--- a/sinusoid_recovery/sinusoid_transformer_design.pptx
+++ b/sinusoid_recovery/sinusoid_transformer_design.pptx
@@ -5,24 +5,28 @@
     <p:sldMasterId id="2147483648" r:id="rId1"/>
   </p:sldMasterIdLst>
   <p:sldIdLst>
-    <p:sldId id="256" r:id="rId2"/>
-    <p:sldId id="257" r:id="rId3"/>
-    <p:sldId id="258" r:id="rId4"/>
-    <p:sldId id="259" r:id="rId5"/>
-    <p:sldId id="260" r:id="rId6"/>
-    <p:sldId id="261" r:id="rId7"/>
-    <p:sldId id="262" r:id="rId8"/>
-    <p:sldId id="263" r:id="rId9"/>
-    <p:sldId id="264" r:id="rId10"/>
-    <p:sldId id="265" r:id="rId11"/>
-    <p:sldId id="266" r:id="rId12"/>
-    <p:sldId id="267" r:id="rId13"/>
-    <p:sldId id="268" r:id="rId14"/>
-    <p:sldId id="269" r:id="rId15"/>
-    <p:sldId id="270" r:id="rId16"/>
-    <p:sldId id="271" r:id="rId17"/>
+    <p:sldId id="256" r:id="rId7"/>
+    <p:sldId id="257" r:id="rId8"/>
+    <p:sldId id="258" r:id="rId9"/>
+    <p:sldId id="259" r:id="rId10"/>
+    <p:sldId id="260" r:id="rId11"/>
+    <p:sldId id="261" r:id="rId12"/>
+    <p:sldId id="262" r:id="rId13"/>
+    <p:sldId id="263" r:id="rId14"/>
+    <p:sldId id="264" r:id="rId15"/>
+    <p:sldId id="265" r:id="rId16"/>
+    <p:sldId id="266" r:id="rId17"/>
+    <p:sldId id="267" r:id="rId18"/>
+    <p:sldId id="268" r:id="rId19"/>
+    <p:sldId id="269" r:id="rId20"/>
+    <p:sldId id="270" r:id="rId21"/>
+    <p:sldId id="271" r:id="rId22"/>
+    <p:sldId id="272" r:id="rId23"/>
+    <p:sldId id="273" r:id="rId24"/>
+    <p:sldId id="274" r:id="rId25"/>
+    <p:sldId id="275" r:id="rId26"/>
   </p:sldIdLst>
-  <p:sldSz cx="12192000" cy="6858000"/>
+  <p:sldSz cx="12191695" cy="6858000" type="screen4x3"/>
   <p:notesSz cx="6858000" cy="9144000"/>
   <p:defaultTextStyle>
     <a:defPPr>
@@ -119,22 +123,6 @@
       </a:defRPr>
     </a:lvl9pPr>
   </p:defaultTextStyle>
-  <p:extLst>
-    <p:ext uri="{EFAFB233-063F-42B5-8137-9DF3F51BA10A}">
-      <p15:sldGuideLst xmlns:p15="http://schemas.microsoft.com/office/powerpoint/2012/main">
-        <p15:guide id="1" orient="horz" pos="2160">
-          <p15:clr>
-            <a:srgbClr val="A4A3A4"/>
-          </p15:clr>
-        </p15:guide>
-        <p15:guide id="2" pos="2880">
-          <p15:clr>
-            <a:srgbClr val="A4A3A4"/>
-          </p15:clr>
-        </p15:guide>
-      </p15:sldGuideLst>
-    </p:ext>
-  </p:extLst>
 </p:presentation>
 </file>
 
@@ -176,9 +164,10 @@
           <a:lstStyle/>
           <a:p>
             <a:r>
-              <a:rPr lang="en-US"/>
+              <a:rPr lang="en-US" smtClean="0"/>
               <a:t>Click to edit Master title style</a:t>
             </a:r>
+            <a:endParaRPr lang="en-US"/>
           </a:p>
         </p:txBody>
       </p:sp>
@@ -294,9 +283,10 @@
           </a:lstStyle>
           <a:p>
             <a:r>
-              <a:rPr lang="en-US"/>
+              <a:rPr lang="en-US" smtClean="0"/>
               <a:t>Click to edit Master subtitle style</a:t>
             </a:r>
+            <a:endParaRPr lang="en-US"/>
           </a:p>
         </p:txBody>
       </p:sp>
@@ -317,7 +307,7 @@
           <a:p>
             <a:fld id="{5BCAD085-E8A6-8845-BD4E-CB4CCA059FC4}" type="datetimeFigureOut">
               <a:rPr lang="en-US" smtClean="0"/>
-              <a:t>4/14/2026</a:t>
+              <a:t>1/27/13</a:t>
             </a:fld>
             <a:endParaRPr lang="en-US"/>
           </a:p>
@@ -411,9 +401,10 @@
           <a:lstStyle/>
           <a:p>
             <a:r>
-              <a:rPr lang="en-US"/>
+              <a:rPr lang="en-US" smtClean="0"/>
               <a:t>Click to edit Master title style</a:t>
             </a:r>
+            <a:endParaRPr lang="en-US"/>
           </a:p>
         </p:txBody>
       </p:sp>
@@ -434,37 +425,38 @@
           <a:p>
             <a:pPr lvl="0"/>
             <a:r>
-              <a:rPr lang="en-US"/>
+              <a:rPr lang="en-US" smtClean="0"/>
               <a:t>Click to edit Master text styles</a:t>
             </a:r>
           </a:p>
           <a:p>
             <a:pPr lvl="1"/>
             <a:r>
-              <a:rPr lang="en-US"/>
+              <a:rPr lang="en-US" smtClean="0"/>
               <a:t>Second level</a:t>
             </a:r>
           </a:p>
           <a:p>
             <a:pPr lvl="2"/>
             <a:r>
-              <a:rPr lang="en-US"/>
+              <a:rPr lang="en-US" smtClean="0"/>
               <a:t>Third level</a:t>
             </a:r>
           </a:p>
           <a:p>
             <a:pPr lvl="3"/>
             <a:r>
-              <a:rPr lang="en-US"/>
+              <a:rPr lang="en-US" smtClean="0"/>
               <a:t>Fourth level</a:t>
             </a:r>
           </a:p>
           <a:p>
             <a:pPr lvl="4"/>
             <a:r>
-              <a:rPr lang="en-US"/>
+              <a:rPr lang="en-US" smtClean="0"/>
               <a:t>Fifth level</a:t>
             </a:r>
+            <a:endParaRPr lang="en-US"/>
           </a:p>
         </p:txBody>
       </p:sp>
@@ -485,7 +477,7 @@
           <a:p>
             <a:fld id="{5BCAD085-E8A6-8845-BD4E-CB4CCA059FC4}" type="datetimeFigureOut">
               <a:rPr lang="en-US" smtClean="0"/>
-              <a:t>4/14/2026</a:t>
+              <a:t>1/27/13</a:t>
             </a:fld>
             <a:endParaRPr lang="en-US"/>
           </a:p>
@@ -584,9 +576,10 @@
           <a:lstStyle/>
           <a:p>
             <a:r>
-              <a:rPr lang="en-US"/>
+              <a:rPr lang="en-US" smtClean="0"/>
               <a:t>Click to edit Master title style</a:t>
             </a:r>
+            <a:endParaRPr lang="en-US"/>
           </a:p>
         </p:txBody>
       </p:sp>
@@ -612,37 +605,38 @@
           <a:p>
             <a:pPr lvl="0"/>
             <a:r>
-              <a:rPr lang="en-US"/>
+              <a:rPr lang="en-US" smtClean="0"/>
               <a:t>Click to edit Master text styles</a:t>
             </a:r>
           </a:p>
           <a:p>
             <a:pPr lvl="1"/>
             <a:r>
-              <a:rPr lang="en-US"/>
+              <a:rPr lang="en-US" smtClean="0"/>
               <a:t>Second level</a:t>
             </a:r>
           </a:p>
           <a:p>
             <a:pPr lvl="2"/>
             <a:r>
-              <a:rPr lang="en-US"/>
+              <a:rPr lang="en-US" smtClean="0"/>
               <a:t>Third level</a:t>
             </a:r>
           </a:p>
           <a:p>
             <a:pPr lvl="3"/>
             <a:r>
-              <a:rPr lang="en-US"/>
+              <a:rPr lang="en-US" smtClean="0"/>
               <a:t>Fourth level</a:t>
             </a:r>
           </a:p>
           <a:p>
             <a:pPr lvl="4"/>
             <a:r>
-              <a:rPr lang="en-US"/>
+              <a:rPr lang="en-US" smtClean="0"/>
               <a:t>Fifth level</a:t>
             </a:r>
+            <a:endParaRPr lang="en-US"/>
           </a:p>
         </p:txBody>
       </p:sp>
@@ -663,7 +657,7 @@
           <a:p>
             <a:fld id="{5BCAD085-E8A6-8845-BD4E-CB4CCA059FC4}" type="datetimeFigureOut">
               <a:rPr lang="en-US" smtClean="0"/>
-              <a:t>4/14/2026</a:t>
+              <a:t>1/27/13</a:t>
             </a:fld>
             <a:endParaRPr lang="en-US"/>
           </a:p>
@@ -757,9 +751,10 @@
           <a:lstStyle/>
           <a:p>
             <a:r>
-              <a:rPr lang="en-US"/>
+              <a:rPr lang="en-US" smtClean="0"/>
               <a:t>Click to edit Master title style</a:t>
             </a:r>
+            <a:endParaRPr lang="en-US"/>
           </a:p>
         </p:txBody>
       </p:sp>
@@ -780,37 +775,38 @@
           <a:p>
             <a:pPr lvl="0"/>
             <a:r>
-              <a:rPr lang="en-US"/>
+              <a:rPr lang="en-US" smtClean="0"/>
               <a:t>Click to edit Master text styles</a:t>
             </a:r>
           </a:p>
           <a:p>
             <a:pPr lvl="1"/>
             <a:r>
-              <a:rPr lang="en-US"/>
+              <a:rPr lang="en-US" smtClean="0"/>
               <a:t>Second level</a:t>
             </a:r>
           </a:p>
           <a:p>
             <a:pPr lvl="2"/>
             <a:r>
-              <a:rPr lang="en-US"/>
+              <a:rPr lang="en-US" smtClean="0"/>
               <a:t>Third level</a:t>
             </a:r>
           </a:p>
           <a:p>
             <a:pPr lvl="3"/>
             <a:r>
-              <a:rPr lang="en-US"/>
+              <a:rPr lang="en-US" smtClean="0"/>
               <a:t>Fourth level</a:t>
             </a:r>
           </a:p>
           <a:p>
             <a:pPr lvl="4"/>
             <a:r>
-              <a:rPr lang="en-US"/>
+              <a:rPr lang="en-US" smtClean="0"/>
               <a:t>Fifth level</a:t>
             </a:r>
+            <a:endParaRPr lang="en-US"/>
           </a:p>
         </p:txBody>
       </p:sp>
@@ -831,7 +827,7 @@
           <a:p>
             <a:fld id="{5BCAD085-E8A6-8845-BD4E-CB4CCA059FC4}" type="datetimeFigureOut">
               <a:rPr lang="en-US" smtClean="0"/>
-              <a:t>4/14/2026</a:t>
+              <a:t>1/27/13</a:t>
             </a:fld>
             <a:endParaRPr lang="en-US"/>
           </a:p>
@@ -934,9 +930,10 @@
           </a:lstStyle>
           <a:p>
             <a:r>
-              <a:rPr lang="en-US"/>
+              <a:rPr lang="en-US" smtClean="0"/>
               <a:t>Click to edit Master title style</a:t>
             </a:r>
+            <a:endParaRPr lang="en-US"/>
           </a:p>
         </p:txBody>
       </p:sp>
@@ -1053,7 +1050,7 @@
           <a:p>
             <a:pPr lvl="0"/>
             <a:r>
-              <a:rPr lang="en-US"/>
+              <a:rPr lang="en-US" smtClean="0"/>
               <a:t>Click to edit Master text styles</a:t>
             </a:r>
           </a:p>
@@ -1076,7 +1073,7 @@
           <a:p>
             <a:fld id="{5BCAD085-E8A6-8845-BD4E-CB4CCA059FC4}" type="datetimeFigureOut">
               <a:rPr lang="en-US" smtClean="0"/>
-              <a:t>4/14/2026</a:t>
+              <a:t>1/27/13</a:t>
             </a:fld>
             <a:endParaRPr lang="en-US"/>
           </a:p>
@@ -1170,9 +1167,10 @@
           <a:lstStyle/>
           <a:p>
             <a:r>
-              <a:rPr lang="en-US"/>
+              <a:rPr lang="en-US" smtClean="0"/>
               <a:t>Click to edit Master title style</a:t>
             </a:r>
+            <a:endParaRPr lang="en-US"/>
           </a:p>
         </p:txBody>
       </p:sp>
@@ -1226,37 +1224,38 @@
           <a:p>
             <a:pPr lvl="0"/>
             <a:r>
-              <a:rPr lang="en-US"/>
+              <a:rPr lang="en-US" smtClean="0"/>
               <a:t>Click to edit Master text styles</a:t>
             </a:r>
           </a:p>
           <a:p>
             <a:pPr lvl="1"/>
             <a:r>
-              <a:rPr lang="en-US"/>
+              <a:rPr lang="en-US" smtClean="0"/>
               <a:t>Second level</a:t>
             </a:r>
           </a:p>
           <a:p>
             <a:pPr lvl="2"/>
             <a:r>
-              <a:rPr lang="en-US"/>
+              <a:rPr lang="en-US" smtClean="0"/>
               <a:t>Third level</a:t>
             </a:r>
           </a:p>
           <a:p>
             <a:pPr lvl="3"/>
             <a:r>
-              <a:rPr lang="en-US"/>
+              <a:rPr lang="en-US" smtClean="0"/>
               <a:t>Fourth level</a:t>
             </a:r>
           </a:p>
           <a:p>
             <a:pPr lvl="4"/>
             <a:r>
-              <a:rPr lang="en-US"/>
+              <a:rPr lang="en-US" smtClean="0"/>
               <a:t>Fifth level</a:t>
             </a:r>
+            <a:endParaRPr lang="en-US"/>
           </a:p>
         </p:txBody>
       </p:sp>
@@ -1310,37 +1309,38 @@
           <a:p>
             <a:pPr lvl="0"/>
             <a:r>
-              <a:rPr lang="en-US"/>
+              <a:rPr lang="en-US" smtClean="0"/>
               <a:t>Click to edit Master text styles</a:t>
             </a:r>
           </a:p>
           <a:p>
             <a:pPr lvl="1"/>
             <a:r>
-              <a:rPr lang="en-US"/>
+              <a:rPr lang="en-US" smtClean="0"/>
               <a:t>Second level</a:t>
             </a:r>
           </a:p>
           <a:p>
             <a:pPr lvl="2"/>
             <a:r>
-              <a:rPr lang="en-US"/>
+              <a:rPr lang="en-US" smtClean="0"/>
               <a:t>Third level</a:t>
             </a:r>
           </a:p>
           <a:p>
             <a:pPr lvl="3"/>
             <a:r>
-              <a:rPr lang="en-US"/>
+              <a:rPr lang="en-US" smtClean="0"/>
               <a:t>Fourth level</a:t>
             </a:r>
           </a:p>
           <a:p>
             <a:pPr lvl="4"/>
             <a:r>
-              <a:rPr lang="en-US"/>
+              <a:rPr lang="en-US" smtClean="0"/>
               <a:t>Fifth level</a:t>
             </a:r>
+            <a:endParaRPr lang="en-US"/>
           </a:p>
         </p:txBody>
       </p:sp>
@@ -1361,7 +1361,7 @@
           <a:p>
             <a:fld id="{5BCAD085-E8A6-8845-BD4E-CB4CCA059FC4}" type="datetimeFigureOut">
               <a:rPr lang="en-US" smtClean="0"/>
-              <a:t>4/14/2026</a:t>
+              <a:t>1/27/13</a:t>
             </a:fld>
             <a:endParaRPr lang="en-US"/>
           </a:p>
@@ -1459,9 +1459,10 @@
           </a:lstStyle>
           <a:p>
             <a:r>
-              <a:rPr lang="en-US"/>
+              <a:rPr lang="en-US" smtClean="0"/>
               <a:t>Click to edit Master title style</a:t>
             </a:r>
+            <a:endParaRPr lang="en-US"/>
           </a:p>
         </p:txBody>
       </p:sp>
@@ -1524,7 +1525,7 @@
           <a:p>
             <a:pPr lvl="0"/>
             <a:r>
-              <a:rPr lang="en-US"/>
+              <a:rPr lang="en-US" smtClean="0"/>
               <a:t>Click to edit Master text styles</a:t>
             </a:r>
           </a:p>
@@ -1580,37 +1581,38 @@
           <a:p>
             <a:pPr lvl="0"/>
             <a:r>
-              <a:rPr lang="en-US"/>
+              <a:rPr lang="en-US" smtClean="0"/>
               <a:t>Click to edit Master text styles</a:t>
             </a:r>
           </a:p>
           <a:p>
             <a:pPr lvl="1"/>
             <a:r>
-              <a:rPr lang="en-US"/>
+              <a:rPr lang="en-US" smtClean="0"/>
               <a:t>Second level</a:t>
             </a:r>
           </a:p>
           <a:p>
             <a:pPr lvl="2"/>
             <a:r>
-              <a:rPr lang="en-US"/>
+              <a:rPr lang="en-US" smtClean="0"/>
               <a:t>Third level</a:t>
             </a:r>
           </a:p>
           <a:p>
             <a:pPr lvl="3"/>
             <a:r>
-              <a:rPr lang="en-US"/>
+              <a:rPr lang="en-US" smtClean="0"/>
               <a:t>Fourth level</a:t>
             </a:r>
           </a:p>
           <a:p>
             <a:pPr lvl="4"/>
             <a:r>
-              <a:rPr lang="en-US"/>
+              <a:rPr lang="en-US" smtClean="0"/>
               <a:t>Fifth level</a:t>
             </a:r>
+            <a:endParaRPr lang="en-US"/>
           </a:p>
         </p:txBody>
       </p:sp>
@@ -1673,7 +1675,7 @@
           <a:p>
             <a:pPr lvl="0"/>
             <a:r>
-              <a:rPr lang="en-US"/>
+              <a:rPr lang="en-US" smtClean="0"/>
               <a:t>Click to edit Master text styles</a:t>
             </a:r>
           </a:p>
@@ -1729,37 +1731,38 @@
           <a:p>
             <a:pPr lvl="0"/>
             <a:r>
-              <a:rPr lang="en-US"/>
+              <a:rPr lang="en-US" smtClean="0"/>
               <a:t>Click to edit Master text styles</a:t>
             </a:r>
           </a:p>
           <a:p>
             <a:pPr lvl="1"/>
             <a:r>
-              <a:rPr lang="en-US"/>
+              <a:rPr lang="en-US" smtClean="0"/>
               <a:t>Second level</a:t>
             </a:r>
           </a:p>
           <a:p>
             <a:pPr lvl="2"/>
             <a:r>
-              <a:rPr lang="en-US"/>
+              <a:rPr lang="en-US" smtClean="0"/>
               <a:t>Third level</a:t>
             </a:r>
           </a:p>
           <a:p>
             <a:pPr lvl="3"/>
             <a:r>
-              <a:rPr lang="en-US"/>
+              <a:rPr lang="en-US" smtClean="0"/>
               <a:t>Fourth level</a:t>
             </a:r>
           </a:p>
           <a:p>
             <a:pPr lvl="4"/>
             <a:r>
-              <a:rPr lang="en-US"/>
+              <a:rPr lang="en-US" smtClean="0"/>
               <a:t>Fifth level</a:t>
             </a:r>
+            <a:endParaRPr lang="en-US"/>
           </a:p>
         </p:txBody>
       </p:sp>
@@ -1780,7 +1783,7 @@
           <a:p>
             <a:fld id="{5BCAD085-E8A6-8845-BD4E-CB4CCA059FC4}" type="datetimeFigureOut">
               <a:rPr lang="en-US" smtClean="0"/>
-              <a:t>4/14/2026</a:t>
+              <a:t>1/27/13</a:t>
             </a:fld>
             <a:endParaRPr lang="en-US"/>
           </a:p>
@@ -1874,9 +1877,10 @@
           <a:lstStyle/>
           <a:p>
             <a:r>
-              <a:rPr lang="en-US"/>
+              <a:rPr lang="en-US" smtClean="0"/>
               <a:t>Click to edit Master title style</a:t>
             </a:r>
+            <a:endParaRPr lang="en-US"/>
           </a:p>
         </p:txBody>
       </p:sp>
@@ -1897,7 +1901,7 @@
           <a:p>
             <a:fld id="{5BCAD085-E8A6-8845-BD4E-CB4CCA059FC4}" type="datetimeFigureOut">
               <a:rPr lang="en-US" smtClean="0"/>
-              <a:t>4/14/2026</a:t>
+              <a:t>1/27/13</a:t>
             </a:fld>
             <a:endParaRPr lang="en-US"/>
           </a:p>
@@ -1992,7 +1996,7 @@
           <a:p>
             <a:fld id="{5BCAD085-E8A6-8845-BD4E-CB4CCA059FC4}" type="datetimeFigureOut">
               <a:rPr lang="en-US" smtClean="0"/>
-              <a:t>4/14/2026</a:t>
+              <a:t>1/27/13</a:t>
             </a:fld>
             <a:endParaRPr lang="en-US"/>
           </a:p>
@@ -2095,9 +2099,10 @@
           </a:lstStyle>
           <a:p>
             <a:r>
-              <a:rPr lang="en-US"/>
+              <a:rPr lang="en-US" smtClean="0"/>
               <a:t>Click to edit Master title style</a:t>
             </a:r>
+            <a:endParaRPr lang="en-US"/>
           </a:p>
         </p:txBody>
       </p:sp>
@@ -2151,37 +2156,38 @@
           <a:p>
             <a:pPr lvl="0"/>
             <a:r>
-              <a:rPr lang="en-US"/>
+              <a:rPr lang="en-US" smtClean="0"/>
               <a:t>Click to edit Master text styles</a:t>
             </a:r>
           </a:p>
           <a:p>
             <a:pPr lvl="1"/>
             <a:r>
-              <a:rPr lang="en-US"/>
+              <a:rPr lang="en-US" smtClean="0"/>
               <a:t>Second level</a:t>
             </a:r>
           </a:p>
           <a:p>
             <a:pPr lvl="2"/>
             <a:r>
-              <a:rPr lang="en-US"/>
+              <a:rPr lang="en-US" smtClean="0"/>
               <a:t>Third level</a:t>
             </a:r>
           </a:p>
           <a:p>
             <a:pPr lvl="3"/>
             <a:r>
-              <a:rPr lang="en-US"/>
+              <a:rPr lang="en-US" smtClean="0"/>
               <a:t>Fourth level</a:t>
             </a:r>
           </a:p>
           <a:p>
             <a:pPr lvl="4"/>
             <a:r>
-              <a:rPr lang="en-US"/>
+              <a:rPr lang="en-US" smtClean="0"/>
               <a:t>Fifth level</a:t>
             </a:r>
+            <a:endParaRPr lang="en-US"/>
           </a:p>
         </p:txBody>
       </p:sp>
@@ -2244,7 +2250,7 @@
           <a:p>
             <a:pPr lvl="0"/>
             <a:r>
-              <a:rPr lang="en-US"/>
+              <a:rPr lang="en-US" smtClean="0"/>
               <a:t>Click to edit Master text styles</a:t>
             </a:r>
           </a:p>
@@ -2267,7 +2273,7 @@
           <a:p>
             <a:fld id="{5BCAD085-E8A6-8845-BD4E-CB4CCA059FC4}" type="datetimeFigureOut">
               <a:rPr lang="en-US" smtClean="0"/>
-              <a:t>4/14/2026</a:t>
+              <a:t>1/27/13</a:t>
             </a:fld>
             <a:endParaRPr lang="en-US"/>
           </a:p>
@@ -2370,9 +2376,10 @@
           </a:lstStyle>
           <a:p>
             <a:r>
-              <a:rPr lang="en-US"/>
+              <a:rPr lang="en-US" smtClean="0"/>
               <a:t>Click to edit Master title style</a:t>
             </a:r>
+            <a:endParaRPr lang="en-US"/>
           </a:p>
         </p:txBody>
       </p:sp>
@@ -2496,7 +2503,7 @@
           <a:p>
             <a:pPr lvl="0"/>
             <a:r>
-              <a:rPr lang="en-US"/>
+              <a:rPr lang="en-US" smtClean="0"/>
               <a:t>Click to edit Master text styles</a:t>
             </a:r>
           </a:p>
@@ -2519,7 +2526,7 @@
           <a:p>
             <a:fld id="{5BCAD085-E8A6-8845-BD4E-CB4CCA059FC4}" type="datetimeFigureOut">
               <a:rPr lang="en-US" smtClean="0"/>
-              <a:t>4/14/2026</a:t>
+              <a:t>1/27/13</a:t>
             </a:fld>
             <a:endParaRPr lang="en-US"/>
           </a:p>
@@ -2628,9 +2635,10 @@
           <a:lstStyle/>
           <a:p>
             <a:r>
-              <a:rPr lang="en-US"/>
+              <a:rPr lang="en-US" smtClean="0"/>
               <a:t>Click to edit Master title style</a:t>
             </a:r>
+            <a:endParaRPr lang="en-US"/>
           </a:p>
         </p:txBody>
       </p:sp>
@@ -2661,37 +2669,38 @@
           <a:p>
             <a:pPr lvl="0"/>
             <a:r>
-              <a:rPr lang="en-US"/>
+              <a:rPr lang="en-US" smtClean="0"/>
               <a:t>Click to edit Master text styles</a:t>
             </a:r>
           </a:p>
           <a:p>
             <a:pPr lvl="1"/>
             <a:r>
-              <a:rPr lang="en-US"/>
+              <a:rPr lang="en-US" smtClean="0"/>
               <a:t>Second level</a:t>
             </a:r>
           </a:p>
           <a:p>
             <a:pPr lvl="2"/>
             <a:r>
-              <a:rPr lang="en-US"/>
+              <a:rPr lang="en-US" smtClean="0"/>
               <a:t>Third level</a:t>
             </a:r>
           </a:p>
           <a:p>
             <a:pPr lvl="3"/>
             <a:r>
-              <a:rPr lang="en-US"/>
+              <a:rPr lang="en-US" smtClean="0"/>
               <a:t>Fourth level</a:t>
             </a:r>
           </a:p>
           <a:p>
             <a:pPr lvl="4"/>
             <a:r>
-              <a:rPr lang="en-US"/>
+              <a:rPr lang="en-US" smtClean="0"/>
               <a:t>Fifth level</a:t>
             </a:r>
+            <a:endParaRPr lang="en-US"/>
           </a:p>
         </p:txBody>
       </p:sp>
@@ -2730,7 +2739,7 @@
           <a:p>
             <a:fld id="{5BCAD085-E8A6-8845-BD4E-CB4CCA059FC4}" type="datetimeFigureOut">
               <a:rPr lang="en-US" smtClean="0"/>
-              <a:t>4/14/2026</a:t>
+              <a:t>1/27/13</a:t>
             </a:fld>
             <a:endParaRPr lang="en-US"/>
           </a:p>
@@ -3089,7 +3098,7 @@
 </file>
 
 <file path=ppt/slides/slide1.xml><?xml version="1.0" encoding="utf-8"?>
-<p:sld xmlns:a="http://schemas.openxmlformats.org/drawingml/2006/main" xmlns:r="http://schemas.openxmlformats.org/officeDocument/2006/relationships" xmlns:p="http://schemas.openxmlformats.org/presentationml/2006/main">
+<p:sld xmlns:a="http://schemas.openxmlformats.org/drawingml/2006/main" xmlns:p="http://schemas.openxmlformats.org/presentationml/2006/main" xmlns:r="http://schemas.openxmlformats.org/officeDocument/2006/relationships">
   <p:cSld>
     <p:spTree>
       <p:nvGrpSpPr>
@@ -3097,14 +3106,7 @@
         <p:cNvGrpSpPr/>
         <p:nvPr/>
       </p:nvGrpSpPr>
-      <p:grpSpPr>
-        <a:xfrm>
-          <a:off x="0" y="0"/>
-          <a:ext cx="0" cy="0"/>
-          <a:chOff x="0" y="0"/>
-          <a:chExt cx="0" cy="0"/>
-        </a:xfrm>
-      </p:grpSpPr>
+      <p:grpSpPr/>
       <p:sp>
         <p:nvSpPr>
           <p:cNvPr id="2" name="Rectangle 1"/>
@@ -3146,7 +3148,6 @@
           <a:lstStyle/>
           <a:p>
             <a:pPr algn="ctr"/>
-            <a:endParaRPr/>
           </a:p>
         </p:txBody>
       </p:sp>
@@ -3190,7 +3191,6 @@
           <a:lstStyle/>
           <a:p>
             <a:pPr algn="ctr"/>
-            <a:endParaRPr/>
           </a:p>
         </p:txBody>
       </p:sp>
@@ -3211,7 +3211,7 @@
           <a:noFill/>
         </p:spPr>
         <p:txBody>
-          <a:bodyPr wrap="square" lIns="45720" tIns="27432" rIns="45720" bIns="27432">
+          <a:bodyPr wrap="square" lIns="45720" rIns="45720" tIns="27432" bIns="27432">
             <a:spAutoFit/>
           </a:bodyPr>
           <a:lstStyle/>
@@ -3246,7 +3246,7 @@
           <a:noFill/>
         </p:spPr>
         <p:txBody>
-          <a:bodyPr wrap="square" lIns="45720" tIns="27432" rIns="45720" bIns="27432">
+          <a:bodyPr wrap="square" lIns="45720" rIns="45720" tIns="27432" bIns="27432">
             <a:spAutoFit/>
           </a:bodyPr>
           <a:lstStyle/>
@@ -3281,7 +3281,7 @@
           <a:noFill/>
         </p:spPr>
         <p:txBody>
-          <a:bodyPr wrap="square" lIns="45720" tIns="27432" rIns="45720" bIns="27432">
+          <a:bodyPr wrap="square" lIns="45720" rIns="45720" tIns="27432" bIns="27432">
             <a:spAutoFit/>
           </a:bodyPr>
           <a:lstStyle/>
@@ -3308,7 +3308,7 @@
 </file>
 
 <file path=ppt/slides/slide10.xml><?xml version="1.0" encoding="utf-8"?>
-<p:sld xmlns:a="http://schemas.openxmlformats.org/drawingml/2006/main" xmlns:r="http://schemas.openxmlformats.org/officeDocument/2006/relationships" xmlns:p="http://schemas.openxmlformats.org/presentationml/2006/main">
+<p:sld xmlns:a="http://schemas.openxmlformats.org/drawingml/2006/main" xmlns:p="http://schemas.openxmlformats.org/presentationml/2006/main" xmlns:r="http://schemas.openxmlformats.org/officeDocument/2006/relationships">
   <p:cSld>
     <p:spTree>
       <p:nvGrpSpPr>
@@ -3316,14 +3316,7 @@
         <p:cNvGrpSpPr/>
         <p:nvPr/>
       </p:nvGrpSpPr>
-      <p:grpSpPr>
-        <a:xfrm>
-          <a:off x="0" y="0"/>
-          <a:ext cx="0" cy="0"/>
-          <a:chOff x="0" y="0"/>
-          <a:chExt cx="0" cy="0"/>
-        </a:xfrm>
-      </p:grpSpPr>
+      <p:grpSpPr/>
       <p:sp>
         <p:nvSpPr>
           <p:cNvPr id="2" name="Rectangle 1"/>
@@ -3365,7 +3358,6 @@
           <a:lstStyle/>
           <a:p>
             <a:pPr algn="ctr"/>
-            <a:endParaRPr/>
           </a:p>
         </p:txBody>
       </p:sp>
@@ -3386,7 +3378,7 @@
           <a:noFill/>
         </p:spPr>
         <p:txBody>
-          <a:bodyPr wrap="square" lIns="45720" tIns="27432" rIns="45720" bIns="27432">
+          <a:bodyPr wrap="square" lIns="45720" rIns="45720" tIns="27432" bIns="27432">
             <a:spAutoFit/>
           </a:bodyPr>
           <a:lstStyle/>
@@ -3421,7 +3413,7 @@
           <a:noFill/>
         </p:spPr>
         <p:txBody>
-          <a:bodyPr wrap="square" lIns="45720" tIns="27432" rIns="45720" bIns="27432">
+          <a:bodyPr wrap="square" lIns="45720" rIns="45720" tIns="27432" bIns="27432">
             <a:spAutoFit/>
           </a:bodyPr>
           <a:lstStyle/>
@@ -3441,6 +3433,49 @@
       </p:sp>
       <p:sp>
         <p:nvSpPr>
+          <p:cNvPr id="5" name="Rectangle 4"/>
+          <p:cNvSpPr/>
+          <p:nvPr/>
+        </p:nvSpPr>
+        <p:spPr>
+          <a:xfrm>
+            <a:off x="548640" y="1508760"/>
+            <a:ext cx="109728" cy="548640"/>
+          </a:xfrm>
+          <a:prstGeom prst="rect">
+            <a:avLst/>
+          </a:prstGeom>
+          <a:solidFill>
+            <a:srgbClr val="F5A623"/>
+          </a:solidFill>
+          <a:ln>
+            <a:noFill/>
+          </a:ln>
+        </p:spPr>
+        <p:style>
+          <a:lnRef idx="1">
+            <a:schemeClr val="accent1"/>
+          </a:lnRef>
+          <a:fillRef idx="3">
+            <a:schemeClr val="accent1"/>
+          </a:fillRef>
+          <a:effectRef idx="2">
+            <a:schemeClr val="accent1"/>
+          </a:effectRef>
+          <a:fontRef idx="minor">
+            <a:schemeClr val="lt1"/>
+          </a:fontRef>
+        </p:style>
+        <p:txBody>
+          <a:bodyPr rtlCol="0" anchor="ctr"/>
+          <a:lstStyle/>
+          <a:p>
+            <a:pPr algn="ctr"/>
+          </a:p>
+        </p:txBody>
+      </p:sp>
+      <p:sp>
+        <p:nvSpPr>
           <p:cNvPr id="6" name="TextBox 5"/>
           <p:cNvSpPr txBox="1"/>
           <p:nvPr/>
@@ -3456,7 +3491,7 @@
           <a:noFill/>
         </p:spPr>
         <p:txBody>
-          <a:bodyPr wrap="square" lIns="45720" tIns="27432" rIns="45720" bIns="27432">
+          <a:bodyPr wrap="square" lIns="45720" rIns="45720" tIns="27432" bIns="27432">
             <a:spAutoFit/>
           </a:bodyPr>
           <a:lstStyle/>
@@ -3491,7 +3526,7 @@
           <a:noFill/>
         </p:spPr>
         <p:txBody>
-          <a:bodyPr wrap="square" lIns="45720" tIns="27432" rIns="45720" bIns="27432">
+          <a:bodyPr wrap="square" lIns="45720" rIns="45720" tIns="27432" bIns="27432">
             <a:spAutoFit/>
           </a:bodyPr>
           <a:lstStyle/>
@@ -3538,7 +3573,7 @@
           <a:noFill/>
         </p:spPr>
         <p:txBody>
-          <a:bodyPr wrap="square" lIns="45720" tIns="27432" rIns="45720" bIns="27432">
+          <a:bodyPr wrap="square" lIns="45720" rIns="45720" tIns="27432" bIns="27432">
             <a:spAutoFit/>
           </a:bodyPr>
           <a:lstStyle/>
@@ -3573,7 +3608,7 @@
           <a:noFill/>
         </p:spPr>
         <p:txBody>
-          <a:bodyPr wrap="square" lIns="45720" tIns="27432" rIns="45720" bIns="27432">
+          <a:bodyPr wrap="square" lIns="45720" rIns="45720" tIns="27432" bIns="27432">
             <a:spAutoFit/>
           </a:bodyPr>
           <a:lstStyle/>
@@ -3636,7 +3671,7 @@
 </file>
 
 <file path=ppt/slides/slide11.xml><?xml version="1.0" encoding="utf-8"?>
-<p:sld xmlns:a="http://schemas.openxmlformats.org/drawingml/2006/main" xmlns:r="http://schemas.openxmlformats.org/officeDocument/2006/relationships" xmlns:p="http://schemas.openxmlformats.org/presentationml/2006/main">
+<p:sld xmlns:a="http://schemas.openxmlformats.org/drawingml/2006/main" xmlns:p="http://schemas.openxmlformats.org/presentationml/2006/main" xmlns:r="http://schemas.openxmlformats.org/officeDocument/2006/relationships">
   <p:cSld>
     <p:spTree>
       <p:nvGrpSpPr>
@@ -3644,14 +3679,7 @@
         <p:cNvGrpSpPr/>
         <p:nvPr/>
       </p:nvGrpSpPr>
-      <p:grpSpPr>
-        <a:xfrm>
-          <a:off x="0" y="0"/>
-          <a:ext cx="0" cy="0"/>
-          <a:chOff x="0" y="0"/>
-          <a:chExt cx="0" cy="0"/>
-        </a:xfrm>
-      </p:grpSpPr>
+      <p:grpSpPr/>
       <p:sp>
         <p:nvSpPr>
           <p:cNvPr id="2" name="Rectangle 1"/>
@@ -3693,7 +3721,6 @@
           <a:lstStyle/>
           <a:p>
             <a:pPr algn="ctr"/>
-            <a:endParaRPr/>
           </a:p>
         </p:txBody>
       </p:sp>
@@ -3714,7 +3741,7 @@
           <a:noFill/>
         </p:spPr>
         <p:txBody>
-          <a:bodyPr wrap="square" lIns="45720" tIns="27432" rIns="45720" bIns="27432">
+          <a:bodyPr wrap="square" lIns="45720" rIns="45720" tIns="27432" bIns="27432">
             <a:spAutoFit/>
           </a:bodyPr>
           <a:lstStyle/>
@@ -3749,7 +3776,7 @@
           <a:noFill/>
         </p:spPr>
         <p:txBody>
-          <a:bodyPr wrap="square" lIns="45720" tIns="27432" rIns="45720" bIns="27432">
+          <a:bodyPr wrap="square" lIns="45720" rIns="45720" tIns="27432" bIns="27432">
             <a:spAutoFit/>
           </a:bodyPr>
           <a:lstStyle/>
@@ -3769,6 +3796,49 @@
       </p:sp>
       <p:sp>
         <p:nvSpPr>
+          <p:cNvPr id="5" name="Rectangle 4"/>
+          <p:cNvSpPr/>
+          <p:nvPr/>
+        </p:nvSpPr>
+        <p:spPr>
+          <a:xfrm>
+            <a:off x="548640" y="1508760"/>
+            <a:ext cx="109728" cy="548640"/>
+          </a:xfrm>
+          <a:prstGeom prst="rect">
+            <a:avLst/>
+          </a:prstGeom>
+          <a:solidFill>
+            <a:srgbClr val="F5A623"/>
+          </a:solidFill>
+          <a:ln>
+            <a:noFill/>
+          </a:ln>
+        </p:spPr>
+        <p:style>
+          <a:lnRef idx="1">
+            <a:schemeClr val="accent1"/>
+          </a:lnRef>
+          <a:fillRef idx="3">
+            <a:schemeClr val="accent1"/>
+          </a:fillRef>
+          <a:effectRef idx="2">
+            <a:schemeClr val="accent1"/>
+          </a:effectRef>
+          <a:fontRef idx="minor">
+            <a:schemeClr val="lt1"/>
+          </a:fontRef>
+        </p:style>
+        <p:txBody>
+          <a:bodyPr rtlCol="0" anchor="ctr"/>
+          <a:lstStyle/>
+          <a:p>
+            <a:pPr algn="ctr"/>
+          </a:p>
+        </p:txBody>
+      </p:sp>
+      <p:sp>
+        <p:nvSpPr>
           <p:cNvPr id="6" name="TextBox 5"/>
           <p:cNvSpPr txBox="1"/>
           <p:nvPr/>
@@ -3784,7 +3854,7 @@
           <a:noFill/>
         </p:spPr>
         <p:txBody>
-          <a:bodyPr wrap="square" lIns="45720" tIns="27432" rIns="45720" bIns="27432">
+          <a:bodyPr wrap="square" lIns="45720" rIns="45720" tIns="27432" bIns="27432">
             <a:spAutoFit/>
           </a:bodyPr>
           <a:lstStyle/>
@@ -3831,7 +3901,7 @@
           <a:noFill/>
         </p:spPr>
         <p:txBody>
-          <a:bodyPr wrap="square" lIns="45720" tIns="27432" rIns="45720" bIns="27432">
+          <a:bodyPr wrap="square" lIns="45720" rIns="45720" tIns="27432" bIns="27432">
             <a:spAutoFit/>
           </a:bodyPr>
           <a:lstStyle/>
@@ -3866,7 +3936,7 @@
           <a:noFill/>
         </p:spPr>
         <p:txBody>
-          <a:bodyPr wrap="square" lIns="45720" tIns="27432" rIns="45720" bIns="27432">
+          <a:bodyPr wrap="square" lIns="45720" rIns="45720" tIns="27432" bIns="27432">
             <a:spAutoFit/>
           </a:bodyPr>
           <a:lstStyle/>
@@ -3908,12 +3978,15 @@
           </a:p>
           <a:p>
             <a:pPr algn="l"/>
-            <a:endParaRPr sz="1400" b="0" i="0">
-              <a:solidFill>
-                <a:srgbClr val="1A1A1A"/>
-              </a:solidFill>
-              <a:latin typeface="Calibri"/>
-            </a:endParaRPr>
+            <a:r>
+              <a:rPr sz="1400" b="0" i="0">
+                <a:solidFill>
+                  <a:srgbClr val="1A1A1A"/>
+                </a:solidFill>
+                <a:latin typeface="Calibri"/>
+              </a:rPr>
+              <a:t/>
+            </a:r>
           </a:p>
           <a:p>
             <a:pPr algn="l"/>
@@ -3946,7 +4019,7 @@
           <a:noFill/>
         </p:spPr>
         <p:txBody>
-          <a:bodyPr wrap="square" lIns="45720" tIns="27432" rIns="45720" bIns="27432">
+          <a:bodyPr wrap="square" lIns="45720" rIns="45720" tIns="27432" bIns="27432">
             <a:spAutoFit/>
           </a:bodyPr>
           <a:lstStyle/>
@@ -3973,7 +4046,7 @@
 </file>
 
 <file path=ppt/slides/slide12.xml><?xml version="1.0" encoding="utf-8"?>
-<p:sld xmlns:a="http://schemas.openxmlformats.org/drawingml/2006/main" xmlns:r="http://schemas.openxmlformats.org/officeDocument/2006/relationships" xmlns:p="http://schemas.openxmlformats.org/presentationml/2006/main">
+<p:sld xmlns:a="http://schemas.openxmlformats.org/drawingml/2006/main" xmlns:p="http://schemas.openxmlformats.org/presentationml/2006/main" xmlns:r="http://schemas.openxmlformats.org/officeDocument/2006/relationships">
   <p:cSld>
     <p:spTree>
       <p:nvGrpSpPr>
@@ -3981,14 +4054,7 @@
         <p:cNvGrpSpPr/>
         <p:nvPr/>
       </p:nvGrpSpPr>
-      <p:grpSpPr>
-        <a:xfrm>
-          <a:off x="0" y="0"/>
-          <a:ext cx="0" cy="0"/>
-          <a:chOff x="0" y="0"/>
-          <a:chExt cx="0" cy="0"/>
-        </a:xfrm>
-      </p:grpSpPr>
+      <p:grpSpPr/>
       <p:sp>
         <p:nvSpPr>
           <p:cNvPr id="2" name="Rectangle 1"/>
@@ -4030,7 +4096,6 @@
           <a:lstStyle/>
           <a:p>
             <a:pPr algn="ctr"/>
-            <a:endParaRPr/>
           </a:p>
         </p:txBody>
       </p:sp>
@@ -4051,7 +4116,7 @@
           <a:noFill/>
         </p:spPr>
         <p:txBody>
-          <a:bodyPr wrap="square" lIns="45720" tIns="27432" rIns="45720" bIns="27432">
+          <a:bodyPr wrap="square" lIns="45720" rIns="45720" tIns="27432" bIns="27432">
             <a:spAutoFit/>
           </a:bodyPr>
           <a:lstStyle/>
@@ -4086,7 +4151,7 @@
           <a:noFill/>
         </p:spPr>
         <p:txBody>
-          <a:bodyPr wrap="square" lIns="45720" tIns="27432" rIns="45720" bIns="27432">
+          <a:bodyPr wrap="square" lIns="45720" rIns="45720" tIns="27432" bIns="27432">
             <a:spAutoFit/>
           </a:bodyPr>
           <a:lstStyle/>
@@ -4106,6 +4171,49 @@
       </p:sp>
       <p:sp>
         <p:nvSpPr>
+          <p:cNvPr id="5" name="Rectangle 4"/>
+          <p:cNvSpPr/>
+          <p:nvPr/>
+        </p:nvSpPr>
+        <p:spPr>
+          <a:xfrm>
+            <a:off x="548640" y="1508760"/>
+            <a:ext cx="109728" cy="548640"/>
+          </a:xfrm>
+          <a:prstGeom prst="rect">
+            <a:avLst/>
+          </a:prstGeom>
+          <a:solidFill>
+            <a:srgbClr val="F5A623"/>
+          </a:solidFill>
+          <a:ln>
+            <a:noFill/>
+          </a:ln>
+        </p:spPr>
+        <p:style>
+          <a:lnRef idx="1">
+            <a:schemeClr val="accent1"/>
+          </a:lnRef>
+          <a:fillRef idx="3">
+            <a:schemeClr val="accent1"/>
+          </a:fillRef>
+          <a:effectRef idx="2">
+            <a:schemeClr val="accent1"/>
+          </a:effectRef>
+          <a:fontRef idx="minor">
+            <a:schemeClr val="lt1"/>
+          </a:fontRef>
+        </p:style>
+        <p:txBody>
+          <a:bodyPr rtlCol="0" anchor="ctr"/>
+          <a:lstStyle/>
+          <a:p>
+            <a:pPr algn="ctr"/>
+          </a:p>
+        </p:txBody>
+      </p:sp>
+      <p:sp>
+        <p:nvSpPr>
           <p:cNvPr id="6" name="TextBox 5"/>
           <p:cNvSpPr txBox="1"/>
           <p:nvPr/>
@@ -4121,7 +4229,7 @@
           <a:noFill/>
         </p:spPr>
         <p:txBody>
-          <a:bodyPr wrap="square" lIns="45720" tIns="27432" rIns="45720" bIns="27432">
+          <a:bodyPr wrap="square" lIns="45720" rIns="45720" tIns="27432" bIns="27432">
             <a:spAutoFit/>
           </a:bodyPr>
           <a:lstStyle/>
@@ -4156,7 +4264,7 @@
           <a:noFill/>
         </p:spPr>
         <p:txBody>
-          <a:bodyPr wrap="square" lIns="45720" tIns="27432" rIns="45720" bIns="27432">
+          <a:bodyPr wrap="square" lIns="45720" rIns="45720" tIns="27432" bIns="27432">
             <a:spAutoFit/>
           </a:bodyPr>
           <a:lstStyle/>
@@ -4191,7 +4299,7 @@
           <a:noFill/>
         </p:spPr>
         <p:txBody>
-          <a:bodyPr wrap="square" lIns="45720" tIns="27432" rIns="45720" bIns="27432">
+          <a:bodyPr wrap="square" lIns="45720" rIns="45720" tIns="27432" bIns="27432">
             <a:spAutoFit/>
           </a:bodyPr>
           <a:lstStyle/>
@@ -4226,7 +4334,7 @@
           <a:noFill/>
         </p:spPr>
         <p:txBody>
-          <a:bodyPr wrap="square" lIns="45720" tIns="27432" rIns="45720" bIns="27432">
+          <a:bodyPr wrap="square" lIns="45720" rIns="45720" tIns="27432" bIns="27432">
             <a:spAutoFit/>
           </a:bodyPr>
           <a:lstStyle/>
@@ -4301,7 +4409,7 @@
 </file>
 
 <file path=ppt/slides/slide13.xml><?xml version="1.0" encoding="utf-8"?>
-<p:sld xmlns:a="http://schemas.openxmlformats.org/drawingml/2006/main" xmlns:r="http://schemas.openxmlformats.org/officeDocument/2006/relationships" xmlns:p="http://schemas.openxmlformats.org/presentationml/2006/main">
+<p:sld xmlns:a="http://schemas.openxmlformats.org/drawingml/2006/main" xmlns:p="http://schemas.openxmlformats.org/presentationml/2006/main" xmlns:r="http://schemas.openxmlformats.org/officeDocument/2006/relationships">
   <p:cSld>
     <p:spTree>
       <p:nvGrpSpPr>
@@ -4309,14 +4417,7 @@
         <p:cNvGrpSpPr/>
         <p:nvPr/>
       </p:nvGrpSpPr>
-      <p:grpSpPr>
-        <a:xfrm>
-          <a:off x="0" y="0"/>
-          <a:ext cx="0" cy="0"/>
-          <a:chOff x="0" y="0"/>
-          <a:chExt cx="0" cy="0"/>
-        </a:xfrm>
-      </p:grpSpPr>
+      <p:grpSpPr/>
       <p:sp>
         <p:nvSpPr>
           <p:cNvPr id="2" name="Rectangle 1"/>
@@ -4358,7 +4459,6 @@
           <a:lstStyle/>
           <a:p>
             <a:pPr algn="ctr"/>
-            <a:endParaRPr/>
           </a:p>
         </p:txBody>
       </p:sp>
@@ -4379,7 +4479,7 @@
           <a:noFill/>
         </p:spPr>
         <p:txBody>
-          <a:bodyPr wrap="square" lIns="45720" tIns="27432" rIns="45720" bIns="27432">
+          <a:bodyPr wrap="square" lIns="45720" rIns="45720" tIns="27432" bIns="27432">
             <a:spAutoFit/>
           </a:bodyPr>
           <a:lstStyle/>
@@ -4414,7 +4514,7 @@
           <a:noFill/>
         </p:spPr>
         <p:txBody>
-          <a:bodyPr wrap="square" lIns="45720" tIns="27432" rIns="45720" bIns="27432">
+          <a:bodyPr wrap="square" lIns="45720" rIns="45720" tIns="27432" bIns="27432">
             <a:spAutoFit/>
           </a:bodyPr>
           <a:lstStyle/>
@@ -4429,6 +4529,49 @@
               </a:rPr>
               <a:t>Does head_dim = 16 meet the information bound?</a:t>
             </a:r>
+          </a:p>
+        </p:txBody>
+      </p:sp>
+      <p:sp>
+        <p:nvSpPr>
+          <p:cNvPr id="5" name="Rectangle 4"/>
+          <p:cNvSpPr/>
+          <p:nvPr/>
+        </p:nvSpPr>
+        <p:spPr>
+          <a:xfrm>
+            <a:off x="548640" y="1508760"/>
+            <a:ext cx="109728" cy="548640"/>
+          </a:xfrm>
+          <a:prstGeom prst="rect">
+            <a:avLst/>
+          </a:prstGeom>
+          <a:solidFill>
+            <a:srgbClr val="F5A623"/>
+          </a:solidFill>
+          <a:ln>
+            <a:noFill/>
+          </a:ln>
+        </p:spPr>
+        <p:style>
+          <a:lnRef idx="1">
+            <a:schemeClr val="accent1"/>
+          </a:lnRef>
+          <a:fillRef idx="3">
+            <a:schemeClr val="accent1"/>
+          </a:fillRef>
+          <a:effectRef idx="2">
+            <a:schemeClr val="accent1"/>
+          </a:effectRef>
+          <a:fontRef idx="minor">
+            <a:schemeClr val="lt1"/>
+          </a:fontRef>
+        </p:style>
+        <p:txBody>
+          <a:bodyPr rtlCol="0" anchor="ctr"/>
+          <a:lstStyle/>
+          <a:p>
+            <a:pPr algn="ctr"/>
           </a:p>
         </p:txBody>
       </p:sp>
@@ -4451,32 +4594,14 @@
                 <a:tableStyleId>{5C22544A-7EE6-4342-B048-85BDC9FD1C3A}</a:tableStyleId>
               </a:tblPr>
               <a:tblGrid>
-                <a:gridCol w="3624349">
-                  <a:extLst>
-                    <a:ext uri="{9D8B030D-6E8A-4147-A177-3AD203B41FA5}">
-                      <a16:colId xmlns:a16="http://schemas.microsoft.com/office/drawing/2014/main" val="20000"/>
-                    </a:ext>
-                  </a:extLst>
-                </a:gridCol>
-                <a:gridCol w="1812174">
-                  <a:extLst>
-                    <a:ext uri="{9D8B030D-6E8A-4147-A177-3AD203B41FA5}">
-                      <a16:colId xmlns:a16="http://schemas.microsoft.com/office/drawing/2014/main" val="20001"/>
-                    </a:ext>
-                  </a:extLst>
-                </a:gridCol>
-                <a:gridCol w="4530436">
-                  <a:extLst>
-                    <a:ext uri="{9D8B030D-6E8A-4147-A177-3AD203B41FA5}">
-                      <a16:colId xmlns:a16="http://schemas.microsoft.com/office/drawing/2014/main" val="20002"/>
-                    </a:ext>
-                  </a:extLst>
-                </a:gridCol>
+                <a:gridCol w="3624349"/>
+                <a:gridCol w="1812174"/>
+                <a:gridCol w="4530436"/>
               </a:tblGrid>
               <a:tr h="548640">
                 <a:tc>
                   <a:txBody>
-                    <a:bodyPr/>
+                    <a:bodyPr wrap="square"/>
                     <a:lstStyle/>
                     <a:p>
                       <a:r>
@@ -4498,7 +4623,7 @@
                 </a:tc>
                 <a:tc>
                   <a:txBody>
-                    <a:bodyPr/>
+                    <a:bodyPr wrap="square"/>
                     <a:lstStyle/>
                     <a:p>
                       <a:r>
@@ -4520,7 +4645,7 @@
                 </a:tc>
                 <a:tc>
                   <a:txBody>
-                    <a:bodyPr/>
+                    <a:bodyPr wrap="square"/>
                     <a:lstStyle/>
                     <a:p>
                       <a:r>
@@ -4540,16 +4665,11 @@
                     </a:solidFill>
                   </a:tcPr>
                 </a:tc>
-                <a:extLst>
-                  <a:ext uri="{0D108BD9-81ED-4DB2-BD59-A6C34878D82A}">
-                    <a16:rowId xmlns:a16="http://schemas.microsoft.com/office/drawing/2014/main" val="10000"/>
-                  </a:ext>
-                </a:extLst>
               </a:tr>
               <a:tr h="548640">
                 <a:tc>
                   <a:txBody>
-                    <a:bodyPr/>
+                    <a:bodyPr wrap="square"/>
                     <a:lstStyle/>
                     <a:p>
                       <a:r>
@@ -4571,7 +4691,7 @@
                 </a:tc>
                 <a:tc>
                   <a:txBody>
-                    <a:bodyPr/>
+                    <a:bodyPr wrap="square"/>
                     <a:lstStyle/>
                     <a:p>
                       <a:r>
@@ -4593,7 +4713,7 @@
                 </a:tc>
                 <a:tc>
                   <a:txBody>
-                    <a:bodyPr/>
+                    <a:bodyPr wrap="square"/>
                     <a:lstStyle/>
                     <a:p>
                       <a:r>
@@ -4613,16 +4733,11 @@
                     </a:solidFill>
                   </a:tcPr>
                 </a:tc>
-                <a:extLst>
-                  <a:ext uri="{0D108BD9-81ED-4DB2-BD59-A6C34878D82A}">
-                    <a16:rowId xmlns:a16="http://schemas.microsoft.com/office/drawing/2014/main" val="10001"/>
-                  </a:ext>
-                </a:extLst>
               </a:tr>
               <a:tr h="548640">
                 <a:tc>
                   <a:txBody>
-                    <a:bodyPr/>
+                    <a:bodyPr wrap="square"/>
                     <a:lstStyle/>
                     <a:p>
                       <a:r>
@@ -4644,7 +4759,7 @@
                 </a:tc>
                 <a:tc>
                   <a:txBody>
-                    <a:bodyPr/>
+                    <a:bodyPr wrap="square"/>
                     <a:lstStyle/>
                     <a:p>
                       <a:r>
@@ -4666,7 +4781,7 @@
                 </a:tc>
                 <a:tc>
                   <a:txBody>
-                    <a:bodyPr/>
+                    <a:bodyPr wrap="square"/>
                     <a:lstStyle/>
                     <a:p>
                       <a:r>
@@ -4686,16 +4801,11 @@
                     </a:solidFill>
                   </a:tcPr>
                 </a:tc>
-                <a:extLst>
-                  <a:ext uri="{0D108BD9-81ED-4DB2-BD59-A6C34878D82A}">
-                    <a16:rowId xmlns:a16="http://schemas.microsoft.com/office/drawing/2014/main" val="10002"/>
-                  </a:ext>
-                </a:extLst>
               </a:tr>
               <a:tr h="548640">
                 <a:tc>
                   <a:txBody>
-                    <a:bodyPr/>
+                    <a:bodyPr wrap="square"/>
                     <a:lstStyle/>
                     <a:p>
                       <a:r>
@@ -4717,7 +4827,7 @@
                 </a:tc>
                 <a:tc>
                   <a:txBody>
-                    <a:bodyPr/>
+                    <a:bodyPr wrap="square"/>
                     <a:lstStyle/>
                     <a:p>
                       <a:r>
@@ -4739,7 +4849,7 @@
                 </a:tc>
                 <a:tc>
                   <a:txBody>
-                    <a:bodyPr/>
+                    <a:bodyPr wrap="square"/>
                     <a:lstStyle/>
                     <a:p>
                       <a:r>
@@ -4759,16 +4869,11 @@
                     </a:solidFill>
                   </a:tcPr>
                 </a:tc>
-                <a:extLst>
-                  <a:ext uri="{0D108BD9-81ED-4DB2-BD59-A6C34878D82A}">
-                    <a16:rowId xmlns:a16="http://schemas.microsoft.com/office/drawing/2014/main" val="10003"/>
-                  </a:ext>
-                </a:extLst>
               </a:tr>
               <a:tr h="548640">
                 <a:tc>
                   <a:txBody>
-                    <a:bodyPr/>
+                    <a:bodyPr wrap="square"/>
                     <a:lstStyle/>
                     <a:p>
                       <a:r>
@@ -4790,7 +4895,7 @@
                 </a:tc>
                 <a:tc>
                   <a:txBody>
-                    <a:bodyPr/>
+                    <a:bodyPr wrap="square"/>
                     <a:lstStyle/>
                     <a:p>
                       <a:r>
@@ -4812,7 +4917,7 @@
                 </a:tc>
                 <a:tc>
                   <a:txBody>
-                    <a:bodyPr/>
+                    <a:bodyPr wrap="square"/>
                     <a:lstStyle/>
                     <a:p>
                       <a:r>
@@ -4832,16 +4937,11 @@
                     </a:solidFill>
                   </a:tcPr>
                 </a:tc>
-                <a:extLst>
-                  <a:ext uri="{0D108BD9-81ED-4DB2-BD59-A6C34878D82A}">
-                    <a16:rowId xmlns:a16="http://schemas.microsoft.com/office/drawing/2014/main" val="10004"/>
-                  </a:ext>
-                </a:extLst>
               </a:tr>
               <a:tr h="548640">
                 <a:tc>
                   <a:txBody>
-                    <a:bodyPr/>
+                    <a:bodyPr wrap="square"/>
                     <a:lstStyle/>
                     <a:p>
                       <a:r>
@@ -4863,7 +4963,7 @@
                 </a:tc>
                 <a:tc>
                   <a:txBody>
-                    <a:bodyPr/>
+                    <a:bodyPr wrap="square"/>
                     <a:lstStyle/>
                     <a:p>
                       <a:r>
@@ -4885,7 +4985,7 @@
                 </a:tc>
                 <a:tc>
                   <a:txBody>
-                    <a:bodyPr/>
+                    <a:bodyPr wrap="square"/>
                     <a:lstStyle/>
                     <a:p>
                       <a:r>
@@ -4905,16 +5005,11 @@
                     </a:solidFill>
                   </a:tcPr>
                 </a:tc>
-                <a:extLst>
-                  <a:ext uri="{0D108BD9-81ED-4DB2-BD59-A6C34878D82A}">
-                    <a16:rowId xmlns:a16="http://schemas.microsoft.com/office/drawing/2014/main" val="10005"/>
-                  </a:ext>
-                </a:extLst>
               </a:tr>
               <a:tr h="548640">
                 <a:tc>
                   <a:txBody>
-                    <a:bodyPr/>
+                    <a:bodyPr wrap="square"/>
                     <a:lstStyle/>
                     <a:p>
                       <a:r>
@@ -4936,7 +5031,7 @@
                 </a:tc>
                 <a:tc>
                   <a:txBody>
-                    <a:bodyPr/>
+                    <a:bodyPr wrap="square"/>
                     <a:lstStyle/>
                     <a:p>
                       <a:r>
@@ -4958,7 +5053,7 @@
                 </a:tc>
                 <a:tc>
                   <a:txBody>
-                    <a:bodyPr/>
+                    <a:bodyPr wrap="square"/>
                     <a:lstStyle/>
                     <a:p>
                       <a:r>
@@ -4978,16 +5073,11 @@
                     </a:solidFill>
                   </a:tcPr>
                 </a:tc>
-                <a:extLst>
-                  <a:ext uri="{0D108BD9-81ED-4DB2-BD59-A6C34878D82A}">
-                    <a16:rowId xmlns:a16="http://schemas.microsoft.com/office/drawing/2014/main" val="10006"/>
-                  </a:ext>
-                </a:extLst>
               </a:tr>
               <a:tr h="548640">
                 <a:tc>
                   <a:txBody>
-                    <a:bodyPr/>
+                    <a:bodyPr wrap="square"/>
                     <a:lstStyle/>
                     <a:p>
                       <a:r>
@@ -5009,7 +5099,7 @@
                 </a:tc>
                 <a:tc>
                   <a:txBody>
-                    <a:bodyPr/>
+                    <a:bodyPr wrap="square"/>
                     <a:lstStyle/>
                     <a:p>
                       <a:r>
@@ -5031,7 +5121,7 @@
                 </a:tc>
                 <a:tc>
                   <a:txBody>
-                    <a:bodyPr/>
+                    <a:bodyPr wrap="square"/>
                     <a:lstStyle/>
                     <a:p>
                       <a:r>
@@ -5051,11 +5141,6 @@
                     </a:solidFill>
                   </a:tcPr>
                 </a:tc>
-                <a:extLst>
-                  <a:ext uri="{0D108BD9-81ED-4DB2-BD59-A6C34878D82A}">
-                    <a16:rowId xmlns:a16="http://schemas.microsoft.com/office/drawing/2014/main" val="10007"/>
-                  </a:ext>
-                </a:extLst>
               </a:tr>
             </a:tbl>
           </a:graphicData>
@@ -5078,7 +5163,7 @@
           <a:noFill/>
         </p:spPr>
         <p:txBody>
-          <a:bodyPr wrap="square" lIns="45720" tIns="27432" rIns="45720" bIns="27432">
+          <a:bodyPr wrap="square" lIns="45720" rIns="45720" tIns="27432" bIns="27432">
             <a:spAutoFit/>
           </a:bodyPr>
           <a:lstStyle/>
@@ -5105,7 +5190,7 @@
 </file>
 
 <file path=ppt/slides/slide14.xml><?xml version="1.0" encoding="utf-8"?>
-<p:sld xmlns:a="http://schemas.openxmlformats.org/drawingml/2006/main" xmlns:r="http://schemas.openxmlformats.org/officeDocument/2006/relationships" xmlns:p="http://schemas.openxmlformats.org/presentationml/2006/main">
+<p:sld xmlns:a="http://schemas.openxmlformats.org/drawingml/2006/main" xmlns:p="http://schemas.openxmlformats.org/presentationml/2006/main" xmlns:r="http://schemas.openxmlformats.org/officeDocument/2006/relationships">
   <p:cSld>
     <p:spTree>
       <p:nvGrpSpPr>
@@ -5113,14 +5198,7 @@
         <p:cNvGrpSpPr/>
         <p:nvPr/>
       </p:nvGrpSpPr>
-      <p:grpSpPr>
-        <a:xfrm>
-          <a:off x="0" y="0"/>
-          <a:ext cx="0" cy="0"/>
-          <a:chOff x="0" y="0"/>
-          <a:chExt cx="0" cy="0"/>
-        </a:xfrm>
-      </p:grpSpPr>
+      <p:grpSpPr/>
       <p:sp>
         <p:nvSpPr>
           <p:cNvPr id="2" name="Rectangle 1"/>
@@ -5162,7 +5240,6 @@
           <a:lstStyle/>
           <a:p>
             <a:pPr algn="ctr"/>
-            <a:endParaRPr/>
           </a:p>
         </p:txBody>
       </p:sp>
@@ -5183,7 +5260,7 @@
           <a:noFill/>
         </p:spPr>
         <p:txBody>
-          <a:bodyPr wrap="square" lIns="45720" tIns="27432" rIns="45720" bIns="27432">
+          <a:bodyPr wrap="square" lIns="45720" rIns="45720" tIns="27432" bIns="27432">
             <a:spAutoFit/>
           </a:bodyPr>
           <a:lstStyle/>
@@ -5218,7 +5295,7 @@
           <a:noFill/>
         </p:spPr>
         <p:txBody>
-          <a:bodyPr wrap="square" lIns="45720" tIns="27432" rIns="45720" bIns="27432">
+          <a:bodyPr wrap="square" lIns="45720" rIns="45720" tIns="27432" bIns="27432">
             <a:spAutoFit/>
           </a:bodyPr>
           <a:lstStyle/>
@@ -5238,6 +5315,49 @@
       </p:sp>
       <p:sp>
         <p:nvSpPr>
+          <p:cNvPr id="5" name="Rectangle 4"/>
+          <p:cNvSpPr/>
+          <p:nvPr/>
+        </p:nvSpPr>
+        <p:spPr>
+          <a:xfrm>
+            <a:off x="548640" y="1508760"/>
+            <a:ext cx="109728" cy="548640"/>
+          </a:xfrm>
+          <a:prstGeom prst="rect">
+            <a:avLst/>
+          </a:prstGeom>
+          <a:solidFill>
+            <a:srgbClr val="F5A623"/>
+          </a:solidFill>
+          <a:ln>
+            <a:noFill/>
+          </a:ln>
+        </p:spPr>
+        <p:style>
+          <a:lnRef idx="1">
+            <a:schemeClr val="accent1"/>
+          </a:lnRef>
+          <a:fillRef idx="3">
+            <a:schemeClr val="accent1"/>
+          </a:fillRef>
+          <a:effectRef idx="2">
+            <a:schemeClr val="accent1"/>
+          </a:effectRef>
+          <a:fontRef idx="minor">
+            <a:schemeClr val="lt1"/>
+          </a:fontRef>
+        </p:style>
+        <p:txBody>
+          <a:bodyPr rtlCol="0" anchor="ctr"/>
+          <a:lstStyle/>
+          <a:p>
+            <a:pPr algn="ctr"/>
+          </a:p>
+        </p:txBody>
+      </p:sp>
+      <p:sp>
+        <p:nvSpPr>
           <p:cNvPr id="6" name="TextBox 5"/>
           <p:cNvSpPr txBox="1"/>
           <p:nvPr/>
@@ -5253,7 +5373,7 @@
           <a:noFill/>
         </p:spPr>
         <p:txBody>
-          <a:bodyPr wrap="square" lIns="45720" tIns="27432" rIns="45720" bIns="27432">
+          <a:bodyPr wrap="square" lIns="45720" rIns="45720" tIns="27432" bIns="27432">
             <a:spAutoFit/>
           </a:bodyPr>
           <a:lstStyle/>
@@ -5288,7 +5408,7 @@
           <a:noFill/>
         </p:spPr>
         <p:txBody>
-          <a:bodyPr wrap="square" lIns="45720" tIns="27432" rIns="45720" bIns="27432">
+          <a:bodyPr wrap="square" lIns="45720" rIns="45720" tIns="27432" bIns="27432">
             <a:spAutoFit/>
           </a:bodyPr>
           <a:lstStyle/>
@@ -5394,7 +5514,6 @@
           <a:lstStyle/>
           <a:p>
             <a:pPr algn="ctr"/>
-            <a:endParaRPr/>
           </a:p>
         </p:txBody>
       </p:sp>
@@ -5415,7 +5534,7 @@
           <a:noFill/>
         </p:spPr>
         <p:txBody>
-          <a:bodyPr wrap="square" lIns="45720" tIns="27432" rIns="45720" bIns="27432">
+          <a:bodyPr wrap="square" lIns="45720" rIns="45720" tIns="27432" bIns="27432">
             <a:spAutoFit/>
           </a:bodyPr>
           <a:lstStyle/>
@@ -5450,7 +5569,7 @@
           <a:noFill/>
         </p:spPr>
         <p:txBody>
-          <a:bodyPr wrap="square" lIns="45720" tIns="27432" rIns="45720" bIns="27432">
+          <a:bodyPr wrap="square" lIns="45720" rIns="45720" tIns="27432" bIns="27432">
             <a:spAutoFit/>
           </a:bodyPr>
           <a:lstStyle/>
@@ -5508,7 +5627,6 @@
           <a:lstStyle/>
           <a:p>
             <a:pPr algn="ctr"/>
-            <a:endParaRPr/>
           </a:p>
         </p:txBody>
       </p:sp>
@@ -5529,7 +5647,7 @@
           <a:noFill/>
         </p:spPr>
         <p:txBody>
-          <a:bodyPr wrap="square" lIns="45720" tIns="27432" rIns="45720" bIns="27432">
+          <a:bodyPr wrap="square" lIns="45720" rIns="45720" tIns="27432" bIns="27432">
             <a:spAutoFit/>
           </a:bodyPr>
           <a:lstStyle/>
@@ -5564,7 +5682,7 @@
           <a:noFill/>
         </p:spPr>
         <p:txBody>
-          <a:bodyPr wrap="square" lIns="45720" tIns="27432" rIns="45720" bIns="27432">
+          <a:bodyPr wrap="square" lIns="45720" rIns="45720" tIns="27432" bIns="27432">
             <a:spAutoFit/>
           </a:bodyPr>
           <a:lstStyle/>
@@ -5622,7 +5740,6 @@
           <a:lstStyle/>
           <a:p>
             <a:pPr algn="ctr"/>
-            <a:endParaRPr/>
           </a:p>
         </p:txBody>
       </p:sp>
@@ -5643,7 +5760,7 @@
           <a:noFill/>
         </p:spPr>
         <p:txBody>
-          <a:bodyPr wrap="square" lIns="45720" tIns="27432" rIns="45720" bIns="27432">
+          <a:bodyPr wrap="square" lIns="45720" rIns="45720" tIns="27432" bIns="27432">
             <a:spAutoFit/>
           </a:bodyPr>
           <a:lstStyle/>
@@ -5678,7 +5795,7 @@
           <a:noFill/>
         </p:spPr>
         <p:txBody>
-          <a:bodyPr wrap="square" lIns="45720" tIns="27432" rIns="45720" bIns="27432">
+          <a:bodyPr wrap="square" lIns="45720" rIns="45720" tIns="27432" bIns="27432">
             <a:spAutoFit/>
           </a:bodyPr>
           <a:lstStyle/>
@@ -5713,7 +5830,7 @@
           <a:noFill/>
         </p:spPr>
         <p:txBody>
-          <a:bodyPr wrap="square" lIns="45720" tIns="27432" rIns="45720" bIns="27432">
+          <a:bodyPr wrap="square" lIns="45720" rIns="45720" tIns="27432" bIns="27432">
             <a:spAutoFit/>
           </a:bodyPr>
           <a:lstStyle/>
@@ -5771,7 +5888,6 @@
           <a:lstStyle/>
           <a:p>
             <a:pPr algn="ctr"/>
-            <a:endParaRPr/>
           </a:p>
         </p:txBody>
       </p:sp>
@@ -5792,7 +5908,7 @@
           <a:noFill/>
         </p:spPr>
         <p:txBody>
-          <a:bodyPr wrap="square" lIns="45720" tIns="27432" rIns="45720" bIns="27432">
+          <a:bodyPr wrap="square" lIns="45720" rIns="45720" tIns="27432" bIns="27432">
             <a:spAutoFit/>
           </a:bodyPr>
           <a:lstStyle/>
@@ -5827,7 +5943,7 @@
           <a:noFill/>
         </p:spPr>
         <p:txBody>
-          <a:bodyPr wrap="square" lIns="45720" tIns="27432" rIns="45720" bIns="27432">
+          <a:bodyPr wrap="square" lIns="45720" rIns="45720" tIns="27432" bIns="27432">
             <a:spAutoFit/>
           </a:bodyPr>
           <a:lstStyle/>
@@ -5862,7 +5978,7 @@
           <a:noFill/>
         </p:spPr>
         <p:txBody>
-          <a:bodyPr wrap="square" lIns="45720" tIns="27432" rIns="45720" bIns="27432">
+          <a:bodyPr wrap="square" lIns="45720" rIns="45720" tIns="27432" bIns="27432">
             <a:spAutoFit/>
           </a:bodyPr>
           <a:lstStyle/>
@@ -5889,7 +6005,7 @@
 </file>
 
 <file path=ppt/slides/slide15.xml><?xml version="1.0" encoding="utf-8"?>
-<p:sld xmlns:a="http://schemas.openxmlformats.org/drawingml/2006/main" xmlns:r="http://schemas.openxmlformats.org/officeDocument/2006/relationships" xmlns:p="http://schemas.openxmlformats.org/presentationml/2006/main">
+<p:sld xmlns:a="http://schemas.openxmlformats.org/drawingml/2006/main" xmlns:p="http://schemas.openxmlformats.org/presentationml/2006/main" xmlns:r="http://schemas.openxmlformats.org/officeDocument/2006/relationships">
   <p:cSld>
     <p:spTree>
       <p:nvGrpSpPr>
@@ -5897,14 +6013,7 @@
         <p:cNvGrpSpPr/>
         <p:nvPr/>
       </p:nvGrpSpPr>
-      <p:grpSpPr>
-        <a:xfrm>
-          <a:off x="0" y="0"/>
-          <a:ext cx="0" cy="0"/>
-          <a:chOff x="0" y="0"/>
-          <a:chExt cx="0" cy="0"/>
-        </a:xfrm>
-      </p:grpSpPr>
+      <p:grpSpPr/>
       <p:sp>
         <p:nvSpPr>
           <p:cNvPr id="2" name="Rectangle 1"/>
@@ -5946,7 +6055,6 @@
           <a:lstStyle/>
           <a:p>
             <a:pPr algn="ctr"/>
-            <a:endParaRPr/>
           </a:p>
         </p:txBody>
       </p:sp>
@@ -5967,7 +6075,7 @@
           <a:noFill/>
         </p:spPr>
         <p:txBody>
-          <a:bodyPr wrap="square" lIns="45720" tIns="27432" rIns="45720" bIns="27432">
+          <a:bodyPr wrap="square" lIns="45720" rIns="45720" tIns="27432" bIns="27432">
             <a:spAutoFit/>
           </a:bodyPr>
           <a:lstStyle/>
@@ -6002,7 +6110,7 @@
           <a:noFill/>
         </p:spPr>
         <p:txBody>
-          <a:bodyPr wrap="square" lIns="45720" tIns="27432" rIns="45720" bIns="27432">
+          <a:bodyPr wrap="square" lIns="45720" rIns="45720" tIns="27432" bIns="27432">
             <a:spAutoFit/>
           </a:bodyPr>
           <a:lstStyle/>
@@ -6022,16 +6130,16 @@
       </p:sp>
       <p:sp>
         <p:nvSpPr>
-          <p:cNvPr id="6" name="Oval 5"/>
+          <p:cNvPr id="5" name="Rectangle 4"/>
           <p:cNvSpPr/>
           <p:nvPr/>
         </p:nvSpPr>
         <p:spPr>
           <a:xfrm>
-            <a:off x="777240" y="1874520"/>
-            <a:ext cx="457200" cy="457200"/>
-          </a:xfrm>
-          <a:prstGeom prst="ellipse">
+            <a:off x="548640" y="1508760"/>
+            <a:ext cx="109728" cy="548640"/>
+          </a:xfrm>
+          <a:prstGeom prst="rect">
             <a:avLst/>
           </a:prstGeom>
           <a:solidFill>
@@ -6060,89 +6168,18 @@
           <a:lstStyle/>
           <a:p>
             <a:pPr algn="ctr"/>
-            <a:endParaRPr/>
-          </a:p>
-        </p:txBody>
-      </p:sp>
-      <p:sp>
-        <p:nvSpPr>
-          <p:cNvPr id="7" name="TextBox 6"/>
-          <p:cNvSpPr txBox="1"/>
-          <p:nvPr/>
-        </p:nvSpPr>
-        <p:spPr>
-          <a:xfrm>
-            <a:off x="1371600" y="1783080"/>
-            <a:ext cx="10058400" cy="457200"/>
-          </a:xfrm>
-          <a:prstGeom prst="rect">
-            <a:avLst/>
-          </a:prstGeom>
-          <a:noFill/>
-        </p:spPr>
-        <p:txBody>
-          <a:bodyPr wrap="square" lIns="45720" tIns="27432" rIns="45720" bIns="27432">
-            <a:spAutoFit/>
-          </a:bodyPr>
-          <a:lstStyle/>
-          <a:p>
-            <a:pPr algn="l"/>
-            <a:r>
-              <a:rPr sz="1700" b="1" i="0">
-                <a:solidFill>
-                  <a:srgbClr val="065A82"/>
-                </a:solidFill>
-                <a:latin typeface="Calibri"/>
-              </a:rPr>
-              <a:t>Attention heatmaps</a:t>
-            </a:r>
-          </a:p>
-        </p:txBody>
-      </p:sp>
-      <p:sp>
-        <p:nvSpPr>
-          <p:cNvPr id="8" name="TextBox 7"/>
-          <p:cNvSpPr txBox="1"/>
-          <p:nvPr/>
-        </p:nvSpPr>
-        <p:spPr>
-          <a:xfrm>
-            <a:off x="1371600" y="2240280"/>
-            <a:ext cx="10058400" cy="548640"/>
-          </a:xfrm>
-          <a:prstGeom prst="rect">
-            <a:avLst/>
-          </a:prstGeom>
-          <a:noFill/>
-        </p:spPr>
-        <p:txBody>
-          <a:bodyPr wrap="square" lIns="45720" tIns="27432" rIns="45720" bIns="27432">
-            <a:spAutoFit/>
-          </a:bodyPr>
-          <a:lstStyle/>
-          <a:p>
-            <a:pPr algn="l"/>
-            <a:r>
-              <a:rPr sz="1400" b="0" i="0">
-                <a:solidFill>
-                  <a:srgbClr val="1A1A1A"/>
-                </a:solidFill>
-                <a:latin typeface="Calibri"/>
-              </a:rPr>
-              <a:t>Peaks at lag 1 and lag 2 — matches AR(2) tap structure</a:t>
-            </a:r>
-          </a:p>
-        </p:txBody>
-      </p:sp>
-      <p:sp>
-        <p:nvSpPr>
-          <p:cNvPr id="9" name="Oval 8"/>
+          </a:p>
+        </p:txBody>
+      </p:sp>
+      <p:sp>
+        <p:nvSpPr>
+          <p:cNvPr id="6" name="Oval 5"/>
           <p:cNvSpPr/>
           <p:nvPr/>
         </p:nvSpPr>
         <p:spPr>
           <a:xfrm>
-            <a:off x="777240" y="2971800"/>
+            <a:off x="777240" y="1874520"/>
             <a:ext cx="457200" cy="457200"/>
           </a:xfrm>
           <a:prstGeom prst="ellipse">
@@ -6174,19 +6211,18 @@
           <a:lstStyle/>
           <a:p>
             <a:pPr algn="ctr"/>
-            <a:endParaRPr/>
-          </a:p>
-        </p:txBody>
-      </p:sp>
-      <p:sp>
-        <p:nvSpPr>
-          <p:cNvPr id="10" name="TextBox 9"/>
+          </a:p>
+        </p:txBody>
+      </p:sp>
+      <p:sp>
+        <p:nvSpPr>
+          <p:cNvPr id="7" name="TextBox 6"/>
           <p:cNvSpPr txBox="1"/>
           <p:nvPr/>
         </p:nvSpPr>
         <p:spPr>
           <a:xfrm>
-            <a:off x="1371600" y="2880360"/>
+            <a:off x="1371600" y="1783080"/>
             <a:ext cx="10058400" cy="457200"/>
           </a:xfrm>
           <a:prstGeom prst="rect">
@@ -6195,7 +6231,7 @@
           <a:noFill/>
         </p:spPr>
         <p:txBody>
-          <a:bodyPr wrap="square" lIns="45720" tIns="27432" rIns="45720" bIns="27432">
+          <a:bodyPr wrap="square" lIns="45720" rIns="45720" tIns="27432" bIns="27432">
             <a:spAutoFit/>
           </a:bodyPr>
           <a:lstStyle/>
@@ -6208,20 +6244,20 @@
                 </a:solidFill>
                 <a:latin typeface="Calibri"/>
               </a:rPr>
-              <a:t>Attention-vs-lag profile</a:t>
-            </a:r>
-          </a:p>
-        </p:txBody>
-      </p:sp>
-      <p:sp>
-        <p:nvSpPr>
-          <p:cNvPr id="11" name="TextBox 10"/>
+              <a:t>Attention heatmaps</a:t>
+            </a:r>
+          </a:p>
+        </p:txBody>
+      </p:sp>
+      <p:sp>
+        <p:nvSpPr>
+          <p:cNvPr id="8" name="TextBox 7"/>
           <p:cNvSpPr txBox="1"/>
           <p:nvPr/>
         </p:nvSpPr>
         <p:spPr>
           <a:xfrm>
-            <a:off x="1371600" y="3337560"/>
+            <a:off x="1371600" y="2240280"/>
             <a:ext cx="10058400" cy="548640"/>
           </a:xfrm>
           <a:prstGeom prst="rect">
@@ -6230,7 +6266,7 @@
           <a:noFill/>
         </p:spPr>
         <p:txBody>
-          <a:bodyPr wrap="square" lIns="45720" tIns="27432" rIns="45720" bIns="27432">
+          <a:bodyPr wrap="square" lIns="45720" rIns="45720" tIns="27432" bIns="27432">
             <a:spAutoFit/>
           </a:bodyPr>
           <a:lstStyle/>
@@ -6243,20 +6279,20 @@
                 </a:solidFill>
                 <a:latin typeface="Calibri"/>
               </a:rPr>
-              <a:t>Bar heights track theoretical  2 cos(ω₀)  weights</a:t>
-            </a:r>
-          </a:p>
-        </p:txBody>
-      </p:sp>
-      <p:sp>
-        <p:nvSpPr>
-          <p:cNvPr id="12" name="Oval 11"/>
+              <a:t>Peaks at lag 1 and lag 2 — matches AR(2) tap structure</a:t>
+            </a:r>
+          </a:p>
+        </p:txBody>
+      </p:sp>
+      <p:sp>
+        <p:nvSpPr>
+          <p:cNvPr id="9" name="Oval 8"/>
           <p:cNvSpPr/>
           <p:nvPr/>
         </p:nvSpPr>
         <p:spPr>
           <a:xfrm>
-            <a:off x="777240" y="4069080"/>
+            <a:off x="777240" y="2971800"/>
             <a:ext cx="457200" cy="457200"/>
           </a:xfrm>
           <a:prstGeom prst="ellipse">
@@ -6288,19 +6324,18 @@
           <a:lstStyle/>
           <a:p>
             <a:pPr algn="ctr"/>
-            <a:endParaRPr/>
-          </a:p>
-        </p:txBody>
-      </p:sp>
-      <p:sp>
-        <p:nvSpPr>
-          <p:cNvPr id="13" name="TextBox 12"/>
+          </a:p>
+        </p:txBody>
+      </p:sp>
+      <p:sp>
+        <p:nvSpPr>
+          <p:cNvPr id="10" name="TextBox 9"/>
           <p:cNvSpPr txBox="1"/>
           <p:nvPr/>
         </p:nvSpPr>
         <p:spPr>
           <a:xfrm>
-            <a:off x="1371600" y="3977640"/>
+            <a:off x="1371600" y="2880360"/>
             <a:ext cx="10058400" cy="457200"/>
           </a:xfrm>
           <a:prstGeom prst="rect">
@@ -6309,7 +6344,7 @@
           <a:noFill/>
         </p:spPr>
         <p:txBody>
-          <a:bodyPr wrap="square" lIns="45720" tIns="27432" rIns="45720" bIns="27432">
+          <a:bodyPr wrap="square" lIns="45720" rIns="45720" tIns="27432" bIns="27432">
             <a:spAutoFit/>
           </a:bodyPr>
           <a:lstStyle/>
@@ -6322,20 +6357,20 @@
                 </a:solidFill>
                 <a:latin typeface="Calibri"/>
               </a:rPr>
-              <a:t>FFT comparison</a:t>
-            </a:r>
-          </a:p>
-        </p:txBody>
-      </p:sp>
-      <p:sp>
-        <p:nvSpPr>
-          <p:cNvPr id="14" name="TextBox 13"/>
+              <a:t>Attention-vs-lag profile</a:t>
+            </a:r>
+          </a:p>
+        </p:txBody>
+      </p:sp>
+      <p:sp>
+        <p:nvSpPr>
+          <p:cNvPr id="11" name="TextBox 10"/>
           <p:cNvSpPr txBox="1"/>
           <p:nvPr/>
         </p:nvSpPr>
         <p:spPr>
           <a:xfrm>
-            <a:off x="1371600" y="4434840"/>
+            <a:off x="1371600" y="3337560"/>
             <a:ext cx="10058400" cy="548640"/>
           </a:xfrm>
           <a:prstGeom prst="rect">
@@ -6344,7 +6379,7 @@
           <a:noFill/>
         </p:spPr>
         <p:txBody>
-          <a:bodyPr wrap="square" lIns="45720" tIns="27432" rIns="45720" bIns="27432">
+          <a:bodyPr wrap="square" lIns="45720" rIns="45720" tIns="27432" bIns="27432">
             <a:spAutoFit/>
           </a:bodyPr>
           <a:lstStyle/>
@@ -6357,20 +6392,20 @@
                 </a:solidFill>
                 <a:latin typeface="Calibri"/>
               </a:rPr>
-              <a:t>Output spectrum concentrates at true frequency, noise suppressed</a:t>
-            </a:r>
-          </a:p>
-        </p:txBody>
-      </p:sp>
-      <p:sp>
-        <p:nvSpPr>
-          <p:cNvPr id="15" name="Oval 14"/>
+              <a:t>Bar heights track theoretical  2 cos(ω₀)  weights</a:t>
+            </a:r>
+          </a:p>
+        </p:txBody>
+      </p:sp>
+      <p:sp>
+        <p:nvSpPr>
+          <p:cNvPr id="12" name="Oval 11"/>
           <p:cNvSpPr/>
           <p:nvPr/>
         </p:nvSpPr>
         <p:spPr>
           <a:xfrm>
-            <a:off x="777240" y="5166360"/>
+            <a:off x="777240" y="4069080"/>
             <a:ext cx="457200" cy="457200"/>
           </a:xfrm>
           <a:prstGeom prst="ellipse">
@@ -6402,7 +6437,119 @@
           <a:lstStyle/>
           <a:p>
             <a:pPr algn="ctr"/>
-            <a:endParaRPr/>
+          </a:p>
+        </p:txBody>
+      </p:sp>
+      <p:sp>
+        <p:nvSpPr>
+          <p:cNvPr id="13" name="TextBox 12"/>
+          <p:cNvSpPr txBox="1"/>
+          <p:nvPr/>
+        </p:nvSpPr>
+        <p:spPr>
+          <a:xfrm>
+            <a:off x="1371600" y="3977640"/>
+            <a:ext cx="10058400" cy="457200"/>
+          </a:xfrm>
+          <a:prstGeom prst="rect">
+            <a:avLst/>
+          </a:prstGeom>
+          <a:noFill/>
+        </p:spPr>
+        <p:txBody>
+          <a:bodyPr wrap="square" lIns="45720" rIns="45720" tIns="27432" bIns="27432">
+            <a:spAutoFit/>
+          </a:bodyPr>
+          <a:lstStyle/>
+          <a:p>
+            <a:pPr algn="l"/>
+            <a:r>
+              <a:rPr sz="1700" b="1" i="0">
+                <a:solidFill>
+                  <a:srgbClr val="065A82"/>
+                </a:solidFill>
+                <a:latin typeface="Calibri"/>
+              </a:rPr>
+              <a:t>FFT comparison</a:t>
+            </a:r>
+          </a:p>
+        </p:txBody>
+      </p:sp>
+      <p:sp>
+        <p:nvSpPr>
+          <p:cNvPr id="14" name="TextBox 13"/>
+          <p:cNvSpPr txBox="1"/>
+          <p:nvPr/>
+        </p:nvSpPr>
+        <p:spPr>
+          <a:xfrm>
+            <a:off x="1371600" y="4434840"/>
+            <a:ext cx="10058400" cy="548640"/>
+          </a:xfrm>
+          <a:prstGeom prst="rect">
+            <a:avLst/>
+          </a:prstGeom>
+          <a:noFill/>
+        </p:spPr>
+        <p:txBody>
+          <a:bodyPr wrap="square" lIns="45720" rIns="45720" tIns="27432" bIns="27432">
+            <a:spAutoFit/>
+          </a:bodyPr>
+          <a:lstStyle/>
+          <a:p>
+            <a:pPr algn="l"/>
+            <a:r>
+              <a:rPr sz="1400" b="0" i="0">
+                <a:solidFill>
+                  <a:srgbClr val="1A1A1A"/>
+                </a:solidFill>
+                <a:latin typeface="Calibri"/>
+              </a:rPr>
+              <a:t>Output spectrum concentrates at true frequency, noise suppressed</a:t>
+            </a:r>
+          </a:p>
+        </p:txBody>
+      </p:sp>
+      <p:sp>
+        <p:nvSpPr>
+          <p:cNvPr id="15" name="Oval 14"/>
+          <p:cNvSpPr/>
+          <p:nvPr/>
+        </p:nvSpPr>
+        <p:spPr>
+          <a:xfrm>
+            <a:off x="777240" y="5166360"/>
+            <a:ext cx="457200" cy="457200"/>
+          </a:xfrm>
+          <a:prstGeom prst="ellipse">
+            <a:avLst/>
+          </a:prstGeom>
+          <a:solidFill>
+            <a:srgbClr val="F5A623"/>
+          </a:solidFill>
+          <a:ln>
+            <a:noFill/>
+          </a:ln>
+        </p:spPr>
+        <p:style>
+          <a:lnRef idx="1">
+            <a:schemeClr val="accent1"/>
+          </a:lnRef>
+          <a:fillRef idx="3">
+            <a:schemeClr val="accent1"/>
+          </a:fillRef>
+          <a:effectRef idx="2">
+            <a:schemeClr val="accent1"/>
+          </a:effectRef>
+          <a:fontRef idx="minor">
+            <a:schemeClr val="lt1"/>
+          </a:fontRef>
+        </p:style>
+        <p:txBody>
+          <a:bodyPr rtlCol="0" anchor="ctr"/>
+          <a:lstStyle/>
+          <a:p>
+            <a:pPr algn="ctr"/>
           </a:p>
         </p:txBody>
       </p:sp>
@@ -6423,7 +6570,7 @@
           <a:noFill/>
         </p:spPr>
         <p:txBody>
-          <a:bodyPr wrap="square" lIns="45720" tIns="27432" rIns="45720" bIns="27432">
+          <a:bodyPr wrap="square" lIns="45720" rIns="45720" tIns="27432" bIns="27432">
             <a:spAutoFit/>
           </a:bodyPr>
           <a:lstStyle/>
@@ -6458,7 +6605,7 @@
           <a:noFill/>
         </p:spPr>
         <p:txBody>
-          <a:bodyPr wrap="square" lIns="45720" tIns="27432" rIns="45720" bIns="27432">
+          <a:bodyPr wrap="square" lIns="45720" rIns="45720" tIns="27432" bIns="27432">
             <a:spAutoFit/>
           </a:bodyPr>
           <a:lstStyle/>
@@ -6485,7 +6632,7 @@
 </file>
 
 <file path=ppt/slides/slide16.xml><?xml version="1.0" encoding="utf-8"?>
-<p:sld xmlns:a="http://schemas.openxmlformats.org/drawingml/2006/main" xmlns:r="http://schemas.openxmlformats.org/officeDocument/2006/relationships" xmlns:p="http://schemas.openxmlformats.org/presentationml/2006/main">
+<p:sld xmlns:a="http://schemas.openxmlformats.org/drawingml/2006/main" xmlns:p="http://schemas.openxmlformats.org/presentationml/2006/main" xmlns:r="http://schemas.openxmlformats.org/officeDocument/2006/relationships">
   <p:cSld>
     <p:spTree>
       <p:nvGrpSpPr>
@@ -6493,14 +6640,7 @@
         <p:cNvGrpSpPr/>
         <p:nvPr/>
       </p:nvGrpSpPr>
-      <p:grpSpPr>
-        <a:xfrm>
-          <a:off x="0" y="0"/>
-          <a:ext cx="0" cy="0"/>
-          <a:chOff x="0" y="0"/>
-          <a:chExt cx="0" cy="0"/>
-        </a:xfrm>
-      </p:grpSpPr>
+      <p:grpSpPr/>
       <p:sp>
         <p:nvSpPr>
           <p:cNvPr id="2" name="Rectangle 1"/>
@@ -6516,7 +6656,7 @@
             <a:avLst/>
           </a:prstGeom>
           <a:solidFill>
-            <a:srgbClr val="21295C"/>
+            <a:srgbClr val="F2F4F8"/>
           </a:solidFill>
           <a:ln>
             <a:noFill/>
@@ -6542,20 +6682,89 @@
           <a:lstStyle/>
           <a:p>
             <a:pPr algn="ctr"/>
-            <a:endParaRPr/>
-          </a:p>
-        </p:txBody>
-      </p:sp>
-      <p:sp>
-        <p:nvSpPr>
-          <p:cNvPr id="3" name="Rectangle 2"/>
+          </a:p>
+        </p:txBody>
+      </p:sp>
+      <p:sp>
+        <p:nvSpPr>
+          <p:cNvPr id="3" name="TextBox 2"/>
+          <p:cNvSpPr txBox="1"/>
+          <p:nvPr/>
+        </p:nvSpPr>
+        <p:spPr>
+          <a:xfrm>
+            <a:off x="548640" y="320040"/>
+            <a:ext cx="10972800" cy="731520"/>
+          </a:xfrm>
+          <a:prstGeom prst="rect">
+            <a:avLst/>
+          </a:prstGeom>
+          <a:noFill/>
+        </p:spPr>
+        <p:txBody>
+          <a:bodyPr wrap="square" lIns="45720" rIns="45720" tIns="27432" bIns="27432">
+            <a:spAutoFit/>
+          </a:bodyPr>
+          <a:lstStyle/>
+          <a:p>
+            <a:pPr algn="l"/>
+            <a:r>
+              <a:rPr sz="3000" b="1" i="0">
+                <a:solidFill>
+                  <a:srgbClr val="065A82"/>
+                </a:solidFill>
+                <a:latin typeface="Calibri"/>
+              </a:rPr>
+              <a:t>Performance vs Input SNR</a:t>
+            </a:r>
+          </a:p>
+        </p:txBody>
+      </p:sp>
+      <p:sp>
+        <p:nvSpPr>
+          <p:cNvPr id="4" name="TextBox 3"/>
+          <p:cNvSpPr txBox="1"/>
+          <p:nvPr/>
+        </p:nvSpPr>
+        <p:spPr>
+          <a:xfrm>
+            <a:off x="548640" y="960120"/>
+            <a:ext cx="10972800" cy="365760"/>
+          </a:xfrm>
+          <a:prstGeom prst="rect">
+            <a:avLst/>
+          </a:prstGeom>
+          <a:noFill/>
+        </p:spPr>
+        <p:txBody>
+          <a:bodyPr wrap="square" lIns="45720" rIns="45720" tIns="27432" bIns="27432">
+            <a:spAutoFit/>
+          </a:bodyPr>
+          <a:lstStyle/>
+          <a:p>
+            <a:pPr algn="l"/>
+            <a:r>
+              <a:rPr sz="1400" b="0" i="0">
+                <a:solidFill>
+                  <a:srgbClr val="555F6D"/>
+                </a:solidFill>
+                <a:latin typeface="Calibri"/>
+              </a:rPr>
+              <a:t>Original 29 K model, easy-noise training</a:t>
+            </a:r>
+          </a:p>
+        </p:txBody>
+      </p:sp>
+      <p:sp>
+        <p:nvSpPr>
+          <p:cNvPr id="5" name="Rectangle 4"/>
           <p:cNvSpPr/>
           <p:nvPr/>
         </p:nvSpPr>
         <p:spPr>
           <a:xfrm>
-            <a:off x="0" y="0"/>
-            <a:ext cx="365760" cy="6858000"/>
+            <a:off x="548640" y="1508760"/>
+            <a:ext cx="109728" cy="548640"/>
           </a:xfrm>
           <a:prstGeom prst="rect">
             <a:avLst/>
@@ -6586,20 +6795,832 @@
           <a:lstStyle/>
           <a:p>
             <a:pPr algn="ctr"/>
-            <a:endParaRPr/>
-          </a:p>
-        </p:txBody>
-      </p:sp>
-      <p:sp>
-        <p:nvSpPr>
-          <p:cNvPr id="4" name="TextBox 3"/>
+          </a:p>
+        </p:txBody>
+      </p:sp>
+      <p:graphicFrame>
+        <p:nvGraphicFramePr>
+          <p:cNvPr id="6" name="Table 5"/>
+          <p:cNvGraphicFramePr>
+            <a:graphicFrameLocks noGrp="1"/>
+          </p:cNvGraphicFramePr>
+          <p:nvPr/>
+        </p:nvGraphicFramePr>
+        <p:xfrm>
+          <a:off x="777240" y="1783080"/>
+          <a:ext cx="10607038" cy="3474720"/>
+        </p:xfrm>
+        <a:graphic>
+          <a:graphicData uri="http://schemas.openxmlformats.org/drawingml/2006/table">
+            <a:tbl>
+              <a:tblPr firstRow="1" bandRow="1">
+                <a:tableStyleId>{5C22544A-7EE6-4342-B048-85BDC9FD1C3A}</a:tableStyleId>
+              </a:tblPr>
+              <a:tblGrid>
+                <a:gridCol w="1631852"/>
+                <a:gridCol w="1631852"/>
+                <a:gridCol w="2447778"/>
+                <a:gridCol w="2447778"/>
+                <a:gridCol w="2447778"/>
+              </a:tblGrid>
+              <a:tr h="496388">
+                <a:tc>
+                  <a:txBody>
+                    <a:bodyPr wrap="square"/>
+                    <a:lstStyle/>
+                    <a:p>
+                      <a:r>
+                        <a:rPr sz="1300" b="1">
+                          <a:solidFill>
+                            <a:srgbClr val="F2F4F8"/>
+                          </a:solidFill>
+                          <a:latin typeface="Calibri"/>
+                        </a:rPr>
+                        <a:t>amp_std</a:t>
+                      </a:r>
+                    </a:p>
+                  </a:txBody>
+                  <a:tcPr marL="73152" marR="73152" marT="36576" marB="36576">
+                    <a:solidFill>
+                      <a:srgbClr val="065A82"/>
+                    </a:solidFill>
+                  </a:tcPr>
+                </a:tc>
+                <a:tc>
+                  <a:txBody>
+                    <a:bodyPr wrap="square"/>
+                    <a:lstStyle/>
+                    <a:p>
+                      <a:r>
+                        <a:rPr sz="1300" b="1">
+                          <a:solidFill>
+                            <a:srgbClr val="F2F4F8"/>
+                          </a:solidFill>
+                          <a:latin typeface="Calibri"/>
+                        </a:rPr>
+                        <a:t>phase_std</a:t>
+                      </a:r>
+                    </a:p>
+                  </a:txBody>
+                  <a:tcPr marL="73152" marR="73152" marT="36576" marB="36576">
+                    <a:solidFill>
+                      <a:srgbClr val="065A82"/>
+                    </a:solidFill>
+                  </a:tcPr>
+                </a:tc>
+                <a:tc>
+                  <a:txBody>
+                    <a:bodyPr wrap="square"/>
+                    <a:lstStyle/>
+                    <a:p>
+                      <a:r>
+                        <a:rPr sz="1300" b="1">
+                          <a:solidFill>
+                            <a:srgbClr val="F2F4F8"/>
+                          </a:solidFill>
+                          <a:latin typeface="Calibri"/>
+                        </a:rPr>
+                        <a:t>Input SNR (dB)</a:t>
+                      </a:r>
+                    </a:p>
+                  </a:txBody>
+                  <a:tcPr marL="73152" marR="73152" marT="36576" marB="36576">
+                    <a:solidFill>
+                      <a:srgbClr val="065A82"/>
+                    </a:solidFill>
+                  </a:tcPr>
+                </a:tc>
+                <a:tc>
+                  <a:txBody>
+                    <a:bodyPr wrap="square"/>
+                    <a:lstStyle/>
+                    <a:p>
+                      <a:r>
+                        <a:rPr sz="1300" b="1">
+                          <a:solidFill>
+                            <a:srgbClr val="F2F4F8"/>
+                          </a:solidFill>
+                          <a:latin typeface="Calibri"/>
+                        </a:rPr>
+                        <a:t>Output SNR (dB)</a:t>
+                      </a:r>
+                    </a:p>
+                  </a:txBody>
+                  <a:tcPr marL="73152" marR="73152" marT="36576" marB="36576">
+                    <a:solidFill>
+                      <a:srgbClr val="065A82"/>
+                    </a:solidFill>
+                  </a:tcPr>
+                </a:tc>
+                <a:tc>
+                  <a:txBody>
+                    <a:bodyPr wrap="square"/>
+                    <a:lstStyle/>
+                    <a:p>
+                      <a:r>
+                        <a:rPr sz="1300" b="1">
+                          <a:solidFill>
+                            <a:srgbClr val="F2F4F8"/>
+                          </a:solidFill>
+                          <a:latin typeface="Calibri"/>
+                        </a:rPr>
+                        <a:t>Gain (dB)</a:t>
+                      </a:r>
+                    </a:p>
+                  </a:txBody>
+                  <a:tcPr marL="73152" marR="73152" marT="36576" marB="36576">
+                    <a:solidFill>
+                      <a:srgbClr val="065A82"/>
+                    </a:solidFill>
+                  </a:tcPr>
+                </a:tc>
+              </a:tr>
+              <a:tr h="496388">
+                <a:tc>
+                  <a:txBody>
+                    <a:bodyPr wrap="square"/>
+                    <a:lstStyle/>
+                    <a:p>
+                      <a:r>
+                        <a:rPr sz="1300">
+                          <a:solidFill>
+                            <a:srgbClr val="1A1A1A"/>
+                          </a:solidFill>
+                          <a:latin typeface="Calibri"/>
+                        </a:rPr>
+                        <a:t>0.10</a:t>
+                      </a:r>
+                    </a:p>
+                  </a:txBody>
+                  <a:tcPr marL="73152" marR="73152" marT="36576" marB="36576">
+                    <a:solidFill>
+                      <a:srgbClr val="FFFFFF"/>
+                    </a:solidFill>
+                  </a:tcPr>
+                </a:tc>
+                <a:tc>
+                  <a:txBody>
+                    <a:bodyPr wrap="square"/>
+                    <a:lstStyle/>
+                    <a:p>
+                      <a:r>
+                        <a:rPr sz="1300">
+                          <a:solidFill>
+                            <a:srgbClr val="1A1A1A"/>
+                          </a:solidFill>
+                          <a:latin typeface="Calibri"/>
+                        </a:rPr>
+                        <a:t>0.05</a:t>
+                      </a:r>
+                    </a:p>
+                  </a:txBody>
+                  <a:tcPr marL="73152" marR="73152" marT="36576" marB="36576">
+                    <a:solidFill>
+                      <a:srgbClr val="FFFFFF"/>
+                    </a:solidFill>
+                  </a:tcPr>
+                </a:tc>
+                <a:tc>
+                  <a:txBody>
+                    <a:bodyPr wrap="square"/>
+                    <a:lstStyle/>
+                    <a:p>
+                      <a:r>
+                        <a:rPr sz="1300">
+                          <a:solidFill>
+                            <a:srgbClr val="1A1A1A"/>
+                          </a:solidFill>
+                          <a:latin typeface="Calibri"/>
+                        </a:rPr>
+                        <a:t>3.05</a:t>
+                      </a:r>
+                    </a:p>
+                  </a:txBody>
+                  <a:tcPr marL="73152" marR="73152" marT="36576" marB="36576">
+                    <a:solidFill>
+                      <a:srgbClr val="FFFFFF"/>
+                    </a:solidFill>
+                  </a:tcPr>
+                </a:tc>
+                <a:tc>
+                  <a:txBody>
+                    <a:bodyPr wrap="square"/>
+                    <a:lstStyle/>
+                    <a:p>
+                      <a:r>
+                        <a:rPr sz="1300">
+                          <a:solidFill>
+                            <a:srgbClr val="1A1A1A"/>
+                          </a:solidFill>
+                          <a:latin typeface="Calibri"/>
+                        </a:rPr>
+                        <a:t>17.31</a:t>
+                      </a:r>
+                    </a:p>
+                  </a:txBody>
+                  <a:tcPr marL="73152" marR="73152" marT="36576" marB="36576">
+                    <a:solidFill>
+                      <a:srgbClr val="FFFFFF"/>
+                    </a:solidFill>
+                  </a:tcPr>
+                </a:tc>
+                <a:tc>
+                  <a:txBody>
+                    <a:bodyPr wrap="square"/>
+                    <a:lstStyle/>
+                    <a:p>
+                      <a:r>
+                        <a:rPr sz="1300">
+                          <a:solidFill>
+                            <a:srgbClr val="1A1A1A"/>
+                          </a:solidFill>
+                          <a:latin typeface="Calibri"/>
+                        </a:rPr>
+                        <a:t>+14.26</a:t>
+                      </a:r>
+                    </a:p>
+                  </a:txBody>
+                  <a:tcPr marL="73152" marR="73152" marT="36576" marB="36576">
+                    <a:solidFill>
+                      <a:srgbClr val="FFFFFF"/>
+                    </a:solidFill>
+                  </a:tcPr>
+                </a:tc>
+              </a:tr>
+              <a:tr h="496388">
+                <a:tc>
+                  <a:txBody>
+                    <a:bodyPr wrap="square"/>
+                    <a:lstStyle/>
+                    <a:p>
+                      <a:r>
+                        <a:rPr sz="1300">
+                          <a:solidFill>
+                            <a:srgbClr val="1A1A1A"/>
+                          </a:solidFill>
+                          <a:latin typeface="Calibri"/>
+                        </a:rPr>
+                        <a:t>0.20</a:t>
+                      </a:r>
+                    </a:p>
+                  </a:txBody>
+                  <a:tcPr marL="73152" marR="73152" marT="36576" marB="36576">
+                    <a:solidFill>
+                      <a:srgbClr val="E8EEF5"/>
+                    </a:solidFill>
+                  </a:tcPr>
+                </a:tc>
+                <a:tc>
+                  <a:txBody>
+                    <a:bodyPr wrap="square"/>
+                    <a:lstStyle/>
+                    <a:p>
+                      <a:r>
+                        <a:rPr sz="1300">
+                          <a:solidFill>
+                            <a:srgbClr val="1A1A1A"/>
+                          </a:solidFill>
+                          <a:latin typeface="Calibri"/>
+                        </a:rPr>
+                        <a:t>0.10</a:t>
+                      </a:r>
+                    </a:p>
+                  </a:txBody>
+                  <a:tcPr marL="73152" marR="73152" marT="36576" marB="36576">
+                    <a:solidFill>
+                      <a:srgbClr val="E8EEF5"/>
+                    </a:solidFill>
+                  </a:tcPr>
+                </a:tc>
+                <a:tc>
+                  <a:txBody>
+                    <a:bodyPr wrap="square"/>
+                    <a:lstStyle/>
+                    <a:p>
+                      <a:r>
+                        <a:rPr sz="1300">
+                          <a:solidFill>
+                            <a:srgbClr val="1A1A1A"/>
+                          </a:solidFill>
+                          <a:latin typeface="Calibri"/>
+                        </a:rPr>
+                        <a:t>2.85</a:t>
+                      </a:r>
+                    </a:p>
+                  </a:txBody>
+                  <a:tcPr marL="73152" marR="73152" marT="36576" marB="36576">
+                    <a:solidFill>
+                      <a:srgbClr val="E8EEF5"/>
+                    </a:solidFill>
+                  </a:tcPr>
+                </a:tc>
+                <a:tc>
+                  <a:txBody>
+                    <a:bodyPr wrap="square"/>
+                    <a:lstStyle/>
+                    <a:p>
+                      <a:r>
+                        <a:rPr sz="1300">
+                          <a:solidFill>
+                            <a:srgbClr val="1A1A1A"/>
+                          </a:solidFill>
+                          <a:latin typeface="Calibri"/>
+                        </a:rPr>
+                        <a:t>14.65</a:t>
+                      </a:r>
+                    </a:p>
+                  </a:txBody>
+                  <a:tcPr marL="73152" marR="73152" marT="36576" marB="36576">
+                    <a:solidFill>
+                      <a:srgbClr val="E8EEF5"/>
+                    </a:solidFill>
+                  </a:tcPr>
+                </a:tc>
+                <a:tc>
+                  <a:txBody>
+                    <a:bodyPr wrap="square"/>
+                    <a:lstStyle/>
+                    <a:p>
+                      <a:r>
+                        <a:rPr sz="1300">
+                          <a:solidFill>
+                            <a:srgbClr val="1A1A1A"/>
+                          </a:solidFill>
+                          <a:latin typeface="Calibri"/>
+                        </a:rPr>
+                        <a:t>+11.80  (training)</a:t>
+                      </a:r>
+                    </a:p>
+                  </a:txBody>
+                  <a:tcPr marL="73152" marR="73152" marT="36576" marB="36576">
+                    <a:solidFill>
+                      <a:srgbClr val="E8EEF5"/>
+                    </a:solidFill>
+                  </a:tcPr>
+                </a:tc>
+              </a:tr>
+              <a:tr h="496388">
+                <a:tc>
+                  <a:txBody>
+                    <a:bodyPr wrap="square"/>
+                    <a:lstStyle/>
+                    <a:p>
+                      <a:r>
+                        <a:rPr sz="1300">
+                          <a:solidFill>
+                            <a:srgbClr val="1A1A1A"/>
+                          </a:solidFill>
+                          <a:latin typeface="Calibri"/>
+                        </a:rPr>
+                        <a:t>0.40</a:t>
+                      </a:r>
+                    </a:p>
+                  </a:txBody>
+                  <a:tcPr marL="73152" marR="73152" marT="36576" marB="36576">
+                    <a:solidFill>
+                      <a:srgbClr val="FFFFFF"/>
+                    </a:solidFill>
+                  </a:tcPr>
+                </a:tc>
+                <a:tc>
+                  <a:txBody>
+                    <a:bodyPr wrap="square"/>
+                    <a:lstStyle/>
+                    <a:p>
+                      <a:r>
+                        <a:rPr sz="1300">
+                          <a:solidFill>
+                            <a:srgbClr val="1A1A1A"/>
+                          </a:solidFill>
+                          <a:latin typeface="Calibri"/>
+                        </a:rPr>
+                        <a:t>0.20</a:t>
+                      </a:r>
+                    </a:p>
+                  </a:txBody>
+                  <a:tcPr marL="73152" marR="73152" marT="36576" marB="36576">
+                    <a:solidFill>
+                      <a:srgbClr val="FFFFFF"/>
+                    </a:solidFill>
+                  </a:tcPr>
+                </a:tc>
+                <a:tc>
+                  <a:txBody>
+                    <a:bodyPr wrap="square"/>
+                    <a:lstStyle/>
+                    <a:p>
+                      <a:r>
+                        <a:rPr sz="1300">
+                          <a:solidFill>
+                            <a:srgbClr val="1A1A1A"/>
+                          </a:solidFill>
+                          <a:latin typeface="Calibri"/>
+                        </a:rPr>
+                        <a:t>2.14</a:t>
+                      </a:r>
+                    </a:p>
+                  </a:txBody>
+                  <a:tcPr marL="73152" marR="73152" marT="36576" marB="36576">
+                    <a:solidFill>
+                      <a:srgbClr val="FFFFFF"/>
+                    </a:solidFill>
+                  </a:tcPr>
+                </a:tc>
+                <a:tc>
+                  <a:txBody>
+                    <a:bodyPr wrap="square"/>
+                    <a:lstStyle/>
+                    <a:p>
+                      <a:r>
+                        <a:rPr sz="1300">
+                          <a:solidFill>
+                            <a:srgbClr val="1A1A1A"/>
+                          </a:solidFill>
+                          <a:latin typeface="Calibri"/>
+                        </a:rPr>
+                        <a:t>9.61</a:t>
+                      </a:r>
+                    </a:p>
+                  </a:txBody>
+                  <a:tcPr marL="73152" marR="73152" marT="36576" marB="36576">
+                    <a:solidFill>
+                      <a:srgbClr val="FFFFFF"/>
+                    </a:solidFill>
+                  </a:tcPr>
+                </a:tc>
+                <a:tc>
+                  <a:txBody>
+                    <a:bodyPr wrap="square"/>
+                    <a:lstStyle/>
+                    <a:p>
+                      <a:r>
+                        <a:rPr sz="1300">
+                          <a:solidFill>
+                            <a:srgbClr val="1A1A1A"/>
+                          </a:solidFill>
+                          <a:latin typeface="Calibri"/>
+                        </a:rPr>
+                        <a:t>+7.47</a:t>
+                      </a:r>
+                    </a:p>
+                  </a:txBody>
+                  <a:tcPr marL="73152" marR="73152" marT="36576" marB="36576">
+                    <a:solidFill>
+                      <a:srgbClr val="FFFFFF"/>
+                    </a:solidFill>
+                  </a:tcPr>
+                </a:tc>
+              </a:tr>
+              <a:tr h="496388">
+                <a:tc>
+                  <a:txBody>
+                    <a:bodyPr wrap="square"/>
+                    <a:lstStyle/>
+                    <a:p>
+                      <a:r>
+                        <a:rPr sz="1300">
+                          <a:solidFill>
+                            <a:srgbClr val="1A1A1A"/>
+                          </a:solidFill>
+                          <a:latin typeface="Calibri"/>
+                        </a:rPr>
+                        <a:t>0.60</a:t>
+                      </a:r>
+                    </a:p>
+                  </a:txBody>
+                  <a:tcPr marL="73152" marR="73152" marT="36576" marB="36576">
+                    <a:solidFill>
+                      <a:srgbClr val="E8EEF5"/>
+                    </a:solidFill>
+                  </a:tcPr>
+                </a:tc>
+                <a:tc>
+                  <a:txBody>
+                    <a:bodyPr wrap="square"/>
+                    <a:lstStyle/>
+                    <a:p>
+                      <a:r>
+                        <a:rPr sz="1300">
+                          <a:solidFill>
+                            <a:srgbClr val="1A1A1A"/>
+                          </a:solidFill>
+                          <a:latin typeface="Calibri"/>
+                        </a:rPr>
+                        <a:t>0.30</a:t>
+                      </a:r>
+                    </a:p>
+                  </a:txBody>
+                  <a:tcPr marL="73152" marR="73152" marT="36576" marB="36576">
+                    <a:solidFill>
+                      <a:srgbClr val="E8EEF5"/>
+                    </a:solidFill>
+                  </a:tcPr>
+                </a:tc>
+                <a:tc>
+                  <a:txBody>
+                    <a:bodyPr wrap="square"/>
+                    <a:lstStyle/>
+                    <a:p>
+                      <a:r>
+                        <a:rPr sz="1300">
+                          <a:solidFill>
+                            <a:srgbClr val="1A1A1A"/>
+                          </a:solidFill>
+                          <a:latin typeface="Calibri"/>
+                        </a:rPr>
+                        <a:t>1.17</a:t>
+                      </a:r>
+                    </a:p>
+                  </a:txBody>
+                  <a:tcPr marL="73152" marR="73152" marT="36576" marB="36576">
+                    <a:solidFill>
+                      <a:srgbClr val="E8EEF5"/>
+                    </a:solidFill>
+                  </a:tcPr>
+                </a:tc>
+                <a:tc>
+                  <a:txBody>
+                    <a:bodyPr wrap="square"/>
+                    <a:lstStyle/>
+                    <a:p>
+                      <a:r>
+                        <a:rPr sz="1300">
+                          <a:solidFill>
+                            <a:srgbClr val="1A1A1A"/>
+                          </a:solidFill>
+                          <a:latin typeface="Calibri"/>
+                        </a:rPr>
+                        <a:t>5.90</a:t>
+                      </a:r>
+                    </a:p>
+                  </a:txBody>
+                  <a:tcPr marL="73152" marR="73152" marT="36576" marB="36576">
+                    <a:solidFill>
+                      <a:srgbClr val="E8EEF5"/>
+                    </a:solidFill>
+                  </a:tcPr>
+                </a:tc>
+                <a:tc>
+                  <a:txBody>
+                    <a:bodyPr wrap="square"/>
+                    <a:lstStyle/>
+                    <a:p>
+                      <a:r>
+                        <a:rPr sz="1300">
+                          <a:solidFill>
+                            <a:srgbClr val="1A1A1A"/>
+                          </a:solidFill>
+                          <a:latin typeface="Calibri"/>
+                        </a:rPr>
+                        <a:t>+4.72</a:t>
+                      </a:r>
+                    </a:p>
+                  </a:txBody>
+                  <a:tcPr marL="73152" marR="73152" marT="36576" marB="36576">
+                    <a:solidFill>
+                      <a:srgbClr val="E8EEF5"/>
+                    </a:solidFill>
+                  </a:tcPr>
+                </a:tc>
+              </a:tr>
+              <a:tr h="496388">
+                <a:tc>
+                  <a:txBody>
+                    <a:bodyPr wrap="square"/>
+                    <a:lstStyle/>
+                    <a:p>
+                      <a:r>
+                        <a:rPr sz="1300">
+                          <a:solidFill>
+                            <a:srgbClr val="1A1A1A"/>
+                          </a:solidFill>
+                          <a:latin typeface="Calibri"/>
+                        </a:rPr>
+                        <a:t>0.80</a:t>
+                      </a:r>
+                    </a:p>
+                  </a:txBody>
+                  <a:tcPr marL="73152" marR="73152" marT="36576" marB="36576">
+                    <a:solidFill>
+                      <a:srgbClr val="FFFFFF"/>
+                    </a:solidFill>
+                  </a:tcPr>
+                </a:tc>
+                <a:tc>
+                  <a:txBody>
+                    <a:bodyPr wrap="square"/>
+                    <a:lstStyle/>
+                    <a:p>
+                      <a:r>
+                        <a:rPr sz="1300">
+                          <a:solidFill>
+                            <a:srgbClr val="1A1A1A"/>
+                          </a:solidFill>
+                          <a:latin typeface="Calibri"/>
+                        </a:rPr>
+                        <a:t>0.40</a:t>
+                      </a:r>
+                    </a:p>
+                  </a:txBody>
+                  <a:tcPr marL="73152" marR="73152" marT="36576" marB="36576">
+                    <a:solidFill>
+                      <a:srgbClr val="FFFFFF"/>
+                    </a:solidFill>
+                  </a:tcPr>
+                </a:tc>
+                <a:tc>
+                  <a:txBody>
+                    <a:bodyPr wrap="square"/>
+                    <a:lstStyle/>
+                    <a:p>
+                      <a:r>
+                        <a:rPr sz="1300">
+                          <a:solidFill>
+                            <a:srgbClr val="1A1A1A"/>
+                          </a:solidFill>
+                          <a:latin typeface="Calibri"/>
+                        </a:rPr>
+                        <a:t>0.12</a:t>
+                      </a:r>
+                    </a:p>
+                  </a:txBody>
+                  <a:tcPr marL="73152" marR="73152" marT="36576" marB="36576">
+                    <a:solidFill>
+                      <a:srgbClr val="FFFFFF"/>
+                    </a:solidFill>
+                  </a:tcPr>
+                </a:tc>
+                <a:tc>
+                  <a:txBody>
+                    <a:bodyPr wrap="square"/>
+                    <a:lstStyle/>
+                    <a:p>
+                      <a:r>
+                        <a:rPr sz="1300">
+                          <a:solidFill>
+                            <a:srgbClr val="1A1A1A"/>
+                          </a:solidFill>
+                          <a:latin typeface="Calibri"/>
+                        </a:rPr>
+                        <a:t>3.26</a:t>
+                      </a:r>
+                    </a:p>
+                  </a:txBody>
+                  <a:tcPr marL="73152" marR="73152" marT="36576" marB="36576">
+                    <a:solidFill>
+                      <a:srgbClr val="FFFFFF"/>
+                    </a:solidFill>
+                  </a:tcPr>
+                </a:tc>
+                <a:tc>
+                  <a:txBody>
+                    <a:bodyPr wrap="square"/>
+                    <a:lstStyle/>
+                    <a:p>
+                      <a:r>
+                        <a:rPr sz="1300">
+                          <a:solidFill>
+                            <a:srgbClr val="1A1A1A"/>
+                          </a:solidFill>
+                          <a:latin typeface="Calibri"/>
+                        </a:rPr>
+                        <a:t>+3.14</a:t>
+                      </a:r>
+                    </a:p>
+                  </a:txBody>
+                  <a:tcPr marL="73152" marR="73152" marT="36576" marB="36576">
+                    <a:solidFill>
+                      <a:srgbClr val="FFFFFF"/>
+                    </a:solidFill>
+                  </a:tcPr>
+                </a:tc>
+              </a:tr>
+              <a:tr h="496392">
+                <a:tc>
+                  <a:txBody>
+                    <a:bodyPr wrap="square"/>
+                    <a:lstStyle/>
+                    <a:p>
+                      <a:r>
+                        <a:rPr sz="1300">
+                          <a:solidFill>
+                            <a:srgbClr val="1A1A1A"/>
+                          </a:solidFill>
+                          <a:latin typeface="Calibri"/>
+                        </a:rPr>
+                        <a:t>1.00</a:t>
+                      </a:r>
+                    </a:p>
+                  </a:txBody>
+                  <a:tcPr marL="73152" marR="73152" marT="36576" marB="36576">
+                    <a:solidFill>
+                      <a:srgbClr val="E8EEF5"/>
+                    </a:solidFill>
+                  </a:tcPr>
+                </a:tc>
+                <a:tc>
+                  <a:txBody>
+                    <a:bodyPr wrap="square"/>
+                    <a:lstStyle/>
+                    <a:p>
+                      <a:r>
+                        <a:rPr sz="1300">
+                          <a:solidFill>
+                            <a:srgbClr val="1A1A1A"/>
+                          </a:solidFill>
+                          <a:latin typeface="Calibri"/>
+                        </a:rPr>
+                        <a:t>0.50</a:t>
+                      </a:r>
+                    </a:p>
+                  </a:txBody>
+                  <a:tcPr marL="73152" marR="73152" marT="36576" marB="36576">
+                    <a:solidFill>
+                      <a:srgbClr val="E8EEF5"/>
+                    </a:solidFill>
+                  </a:tcPr>
+                </a:tc>
+                <a:tc>
+                  <a:txBody>
+                    <a:bodyPr wrap="square"/>
+                    <a:lstStyle/>
+                    <a:p>
+                      <a:r>
+                        <a:rPr sz="1300">
+                          <a:solidFill>
+                            <a:srgbClr val="1A1A1A"/>
+                          </a:solidFill>
+                          <a:latin typeface="Calibri"/>
+                        </a:rPr>
+                        <a:t>-0.93</a:t>
+                      </a:r>
+                    </a:p>
+                  </a:txBody>
+                  <a:tcPr marL="73152" marR="73152" marT="36576" marB="36576">
+                    <a:solidFill>
+                      <a:srgbClr val="E8EEF5"/>
+                    </a:solidFill>
+                  </a:tcPr>
+                </a:tc>
+                <a:tc>
+                  <a:txBody>
+                    <a:bodyPr wrap="square"/>
+                    <a:lstStyle/>
+                    <a:p>
+                      <a:r>
+                        <a:rPr sz="1300">
+                          <a:solidFill>
+                            <a:srgbClr val="1A1A1A"/>
+                          </a:solidFill>
+                          <a:latin typeface="Calibri"/>
+                        </a:rPr>
+                        <a:t>1.37</a:t>
+                      </a:r>
+                    </a:p>
+                  </a:txBody>
+                  <a:tcPr marL="73152" marR="73152" marT="36576" marB="36576">
+                    <a:solidFill>
+                      <a:srgbClr val="E8EEF5"/>
+                    </a:solidFill>
+                  </a:tcPr>
+                </a:tc>
+                <a:tc>
+                  <a:txBody>
+                    <a:bodyPr wrap="square"/>
+                    <a:lstStyle/>
+                    <a:p>
+                      <a:r>
+                        <a:rPr sz="1300">
+                          <a:solidFill>
+                            <a:srgbClr val="1A1A1A"/>
+                          </a:solidFill>
+                          <a:latin typeface="Calibri"/>
+                        </a:rPr>
+                        <a:t>+2.30</a:t>
+                      </a:r>
+                    </a:p>
+                  </a:txBody>
+                  <a:tcPr marL="73152" marR="73152" marT="36576" marB="36576">
+                    <a:solidFill>
+                      <a:srgbClr val="E8EEF5"/>
+                    </a:solidFill>
+                  </a:tcPr>
+                </a:tc>
+              </a:tr>
+            </a:tbl>
+          </a:graphicData>
+        </a:graphic>
+      </p:graphicFrame>
+      <p:sp>
+        <p:nvSpPr>
+          <p:cNvPr id="7" name="TextBox 6"/>
           <p:cNvSpPr txBox="1"/>
           <p:nvPr/>
         </p:nvSpPr>
         <p:spPr>
           <a:xfrm>
-            <a:off x="914400" y="731520"/>
-            <a:ext cx="10515600" cy="914400"/>
+            <a:off x="777240" y="5486400"/>
+            <a:ext cx="10607040" cy="914400"/>
           </a:xfrm>
           <a:prstGeom prst="rect">
             <a:avLst/>
@@ -6607,79 +7628,63 @@
           <a:noFill/>
         </p:spPr>
         <p:txBody>
-          <a:bodyPr wrap="square" lIns="45720" tIns="27432" rIns="45720" bIns="27432">
+          <a:bodyPr wrap="square" lIns="45720" rIns="45720" tIns="27432" bIns="27432">
             <a:spAutoFit/>
           </a:bodyPr>
           <a:lstStyle/>
           <a:p>
             <a:pPr algn="l"/>
             <a:r>
-              <a:rPr sz="3800" b="1" i="0">
-                <a:solidFill>
-                  <a:srgbClr val="F2F4F8"/>
-                </a:solidFill>
-                <a:latin typeface="Calibri"/>
-              </a:rPr>
-              <a:t>Key Takeaway</a:t>
-            </a:r>
-          </a:p>
-        </p:txBody>
-      </p:sp>
-      <p:sp>
-        <p:nvSpPr>
-          <p:cNvPr id="5" name="TextBox 4"/>
-          <p:cNvSpPr txBox="1"/>
-          <p:nvPr/>
-        </p:nvSpPr>
-        <p:spPr>
-          <a:xfrm>
-            <a:off x="914400" y="1645920"/>
-            <a:ext cx="10515600" cy="548640"/>
-          </a:xfrm>
-          <a:prstGeom prst="rect">
-            <a:avLst/>
-          </a:prstGeom>
-          <a:noFill/>
-        </p:spPr>
-        <p:txBody>
-          <a:bodyPr wrap="square" lIns="45720" tIns="27432" rIns="45720" bIns="27432">
-            <a:spAutoFit/>
-          </a:bodyPr>
-          <a:lstStyle/>
-          <a:p>
-            <a:pPr algn="l"/>
-            <a:r>
-              <a:rPr sz="1800" b="0" i="0">
-                <a:solidFill>
-                  <a:srgbClr val="CADCFC"/>
-                </a:solidFill>
-                <a:latin typeface="Calibri"/>
-              </a:rPr>
-              <a:t>Three DSP-anchored hyperparameters define the design</a:t>
-            </a:r>
-          </a:p>
-        </p:txBody>
-      </p:sp>
-      <p:sp>
-        <p:nvSpPr>
-          <p:cNvPr id="6" name="Rounded Rectangle 5"/>
+              <a:rPr sz="1400" b="0" i="0">
+                <a:solidFill>
+                  <a:srgbClr val="555F6D"/>
+                </a:solidFill>
+                <a:latin typeface="Calibri"/>
+              </a:rPr>
+              <a:t>Gain collapses out-of-distribution. Two effects: harder physical task + train/test mismatch.</a:t>
+            </a:r>
+          </a:p>
+        </p:txBody>
+      </p:sp>
+    </p:spTree>
+  </p:cSld>
+  <p:clrMapOvr>
+    <a:masterClrMapping/>
+  </p:clrMapOvr>
+</p:sld>
+</file>
+
+<file path=ppt/slides/slide17.xml><?xml version="1.0" encoding="utf-8"?>
+<p:sld xmlns:a="http://schemas.openxmlformats.org/drawingml/2006/main" xmlns:p="http://schemas.openxmlformats.org/presentationml/2006/main" xmlns:r="http://schemas.openxmlformats.org/officeDocument/2006/relationships">
+  <p:cSld>
+    <p:spTree>
+      <p:nvGrpSpPr>
+        <p:cNvPr id="1" name=""/>
+        <p:cNvGrpSpPr/>
+        <p:nvPr/>
+      </p:nvGrpSpPr>
+      <p:grpSpPr/>
+      <p:sp>
+        <p:nvSpPr>
+          <p:cNvPr id="2" name="Rectangle 1"/>
           <p:cNvSpPr/>
           <p:nvPr/>
         </p:nvSpPr>
         <p:spPr>
           <a:xfrm>
-            <a:off x="914400" y="2834640"/>
-            <a:ext cx="10332720" cy="822960"/>
-          </a:xfrm>
-          <a:prstGeom prst="roundRect">
+            <a:off x="0" y="0"/>
+            <a:ext cx="12191695" cy="6858000"/>
+          </a:xfrm>
+          <a:prstGeom prst="rect">
             <a:avLst/>
           </a:prstGeom>
           <a:solidFill>
-            <a:srgbClr val="065A82"/>
+            <a:srgbClr val="F2F4F8"/>
           </a:solidFill>
           <a:ln>
             <a:noFill/>
           </a:ln>
+          <a:effectLst/>
         </p:spPr>
         <p:style>
           <a:lnRef idx="1">
@@ -6700,20 +7705,19 @@
           <a:lstStyle/>
           <a:p>
             <a:pPr algn="ctr"/>
-            <a:endParaRPr/>
-          </a:p>
-        </p:txBody>
-      </p:sp>
-      <p:sp>
-        <p:nvSpPr>
-          <p:cNvPr id="7" name="TextBox 6"/>
+          </a:p>
+        </p:txBody>
+      </p:sp>
+      <p:sp>
+        <p:nvSpPr>
+          <p:cNvPr id="3" name="TextBox 2"/>
           <p:cNvSpPr txBox="1"/>
           <p:nvPr/>
         </p:nvSpPr>
         <p:spPr>
           <a:xfrm>
-            <a:off x="1188720" y="3017520"/>
-            <a:ext cx="3200400" cy="457200"/>
+            <a:off x="548640" y="320040"/>
+            <a:ext cx="10972800" cy="731520"/>
           </a:xfrm>
           <a:prstGeom prst="rect">
             <a:avLst/>
@@ -6721,34 +7725,34 @@
           <a:noFill/>
         </p:spPr>
         <p:txBody>
-          <a:bodyPr wrap="square" lIns="45720" tIns="27432" rIns="45720" bIns="27432">
+          <a:bodyPr wrap="square" lIns="45720" rIns="45720" tIns="27432" bIns="27432">
             <a:spAutoFit/>
           </a:bodyPr>
           <a:lstStyle/>
           <a:p>
             <a:pPr algn="l"/>
             <a:r>
-              <a:rPr sz="2000" b="1" i="0">
-                <a:solidFill>
-                  <a:srgbClr val="F5A623"/>
-                </a:solidFill>
-                <a:latin typeface="Calibri"/>
-              </a:rPr>
-              <a:t>n_heads</a:t>
-            </a:r>
-          </a:p>
-        </p:txBody>
-      </p:sp>
-      <p:sp>
-        <p:nvSpPr>
-          <p:cNvPr id="8" name="TextBox 7"/>
+              <a:rPr sz="3000" b="1" i="0">
+                <a:solidFill>
+                  <a:srgbClr val="065A82"/>
+                </a:solidFill>
+                <a:latin typeface="Calibri"/>
+              </a:rPr>
+              <a:t>Tweaking for Low SNR</a:t>
+            </a:r>
+          </a:p>
+        </p:txBody>
+      </p:sp>
+      <p:sp>
+        <p:nvSpPr>
+          <p:cNvPr id="4" name="TextBox 3"/>
           <p:cNvSpPr txBox="1"/>
           <p:nvPr/>
         </p:nvSpPr>
         <p:spPr>
           <a:xfrm>
-            <a:off x="4572000" y="3017520"/>
-            <a:ext cx="6400800" cy="457200"/>
+            <a:off x="548640" y="960120"/>
+            <a:ext cx="10972800" cy="365760"/>
           </a:xfrm>
           <a:prstGeom prst="rect">
             <a:avLst/>
@@ -6756,40 +7760,40 @@
           <a:noFill/>
         </p:spPr>
         <p:txBody>
-          <a:bodyPr wrap="square" lIns="45720" tIns="27432" rIns="45720" bIns="27432">
+          <a:bodyPr wrap="square" lIns="45720" rIns="45720" tIns="27432" bIns="27432">
             <a:spAutoFit/>
           </a:bodyPr>
           <a:lstStyle/>
           <a:p>
             <a:pPr algn="l"/>
             <a:r>
-              <a:rPr sz="2000" b="0" i="0">
-                <a:solidFill>
-                  <a:srgbClr val="F2F4F8"/>
-                </a:solidFill>
-                <a:latin typeface="Calibri"/>
-              </a:rPr>
-              <a:t>≈  effective AR order</a:t>
-            </a:r>
-          </a:p>
-        </p:txBody>
-      </p:sp>
-      <p:sp>
-        <p:nvSpPr>
-          <p:cNvPr id="9" name="Rounded Rectangle 8"/>
+              <a:rPr sz="1400" b="0" i="0">
+                <a:solidFill>
+                  <a:srgbClr val="555F6D"/>
+                </a:solidFill>
+                <a:latin typeface="Calibri"/>
+              </a:rPr>
+              <a:t>Retrain at hard noise (input SNR ≈ 0 dB)</a:t>
+            </a:r>
+          </a:p>
+        </p:txBody>
+      </p:sp>
+      <p:sp>
+        <p:nvSpPr>
+          <p:cNvPr id="5" name="Rectangle 4"/>
           <p:cNvSpPr/>
           <p:nvPr/>
         </p:nvSpPr>
         <p:spPr>
           <a:xfrm>
-            <a:off x="914400" y="3794760"/>
-            <a:ext cx="10332720" cy="822960"/>
-          </a:xfrm>
-          <a:prstGeom prst="roundRect">
+            <a:off x="548640" y="1508760"/>
+            <a:ext cx="109728" cy="548640"/>
+          </a:xfrm>
+          <a:prstGeom prst="rect">
             <a:avLst/>
           </a:prstGeom>
           <a:solidFill>
-            <a:srgbClr val="065A82"/>
+            <a:srgbClr val="F5A623"/>
           </a:solidFill>
           <a:ln>
             <a:noFill/>
@@ -6814,20 +7818,407 @@
           <a:lstStyle/>
           <a:p>
             <a:pPr algn="ctr"/>
-            <a:endParaRPr/>
-          </a:p>
-        </p:txBody>
-      </p:sp>
-      <p:sp>
-        <p:nvSpPr>
-          <p:cNvPr id="10" name="TextBox 9"/>
+          </a:p>
+        </p:txBody>
+      </p:sp>
+      <p:graphicFrame>
+        <p:nvGraphicFramePr>
+          <p:cNvPr id="6" name="Table 5"/>
+          <p:cNvGraphicFramePr>
+            <a:graphicFrameLocks noGrp="1"/>
+          </p:cNvGraphicFramePr>
+          <p:nvPr/>
+        </p:nvGraphicFramePr>
+        <p:xfrm>
+          <a:off x="777240" y="1783080"/>
+          <a:ext cx="10607040" cy="2194560"/>
+        </p:xfrm>
+        <a:graphic>
+          <a:graphicData uri="http://schemas.openxmlformats.org/drawingml/2006/table">
+            <a:tbl>
+              <a:tblPr firstRow="1" bandRow="1">
+                <a:tableStyleId>{5C22544A-7EE6-4342-B048-85BDC9FD1C3A}</a:tableStyleId>
+              </a:tblPr>
+              <a:tblGrid>
+                <a:gridCol w="3093720"/>
+                <a:gridCol w="3977640"/>
+                <a:gridCol w="1325880"/>
+                <a:gridCol w="2209800"/>
+              </a:tblGrid>
+              <a:tr h="548640">
+                <a:tc>
+                  <a:txBody>
+                    <a:bodyPr wrap="square"/>
+                    <a:lstStyle/>
+                    <a:p>
+                      <a:r>
+                        <a:rPr sz="1300" b="1">
+                          <a:solidFill>
+                            <a:srgbClr val="F2F4F8"/>
+                          </a:solidFill>
+                          <a:latin typeface="Calibri"/>
+                        </a:rPr>
+                        <a:t>Scenario</a:t>
+                      </a:r>
+                    </a:p>
+                  </a:txBody>
+                  <a:tcPr marL="73152" marR="73152" marT="36576" marB="36576">
+                    <a:solidFill>
+                      <a:srgbClr val="065A82"/>
+                    </a:solidFill>
+                  </a:tcPr>
+                </a:tc>
+                <a:tc>
+                  <a:txBody>
+                    <a:bodyPr wrap="square"/>
+                    <a:lstStyle/>
+                    <a:p>
+                      <a:r>
+                        <a:rPr sz="1300" b="1">
+                          <a:solidFill>
+                            <a:srgbClr val="F2F4F8"/>
+                          </a:solidFill>
+                          <a:latin typeface="Calibri"/>
+                        </a:rPr>
+                        <a:t>Arch (ctx / emb / heads / layers)</a:t>
+                      </a:r>
+                    </a:p>
+                  </a:txBody>
+                  <a:tcPr marL="73152" marR="73152" marT="36576" marB="36576">
+                    <a:solidFill>
+                      <a:srgbClr val="065A82"/>
+                    </a:solidFill>
+                  </a:tcPr>
+                </a:tc>
+                <a:tc>
+                  <a:txBody>
+                    <a:bodyPr wrap="square"/>
+                    <a:lstStyle/>
+                    <a:p>
+                      <a:r>
+                        <a:rPr sz="1300" b="1">
+                          <a:solidFill>
+                            <a:srgbClr val="F2F4F8"/>
+                          </a:solidFill>
+                          <a:latin typeface="Calibri"/>
+                        </a:rPr>
+                        <a:t>Params</a:t>
+                      </a:r>
+                    </a:p>
+                  </a:txBody>
+                  <a:tcPr marL="73152" marR="73152" marT="36576" marB="36576">
+                    <a:solidFill>
+                      <a:srgbClr val="065A82"/>
+                    </a:solidFill>
+                  </a:tcPr>
+                </a:tc>
+                <a:tc>
+                  <a:txBody>
+                    <a:bodyPr wrap="square"/>
+                    <a:lstStyle/>
+                    <a:p>
+                      <a:r>
+                        <a:rPr sz="1300" b="1">
+                          <a:solidFill>
+                            <a:srgbClr val="F2F4F8"/>
+                          </a:solidFill>
+                          <a:latin typeface="Calibri"/>
+                        </a:rPr>
+                        <a:t>Gain (dB)</a:t>
+                      </a:r>
+                    </a:p>
+                  </a:txBody>
+                  <a:tcPr marL="73152" marR="73152" marT="36576" marB="36576">
+                    <a:solidFill>
+                      <a:srgbClr val="065A82"/>
+                    </a:solidFill>
+                  </a:tcPr>
+                </a:tc>
+              </a:tr>
+              <a:tr h="548640">
+                <a:tc>
+                  <a:txBody>
+                    <a:bodyPr wrap="square"/>
+                    <a:lstStyle/>
+                    <a:p>
+                      <a:r>
+                        <a:rPr sz="1300">
+                          <a:solidFill>
+                            <a:srgbClr val="1A1A1A"/>
+                          </a:solidFill>
+                          <a:latin typeface="Calibri"/>
+                        </a:rPr>
+                        <a:t>Original (no retrain)</a:t>
+                      </a:r>
+                    </a:p>
+                  </a:txBody>
+                  <a:tcPr marL="73152" marR="73152" marT="36576" marB="36576">
+                    <a:solidFill>
+                      <a:srgbClr val="FFFFFF"/>
+                    </a:solidFill>
+                  </a:tcPr>
+                </a:tc>
+                <a:tc>
+                  <a:txBody>
+                    <a:bodyPr wrap="square"/>
+                    <a:lstStyle/>
+                    <a:p>
+                      <a:r>
+                        <a:rPr sz="1300">
+                          <a:solidFill>
+                            <a:srgbClr val="1A1A1A"/>
+                          </a:solidFill>
+                          <a:latin typeface="Calibri"/>
+                        </a:rPr>
+                        <a:t>128 / 32 / 2 / 2</a:t>
+                      </a:r>
+                    </a:p>
+                  </a:txBody>
+                  <a:tcPr marL="73152" marR="73152" marT="36576" marB="36576">
+                    <a:solidFill>
+                      <a:srgbClr val="FFFFFF"/>
+                    </a:solidFill>
+                  </a:tcPr>
+                </a:tc>
+                <a:tc>
+                  <a:txBody>
+                    <a:bodyPr wrap="square"/>
+                    <a:lstStyle/>
+                    <a:p>
+                      <a:r>
+                        <a:rPr sz="1300">
+                          <a:solidFill>
+                            <a:srgbClr val="1A1A1A"/>
+                          </a:solidFill>
+                          <a:latin typeface="Calibri"/>
+                        </a:rPr>
+                        <a:t>29 K</a:t>
+                      </a:r>
+                    </a:p>
+                  </a:txBody>
+                  <a:tcPr marL="73152" marR="73152" marT="36576" marB="36576">
+                    <a:solidFill>
+                      <a:srgbClr val="FFFFFF"/>
+                    </a:solidFill>
+                  </a:tcPr>
+                </a:tc>
+                <a:tc>
+                  <a:txBody>
+                    <a:bodyPr wrap="square"/>
+                    <a:lstStyle/>
+                    <a:p>
+                      <a:r>
+                        <a:rPr sz="1300">
+                          <a:solidFill>
+                            <a:srgbClr val="1A1A1A"/>
+                          </a:solidFill>
+                          <a:latin typeface="Calibri"/>
+                        </a:rPr>
+                        <a:t>+3.14</a:t>
+                      </a:r>
+                    </a:p>
+                  </a:txBody>
+                  <a:tcPr marL="73152" marR="73152" marT="36576" marB="36576">
+                    <a:solidFill>
+                      <a:srgbClr val="FFFFFF"/>
+                    </a:solidFill>
+                  </a:tcPr>
+                </a:tc>
+              </a:tr>
+              <a:tr h="548640">
+                <a:tc>
+                  <a:txBody>
+                    <a:bodyPr wrap="square"/>
+                    <a:lstStyle/>
+                    <a:p>
+                      <a:r>
+                        <a:rPr sz="1300">
+                          <a:solidFill>
+                            <a:srgbClr val="1A1A1A"/>
+                          </a:solidFill>
+                          <a:latin typeface="Calibri"/>
+                        </a:rPr>
+                        <a:t>Same arch, retrained</a:t>
+                      </a:r>
+                    </a:p>
+                  </a:txBody>
+                  <a:tcPr marL="73152" marR="73152" marT="36576" marB="36576">
+                    <a:solidFill>
+                      <a:srgbClr val="E8EEF5"/>
+                    </a:solidFill>
+                  </a:tcPr>
+                </a:tc>
+                <a:tc>
+                  <a:txBody>
+                    <a:bodyPr wrap="square"/>
+                    <a:lstStyle/>
+                    <a:p>
+                      <a:r>
+                        <a:rPr sz="1300">
+                          <a:solidFill>
+                            <a:srgbClr val="1A1A1A"/>
+                          </a:solidFill>
+                          <a:latin typeface="Calibri"/>
+                        </a:rPr>
+                        <a:t>128 / 32 / 2 / 2</a:t>
+                      </a:r>
+                    </a:p>
+                  </a:txBody>
+                  <a:tcPr marL="73152" marR="73152" marT="36576" marB="36576">
+                    <a:solidFill>
+                      <a:srgbClr val="E8EEF5"/>
+                    </a:solidFill>
+                  </a:tcPr>
+                </a:tc>
+                <a:tc>
+                  <a:txBody>
+                    <a:bodyPr wrap="square"/>
+                    <a:lstStyle/>
+                    <a:p>
+                      <a:r>
+                        <a:rPr sz="1300">
+                          <a:solidFill>
+                            <a:srgbClr val="1A1A1A"/>
+                          </a:solidFill>
+                          <a:latin typeface="Calibri"/>
+                        </a:rPr>
+                        <a:t>29 K</a:t>
+                      </a:r>
+                    </a:p>
+                  </a:txBody>
+                  <a:tcPr marL="73152" marR="73152" marT="36576" marB="36576">
+                    <a:solidFill>
+                      <a:srgbClr val="E8EEF5"/>
+                    </a:solidFill>
+                  </a:tcPr>
+                </a:tc>
+                <a:tc>
+                  <a:txBody>
+                    <a:bodyPr wrap="square"/>
+                    <a:lstStyle/>
+                    <a:p>
+                      <a:r>
+                        <a:rPr sz="1300">
+                          <a:solidFill>
+                            <a:srgbClr val="1A1A1A"/>
+                          </a:solidFill>
+                          <a:latin typeface="Calibri"/>
+                        </a:rPr>
+                        <a:t>+3.69</a:t>
+                      </a:r>
+                    </a:p>
+                  </a:txBody>
+                  <a:tcPr marL="73152" marR="73152" marT="36576" marB="36576">
+                    <a:solidFill>
+                      <a:srgbClr val="E8EEF5"/>
+                    </a:solidFill>
+                  </a:tcPr>
+                </a:tc>
+              </a:tr>
+              <a:tr h="548640">
+                <a:tc>
+                  <a:txBody>
+                    <a:bodyPr wrap="square"/>
+                    <a:lstStyle/>
+                    <a:p>
+                      <a:r>
+                        <a:rPr sz="1300">
+                          <a:solidFill>
+                            <a:srgbClr val="1A1A1A"/>
+                          </a:solidFill>
+                          <a:latin typeface="Calibri"/>
+                        </a:rPr>
+                        <a:t>Scaled arch, retrained</a:t>
+                      </a:r>
+                    </a:p>
+                  </a:txBody>
+                  <a:tcPr marL="73152" marR="73152" marT="36576" marB="36576">
+                    <a:solidFill>
+                      <a:srgbClr val="FFFFFF"/>
+                    </a:solidFill>
+                  </a:tcPr>
+                </a:tc>
+                <a:tc>
+                  <a:txBody>
+                    <a:bodyPr wrap="square"/>
+                    <a:lstStyle/>
+                    <a:p>
+                      <a:r>
+                        <a:rPr sz="1300">
+                          <a:solidFill>
+                            <a:srgbClr val="1A1A1A"/>
+                          </a:solidFill>
+                          <a:latin typeface="Calibri"/>
+                        </a:rPr>
+                        <a:t>256 / 72 / 4 / 3</a:t>
+                      </a:r>
+                    </a:p>
+                  </a:txBody>
+                  <a:tcPr marL="73152" marR="73152" marT="36576" marB="36576">
+                    <a:solidFill>
+                      <a:srgbClr val="FFFFFF"/>
+                    </a:solidFill>
+                  </a:tcPr>
+                </a:tc>
+                <a:tc>
+                  <a:txBody>
+                    <a:bodyPr wrap="square"/>
+                    <a:lstStyle/>
+                    <a:p>
+                      <a:r>
+                        <a:rPr sz="1300">
+                          <a:solidFill>
+                            <a:srgbClr val="1A1A1A"/>
+                          </a:solidFill>
+                          <a:latin typeface="Calibri"/>
+                        </a:rPr>
+                        <a:t>208 K</a:t>
+                      </a:r>
+                    </a:p>
+                  </a:txBody>
+                  <a:tcPr marL="73152" marR="73152" marT="36576" marB="36576">
+                    <a:solidFill>
+                      <a:srgbClr val="FFFFFF"/>
+                    </a:solidFill>
+                  </a:tcPr>
+                </a:tc>
+                <a:tc>
+                  <a:txBody>
+                    <a:bodyPr wrap="square"/>
+                    <a:lstStyle/>
+                    <a:p>
+                      <a:r>
+                        <a:rPr sz="1300">
+                          <a:solidFill>
+                            <a:srgbClr val="1A1A1A"/>
+                          </a:solidFill>
+                          <a:latin typeface="Calibri"/>
+                        </a:rPr>
+                        <a:t>+6.00</a:t>
+                      </a:r>
+                    </a:p>
+                  </a:txBody>
+                  <a:tcPr marL="73152" marR="73152" marT="36576" marB="36576">
+                    <a:solidFill>
+                      <a:srgbClr val="FFFFFF"/>
+                    </a:solidFill>
+                  </a:tcPr>
+                </a:tc>
+              </a:tr>
+            </a:tbl>
+          </a:graphicData>
+        </a:graphic>
+      </p:graphicFrame>
+      <p:sp>
+        <p:nvSpPr>
+          <p:cNvPr id="7" name="TextBox 6"/>
           <p:cNvSpPr txBox="1"/>
           <p:nvPr/>
         </p:nvSpPr>
         <p:spPr>
           <a:xfrm>
-            <a:off x="1188720" y="3977640"/>
-            <a:ext cx="3200400" cy="457200"/>
+            <a:off x="777240" y="4114800"/>
+            <a:ext cx="10607040" cy="457200"/>
           </a:xfrm>
           <a:prstGeom prst="rect">
             <a:avLst/>
@@ -6835,34 +8226,34 @@
           <a:noFill/>
         </p:spPr>
         <p:txBody>
-          <a:bodyPr wrap="square" lIns="45720" tIns="27432" rIns="45720" bIns="27432">
+          <a:bodyPr wrap="square" lIns="45720" rIns="45720" tIns="27432" bIns="27432">
             <a:spAutoFit/>
           </a:bodyPr>
           <a:lstStyle/>
           <a:p>
             <a:pPr algn="l"/>
             <a:r>
-              <a:rPr sz="2000" b="1" i="0">
-                <a:solidFill>
-                  <a:srgbClr val="F5A623"/>
-                </a:solidFill>
-                <a:latin typeface="Calibri"/>
-              </a:rPr>
-              <a:t>context_length</a:t>
-            </a:r>
-          </a:p>
-        </p:txBody>
-      </p:sp>
-      <p:sp>
-        <p:nvSpPr>
-          <p:cNvPr id="11" name="TextBox 10"/>
+              <a:rPr sz="1800" b="1" i="0">
+                <a:solidFill>
+                  <a:srgbClr val="1C7293"/>
+                </a:solidFill>
+                <a:latin typeface="Calibri"/>
+              </a:rPr>
+              <a:t>DSP-grounded tuning rules at low SNR</a:t>
+            </a:r>
+          </a:p>
+        </p:txBody>
+      </p:sp>
+      <p:sp>
+        <p:nvSpPr>
+          <p:cNvPr id="8" name="TextBox 7"/>
           <p:cNvSpPr txBox="1"/>
           <p:nvPr/>
         </p:nvSpPr>
         <p:spPr>
           <a:xfrm>
-            <a:off x="4572000" y="3977640"/>
-            <a:ext cx="6400800" cy="457200"/>
+            <a:off x="777240" y="4572000"/>
+            <a:ext cx="10607040" cy="2103120"/>
           </a:xfrm>
           <a:prstGeom prst="rect">
             <a:avLst/>
@@ -6870,44 +8261,111 @@
           <a:noFill/>
         </p:spPr>
         <p:txBody>
-          <a:bodyPr wrap="square" lIns="45720" tIns="27432" rIns="45720" bIns="27432">
+          <a:bodyPr wrap="square" lIns="45720" rIns="45720" tIns="27432" bIns="27432">
             <a:spAutoFit/>
           </a:bodyPr>
           <a:lstStyle/>
           <a:p>
             <a:pPr algn="l"/>
             <a:r>
-              <a:rPr sz="2000" b="0" i="0">
-                <a:solidFill>
-                  <a:srgbClr val="F2F4F8"/>
-                </a:solidFill>
-                <a:latin typeface="Calibri"/>
-              </a:rPr>
-              <a:t>≈  N_FFT  ≈  fs / f_min</a:t>
-            </a:r>
-          </a:p>
-        </p:txBody>
-      </p:sp>
-      <p:sp>
-        <p:nvSpPr>
-          <p:cNvPr id="12" name="Rounded Rectangle 11"/>
+              <a:rPr sz="1400" b="0" i="0">
+                <a:solidFill>
+                  <a:srgbClr val="1A1A1A"/>
+                </a:solidFill>
+                <a:latin typeface="Calibri"/>
+              </a:rPr>
+              <a:t>• context_length ↑   — extra √k noise averaging</a:t>
+            </a:r>
+          </a:p>
+          <a:p>
+            <a:pPr algn="l"/>
+            <a:r>
+              <a:rPr sz="1400" b="0" i="0">
+                <a:solidFill>
+                  <a:srgbClr val="1A1A1A"/>
+                </a:solidFill>
+                <a:latin typeface="Calibri"/>
+              </a:rPr>
+              <a:t>• n_heads ↑              — add smoothing/MA heads beyond AR taps</a:t>
+            </a:r>
+          </a:p>
+          <a:p>
+            <a:pPr algn="l"/>
+            <a:r>
+              <a:rPr sz="1400" b="0" i="0">
+                <a:solidFill>
+                  <a:srgbClr val="1A1A1A"/>
+                </a:solidFill>
+                <a:latin typeface="Calibri"/>
+              </a:rPr>
+              <a:t>• n_layers ↑              — depth for iterative denoising refinement</a:t>
+            </a:r>
+          </a:p>
+          <a:p>
+            <a:pPr algn="l"/>
+            <a:r>
+              <a:rPr sz="1400" b="0" i="0">
+                <a:solidFill>
+                  <a:srgbClr val="1A1A1A"/>
+                </a:solidFill>
+                <a:latin typeface="Calibri"/>
+              </a:rPr>
+              <a:t>• head_dim follows 2·log₂(context_length); emb_dim falls out</a:t>
+            </a:r>
+          </a:p>
+          <a:p>
+            <a:pPr algn="l"/>
+            <a:r>
+              <a:rPr sz="1400" b="0" i="0">
+                <a:solidFill>
+                  <a:srgbClr val="1A1A1A"/>
+                </a:solidFill>
+                <a:latin typeface="Calibri"/>
+              </a:rPr>
+              <a:t>• Match training noise to deployment noise; use mixed-σ curriculum</a:t>
+            </a:r>
+          </a:p>
+        </p:txBody>
+      </p:sp>
+    </p:spTree>
+  </p:cSld>
+  <p:clrMapOvr>
+    <a:masterClrMapping/>
+  </p:clrMapOvr>
+</p:sld>
+</file>
+
+<file path=ppt/slides/slide18.xml><?xml version="1.0" encoding="utf-8"?>
+<p:sld xmlns:a="http://schemas.openxmlformats.org/drawingml/2006/main" xmlns:p="http://schemas.openxmlformats.org/presentationml/2006/main" xmlns:r="http://schemas.openxmlformats.org/officeDocument/2006/relationships">
+  <p:cSld>
+    <p:spTree>
+      <p:nvGrpSpPr>
+        <p:cNvPr id="1" name=""/>
+        <p:cNvGrpSpPr/>
+        <p:nvPr/>
+      </p:nvGrpSpPr>
+      <p:grpSpPr/>
+      <p:sp>
+        <p:nvSpPr>
+          <p:cNvPr id="2" name="Rectangle 1"/>
           <p:cNvSpPr/>
           <p:nvPr/>
         </p:nvSpPr>
         <p:spPr>
           <a:xfrm>
-            <a:off x="914400" y="4754880"/>
-            <a:ext cx="10332720" cy="822960"/>
-          </a:xfrm>
-          <a:prstGeom prst="roundRect">
+            <a:off x="0" y="0"/>
+            <a:ext cx="12191695" cy="6858000"/>
+          </a:xfrm>
+          <a:prstGeom prst="rect">
             <a:avLst/>
           </a:prstGeom>
           <a:solidFill>
-            <a:srgbClr val="065A82"/>
+            <a:srgbClr val="F2F4F8"/>
           </a:solidFill>
           <a:ln>
             <a:noFill/>
           </a:ln>
+          <a:effectLst/>
         </p:spPr>
         <p:style>
           <a:lnRef idx="1">
@@ -6928,20 +8386,19 @@
           <a:lstStyle/>
           <a:p>
             <a:pPr algn="ctr"/>
-            <a:endParaRPr/>
-          </a:p>
-        </p:txBody>
-      </p:sp>
-      <p:sp>
-        <p:nvSpPr>
-          <p:cNvPr id="13" name="TextBox 12"/>
+          </a:p>
+        </p:txBody>
+      </p:sp>
+      <p:sp>
+        <p:nvSpPr>
+          <p:cNvPr id="3" name="TextBox 2"/>
           <p:cNvSpPr txBox="1"/>
           <p:nvPr/>
         </p:nvSpPr>
         <p:spPr>
           <a:xfrm>
-            <a:off x="1188720" y="4937760"/>
-            <a:ext cx="3200400" cy="457200"/>
+            <a:off x="548640" y="320040"/>
+            <a:ext cx="10972800" cy="731520"/>
           </a:xfrm>
           <a:prstGeom prst="rect">
             <a:avLst/>
@@ -6949,34 +8406,34 @@
           <a:noFill/>
         </p:spPr>
         <p:txBody>
-          <a:bodyPr wrap="square" lIns="45720" tIns="27432" rIns="45720" bIns="27432">
+          <a:bodyPr wrap="square" lIns="45720" rIns="45720" tIns="27432" bIns="27432">
             <a:spAutoFit/>
           </a:bodyPr>
           <a:lstStyle/>
           <a:p>
             <a:pPr algn="l"/>
             <a:r>
-              <a:rPr sz="2000" b="1" i="0">
-                <a:solidFill>
-                  <a:srgbClr val="F5A623"/>
-                </a:solidFill>
-                <a:latin typeface="Calibri"/>
-              </a:rPr>
-              <a:t>head_dim</a:t>
-            </a:r>
-          </a:p>
-        </p:txBody>
-      </p:sp>
-      <p:sp>
-        <p:nvSpPr>
-          <p:cNvPr id="14" name="TextBox 13"/>
+              <a:rPr sz="3000" b="1" i="0">
+                <a:solidFill>
+                  <a:srgbClr val="065A82"/>
+                </a:solidFill>
+                <a:latin typeface="Calibri"/>
+              </a:rPr>
+              <a:t>FFT Embedding — Head-to-Head</a:t>
+            </a:r>
+          </a:p>
+        </p:txBody>
+      </p:sp>
+      <p:sp>
+        <p:nvSpPr>
+          <p:cNvPr id="4" name="TextBox 3"/>
           <p:cNvSpPr txBox="1"/>
           <p:nvPr/>
         </p:nvSpPr>
         <p:spPr>
           <a:xfrm>
-            <a:off x="4572000" y="4937760"/>
-            <a:ext cx="6400800" cy="457200"/>
+            <a:off x="548640" y="960120"/>
+            <a:ext cx="10972800" cy="365760"/>
           </a:xfrm>
           <a:prstGeom prst="rect">
             <a:avLst/>
@@ -6984,34 +8441,77 @@
           <a:noFill/>
         </p:spPr>
         <p:txBody>
-          <a:bodyPr wrap="square" lIns="45720" tIns="27432" rIns="45720" bIns="27432">
+          <a:bodyPr wrap="square" lIns="45720" rIns="45720" tIns="27432" bIns="27432">
             <a:spAutoFit/>
           </a:bodyPr>
           <a:lstStyle/>
           <a:p>
             <a:pPr algn="l"/>
             <a:r>
-              <a:rPr sz="2000" b="0" i="0">
-                <a:solidFill>
-                  <a:srgbClr val="F2F4F8"/>
-                </a:solidFill>
-                <a:latin typeface="Calibri"/>
-              </a:rPr>
-              <a:t>≈  2 · log₂(context_length)</a:t>
-            </a:r>
-          </a:p>
-        </p:txBody>
-      </p:sp>
-      <p:sp>
-        <p:nvSpPr>
-          <p:cNvPr id="15" name="TextBox 14"/>
+              <a:rPr sz="1400" b="0" i="0">
+                <a:solidFill>
+                  <a:srgbClr val="555F6D"/>
+                </a:solidFill>
+                <a:latin typeface="Calibri"/>
+              </a:rPr>
+              <a:t>Replace Linear(1, 32) with sliding-window FFT</a:t>
+            </a:r>
+          </a:p>
+        </p:txBody>
+      </p:sp>
+      <p:sp>
+        <p:nvSpPr>
+          <p:cNvPr id="5" name="Rectangle 4"/>
+          <p:cNvSpPr/>
+          <p:nvPr/>
+        </p:nvSpPr>
+        <p:spPr>
+          <a:xfrm>
+            <a:off x="548640" y="1508760"/>
+            <a:ext cx="109728" cy="548640"/>
+          </a:xfrm>
+          <a:prstGeom prst="rect">
+            <a:avLst/>
+          </a:prstGeom>
+          <a:solidFill>
+            <a:srgbClr val="F5A623"/>
+          </a:solidFill>
+          <a:ln>
+            <a:noFill/>
+          </a:ln>
+        </p:spPr>
+        <p:style>
+          <a:lnRef idx="1">
+            <a:schemeClr val="accent1"/>
+          </a:lnRef>
+          <a:fillRef idx="3">
+            <a:schemeClr val="accent1"/>
+          </a:fillRef>
+          <a:effectRef idx="2">
+            <a:schemeClr val="accent1"/>
+          </a:effectRef>
+          <a:fontRef idx="minor">
+            <a:schemeClr val="lt1"/>
+          </a:fontRef>
+        </p:style>
+        <p:txBody>
+          <a:bodyPr rtlCol="0" anchor="ctr"/>
+          <a:lstStyle/>
+          <a:p>
+            <a:pPr algn="ctr"/>
+          </a:p>
+        </p:txBody>
+      </p:sp>
+      <p:sp>
+        <p:nvSpPr>
+          <p:cNvPr id="6" name="TextBox 5"/>
           <p:cNvSpPr txBox="1"/>
           <p:nvPr/>
         </p:nvSpPr>
         <p:spPr>
           <a:xfrm>
-            <a:off x="914400" y="5943600"/>
-            <a:ext cx="10515600" cy="640080"/>
+            <a:off x="777240" y="1737360"/>
+            <a:ext cx="10607040" cy="457200"/>
           </a:xfrm>
           <a:prstGeom prst="rect">
             <a:avLst/>
@@ -7019,20 +8519,1233 @@
           <a:noFill/>
         </p:spPr>
         <p:txBody>
-          <a:bodyPr wrap="square" lIns="45720" tIns="27432" rIns="45720" bIns="27432">
+          <a:bodyPr wrap="square" lIns="45720" rIns="45720" tIns="27432" bIns="27432">
             <a:spAutoFit/>
           </a:bodyPr>
           <a:lstStyle/>
           <a:p>
             <a:pPr algn="l"/>
             <a:r>
-              <a:rPr sz="1600" b="0" i="0">
-                <a:solidFill>
-                  <a:srgbClr val="CADCFC"/>
-                </a:solidFill>
-                <a:latin typeface="Calibri"/>
-              </a:rPr>
-              <a:t>emb_dim falls out.  The framing generalizes to many signal-processing tasks.</a:t>
+              <a:rPr sz="1400" b="0" i="0">
+                <a:solidFill>
+                  <a:srgbClr val="555F6D"/>
+                </a:solidFill>
+                <a:latin typeface="Calibri"/>
+              </a:rPr>
+              <a:t>Both models ~30 K params; only the input embedding differs</a:t>
+            </a:r>
+          </a:p>
+        </p:txBody>
+      </p:sp>
+      <p:sp>
+        <p:nvSpPr>
+          <p:cNvPr id="7" name="TextBox 6"/>
+          <p:cNvSpPr txBox="1"/>
+          <p:nvPr/>
+        </p:nvSpPr>
+        <p:spPr>
+          <a:xfrm>
+            <a:off x="777240" y="2286000"/>
+            <a:ext cx="10607040" cy="365760"/>
+          </a:xfrm>
+          <a:prstGeom prst="rect">
+            <a:avLst/>
+          </a:prstGeom>
+          <a:noFill/>
+        </p:spPr>
+        <p:txBody>
+          <a:bodyPr wrap="square" lIns="45720" rIns="45720" tIns="27432" bIns="27432">
+            <a:spAutoFit/>
+          </a:bodyPr>
+          <a:lstStyle/>
+          <a:p>
+            <a:pPr algn="l"/>
+            <a:r>
+              <a:rPr sz="1500" b="1" i="0">
+                <a:solidFill>
+                  <a:srgbClr val="1C7293"/>
+                </a:solidFill>
+                <a:latin typeface="Calibri"/>
+              </a:rPr>
+              <a:t>Easy noise  (amp_std=0.2, phase_std=0.1) — 8 epochs</a:t>
+            </a:r>
+          </a:p>
+        </p:txBody>
+      </p:sp>
+      <p:graphicFrame>
+        <p:nvGraphicFramePr>
+          <p:cNvPr id="8" name="Table 7"/>
+          <p:cNvGraphicFramePr>
+            <a:graphicFrameLocks noGrp="1"/>
+          </p:cNvGraphicFramePr>
+          <p:nvPr/>
+        </p:nvGraphicFramePr>
+        <p:xfrm>
+          <a:off x="777240" y="2697480"/>
+          <a:ext cx="10607040" cy="1188720"/>
+        </p:xfrm>
+        <a:graphic>
+          <a:graphicData uri="http://schemas.openxmlformats.org/drawingml/2006/table">
+            <a:tbl>
+              <a:tblPr firstRow="1" bandRow="1">
+                <a:tableStyleId>{5C22544A-7EE6-4342-B048-85BDC9FD1C3A}</a:tableStyleId>
+              </a:tblPr>
+              <a:tblGrid>
+                <a:gridCol w="3535680"/>
+                <a:gridCol w="1767840"/>
+                <a:gridCol w="2651760"/>
+                <a:gridCol w="2651760"/>
+              </a:tblGrid>
+              <a:tr h="396240">
+                <a:tc>
+                  <a:txBody>
+                    <a:bodyPr wrap="square"/>
+                    <a:lstStyle/>
+                    <a:p>
+                      <a:r>
+                        <a:rPr sz="1300" b="1">
+                          <a:solidFill>
+                            <a:srgbClr val="F2F4F8"/>
+                          </a:solidFill>
+                          <a:latin typeface="Calibri"/>
+                        </a:rPr>
+                        <a:t>Variant</a:t>
+                      </a:r>
+                    </a:p>
+                  </a:txBody>
+                  <a:tcPr marL="73152" marR="73152" marT="36576" marB="36576">
+                    <a:solidFill>
+                      <a:srgbClr val="065A82"/>
+                    </a:solidFill>
+                  </a:tcPr>
+                </a:tc>
+                <a:tc>
+                  <a:txBody>
+                    <a:bodyPr wrap="square"/>
+                    <a:lstStyle/>
+                    <a:p>
+                      <a:r>
+                        <a:rPr sz="1300" b="1">
+                          <a:solidFill>
+                            <a:srgbClr val="F2F4F8"/>
+                          </a:solidFill>
+                          <a:latin typeface="Calibri"/>
+                        </a:rPr>
+                        <a:t>Params</a:t>
+                      </a:r>
+                    </a:p>
+                  </a:txBody>
+                  <a:tcPr marL="73152" marR="73152" marT="36576" marB="36576">
+                    <a:solidFill>
+                      <a:srgbClr val="065A82"/>
+                    </a:solidFill>
+                  </a:tcPr>
+                </a:tc>
+                <a:tc>
+                  <a:txBody>
+                    <a:bodyPr wrap="square"/>
+                    <a:lstStyle/>
+                    <a:p>
+                      <a:r>
+                        <a:rPr sz="1300" b="1">
+                          <a:solidFill>
+                            <a:srgbClr val="F2F4F8"/>
+                          </a:solidFill>
+                          <a:latin typeface="Calibri"/>
+                        </a:rPr>
+                        <a:t>Out SNR</a:t>
+                      </a:r>
+                    </a:p>
+                  </a:txBody>
+                  <a:tcPr marL="73152" marR="73152" marT="36576" marB="36576">
+                    <a:solidFill>
+                      <a:srgbClr val="065A82"/>
+                    </a:solidFill>
+                  </a:tcPr>
+                </a:tc>
+                <a:tc>
+                  <a:txBody>
+                    <a:bodyPr wrap="square"/>
+                    <a:lstStyle/>
+                    <a:p>
+                      <a:r>
+                        <a:rPr sz="1300" b="1">
+                          <a:solidFill>
+                            <a:srgbClr val="F2F4F8"/>
+                          </a:solidFill>
+                          <a:latin typeface="Calibri"/>
+                        </a:rPr>
+                        <a:t>Gain</a:t>
+                      </a:r>
+                    </a:p>
+                  </a:txBody>
+                  <a:tcPr marL="73152" marR="73152" marT="36576" marB="36576">
+                    <a:solidFill>
+                      <a:srgbClr val="065A82"/>
+                    </a:solidFill>
+                  </a:tcPr>
+                </a:tc>
+              </a:tr>
+              <a:tr h="396240">
+                <a:tc>
+                  <a:txBody>
+                    <a:bodyPr wrap="square"/>
+                    <a:lstStyle/>
+                    <a:p>
+                      <a:r>
+                        <a:rPr sz="1300">
+                          <a:solidFill>
+                            <a:srgbClr val="1A1A1A"/>
+                          </a:solidFill>
+                          <a:latin typeface="Calibri"/>
+                        </a:rPr>
+                        <a:t>Scalar Linear(1, 32)</a:t>
+                      </a:r>
+                    </a:p>
+                  </a:txBody>
+                  <a:tcPr marL="73152" marR="73152" marT="36576" marB="36576">
+                    <a:solidFill>
+                      <a:srgbClr val="FFFFFF"/>
+                    </a:solidFill>
+                  </a:tcPr>
+                </a:tc>
+                <a:tc>
+                  <a:txBody>
+                    <a:bodyPr wrap="square"/>
+                    <a:lstStyle/>
+                    <a:p>
+                      <a:r>
+                        <a:rPr sz="1300">
+                          <a:solidFill>
+                            <a:srgbClr val="1A1A1A"/>
+                          </a:solidFill>
+                          <a:latin typeface="Calibri"/>
+                        </a:rPr>
+                        <a:t>29,473</a:t>
+                      </a:r>
+                    </a:p>
+                  </a:txBody>
+                  <a:tcPr marL="73152" marR="73152" marT="36576" marB="36576">
+                    <a:solidFill>
+                      <a:srgbClr val="FFFFFF"/>
+                    </a:solidFill>
+                  </a:tcPr>
+                </a:tc>
+                <a:tc>
+                  <a:txBody>
+                    <a:bodyPr wrap="square"/>
+                    <a:lstStyle/>
+                    <a:p>
+                      <a:r>
+                        <a:rPr sz="1300">
+                          <a:solidFill>
+                            <a:srgbClr val="1A1A1A"/>
+                          </a:solidFill>
+                          <a:latin typeface="Calibri"/>
+                        </a:rPr>
+                        <a:t>9.92 dB</a:t>
+                      </a:r>
+                    </a:p>
+                  </a:txBody>
+                  <a:tcPr marL="73152" marR="73152" marT="36576" marB="36576">
+                    <a:solidFill>
+                      <a:srgbClr val="FFFFFF"/>
+                    </a:solidFill>
+                  </a:tcPr>
+                </a:tc>
+                <a:tc>
+                  <a:txBody>
+                    <a:bodyPr wrap="square"/>
+                    <a:lstStyle/>
+                    <a:p>
+                      <a:r>
+                        <a:rPr sz="1300">
+                          <a:solidFill>
+                            <a:srgbClr val="1A1A1A"/>
+                          </a:solidFill>
+                          <a:latin typeface="Calibri"/>
+                        </a:rPr>
+                        <a:t>+7.31 dB</a:t>
+                      </a:r>
+                    </a:p>
+                  </a:txBody>
+                  <a:tcPr marL="73152" marR="73152" marT="36576" marB="36576">
+                    <a:solidFill>
+                      <a:srgbClr val="FFFFFF"/>
+                    </a:solidFill>
+                  </a:tcPr>
+                </a:tc>
+              </a:tr>
+              <a:tr h="396240">
+                <a:tc>
+                  <a:txBody>
+                    <a:bodyPr wrap="square"/>
+                    <a:lstStyle/>
+                    <a:p>
+                      <a:r>
+                        <a:rPr sz="1300">
+                          <a:solidFill>
+                            <a:srgbClr val="1A1A1A"/>
+                          </a:solidFill>
+                          <a:latin typeface="Calibri"/>
+                        </a:rPr>
+                        <a:t>FFT sliding window</a:t>
+                      </a:r>
+                    </a:p>
+                  </a:txBody>
+                  <a:tcPr marL="73152" marR="73152" marT="36576" marB="36576">
+                    <a:solidFill>
+                      <a:srgbClr val="E8EEF5"/>
+                    </a:solidFill>
+                  </a:tcPr>
+                </a:tc>
+                <a:tc>
+                  <a:txBody>
+                    <a:bodyPr wrap="square"/>
+                    <a:lstStyle/>
+                    <a:p>
+                      <a:r>
+                        <a:rPr sz="1300">
+                          <a:solidFill>
+                            <a:srgbClr val="1A1A1A"/>
+                          </a:solidFill>
+                          <a:latin typeface="Calibri"/>
+                        </a:rPr>
+                        <a:t>30,529</a:t>
+                      </a:r>
+                    </a:p>
+                  </a:txBody>
+                  <a:tcPr marL="73152" marR="73152" marT="36576" marB="36576">
+                    <a:solidFill>
+                      <a:srgbClr val="E8EEF5"/>
+                    </a:solidFill>
+                  </a:tcPr>
+                </a:tc>
+                <a:tc>
+                  <a:txBody>
+                    <a:bodyPr wrap="square"/>
+                    <a:lstStyle/>
+                    <a:p>
+                      <a:r>
+                        <a:rPr sz="1300">
+                          <a:solidFill>
+                            <a:srgbClr val="1A1A1A"/>
+                          </a:solidFill>
+                          <a:latin typeface="Calibri"/>
+                        </a:rPr>
+                        <a:t>16.39 dB</a:t>
+                      </a:r>
+                    </a:p>
+                  </a:txBody>
+                  <a:tcPr marL="73152" marR="73152" marT="36576" marB="36576">
+                    <a:solidFill>
+                      <a:srgbClr val="E8EEF5"/>
+                    </a:solidFill>
+                  </a:tcPr>
+                </a:tc>
+                <a:tc>
+                  <a:txBody>
+                    <a:bodyPr wrap="square"/>
+                    <a:lstStyle/>
+                    <a:p>
+                      <a:r>
+                        <a:rPr sz="1300">
+                          <a:solidFill>
+                            <a:srgbClr val="1A1A1A"/>
+                          </a:solidFill>
+                          <a:latin typeface="Calibri"/>
+                        </a:rPr>
+                        <a:t>+13.78 dB</a:t>
+                      </a:r>
+                    </a:p>
+                  </a:txBody>
+                  <a:tcPr marL="73152" marR="73152" marT="36576" marB="36576">
+                    <a:solidFill>
+                      <a:srgbClr val="E8EEF5"/>
+                    </a:solidFill>
+                  </a:tcPr>
+                </a:tc>
+              </a:tr>
+            </a:tbl>
+          </a:graphicData>
+        </a:graphic>
+      </p:graphicFrame>
+      <p:sp>
+        <p:nvSpPr>
+          <p:cNvPr id="9" name="TextBox 8"/>
+          <p:cNvSpPr txBox="1"/>
+          <p:nvPr/>
+        </p:nvSpPr>
+        <p:spPr>
+          <a:xfrm>
+            <a:off x="777240" y="4114800"/>
+            <a:ext cx="10607040" cy="365760"/>
+          </a:xfrm>
+          <a:prstGeom prst="rect">
+            <a:avLst/>
+          </a:prstGeom>
+          <a:noFill/>
+        </p:spPr>
+        <p:txBody>
+          <a:bodyPr wrap="square" lIns="45720" rIns="45720" tIns="27432" bIns="27432">
+            <a:spAutoFit/>
+          </a:bodyPr>
+          <a:lstStyle/>
+          <a:p>
+            <a:pPr algn="l"/>
+            <a:r>
+              <a:rPr sz="1500" b="1" i="0">
+                <a:solidFill>
+                  <a:srgbClr val="1C7293"/>
+                </a:solidFill>
+                <a:latin typeface="Calibri"/>
+              </a:rPr>
+              <a:t>Hard noise  (amp_std=0.8, phase_std=0.4) — 10 epochs</a:t>
+            </a:r>
+          </a:p>
+        </p:txBody>
+      </p:sp>
+      <p:graphicFrame>
+        <p:nvGraphicFramePr>
+          <p:cNvPr id="10" name="Table 9"/>
+          <p:cNvGraphicFramePr>
+            <a:graphicFrameLocks noGrp="1"/>
+          </p:cNvGraphicFramePr>
+          <p:nvPr/>
+        </p:nvGraphicFramePr>
+        <p:xfrm>
+          <a:off x="777240" y="4526280"/>
+          <a:ext cx="10607040" cy="1554480"/>
+        </p:xfrm>
+        <a:graphic>
+          <a:graphicData uri="http://schemas.openxmlformats.org/drawingml/2006/table">
+            <a:tbl>
+              <a:tblPr firstRow="1" bandRow="1">
+                <a:tableStyleId>{5C22544A-7EE6-4342-B048-85BDC9FD1C3A}</a:tableStyleId>
+              </a:tblPr>
+              <a:tblGrid>
+                <a:gridCol w="3535680"/>
+                <a:gridCol w="1767840"/>
+                <a:gridCol w="2651760"/>
+                <a:gridCol w="2651760"/>
+              </a:tblGrid>
+              <a:tr h="388620">
+                <a:tc>
+                  <a:txBody>
+                    <a:bodyPr wrap="square"/>
+                    <a:lstStyle/>
+                    <a:p>
+                      <a:r>
+                        <a:rPr sz="1300" b="1">
+                          <a:solidFill>
+                            <a:srgbClr val="F2F4F8"/>
+                          </a:solidFill>
+                          <a:latin typeface="Calibri"/>
+                        </a:rPr>
+                        <a:t>Variant</a:t>
+                      </a:r>
+                    </a:p>
+                  </a:txBody>
+                  <a:tcPr marL="73152" marR="73152" marT="36576" marB="36576">
+                    <a:solidFill>
+                      <a:srgbClr val="065A82"/>
+                    </a:solidFill>
+                  </a:tcPr>
+                </a:tc>
+                <a:tc>
+                  <a:txBody>
+                    <a:bodyPr wrap="square"/>
+                    <a:lstStyle/>
+                    <a:p>
+                      <a:r>
+                        <a:rPr sz="1300" b="1">
+                          <a:solidFill>
+                            <a:srgbClr val="F2F4F8"/>
+                          </a:solidFill>
+                          <a:latin typeface="Calibri"/>
+                        </a:rPr>
+                        <a:t>Params</a:t>
+                      </a:r>
+                    </a:p>
+                  </a:txBody>
+                  <a:tcPr marL="73152" marR="73152" marT="36576" marB="36576">
+                    <a:solidFill>
+                      <a:srgbClr val="065A82"/>
+                    </a:solidFill>
+                  </a:tcPr>
+                </a:tc>
+                <a:tc>
+                  <a:txBody>
+                    <a:bodyPr wrap="square"/>
+                    <a:lstStyle/>
+                    <a:p>
+                      <a:r>
+                        <a:rPr sz="1300" b="1">
+                          <a:solidFill>
+                            <a:srgbClr val="F2F4F8"/>
+                          </a:solidFill>
+                          <a:latin typeface="Calibri"/>
+                        </a:rPr>
+                        <a:t>Out SNR</a:t>
+                      </a:r>
+                    </a:p>
+                  </a:txBody>
+                  <a:tcPr marL="73152" marR="73152" marT="36576" marB="36576">
+                    <a:solidFill>
+                      <a:srgbClr val="065A82"/>
+                    </a:solidFill>
+                  </a:tcPr>
+                </a:tc>
+                <a:tc>
+                  <a:txBody>
+                    <a:bodyPr wrap="square"/>
+                    <a:lstStyle/>
+                    <a:p>
+                      <a:r>
+                        <a:rPr sz="1300" b="1">
+                          <a:solidFill>
+                            <a:srgbClr val="F2F4F8"/>
+                          </a:solidFill>
+                          <a:latin typeface="Calibri"/>
+                        </a:rPr>
+                        <a:t>Gain</a:t>
+                      </a:r>
+                    </a:p>
+                  </a:txBody>
+                  <a:tcPr marL="73152" marR="73152" marT="36576" marB="36576">
+                    <a:solidFill>
+                      <a:srgbClr val="065A82"/>
+                    </a:solidFill>
+                  </a:tcPr>
+                </a:tc>
+              </a:tr>
+              <a:tr h="388620">
+                <a:tc>
+                  <a:txBody>
+                    <a:bodyPr wrap="square"/>
+                    <a:lstStyle/>
+                    <a:p>
+                      <a:r>
+                        <a:rPr sz="1300">
+                          <a:solidFill>
+                            <a:srgbClr val="1A1A1A"/>
+                          </a:solidFill>
+                          <a:latin typeface="Calibri"/>
+                        </a:rPr>
+                        <a:t>Scalar Linear(1, 32)</a:t>
+                      </a:r>
+                    </a:p>
+                  </a:txBody>
+                  <a:tcPr marL="73152" marR="73152" marT="36576" marB="36576">
+                    <a:solidFill>
+                      <a:srgbClr val="FFFFFF"/>
+                    </a:solidFill>
+                  </a:tcPr>
+                </a:tc>
+                <a:tc>
+                  <a:txBody>
+                    <a:bodyPr wrap="square"/>
+                    <a:lstStyle/>
+                    <a:p>
+                      <a:r>
+                        <a:rPr sz="1300">
+                          <a:solidFill>
+                            <a:srgbClr val="1A1A1A"/>
+                          </a:solidFill>
+                          <a:latin typeface="Calibri"/>
+                        </a:rPr>
+                        <a:t>29,473</a:t>
+                      </a:r>
+                    </a:p>
+                  </a:txBody>
+                  <a:tcPr marL="73152" marR="73152" marT="36576" marB="36576">
+                    <a:solidFill>
+                      <a:srgbClr val="FFFFFF"/>
+                    </a:solidFill>
+                  </a:tcPr>
+                </a:tc>
+                <a:tc>
+                  <a:txBody>
+                    <a:bodyPr wrap="square"/>
+                    <a:lstStyle/>
+                    <a:p>
+                      <a:r>
+                        <a:rPr sz="1300">
+                          <a:solidFill>
+                            <a:srgbClr val="1A1A1A"/>
+                          </a:solidFill>
+                          <a:latin typeface="Calibri"/>
+                        </a:rPr>
+                        <a:t>3.81 dB</a:t>
+                      </a:r>
+                    </a:p>
+                  </a:txBody>
+                  <a:tcPr marL="73152" marR="73152" marT="36576" marB="36576">
+                    <a:solidFill>
+                      <a:srgbClr val="FFFFFF"/>
+                    </a:solidFill>
+                  </a:tcPr>
+                </a:tc>
+                <a:tc>
+                  <a:txBody>
+                    <a:bodyPr wrap="square"/>
+                    <a:lstStyle/>
+                    <a:p>
+                      <a:r>
+                        <a:rPr sz="1300">
+                          <a:solidFill>
+                            <a:srgbClr val="1A1A1A"/>
+                          </a:solidFill>
+                          <a:latin typeface="Calibri"/>
+                        </a:rPr>
+                        <a:t>+3.69 dB</a:t>
+                      </a:r>
+                    </a:p>
+                  </a:txBody>
+                  <a:tcPr marL="73152" marR="73152" marT="36576" marB="36576">
+                    <a:solidFill>
+                      <a:srgbClr val="FFFFFF"/>
+                    </a:solidFill>
+                  </a:tcPr>
+                </a:tc>
+              </a:tr>
+              <a:tr h="388620">
+                <a:tc>
+                  <a:txBody>
+                    <a:bodyPr wrap="square"/>
+                    <a:lstStyle/>
+                    <a:p>
+                      <a:r>
+                        <a:rPr sz="1300">
+                          <a:solidFill>
+                            <a:srgbClr val="1A1A1A"/>
+                          </a:solidFill>
+                          <a:latin typeface="Calibri"/>
+                        </a:rPr>
+                        <a:t>FFT sliding window</a:t>
+                      </a:r>
+                    </a:p>
+                  </a:txBody>
+                  <a:tcPr marL="73152" marR="73152" marT="36576" marB="36576">
+                    <a:solidFill>
+                      <a:srgbClr val="E8EEF5"/>
+                    </a:solidFill>
+                  </a:tcPr>
+                </a:tc>
+                <a:tc>
+                  <a:txBody>
+                    <a:bodyPr wrap="square"/>
+                    <a:lstStyle/>
+                    <a:p>
+                      <a:r>
+                        <a:rPr sz="1300">
+                          <a:solidFill>
+                            <a:srgbClr val="1A1A1A"/>
+                          </a:solidFill>
+                          <a:latin typeface="Calibri"/>
+                        </a:rPr>
+                        <a:t>30,529</a:t>
+                      </a:r>
+                    </a:p>
+                  </a:txBody>
+                  <a:tcPr marL="73152" marR="73152" marT="36576" marB="36576">
+                    <a:solidFill>
+                      <a:srgbClr val="E8EEF5"/>
+                    </a:solidFill>
+                  </a:tcPr>
+                </a:tc>
+                <a:tc>
+                  <a:txBody>
+                    <a:bodyPr wrap="square"/>
+                    <a:lstStyle/>
+                    <a:p>
+                      <a:r>
+                        <a:rPr sz="1300">
+                          <a:solidFill>
+                            <a:srgbClr val="1A1A1A"/>
+                          </a:solidFill>
+                          <a:latin typeface="Calibri"/>
+                        </a:rPr>
+                        <a:t>9.12 dB</a:t>
+                      </a:r>
+                    </a:p>
+                  </a:txBody>
+                  <a:tcPr marL="73152" marR="73152" marT="36576" marB="36576">
+                    <a:solidFill>
+                      <a:srgbClr val="E8EEF5"/>
+                    </a:solidFill>
+                  </a:tcPr>
+                </a:tc>
+                <a:tc>
+                  <a:txBody>
+                    <a:bodyPr wrap="square"/>
+                    <a:lstStyle/>
+                    <a:p>
+                      <a:r>
+                        <a:rPr sz="1300">
+                          <a:solidFill>
+                            <a:srgbClr val="1A1A1A"/>
+                          </a:solidFill>
+                          <a:latin typeface="Calibri"/>
+                        </a:rPr>
+                        <a:t>+9.00 dB</a:t>
+                      </a:r>
+                    </a:p>
+                  </a:txBody>
+                  <a:tcPr marL="73152" marR="73152" marT="36576" marB="36576">
+                    <a:solidFill>
+                      <a:srgbClr val="E8EEF5"/>
+                    </a:solidFill>
+                  </a:tcPr>
+                </a:tc>
+              </a:tr>
+              <a:tr h="388620">
+                <a:tc>
+                  <a:txBody>
+                    <a:bodyPr wrap="square"/>
+                    <a:lstStyle/>
+                    <a:p>
+                      <a:r>
+                        <a:rPr sz="1300">
+                          <a:solidFill>
+                            <a:srgbClr val="1A1A1A"/>
+                          </a:solidFill>
+                          <a:latin typeface="Calibri"/>
+                        </a:rPr>
+                        <a:t>Scalar SCALED (208 K)</a:t>
+                      </a:r>
+                    </a:p>
+                  </a:txBody>
+                  <a:tcPr marL="73152" marR="73152" marT="36576" marB="36576">
+                    <a:solidFill>
+                      <a:srgbClr val="FFFFFF"/>
+                    </a:solidFill>
+                  </a:tcPr>
+                </a:tc>
+                <a:tc>
+                  <a:txBody>
+                    <a:bodyPr wrap="square"/>
+                    <a:lstStyle/>
+                    <a:p>
+                      <a:r>
+                        <a:rPr sz="1300">
+                          <a:solidFill>
+                            <a:srgbClr val="1A1A1A"/>
+                          </a:solidFill>
+                          <a:latin typeface="Calibri"/>
+                        </a:rPr>
+                        <a:t>207,577</a:t>
+                      </a:r>
+                    </a:p>
+                  </a:txBody>
+                  <a:tcPr marL="73152" marR="73152" marT="36576" marB="36576">
+                    <a:solidFill>
+                      <a:srgbClr val="FFFFFF"/>
+                    </a:solidFill>
+                  </a:tcPr>
+                </a:tc>
+                <a:tc>
+                  <a:txBody>
+                    <a:bodyPr wrap="square"/>
+                    <a:lstStyle/>
+                    <a:p>
+                      <a:r>
+                        <a:rPr sz="1300">
+                          <a:solidFill>
+                            <a:srgbClr val="1A1A1A"/>
+                          </a:solidFill>
+                          <a:latin typeface="Calibri"/>
+                        </a:rPr>
+                        <a:t>5.85 dB</a:t>
+                      </a:r>
+                    </a:p>
+                  </a:txBody>
+                  <a:tcPr marL="73152" marR="73152" marT="36576" marB="36576">
+                    <a:solidFill>
+                      <a:srgbClr val="FFFFFF"/>
+                    </a:solidFill>
+                  </a:tcPr>
+                </a:tc>
+                <a:tc>
+                  <a:txBody>
+                    <a:bodyPr wrap="square"/>
+                    <a:lstStyle/>
+                    <a:p>
+                      <a:r>
+                        <a:rPr sz="1300">
+                          <a:solidFill>
+                            <a:srgbClr val="1A1A1A"/>
+                          </a:solidFill>
+                          <a:latin typeface="Calibri"/>
+                        </a:rPr>
+                        <a:t>+6.00 dB</a:t>
+                      </a:r>
+                    </a:p>
+                  </a:txBody>
+                  <a:tcPr marL="73152" marR="73152" marT="36576" marB="36576">
+                    <a:solidFill>
+                      <a:srgbClr val="FFFFFF"/>
+                    </a:solidFill>
+                  </a:tcPr>
+                </a:tc>
+              </a:tr>
+            </a:tbl>
+          </a:graphicData>
+        </a:graphic>
+      </p:graphicFrame>
+      <p:sp>
+        <p:nvSpPr>
+          <p:cNvPr id="11" name="TextBox 10"/>
+          <p:cNvSpPr txBox="1"/>
+          <p:nvPr/>
+        </p:nvSpPr>
+        <p:spPr>
+          <a:xfrm>
+            <a:off x="777240" y="6263640"/>
+            <a:ext cx="10607040" cy="457200"/>
+          </a:xfrm>
+          <a:prstGeom prst="rect">
+            <a:avLst/>
+          </a:prstGeom>
+          <a:noFill/>
+        </p:spPr>
+        <p:txBody>
+          <a:bodyPr wrap="square" lIns="45720" rIns="45720" tIns="27432" bIns="27432">
+            <a:spAutoFit/>
+          </a:bodyPr>
+          <a:lstStyle/>
+          <a:p>
+            <a:pPr algn="l"/>
+            <a:r>
+              <a:rPr sz="1400" b="1" i="0">
+                <a:solidFill>
+                  <a:srgbClr val="065A82"/>
+                </a:solidFill>
+                <a:latin typeface="Calibri"/>
+              </a:rPr>
+              <a:t>FFT at 30 K beats the scaled scalar model at 208 K by +3 dB.</a:t>
+            </a:r>
+          </a:p>
+        </p:txBody>
+      </p:sp>
+    </p:spTree>
+  </p:cSld>
+  <p:clrMapOvr>
+    <a:masterClrMapping/>
+  </p:clrMapOvr>
+</p:sld>
+</file>
+
+<file path=ppt/slides/slide19.xml><?xml version="1.0" encoding="utf-8"?>
+<p:sld xmlns:a="http://schemas.openxmlformats.org/drawingml/2006/main" xmlns:p="http://schemas.openxmlformats.org/presentationml/2006/main" xmlns:r="http://schemas.openxmlformats.org/officeDocument/2006/relationships">
+  <p:cSld>
+    <p:spTree>
+      <p:nvGrpSpPr>
+        <p:cNvPr id="1" name=""/>
+        <p:cNvGrpSpPr/>
+        <p:nvPr/>
+      </p:nvGrpSpPr>
+      <p:grpSpPr/>
+      <p:sp>
+        <p:nvSpPr>
+          <p:cNvPr id="2" name="Rectangle 1"/>
+          <p:cNvSpPr/>
+          <p:nvPr/>
+        </p:nvSpPr>
+        <p:spPr>
+          <a:xfrm>
+            <a:off x="0" y="0"/>
+            <a:ext cx="12191695" cy="6858000"/>
+          </a:xfrm>
+          <a:prstGeom prst="rect">
+            <a:avLst/>
+          </a:prstGeom>
+          <a:solidFill>
+            <a:srgbClr val="F2F4F8"/>
+          </a:solidFill>
+          <a:ln>
+            <a:noFill/>
+          </a:ln>
+          <a:effectLst/>
+        </p:spPr>
+        <p:style>
+          <a:lnRef idx="1">
+            <a:schemeClr val="accent1"/>
+          </a:lnRef>
+          <a:fillRef idx="3">
+            <a:schemeClr val="accent1"/>
+          </a:fillRef>
+          <a:effectRef idx="2">
+            <a:schemeClr val="accent1"/>
+          </a:effectRef>
+          <a:fontRef idx="minor">
+            <a:schemeClr val="lt1"/>
+          </a:fontRef>
+        </p:style>
+        <p:txBody>
+          <a:bodyPr rtlCol="0" anchor="ctr"/>
+          <a:lstStyle/>
+          <a:p>
+            <a:pPr algn="ctr"/>
+          </a:p>
+        </p:txBody>
+      </p:sp>
+      <p:sp>
+        <p:nvSpPr>
+          <p:cNvPr id="3" name="TextBox 2"/>
+          <p:cNvSpPr txBox="1"/>
+          <p:nvPr/>
+        </p:nvSpPr>
+        <p:spPr>
+          <a:xfrm>
+            <a:off x="548640" y="320040"/>
+            <a:ext cx="10972800" cy="731520"/>
+          </a:xfrm>
+          <a:prstGeom prst="rect">
+            <a:avLst/>
+          </a:prstGeom>
+          <a:noFill/>
+        </p:spPr>
+        <p:txBody>
+          <a:bodyPr wrap="square" lIns="45720" rIns="45720" tIns="27432" bIns="27432">
+            <a:spAutoFit/>
+          </a:bodyPr>
+          <a:lstStyle/>
+          <a:p>
+            <a:pPr algn="l"/>
+            <a:r>
+              <a:rPr sz="3000" b="1" i="0">
+                <a:solidFill>
+                  <a:srgbClr val="065A82"/>
+                </a:solidFill>
+                <a:latin typeface="Calibri"/>
+              </a:rPr>
+              <a:t>Why the FFT Front-End Wins</a:t>
+            </a:r>
+          </a:p>
+        </p:txBody>
+      </p:sp>
+      <p:sp>
+        <p:nvSpPr>
+          <p:cNvPr id="4" name="TextBox 3"/>
+          <p:cNvSpPr txBox="1"/>
+          <p:nvPr/>
+        </p:nvSpPr>
+        <p:spPr>
+          <a:xfrm>
+            <a:off x="548640" y="960120"/>
+            <a:ext cx="10972800" cy="365760"/>
+          </a:xfrm>
+          <a:prstGeom prst="rect">
+            <a:avLst/>
+          </a:prstGeom>
+          <a:noFill/>
+        </p:spPr>
+        <p:txBody>
+          <a:bodyPr wrap="square" lIns="45720" rIns="45720" tIns="27432" bIns="27432">
+            <a:spAutoFit/>
+          </a:bodyPr>
+          <a:lstStyle/>
+          <a:p>
+            <a:pPr algn="l"/>
+            <a:r>
+              <a:rPr sz="1400" b="0" i="0">
+                <a:solidFill>
+                  <a:srgbClr val="555F6D"/>
+                </a:solidFill>
+                <a:latin typeface="Calibri"/>
+              </a:rPr>
+              <a:t>A near-diagonal representation of the task</a:t>
+            </a:r>
+          </a:p>
+        </p:txBody>
+      </p:sp>
+      <p:sp>
+        <p:nvSpPr>
+          <p:cNvPr id="5" name="Rectangle 4"/>
+          <p:cNvSpPr/>
+          <p:nvPr/>
+        </p:nvSpPr>
+        <p:spPr>
+          <a:xfrm>
+            <a:off x="548640" y="1508760"/>
+            <a:ext cx="109728" cy="548640"/>
+          </a:xfrm>
+          <a:prstGeom prst="rect">
+            <a:avLst/>
+          </a:prstGeom>
+          <a:solidFill>
+            <a:srgbClr val="F5A623"/>
+          </a:solidFill>
+          <a:ln>
+            <a:noFill/>
+          </a:ln>
+        </p:spPr>
+        <p:style>
+          <a:lnRef idx="1">
+            <a:schemeClr val="accent1"/>
+          </a:lnRef>
+          <a:fillRef idx="3">
+            <a:schemeClr val="accent1"/>
+          </a:fillRef>
+          <a:effectRef idx="2">
+            <a:schemeClr val="accent1"/>
+          </a:effectRef>
+          <a:fontRef idx="minor">
+            <a:schemeClr val="lt1"/>
+          </a:fontRef>
+        </p:style>
+        <p:txBody>
+          <a:bodyPr rtlCol="0" anchor="ctr"/>
+          <a:lstStyle/>
+          <a:p>
+            <a:pPr algn="ctr"/>
+          </a:p>
+        </p:txBody>
+      </p:sp>
+      <p:sp>
+        <p:nvSpPr>
+          <p:cNvPr id="6" name="TextBox 5"/>
+          <p:cNvSpPr txBox="1"/>
+          <p:nvPr/>
+        </p:nvSpPr>
+        <p:spPr>
+          <a:xfrm>
+            <a:off x="777240" y="1737360"/>
+            <a:ext cx="10607040" cy="457200"/>
+          </a:xfrm>
+          <a:prstGeom prst="rect">
+            <a:avLst/>
+          </a:prstGeom>
+          <a:noFill/>
+        </p:spPr>
+        <p:txBody>
+          <a:bodyPr wrap="square" lIns="45720" rIns="45720" tIns="27432" bIns="27432">
+            <a:spAutoFit/>
+          </a:bodyPr>
+          <a:lstStyle/>
+          <a:p>
+            <a:pPr algn="l"/>
+            <a:r>
+              <a:rPr sz="1500" b="0" i="0">
+                <a:solidFill>
+                  <a:srgbClr val="1A1A1A"/>
+                </a:solidFill>
+                <a:latin typeface="Calibri"/>
+              </a:rPr>
+              <a:t>Token at position t = Linear( rfft( x[t-W+1 : t+1] ) ),  W = 32</a:t>
+            </a:r>
+          </a:p>
+        </p:txBody>
+      </p:sp>
+      <p:sp>
+        <p:nvSpPr>
+          <p:cNvPr id="7" name="TextBox 6"/>
+          <p:cNvSpPr txBox="1"/>
+          <p:nvPr/>
+        </p:nvSpPr>
+        <p:spPr>
+          <a:xfrm>
+            <a:off x="777240" y="2468880"/>
+            <a:ext cx="10607040" cy="457200"/>
+          </a:xfrm>
+          <a:prstGeom prst="rect">
+            <a:avLst/>
+          </a:prstGeom>
+          <a:noFill/>
+        </p:spPr>
+        <p:txBody>
+          <a:bodyPr wrap="square" lIns="45720" rIns="45720" tIns="27432" bIns="27432">
+            <a:spAutoFit/>
+          </a:bodyPr>
+          <a:lstStyle/>
+          <a:p>
+            <a:pPr algn="l"/>
+            <a:r>
+              <a:rPr sz="1800" b="1" i="0">
+                <a:solidFill>
+                  <a:srgbClr val="1C7293"/>
+                </a:solidFill>
+                <a:latin typeface="Calibri"/>
+              </a:rPr>
+              <a:t>What changes for the model</a:t>
+            </a:r>
+          </a:p>
+        </p:txBody>
+      </p:sp>
+      <p:sp>
+        <p:nvSpPr>
+          <p:cNvPr id="8" name="TextBox 7"/>
+          <p:cNvSpPr txBox="1"/>
+          <p:nvPr/>
+        </p:nvSpPr>
+        <p:spPr>
+          <a:xfrm>
+            <a:off x="777240" y="2926080"/>
+            <a:ext cx="10607040" cy="2103120"/>
+          </a:xfrm>
+          <a:prstGeom prst="rect">
+            <a:avLst/>
+          </a:prstGeom>
+          <a:noFill/>
+        </p:spPr>
+        <p:txBody>
+          <a:bodyPr wrap="square" lIns="45720" rIns="45720" tIns="27432" bIns="27432">
+            <a:spAutoFit/>
+          </a:bodyPr>
+          <a:lstStyle/>
+          <a:p>
+            <a:pPr algn="l"/>
+            <a:r>
+              <a:rPr sz="1400" b="0" i="0">
+                <a:solidFill>
+                  <a:srgbClr val="1A1A1A"/>
+                </a:solidFill>
+                <a:latin typeface="Calibri"/>
+              </a:rPr>
+              <a:t>• A pure sinusoid is a delta in the frequency domain</a:t>
+            </a:r>
+          </a:p>
+          <a:p>
+            <a:pPr algn="l"/>
+            <a:r>
+              <a:rPr sz="1400" b="0" i="0">
+                <a:solidFill>
+                  <a:srgbClr val="1A1A1A"/>
+                </a:solidFill>
+                <a:latin typeface="Calibri"/>
+              </a:rPr>
+              <a:t>• Each token already encodes the local spectrum of the last 32 samples</a:t>
+            </a:r>
+          </a:p>
+          <a:p>
+            <a:pPr algn="l"/>
+            <a:r>
+              <a:rPr sz="1400" b="0" i="0">
+                <a:solidFill>
+                  <a:srgbClr val="1A1A1A"/>
+                </a:solidFill>
+                <a:latin typeface="Calibri"/>
+              </a:rPr>
+              <a:t>• Noisy input becomes a peak-plus-noise-floor in each token</a:t>
+            </a:r>
+          </a:p>
+          <a:p>
+            <a:pPr algn="l"/>
+            <a:r>
+              <a:rPr sz="1400" b="0" i="0">
+                <a:solidFill>
+                  <a:srgbClr val="1A1A1A"/>
+                </a:solidFill>
+                <a:latin typeface="Calibri"/>
+              </a:rPr>
+              <a:t>• The transformer's job collapses to peak-tracking and bin interpolation</a:t>
+            </a:r>
+          </a:p>
+          <a:p>
+            <a:pPr algn="l"/>
+            <a:r>
+              <a:rPr sz="1400" b="0" i="0">
+                <a:solidFill>
+                  <a:srgbClr val="1A1A1A"/>
+                </a:solidFill>
+                <a:latin typeface="Calibri"/>
+              </a:rPr>
+              <a:t>• Equivalent to many parallel matched filters before attention even runs</a:t>
+            </a:r>
+          </a:p>
+        </p:txBody>
+      </p:sp>
+      <p:sp>
+        <p:nvSpPr>
+          <p:cNvPr id="9" name="TextBox 8"/>
+          <p:cNvSpPr txBox="1"/>
+          <p:nvPr/>
+        </p:nvSpPr>
+        <p:spPr>
+          <a:xfrm>
+            <a:off x="777240" y="5120640"/>
+            <a:ext cx="10607040" cy="457200"/>
+          </a:xfrm>
+          <a:prstGeom prst="rect">
+            <a:avLst/>
+          </a:prstGeom>
+          <a:noFill/>
+        </p:spPr>
+        <p:txBody>
+          <a:bodyPr wrap="square" lIns="45720" rIns="45720" tIns="27432" bIns="27432">
+            <a:spAutoFit/>
+          </a:bodyPr>
+          <a:lstStyle/>
+          <a:p>
+            <a:pPr algn="l"/>
+            <a:r>
+              <a:rPr sz="1800" b="1" i="0">
+                <a:solidFill>
+                  <a:srgbClr val="1C7293"/>
+                </a:solidFill>
+                <a:latin typeface="Calibri"/>
+              </a:rPr>
+              <a:t>Trade-offs</a:t>
+            </a:r>
+          </a:p>
+        </p:txBody>
+      </p:sp>
+      <p:sp>
+        <p:nvSpPr>
+          <p:cNvPr id="10" name="TextBox 9"/>
+          <p:cNvSpPr txBox="1"/>
+          <p:nvPr/>
+        </p:nvSpPr>
+        <p:spPr>
+          <a:xfrm>
+            <a:off x="777240" y="5577840"/>
+            <a:ext cx="10607040" cy="1188720"/>
+          </a:xfrm>
+          <a:prstGeom prst="rect">
+            <a:avLst/>
+          </a:prstGeom>
+          <a:noFill/>
+        </p:spPr>
+        <p:txBody>
+          <a:bodyPr wrap="square" lIns="45720" rIns="45720" tIns="27432" bIns="27432">
+            <a:spAutoFit/>
+          </a:bodyPr>
+          <a:lstStyle/>
+          <a:p>
+            <a:pPr algn="l"/>
+            <a:r>
+              <a:rPr sz="1400" b="0" i="0">
+                <a:solidFill>
+                  <a:srgbClr val="1A1A1A"/>
+                </a:solidFill>
+                <a:latin typeface="Calibri"/>
+              </a:rPr>
+              <a:t>• Inference overhead of sliding FFT is negligible (~160 MACs/sample)</a:t>
+            </a:r>
+          </a:p>
+          <a:p>
+            <a:pPr algn="l"/>
+            <a:r>
+              <a:rPr sz="1400" b="0" i="0">
+                <a:solidFill>
+                  <a:srgbClr val="1A1A1A"/>
+                </a:solidFill>
+                <a:latin typeface="Calibri"/>
+              </a:rPr>
+              <a:t>• Strong inductive bias — best for stationary/periodic signals</a:t>
+            </a:r>
+          </a:p>
+          <a:p>
+            <a:pPr algn="l"/>
+            <a:r>
+              <a:rPr sz="1400" b="0" i="0">
+                <a:solidFill>
+                  <a:srgbClr val="1A1A1A"/>
+                </a:solidFill>
+                <a:latin typeface="Calibri"/>
+              </a:rPr>
+              <a:t>• Window size W is a classical STFT trade-off (frequency vs time resolution)</a:t>
             </a:r>
           </a:p>
         </p:txBody>
@@ -7046,7 +9759,7 @@
 </file>
 
 <file path=ppt/slides/slide2.xml><?xml version="1.0" encoding="utf-8"?>
-<p:sld xmlns:a="http://schemas.openxmlformats.org/drawingml/2006/main" xmlns:r="http://schemas.openxmlformats.org/officeDocument/2006/relationships" xmlns:p="http://schemas.openxmlformats.org/presentationml/2006/main">
+<p:sld xmlns:a="http://schemas.openxmlformats.org/drawingml/2006/main" xmlns:p="http://schemas.openxmlformats.org/presentationml/2006/main" xmlns:r="http://schemas.openxmlformats.org/officeDocument/2006/relationships">
   <p:cSld>
     <p:spTree>
       <p:nvGrpSpPr>
@@ -7054,14 +9767,7 @@
         <p:cNvGrpSpPr/>
         <p:nvPr/>
       </p:nvGrpSpPr>
-      <p:grpSpPr>
-        <a:xfrm>
-          <a:off x="0" y="0"/>
-          <a:ext cx="0" cy="0"/>
-          <a:chOff x="0" y="0"/>
-          <a:chExt cx="0" cy="0"/>
-        </a:xfrm>
-      </p:grpSpPr>
+      <p:grpSpPr/>
       <p:sp>
         <p:nvSpPr>
           <p:cNvPr id="2" name="Rectangle 1"/>
@@ -7103,7 +9809,6 @@
           <a:lstStyle/>
           <a:p>
             <a:pPr algn="ctr"/>
-            <a:endParaRPr/>
           </a:p>
         </p:txBody>
       </p:sp>
@@ -7124,7 +9829,7 @@
           <a:noFill/>
         </p:spPr>
         <p:txBody>
-          <a:bodyPr wrap="square" lIns="45720" tIns="27432" rIns="45720" bIns="27432">
+          <a:bodyPr wrap="square" lIns="45720" rIns="45720" tIns="27432" bIns="27432">
             <a:spAutoFit/>
           </a:bodyPr>
           <a:lstStyle/>
@@ -7159,7 +9864,7 @@
           <a:noFill/>
         </p:spPr>
         <p:txBody>
-          <a:bodyPr wrap="square" lIns="45720" tIns="27432" rIns="45720" bIns="27432">
+          <a:bodyPr wrap="square" lIns="45720" rIns="45720" tIns="27432" bIns="27432">
             <a:spAutoFit/>
           </a:bodyPr>
           <a:lstStyle/>
@@ -7179,6 +9884,49 @@
       </p:sp>
       <p:sp>
         <p:nvSpPr>
+          <p:cNvPr id="5" name="Rectangle 4"/>
+          <p:cNvSpPr/>
+          <p:nvPr/>
+        </p:nvSpPr>
+        <p:spPr>
+          <a:xfrm>
+            <a:off x="548640" y="1508760"/>
+            <a:ext cx="109728" cy="548640"/>
+          </a:xfrm>
+          <a:prstGeom prst="rect">
+            <a:avLst/>
+          </a:prstGeom>
+          <a:solidFill>
+            <a:srgbClr val="F5A623"/>
+          </a:solidFill>
+          <a:ln>
+            <a:noFill/>
+          </a:ln>
+        </p:spPr>
+        <p:style>
+          <a:lnRef idx="1">
+            <a:schemeClr val="accent1"/>
+          </a:lnRef>
+          <a:fillRef idx="3">
+            <a:schemeClr val="accent1"/>
+          </a:fillRef>
+          <a:effectRef idx="2">
+            <a:schemeClr val="accent1"/>
+          </a:effectRef>
+          <a:fontRef idx="minor">
+            <a:schemeClr val="lt1"/>
+          </a:fontRef>
+        </p:style>
+        <p:txBody>
+          <a:bodyPr rtlCol="0" anchor="ctr"/>
+          <a:lstStyle/>
+          <a:p>
+            <a:pPr algn="ctr"/>
+          </a:p>
+        </p:txBody>
+      </p:sp>
+      <p:sp>
+        <p:nvSpPr>
           <p:cNvPr id="6" name="TextBox 5"/>
           <p:cNvSpPr txBox="1"/>
           <p:nvPr/>
@@ -7194,7 +9942,7 @@
           <a:noFill/>
         </p:spPr>
         <p:txBody>
-          <a:bodyPr wrap="square" lIns="45720" tIns="27432" rIns="45720" bIns="27432">
+          <a:bodyPr wrap="square" lIns="45720" rIns="45720" tIns="27432" bIns="27432">
             <a:spAutoFit/>
           </a:bodyPr>
           <a:lstStyle/>
@@ -7229,14 +9977,14 @@
           <a:noFill/>
         </p:spPr>
         <p:txBody>
-          <a:bodyPr wrap="square" lIns="45720" tIns="27432" rIns="45720" bIns="27432">
+          <a:bodyPr wrap="square" lIns="45720" rIns="45720" tIns="27432" bIns="27432">
             <a:spAutoFit/>
           </a:bodyPr>
           <a:lstStyle/>
           <a:p>
             <a:pPr algn="l"/>
             <a:r>
-              <a:rPr sz="1500" b="0" i="0" dirty="0">
+              <a:rPr sz="1500" b="0" i="0">
                 <a:solidFill>
                   <a:srgbClr val="1A1A1A"/>
                 </a:solidFill>
@@ -7248,7 +9996,7 @@
           <a:p>
             <a:pPr algn="l"/>
             <a:r>
-              <a:rPr sz="1500" b="0" i="0" dirty="0">
+              <a:rPr sz="1500" b="0" i="0">
                 <a:solidFill>
                   <a:srgbClr val="1A1A1A"/>
                 </a:solidFill>
@@ -7260,7 +10008,7 @@
           <a:p>
             <a:pPr algn="l"/>
             <a:r>
-              <a:rPr sz="1500" b="0" i="0" dirty="0">
+              <a:rPr sz="1500" b="0" i="0">
                 <a:solidFill>
                   <a:srgbClr val="1A1A1A"/>
                 </a:solidFill>
@@ -7272,7 +10020,7 @@
           <a:p>
             <a:pPr algn="l"/>
             <a:r>
-              <a:rPr sz="1500" b="0" i="0" dirty="0">
+              <a:rPr sz="1500" b="0" i="0">
                 <a:solidFill>
                   <a:srgbClr val="1A1A1A"/>
                 </a:solidFill>
@@ -7300,7 +10048,7 @@
           <a:noFill/>
         </p:spPr>
         <p:txBody>
-          <a:bodyPr wrap="square" lIns="45720" tIns="27432" rIns="45720" bIns="27432">
+          <a:bodyPr wrap="square" lIns="45720" rIns="45720" tIns="27432" bIns="27432">
             <a:spAutoFit/>
           </a:bodyPr>
           <a:lstStyle/>
@@ -7335,7 +10083,7 @@
           <a:noFill/>
         </p:spPr>
         <p:txBody>
-          <a:bodyPr wrap="square" lIns="45720" tIns="27432" rIns="45720" bIns="27432">
+          <a:bodyPr wrap="square" lIns="45720" rIns="45720" tIns="27432" bIns="27432">
             <a:spAutoFit/>
           </a:bodyPr>
           <a:lstStyle/>
@@ -7406,7 +10154,7 @@
           <a:noFill/>
         </p:spPr>
         <p:txBody>
-          <a:bodyPr wrap="square" lIns="45720" tIns="27432" rIns="45720" bIns="27432">
+          <a:bodyPr wrap="square" lIns="45720" rIns="45720" tIns="27432" bIns="27432">
             <a:spAutoFit/>
           </a:bodyPr>
           <a:lstStyle/>
@@ -7420,6 +10168,555 @@
                 <a:latin typeface="Calibri"/>
               </a:rPr>
               <a:t>If the thesis holds, a tiny transformer is just an AR model in disguise.</a:t>
+            </a:r>
+          </a:p>
+        </p:txBody>
+      </p:sp>
+    </p:spTree>
+  </p:cSld>
+  <p:clrMapOvr>
+    <a:masterClrMapping/>
+  </p:clrMapOvr>
+</p:sld>
+</file>
+
+<file path=ppt/slides/slide20.xml><?xml version="1.0" encoding="utf-8"?>
+<p:sld xmlns:a="http://schemas.openxmlformats.org/drawingml/2006/main" xmlns:p="http://schemas.openxmlformats.org/presentationml/2006/main" xmlns:r="http://schemas.openxmlformats.org/officeDocument/2006/relationships">
+  <p:cSld>
+    <p:spTree>
+      <p:nvGrpSpPr>
+        <p:cNvPr id="1" name=""/>
+        <p:cNvGrpSpPr/>
+        <p:nvPr/>
+      </p:nvGrpSpPr>
+      <p:grpSpPr/>
+      <p:sp>
+        <p:nvSpPr>
+          <p:cNvPr id="2" name="Rectangle 1"/>
+          <p:cNvSpPr/>
+          <p:nvPr/>
+        </p:nvSpPr>
+        <p:spPr>
+          <a:xfrm>
+            <a:off x="0" y="0"/>
+            <a:ext cx="12191695" cy="6858000"/>
+          </a:xfrm>
+          <a:prstGeom prst="rect">
+            <a:avLst/>
+          </a:prstGeom>
+          <a:solidFill>
+            <a:srgbClr val="21295C"/>
+          </a:solidFill>
+          <a:ln>
+            <a:noFill/>
+          </a:ln>
+          <a:effectLst/>
+        </p:spPr>
+        <p:style>
+          <a:lnRef idx="1">
+            <a:schemeClr val="accent1"/>
+          </a:lnRef>
+          <a:fillRef idx="3">
+            <a:schemeClr val="accent1"/>
+          </a:fillRef>
+          <a:effectRef idx="2">
+            <a:schemeClr val="accent1"/>
+          </a:effectRef>
+          <a:fontRef idx="minor">
+            <a:schemeClr val="lt1"/>
+          </a:fontRef>
+        </p:style>
+        <p:txBody>
+          <a:bodyPr rtlCol="0" anchor="ctr"/>
+          <a:lstStyle/>
+          <a:p>
+            <a:pPr algn="ctr"/>
+          </a:p>
+        </p:txBody>
+      </p:sp>
+      <p:sp>
+        <p:nvSpPr>
+          <p:cNvPr id="3" name="Rectangle 2"/>
+          <p:cNvSpPr/>
+          <p:nvPr/>
+        </p:nvSpPr>
+        <p:spPr>
+          <a:xfrm>
+            <a:off x="0" y="0"/>
+            <a:ext cx="365760" cy="6858000"/>
+          </a:xfrm>
+          <a:prstGeom prst="rect">
+            <a:avLst/>
+          </a:prstGeom>
+          <a:solidFill>
+            <a:srgbClr val="F5A623"/>
+          </a:solidFill>
+          <a:ln>
+            <a:noFill/>
+          </a:ln>
+        </p:spPr>
+        <p:style>
+          <a:lnRef idx="1">
+            <a:schemeClr val="accent1"/>
+          </a:lnRef>
+          <a:fillRef idx="3">
+            <a:schemeClr val="accent1"/>
+          </a:fillRef>
+          <a:effectRef idx="2">
+            <a:schemeClr val="accent1"/>
+          </a:effectRef>
+          <a:fontRef idx="minor">
+            <a:schemeClr val="lt1"/>
+          </a:fontRef>
+        </p:style>
+        <p:txBody>
+          <a:bodyPr rtlCol="0" anchor="ctr"/>
+          <a:lstStyle/>
+          <a:p>
+            <a:pPr algn="ctr"/>
+          </a:p>
+        </p:txBody>
+      </p:sp>
+      <p:sp>
+        <p:nvSpPr>
+          <p:cNvPr id="4" name="TextBox 3"/>
+          <p:cNvSpPr txBox="1"/>
+          <p:nvPr/>
+        </p:nvSpPr>
+        <p:spPr>
+          <a:xfrm>
+            <a:off x="914400" y="731520"/>
+            <a:ext cx="10515600" cy="914400"/>
+          </a:xfrm>
+          <a:prstGeom prst="rect">
+            <a:avLst/>
+          </a:prstGeom>
+          <a:noFill/>
+        </p:spPr>
+        <p:txBody>
+          <a:bodyPr wrap="square" lIns="45720" rIns="45720" tIns="27432" bIns="27432">
+            <a:spAutoFit/>
+          </a:bodyPr>
+          <a:lstStyle/>
+          <a:p>
+            <a:pPr algn="l"/>
+            <a:r>
+              <a:rPr sz="3800" b="1" i="0">
+                <a:solidFill>
+                  <a:srgbClr val="F2F4F8"/>
+                </a:solidFill>
+                <a:latin typeface="Calibri"/>
+              </a:rPr>
+              <a:t>Key Takeaway</a:t>
+            </a:r>
+          </a:p>
+        </p:txBody>
+      </p:sp>
+      <p:sp>
+        <p:nvSpPr>
+          <p:cNvPr id="5" name="TextBox 4"/>
+          <p:cNvSpPr txBox="1"/>
+          <p:nvPr/>
+        </p:nvSpPr>
+        <p:spPr>
+          <a:xfrm>
+            <a:off x="914400" y="1645920"/>
+            <a:ext cx="10515600" cy="548640"/>
+          </a:xfrm>
+          <a:prstGeom prst="rect">
+            <a:avLst/>
+          </a:prstGeom>
+          <a:noFill/>
+        </p:spPr>
+        <p:txBody>
+          <a:bodyPr wrap="square" lIns="45720" rIns="45720" tIns="27432" bIns="27432">
+            <a:spAutoFit/>
+          </a:bodyPr>
+          <a:lstStyle/>
+          <a:p>
+            <a:pPr algn="l"/>
+            <a:r>
+              <a:rPr sz="1800" b="0" i="0">
+                <a:solidFill>
+                  <a:srgbClr val="CADCFC"/>
+                </a:solidFill>
+                <a:latin typeface="Calibri"/>
+              </a:rPr>
+              <a:t>Three DSP-anchored hyperparameters define the design</a:t>
+            </a:r>
+          </a:p>
+        </p:txBody>
+      </p:sp>
+      <p:sp>
+        <p:nvSpPr>
+          <p:cNvPr id="6" name="Rounded Rectangle 5"/>
+          <p:cNvSpPr/>
+          <p:nvPr/>
+        </p:nvSpPr>
+        <p:spPr>
+          <a:xfrm>
+            <a:off x="914400" y="2834640"/>
+            <a:ext cx="10332720" cy="822960"/>
+          </a:xfrm>
+          <a:prstGeom prst="roundRect">
+            <a:avLst/>
+          </a:prstGeom>
+          <a:solidFill>
+            <a:srgbClr val="065A82"/>
+          </a:solidFill>
+          <a:ln>
+            <a:noFill/>
+          </a:ln>
+        </p:spPr>
+        <p:style>
+          <a:lnRef idx="1">
+            <a:schemeClr val="accent1"/>
+          </a:lnRef>
+          <a:fillRef idx="3">
+            <a:schemeClr val="accent1"/>
+          </a:fillRef>
+          <a:effectRef idx="2">
+            <a:schemeClr val="accent1"/>
+          </a:effectRef>
+          <a:fontRef idx="minor">
+            <a:schemeClr val="lt1"/>
+          </a:fontRef>
+        </p:style>
+        <p:txBody>
+          <a:bodyPr rtlCol="0" anchor="ctr"/>
+          <a:lstStyle/>
+          <a:p>
+            <a:pPr algn="ctr"/>
+          </a:p>
+        </p:txBody>
+      </p:sp>
+      <p:sp>
+        <p:nvSpPr>
+          <p:cNvPr id="7" name="TextBox 6"/>
+          <p:cNvSpPr txBox="1"/>
+          <p:nvPr/>
+        </p:nvSpPr>
+        <p:spPr>
+          <a:xfrm>
+            <a:off x="1188720" y="3017520"/>
+            <a:ext cx="3200400" cy="457200"/>
+          </a:xfrm>
+          <a:prstGeom prst="rect">
+            <a:avLst/>
+          </a:prstGeom>
+          <a:noFill/>
+        </p:spPr>
+        <p:txBody>
+          <a:bodyPr wrap="square" lIns="45720" rIns="45720" tIns="27432" bIns="27432">
+            <a:spAutoFit/>
+          </a:bodyPr>
+          <a:lstStyle/>
+          <a:p>
+            <a:pPr algn="l"/>
+            <a:r>
+              <a:rPr sz="2000" b="1" i="0">
+                <a:solidFill>
+                  <a:srgbClr val="F5A623"/>
+                </a:solidFill>
+                <a:latin typeface="Calibri"/>
+              </a:rPr>
+              <a:t>n_heads</a:t>
+            </a:r>
+          </a:p>
+        </p:txBody>
+      </p:sp>
+      <p:sp>
+        <p:nvSpPr>
+          <p:cNvPr id="8" name="TextBox 7"/>
+          <p:cNvSpPr txBox="1"/>
+          <p:nvPr/>
+        </p:nvSpPr>
+        <p:spPr>
+          <a:xfrm>
+            <a:off x="4572000" y="3017520"/>
+            <a:ext cx="6400800" cy="457200"/>
+          </a:xfrm>
+          <a:prstGeom prst="rect">
+            <a:avLst/>
+          </a:prstGeom>
+          <a:noFill/>
+        </p:spPr>
+        <p:txBody>
+          <a:bodyPr wrap="square" lIns="45720" rIns="45720" tIns="27432" bIns="27432">
+            <a:spAutoFit/>
+          </a:bodyPr>
+          <a:lstStyle/>
+          <a:p>
+            <a:pPr algn="l"/>
+            <a:r>
+              <a:rPr sz="2000" b="0" i="0">
+                <a:solidFill>
+                  <a:srgbClr val="F2F4F8"/>
+                </a:solidFill>
+                <a:latin typeface="Calibri"/>
+              </a:rPr>
+              <a:t>≈  effective AR order</a:t>
+            </a:r>
+          </a:p>
+        </p:txBody>
+      </p:sp>
+      <p:sp>
+        <p:nvSpPr>
+          <p:cNvPr id="9" name="Rounded Rectangle 8"/>
+          <p:cNvSpPr/>
+          <p:nvPr/>
+        </p:nvSpPr>
+        <p:spPr>
+          <a:xfrm>
+            <a:off x="914400" y="3794760"/>
+            <a:ext cx="10332720" cy="822960"/>
+          </a:xfrm>
+          <a:prstGeom prst="roundRect">
+            <a:avLst/>
+          </a:prstGeom>
+          <a:solidFill>
+            <a:srgbClr val="065A82"/>
+          </a:solidFill>
+          <a:ln>
+            <a:noFill/>
+          </a:ln>
+        </p:spPr>
+        <p:style>
+          <a:lnRef idx="1">
+            <a:schemeClr val="accent1"/>
+          </a:lnRef>
+          <a:fillRef idx="3">
+            <a:schemeClr val="accent1"/>
+          </a:fillRef>
+          <a:effectRef idx="2">
+            <a:schemeClr val="accent1"/>
+          </a:effectRef>
+          <a:fontRef idx="minor">
+            <a:schemeClr val="lt1"/>
+          </a:fontRef>
+        </p:style>
+        <p:txBody>
+          <a:bodyPr rtlCol="0" anchor="ctr"/>
+          <a:lstStyle/>
+          <a:p>
+            <a:pPr algn="ctr"/>
+          </a:p>
+        </p:txBody>
+      </p:sp>
+      <p:sp>
+        <p:nvSpPr>
+          <p:cNvPr id="10" name="TextBox 9"/>
+          <p:cNvSpPr txBox="1"/>
+          <p:nvPr/>
+        </p:nvSpPr>
+        <p:spPr>
+          <a:xfrm>
+            <a:off x="1188720" y="3977640"/>
+            <a:ext cx="3200400" cy="457200"/>
+          </a:xfrm>
+          <a:prstGeom prst="rect">
+            <a:avLst/>
+          </a:prstGeom>
+          <a:noFill/>
+        </p:spPr>
+        <p:txBody>
+          <a:bodyPr wrap="square" lIns="45720" rIns="45720" tIns="27432" bIns="27432">
+            <a:spAutoFit/>
+          </a:bodyPr>
+          <a:lstStyle/>
+          <a:p>
+            <a:pPr algn="l"/>
+            <a:r>
+              <a:rPr sz="2000" b="1" i="0">
+                <a:solidFill>
+                  <a:srgbClr val="F5A623"/>
+                </a:solidFill>
+                <a:latin typeface="Calibri"/>
+              </a:rPr>
+              <a:t>context_length</a:t>
+            </a:r>
+          </a:p>
+        </p:txBody>
+      </p:sp>
+      <p:sp>
+        <p:nvSpPr>
+          <p:cNvPr id="11" name="TextBox 10"/>
+          <p:cNvSpPr txBox="1"/>
+          <p:nvPr/>
+        </p:nvSpPr>
+        <p:spPr>
+          <a:xfrm>
+            <a:off x="4572000" y="3977640"/>
+            <a:ext cx="6400800" cy="457200"/>
+          </a:xfrm>
+          <a:prstGeom prst="rect">
+            <a:avLst/>
+          </a:prstGeom>
+          <a:noFill/>
+        </p:spPr>
+        <p:txBody>
+          <a:bodyPr wrap="square" lIns="45720" rIns="45720" tIns="27432" bIns="27432">
+            <a:spAutoFit/>
+          </a:bodyPr>
+          <a:lstStyle/>
+          <a:p>
+            <a:pPr algn="l"/>
+            <a:r>
+              <a:rPr sz="2000" b="0" i="0">
+                <a:solidFill>
+                  <a:srgbClr val="F2F4F8"/>
+                </a:solidFill>
+                <a:latin typeface="Calibri"/>
+              </a:rPr>
+              <a:t>≈  N_FFT  ≈  fs / f_min</a:t>
+            </a:r>
+          </a:p>
+        </p:txBody>
+      </p:sp>
+      <p:sp>
+        <p:nvSpPr>
+          <p:cNvPr id="12" name="Rounded Rectangle 11"/>
+          <p:cNvSpPr/>
+          <p:nvPr/>
+        </p:nvSpPr>
+        <p:spPr>
+          <a:xfrm>
+            <a:off x="914400" y="4754880"/>
+            <a:ext cx="10332720" cy="822960"/>
+          </a:xfrm>
+          <a:prstGeom prst="roundRect">
+            <a:avLst/>
+          </a:prstGeom>
+          <a:solidFill>
+            <a:srgbClr val="065A82"/>
+          </a:solidFill>
+          <a:ln>
+            <a:noFill/>
+          </a:ln>
+        </p:spPr>
+        <p:style>
+          <a:lnRef idx="1">
+            <a:schemeClr val="accent1"/>
+          </a:lnRef>
+          <a:fillRef idx="3">
+            <a:schemeClr val="accent1"/>
+          </a:fillRef>
+          <a:effectRef idx="2">
+            <a:schemeClr val="accent1"/>
+          </a:effectRef>
+          <a:fontRef idx="minor">
+            <a:schemeClr val="lt1"/>
+          </a:fontRef>
+        </p:style>
+        <p:txBody>
+          <a:bodyPr rtlCol="0" anchor="ctr"/>
+          <a:lstStyle/>
+          <a:p>
+            <a:pPr algn="ctr"/>
+          </a:p>
+        </p:txBody>
+      </p:sp>
+      <p:sp>
+        <p:nvSpPr>
+          <p:cNvPr id="13" name="TextBox 12"/>
+          <p:cNvSpPr txBox="1"/>
+          <p:nvPr/>
+        </p:nvSpPr>
+        <p:spPr>
+          <a:xfrm>
+            <a:off x="1188720" y="4937760"/>
+            <a:ext cx="3200400" cy="457200"/>
+          </a:xfrm>
+          <a:prstGeom prst="rect">
+            <a:avLst/>
+          </a:prstGeom>
+          <a:noFill/>
+        </p:spPr>
+        <p:txBody>
+          <a:bodyPr wrap="square" lIns="45720" rIns="45720" tIns="27432" bIns="27432">
+            <a:spAutoFit/>
+          </a:bodyPr>
+          <a:lstStyle/>
+          <a:p>
+            <a:pPr algn="l"/>
+            <a:r>
+              <a:rPr sz="2000" b="1" i="0">
+                <a:solidFill>
+                  <a:srgbClr val="F5A623"/>
+                </a:solidFill>
+                <a:latin typeface="Calibri"/>
+              </a:rPr>
+              <a:t>head_dim</a:t>
+            </a:r>
+          </a:p>
+        </p:txBody>
+      </p:sp>
+      <p:sp>
+        <p:nvSpPr>
+          <p:cNvPr id="14" name="TextBox 13"/>
+          <p:cNvSpPr txBox="1"/>
+          <p:nvPr/>
+        </p:nvSpPr>
+        <p:spPr>
+          <a:xfrm>
+            <a:off x="4572000" y="4937760"/>
+            <a:ext cx="6400800" cy="457200"/>
+          </a:xfrm>
+          <a:prstGeom prst="rect">
+            <a:avLst/>
+          </a:prstGeom>
+          <a:noFill/>
+        </p:spPr>
+        <p:txBody>
+          <a:bodyPr wrap="square" lIns="45720" rIns="45720" tIns="27432" bIns="27432">
+            <a:spAutoFit/>
+          </a:bodyPr>
+          <a:lstStyle/>
+          <a:p>
+            <a:pPr algn="l"/>
+            <a:r>
+              <a:rPr sz="2000" b="0" i="0">
+                <a:solidFill>
+                  <a:srgbClr val="F2F4F8"/>
+                </a:solidFill>
+                <a:latin typeface="Calibri"/>
+              </a:rPr>
+              <a:t>≈  2 · log₂(context_length)</a:t>
+            </a:r>
+          </a:p>
+        </p:txBody>
+      </p:sp>
+      <p:sp>
+        <p:nvSpPr>
+          <p:cNvPr id="15" name="TextBox 14"/>
+          <p:cNvSpPr txBox="1"/>
+          <p:nvPr/>
+        </p:nvSpPr>
+        <p:spPr>
+          <a:xfrm>
+            <a:off x="914400" y="5943600"/>
+            <a:ext cx="10515600" cy="640080"/>
+          </a:xfrm>
+          <a:prstGeom prst="rect">
+            <a:avLst/>
+          </a:prstGeom>
+          <a:noFill/>
+        </p:spPr>
+        <p:txBody>
+          <a:bodyPr wrap="square" lIns="45720" rIns="45720" tIns="27432" bIns="27432">
+            <a:spAutoFit/>
+          </a:bodyPr>
+          <a:lstStyle/>
+          <a:p>
+            <a:pPr algn="l"/>
+            <a:r>
+              <a:rPr sz="1600" b="0" i="0">
+                <a:solidFill>
+                  <a:srgbClr val="CADCFC"/>
+                </a:solidFill>
+                <a:latin typeface="Calibri"/>
+              </a:rPr>
+              <a:t>emb_dim falls out.  The framing generalizes to many signal-processing tasks.</a:t>
             </a:r>
           </a:p>
         </p:txBody>
@@ -7433,7 +10730,7 @@
 </file>
 
 <file path=ppt/slides/slide3.xml><?xml version="1.0" encoding="utf-8"?>
-<p:sld xmlns:a="http://schemas.openxmlformats.org/drawingml/2006/main" xmlns:r="http://schemas.openxmlformats.org/officeDocument/2006/relationships" xmlns:p="http://schemas.openxmlformats.org/presentationml/2006/main">
+<p:sld xmlns:a="http://schemas.openxmlformats.org/drawingml/2006/main" xmlns:p="http://schemas.openxmlformats.org/presentationml/2006/main" xmlns:r="http://schemas.openxmlformats.org/officeDocument/2006/relationships">
   <p:cSld>
     <p:spTree>
       <p:nvGrpSpPr>
@@ -7441,14 +10738,7 @@
         <p:cNvGrpSpPr/>
         <p:nvPr/>
       </p:nvGrpSpPr>
-      <p:grpSpPr>
-        <a:xfrm>
-          <a:off x="0" y="0"/>
-          <a:ext cx="0" cy="0"/>
-          <a:chOff x="0" y="0"/>
-          <a:chExt cx="0" cy="0"/>
-        </a:xfrm>
-      </p:grpSpPr>
+      <p:grpSpPr/>
       <p:sp>
         <p:nvSpPr>
           <p:cNvPr id="2" name="Rectangle 1"/>
@@ -7490,7 +10780,6 @@
           <a:lstStyle/>
           <a:p>
             <a:pPr algn="ctr"/>
-            <a:endParaRPr/>
           </a:p>
         </p:txBody>
       </p:sp>
@@ -7511,7 +10800,7 @@
           <a:noFill/>
         </p:spPr>
         <p:txBody>
-          <a:bodyPr wrap="square" lIns="45720" tIns="27432" rIns="45720" bIns="27432">
+          <a:bodyPr wrap="square" lIns="45720" rIns="45720" tIns="27432" bIns="27432">
             <a:spAutoFit/>
           </a:bodyPr>
           <a:lstStyle/>
@@ -7546,7 +10835,7 @@
           <a:noFill/>
         </p:spPr>
         <p:txBody>
-          <a:bodyPr wrap="square" lIns="45720" tIns="27432" rIns="45720" bIns="27432">
+          <a:bodyPr wrap="square" lIns="45720" rIns="45720" tIns="27432" bIns="27432">
             <a:spAutoFit/>
           </a:bodyPr>
           <a:lstStyle/>
@@ -7561,6 +10850,49 @@
               </a:rPr>
               <a:t>A sinusoid is exactly an AR(2) process</a:t>
             </a:r>
+          </a:p>
+        </p:txBody>
+      </p:sp>
+      <p:sp>
+        <p:nvSpPr>
+          <p:cNvPr id="5" name="Rectangle 4"/>
+          <p:cNvSpPr/>
+          <p:nvPr/>
+        </p:nvSpPr>
+        <p:spPr>
+          <a:xfrm>
+            <a:off x="548640" y="1508760"/>
+            <a:ext cx="109728" cy="548640"/>
+          </a:xfrm>
+          <a:prstGeom prst="rect">
+            <a:avLst/>
+          </a:prstGeom>
+          <a:solidFill>
+            <a:srgbClr val="F5A623"/>
+          </a:solidFill>
+          <a:ln>
+            <a:noFill/>
+          </a:ln>
+        </p:spPr>
+        <p:style>
+          <a:lnRef idx="1">
+            <a:schemeClr val="accent1"/>
+          </a:lnRef>
+          <a:fillRef idx="3">
+            <a:schemeClr val="accent1"/>
+          </a:fillRef>
+          <a:effectRef idx="2">
+            <a:schemeClr val="accent1"/>
+          </a:effectRef>
+          <a:fontRef idx="minor">
+            <a:schemeClr val="lt1"/>
+          </a:fontRef>
+        </p:style>
+        <p:txBody>
+          <a:bodyPr rtlCol="0" anchor="ctr"/>
+          <a:lstStyle/>
+          <a:p>
+            <a:pPr algn="ctr"/>
           </a:p>
         </p:txBody>
       </p:sp>
@@ -7604,7 +10936,6 @@
           <a:lstStyle/>
           <a:p>
             <a:pPr algn="ctr"/>
-            <a:endParaRPr/>
           </a:p>
         </p:txBody>
       </p:sp>
@@ -7625,7 +10956,7 @@
           <a:noFill/>
         </p:spPr>
         <p:txBody>
-          <a:bodyPr wrap="square" lIns="45720" tIns="27432" rIns="45720" bIns="27432">
+          <a:bodyPr wrap="square" lIns="45720" rIns="45720" tIns="27432" bIns="27432">
             <a:spAutoFit/>
           </a:bodyPr>
           <a:lstStyle/>
@@ -7660,7 +10991,7 @@
           <a:noFill/>
         </p:spPr>
         <p:txBody>
-          <a:bodyPr wrap="square" lIns="45720" tIns="27432" rIns="45720" bIns="27432">
+          <a:bodyPr wrap="square" lIns="45720" rIns="45720" tIns="27432" bIns="27432">
             <a:spAutoFit/>
           </a:bodyPr>
           <a:lstStyle/>
@@ -7695,7 +11026,7 @@
           <a:noFill/>
         </p:spPr>
         <p:txBody>
-          <a:bodyPr wrap="square" lIns="45720" tIns="27432" rIns="45720" bIns="27432">
+          <a:bodyPr wrap="square" lIns="45720" rIns="45720" tIns="27432" bIns="27432">
             <a:spAutoFit/>
           </a:bodyPr>
           <a:lstStyle/>
@@ -7758,7 +11089,7 @@
 </file>
 
 <file path=ppt/slides/slide4.xml><?xml version="1.0" encoding="utf-8"?>
-<p:sld xmlns:a="http://schemas.openxmlformats.org/drawingml/2006/main" xmlns:r="http://schemas.openxmlformats.org/officeDocument/2006/relationships" xmlns:p="http://schemas.openxmlformats.org/presentationml/2006/main">
+<p:sld xmlns:a="http://schemas.openxmlformats.org/drawingml/2006/main" xmlns:p="http://schemas.openxmlformats.org/presentationml/2006/main" xmlns:r="http://schemas.openxmlformats.org/officeDocument/2006/relationships">
   <p:cSld>
     <p:spTree>
       <p:nvGrpSpPr>
@@ -7766,14 +11097,7 @@
         <p:cNvGrpSpPr/>
         <p:nvPr/>
       </p:nvGrpSpPr>
-      <p:grpSpPr>
-        <a:xfrm>
-          <a:off x="0" y="0"/>
-          <a:ext cx="0" cy="0"/>
-          <a:chOff x="0" y="0"/>
-          <a:chExt cx="0" cy="0"/>
-        </a:xfrm>
-      </p:grpSpPr>
+      <p:grpSpPr/>
       <p:sp>
         <p:nvSpPr>
           <p:cNvPr id="2" name="Rectangle 1"/>
@@ -7815,7 +11139,6 @@
           <a:lstStyle/>
           <a:p>
             <a:pPr algn="ctr"/>
-            <a:endParaRPr/>
           </a:p>
         </p:txBody>
       </p:sp>
@@ -7836,7 +11159,7 @@
           <a:noFill/>
         </p:spPr>
         <p:txBody>
-          <a:bodyPr wrap="square" lIns="45720" tIns="27432" rIns="45720" bIns="27432">
+          <a:bodyPr wrap="square" lIns="45720" rIns="45720" tIns="27432" bIns="27432">
             <a:spAutoFit/>
           </a:bodyPr>
           <a:lstStyle/>
@@ -7871,7 +11194,7 @@
           <a:noFill/>
         </p:spPr>
         <p:txBody>
-          <a:bodyPr wrap="square" lIns="45720" tIns="27432" rIns="45720" bIns="27432">
+          <a:bodyPr wrap="square" lIns="45720" rIns="45720" tIns="27432" bIns="27432">
             <a:spAutoFit/>
           </a:bodyPr>
           <a:lstStyle/>
@@ -7886,6 +11209,49 @@
               </a:rPr>
               <a:t>Noisy sinusoid → clean next-sample prediction</a:t>
             </a:r>
+          </a:p>
+        </p:txBody>
+      </p:sp>
+      <p:sp>
+        <p:nvSpPr>
+          <p:cNvPr id="5" name="Rectangle 4"/>
+          <p:cNvSpPr/>
+          <p:nvPr/>
+        </p:nvSpPr>
+        <p:spPr>
+          <a:xfrm>
+            <a:off x="548640" y="1508760"/>
+            <a:ext cx="109728" cy="548640"/>
+          </a:xfrm>
+          <a:prstGeom prst="rect">
+            <a:avLst/>
+          </a:prstGeom>
+          <a:solidFill>
+            <a:srgbClr val="F5A623"/>
+          </a:solidFill>
+          <a:ln>
+            <a:noFill/>
+          </a:ln>
+        </p:spPr>
+        <p:style>
+          <a:lnRef idx="1">
+            <a:schemeClr val="accent1"/>
+          </a:lnRef>
+          <a:fillRef idx="3">
+            <a:schemeClr val="accent1"/>
+          </a:fillRef>
+          <a:effectRef idx="2">
+            <a:schemeClr val="accent1"/>
+          </a:effectRef>
+          <a:fontRef idx="minor">
+            <a:schemeClr val="lt1"/>
+          </a:fontRef>
+        </p:style>
+        <p:txBody>
+          <a:bodyPr rtlCol="0" anchor="ctr"/>
+          <a:lstStyle/>
+          <a:p>
+            <a:pPr algn="ctr"/>
           </a:p>
         </p:txBody>
       </p:sp>
@@ -7908,32 +11274,14 @@
                 <a:tableStyleId>{5C22544A-7EE6-4342-B048-85BDC9FD1C3A}</a:tableStyleId>
               </a:tblPr>
               <a:tblGrid>
-                <a:gridCol w="2651760">
-                  <a:extLst>
-                    <a:ext uri="{9D8B030D-6E8A-4147-A177-3AD203B41FA5}">
-                      <a16:colId xmlns:a16="http://schemas.microsoft.com/office/drawing/2014/main" val="20000"/>
-                    </a:ext>
-                  </a:extLst>
-                </a:gridCol>
-                <a:gridCol w="3535680">
-                  <a:extLst>
-                    <a:ext uri="{9D8B030D-6E8A-4147-A177-3AD203B41FA5}">
-                      <a16:colId xmlns:a16="http://schemas.microsoft.com/office/drawing/2014/main" val="20001"/>
-                    </a:ext>
-                  </a:extLst>
-                </a:gridCol>
-                <a:gridCol w="4419600">
-                  <a:extLst>
-                    <a:ext uri="{9D8B030D-6E8A-4147-A177-3AD203B41FA5}">
-                      <a16:colId xmlns:a16="http://schemas.microsoft.com/office/drawing/2014/main" val="20002"/>
-                    </a:ext>
-                  </a:extLst>
-                </a:gridCol>
+                <a:gridCol w="2651760"/>
+                <a:gridCol w="3535680"/>
+                <a:gridCol w="4419600"/>
               </a:tblGrid>
               <a:tr h="502920">
                 <a:tc>
                   <a:txBody>
-                    <a:bodyPr/>
+                    <a:bodyPr wrap="square"/>
                     <a:lstStyle/>
                     <a:p>
                       <a:r>
@@ -7955,7 +11303,7 @@
                 </a:tc>
                 <a:tc>
                   <a:txBody>
-                    <a:bodyPr/>
+                    <a:bodyPr wrap="square"/>
                     <a:lstStyle/>
                     <a:p>
                       <a:r>
@@ -7977,7 +11325,7 @@
                 </a:tc>
                 <a:tc>
                   <a:txBody>
-                    <a:bodyPr/>
+                    <a:bodyPr wrap="square"/>
                     <a:lstStyle/>
                     <a:p>
                       <a:r>
@@ -7997,16 +11345,11 @@
                     </a:solidFill>
                   </a:tcPr>
                 </a:tc>
-                <a:extLst>
-                  <a:ext uri="{0D108BD9-81ED-4DB2-BD59-A6C34878D82A}">
-                    <a16:rowId xmlns:a16="http://schemas.microsoft.com/office/drawing/2014/main" val="10000"/>
-                  </a:ext>
-                </a:extLst>
               </a:tr>
               <a:tr h="502920">
                 <a:tc>
                   <a:txBody>
-                    <a:bodyPr/>
+                    <a:bodyPr wrap="square"/>
                     <a:lstStyle/>
                     <a:p>
                       <a:r>
@@ -8028,7 +11371,7 @@
                 </a:tc>
                 <a:tc>
                   <a:txBody>
-                    <a:bodyPr/>
+                    <a:bodyPr wrap="square"/>
                     <a:lstStyle/>
                     <a:p>
                       <a:r>
@@ -8050,7 +11393,7 @@
                 </a:tc>
                 <a:tc>
                   <a:txBody>
-                    <a:bodyPr/>
+                    <a:bodyPr wrap="square"/>
                     <a:lstStyle/>
                     <a:p>
                       <a:r>
@@ -8070,16 +11413,11 @@
                     </a:solidFill>
                   </a:tcPr>
                 </a:tc>
-                <a:extLst>
-                  <a:ext uri="{0D108BD9-81ED-4DB2-BD59-A6C34878D82A}">
-                    <a16:rowId xmlns:a16="http://schemas.microsoft.com/office/drawing/2014/main" val="10001"/>
-                  </a:ext>
-                </a:extLst>
               </a:tr>
               <a:tr h="502920">
                 <a:tc>
                   <a:txBody>
-                    <a:bodyPr/>
+                    <a:bodyPr wrap="square"/>
                     <a:lstStyle/>
                     <a:p>
                       <a:r>
@@ -8101,7 +11439,7 @@
                 </a:tc>
                 <a:tc>
                   <a:txBody>
-                    <a:bodyPr/>
+                    <a:bodyPr wrap="square"/>
                     <a:lstStyle/>
                     <a:p>
                       <a:r>
@@ -8123,7 +11461,7 @@
                 </a:tc>
                 <a:tc>
                   <a:txBody>
-                    <a:bodyPr/>
+                    <a:bodyPr wrap="square"/>
                     <a:lstStyle/>
                     <a:p>
                       <a:r>
@@ -8143,16 +11481,11 @@
                     </a:solidFill>
                   </a:tcPr>
                 </a:tc>
-                <a:extLst>
-                  <a:ext uri="{0D108BD9-81ED-4DB2-BD59-A6C34878D82A}">
-                    <a16:rowId xmlns:a16="http://schemas.microsoft.com/office/drawing/2014/main" val="10002"/>
-                  </a:ext>
-                </a:extLst>
               </a:tr>
               <a:tr h="502920">
                 <a:tc>
                   <a:txBody>
-                    <a:bodyPr/>
+                    <a:bodyPr wrap="square"/>
                     <a:lstStyle/>
                     <a:p>
                       <a:r>
@@ -8174,7 +11507,7 @@
                 </a:tc>
                 <a:tc>
                   <a:txBody>
-                    <a:bodyPr/>
+                    <a:bodyPr wrap="square"/>
                     <a:lstStyle/>
                     <a:p>
                       <a:r>
@@ -8196,7 +11529,7 @@
                 </a:tc>
                 <a:tc>
                   <a:txBody>
-                    <a:bodyPr/>
+                    <a:bodyPr wrap="square"/>
                     <a:lstStyle/>
                     <a:p>
                       <a:r>
@@ -8216,16 +11549,11 @@
                     </a:solidFill>
                   </a:tcPr>
                 </a:tc>
-                <a:extLst>
-                  <a:ext uri="{0D108BD9-81ED-4DB2-BD59-A6C34878D82A}">
-                    <a16:rowId xmlns:a16="http://schemas.microsoft.com/office/drawing/2014/main" val="10003"/>
-                  </a:ext>
-                </a:extLst>
               </a:tr>
               <a:tr h="502920">
                 <a:tc>
                   <a:txBody>
-                    <a:bodyPr/>
+                    <a:bodyPr wrap="square"/>
                     <a:lstStyle/>
                     <a:p>
                       <a:r>
@@ -8247,7 +11575,7 @@
                 </a:tc>
                 <a:tc>
                   <a:txBody>
-                    <a:bodyPr/>
+                    <a:bodyPr wrap="square"/>
                     <a:lstStyle/>
                     <a:p>
                       <a:r>
@@ -8269,7 +11597,7 @@
                 </a:tc>
                 <a:tc>
                   <a:txBody>
-                    <a:bodyPr/>
+                    <a:bodyPr wrap="square"/>
                     <a:lstStyle/>
                     <a:p>
                       <a:r>
@@ -8289,16 +11617,11 @@
                     </a:solidFill>
                   </a:tcPr>
                 </a:tc>
-                <a:extLst>
-                  <a:ext uri="{0D108BD9-81ED-4DB2-BD59-A6C34878D82A}">
-                    <a16:rowId xmlns:a16="http://schemas.microsoft.com/office/drawing/2014/main" val="10004"/>
-                  </a:ext>
-                </a:extLst>
               </a:tr>
               <a:tr h="502920">
                 <a:tc>
                   <a:txBody>
-                    <a:bodyPr/>
+                    <a:bodyPr wrap="square"/>
                     <a:lstStyle/>
                     <a:p>
                       <a:r>
@@ -8320,7 +11643,7 @@
                 </a:tc>
                 <a:tc>
                   <a:txBody>
-                    <a:bodyPr/>
+                    <a:bodyPr wrap="square"/>
                     <a:lstStyle/>
                     <a:p>
                       <a:r>
@@ -8342,7 +11665,7 @@
                 </a:tc>
                 <a:tc>
                   <a:txBody>
-                    <a:bodyPr/>
+                    <a:bodyPr wrap="square"/>
                     <a:lstStyle/>
                     <a:p>
                       <a:r>
@@ -8362,16 +11685,11 @@
                     </a:solidFill>
                   </a:tcPr>
                 </a:tc>
-                <a:extLst>
-                  <a:ext uri="{0D108BD9-81ED-4DB2-BD59-A6C34878D82A}">
-                    <a16:rowId xmlns:a16="http://schemas.microsoft.com/office/drawing/2014/main" val="10005"/>
-                  </a:ext>
-                </a:extLst>
               </a:tr>
               <a:tr h="502920">
                 <a:tc>
                   <a:txBody>
-                    <a:bodyPr/>
+                    <a:bodyPr wrap="square"/>
                     <a:lstStyle/>
                     <a:p>
                       <a:r>
@@ -8393,7 +11711,7 @@
                 </a:tc>
                 <a:tc>
                   <a:txBody>
-                    <a:bodyPr/>
+                    <a:bodyPr wrap="square"/>
                     <a:lstStyle/>
                     <a:p>
                       <a:r>
@@ -8415,7 +11733,7 @@
                 </a:tc>
                 <a:tc>
                   <a:txBody>
-                    <a:bodyPr/>
+                    <a:bodyPr wrap="square"/>
                     <a:lstStyle/>
                     <a:p>
                       <a:r>
@@ -8435,16 +11753,11 @@
                     </a:solidFill>
                   </a:tcPr>
                 </a:tc>
-                <a:extLst>
-                  <a:ext uri="{0D108BD9-81ED-4DB2-BD59-A6C34878D82A}">
-                    <a16:rowId xmlns:a16="http://schemas.microsoft.com/office/drawing/2014/main" val="10006"/>
-                  </a:ext>
-                </a:extLst>
               </a:tr>
               <a:tr h="502920">
                 <a:tc>
                   <a:txBody>
-                    <a:bodyPr/>
+                    <a:bodyPr wrap="square"/>
                     <a:lstStyle/>
                     <a:p>
                       <a:r>
@@ -8466,7 +11779,7 @@
                 </a:tc>
                 <a:tc>
                   <a:txBody>
-                    <a:bodyPr/>
+                    <a:bodyPr wrap="square"/>
                     <a:lstStyle/>
                     <a:p>
                       <a:r>
@@ -8488,7 +11801,7 @@
                 </a:tc>
                 <a:tc>
                   <a:txBody>
-                    <a:bodyPr/>
+                    <a:bodyPr wrap="square"/>
                     <a:lstStyle/>
                     <a:p>
                       <a:r>
@@ -8508,11 +11821,6 @@
                     </a:solidFill>
                   </a:tcPr>
                 </a:tc>
-                <a:extLst>
-                  <a:ext uri="{0D108BD9-81ED-4DB2-BD59-A6C34878D82A}">
-                    <a16:rowId xmlns:a16="http://schemas.microsoft.com/office/drawing/2014/main" val="10007"/>
-                  </a:ext>
-                </a:extLst>
               </a:tr>
             </a:tbl>
           </a:graphicData>
@@ -8535,7 +11843,7 @@
           <a:noFill/>
         </p:spPr>
         <p:txBody>
-          <a:bodyPr wrap="square" lIns="45720" tIns="27432" rIns="45720" bIns="27432">
+          <a:bodyPr wrap="square" lIns="45720" rIns="45720" tIns="27432" bIns="27432">
             <a:spAutoFit/>
           </a:bodyPr>
           <a:lstStyle/>
@@ -8562,7 +11870,7 @@
 </file>
 
 <file path=ppt/slides/slide5.xml><?xml version="1.0" encoding="utf-8"?>
-<p:sld xmlns:a="http://schemas.openxmlformats.org/drawingml/2006/main" xmlns:r="http://schemas.openxmlformats.org/officeDocument/2006/relationships" xmlns:p="http://schemas.openxmlformats.org/presentationml/2006/main">
+<p:sld xmlns:a="http://schemas.openxmlformats.org/drawingml/2006/main" xmlns:p="http://schemas.openxmlformats.org/presentationml/2006/main" xmlns:r="http://schemas.openxmlformats.org/officeDocument/2006/relationships">
   <p:cSld>
     <p:spTree>
       <p:nvGrpSpPr>
@@ -8570,14 +11878,7 @@
         <p:cNvGrpSpPr/>
         <p:nvPr/>
       </p:nvGrpSpPr>
-      <p:grpSpPr>
-        <a:xfrm>
-          <a:off x="0" y="0"/>
-          <a:ext cx="0" cy="0"/>
-          <a:chOff x="0" y="0"/>
-          <a:chExt cx="0" cy="0"/>
-        </a:xfrm>
-      </p:grpSpPr>
+      <p:grpSpPr/>
       <p:sp>
         <p:nvSpPr>
           <p:cNvPr id="2" name="Rectangle 1"/>
@@ -8619,7 +11920,6 @@
           <a:lstStyle/>
           <a:p>
             <a:pPr algn="ctr"/>
-            <a:endParaRPr/>
           </a:p>
         </p:txBody>
       </p:sp>
@@ -8640,7 +11940,7 @@
           <a:noFill/>
         </p:spPr>
         <p:txBody>
-          <a:bodyPr wrap="square" lIns="45720" tIns="27432" rIns="45720" bIns="27432">
+          <a:bodyPr wrap="square" lIns="45720" rIns="45720" tIns="27432" bIns="27432">
             <a:spAutoFit/>
           </a:bodyPr>
           <a:lstStyle/>
@@ -8675,7 +11975,7 @@
           <a:noFill/>
         </p:spPr>
         <p:txBody>
-          <a:bodyPr wrap="square" lIns="45720" tIns="27432" rIns="45720" bIns="27432">
+          <a:bodyPr wrap="square" lIns="45720" rIns="45720" tIns="27432" bIns="27432">
             <a:spAutoFit/>
           </a:bodyPr>
           <a:lstStyle/>
@@ -8690,6 +11990,49 @@
               </a:rPr>
               <a:t>Scalar in → embed → 2 transformer blocks → scalar out</a:t>
             </a:r>
+          </a:p>
+        </p:txBody>
+      </p:sp>
+      <p:sp>
+        <p:nvSpPr>
+          <p:cNvPr id="5" name="Rectangle 4"/>
+          <p:cNvSpPr/>
+          <p:nvPr/>
+        </p:nvSpPr>
+        <p:spPr>
+          <a:xfrm>
+            <a:off x="548640" y="1508760"/>
+            <a:ext cx="109728" cy="548640"/>
+          </a:xfrm>
+          <a:prstGeom prst="rect">
+            <a:avLst/>
+          </a:prstGeom>
+          <a:solidFill>
+            <a:srgbClr val="F5A623"/>
+          </a:solidFill>
+          <a:ln>
+            <a:noFill/>
+          </a:ln>
+        </p:spPr>
+        <p:style>
+          <a:lnRef idx="1">
+            <a:schemeClr val="accent1"/>
+          </a:lnRef>
+          <a:fillRef idx="3">
+            <a:schemeClr val="accent1"/>
+          </a:fillRef>
+          <a:effectRef idx="2">
+            <a:schemeClr val="accent1"/>
+          </a:effectRef>
+          <a:fontRef idx="minor">
+            <a:schemeClr val="lt1"/>
+          </a:fontRef>
+        </p:style>
+        <p:txBody>
+          <a:bodyPr rtlCol="0" anchor="ctr"/>
+          <a:lstStyle/>
+          <a:p>
+            <a:pPr algn="ctr"/>
           </a:p>
         </p:txBody>
       </p:sp>
@@ -8729,7 +12072,7 @@
           </a:fontRef>
         </p:style>
         <p:txBody>
-          <a:bodyPr wrap="square" lIns="45720" rIns="45720" rtlCol="0" anchor="ctr"/>
+          <a:bodyPr rtlCol="0" anchor="ctr" lIns="45720" rIns="45720" wrap="square"/>
           <a:lstStyle/>
           <a:p>
             <a:pPr algn="ctr"/>
@@ -8797,7 +12140,6 @@
           <a:lstStyle/>
           <a:p>
             <a:pPr algn="ctr"/>
-            <a:endParaRPr/>
           </a:p>
         </p:txBody>
       </p:sp>
@@ -8837,7 +12179,7 @@
           </a:fontRef>
         </p:style>
         <p:txBody>
-          <a:bodyPr wrap="square" lIns="45720" rIns="45720" rtlCol="0" anchor="ctr"/>
+          <a:bodyPr rtlCol="0" anchor="ctr" lIns="45720" rIns="45720" wrap="square"/>
           <a:lstStyle/>
           <a:p>
             <a:pPr algn="ctr"/>
@@ -8905,7 +12247,6 @@
           <a:lstStyle/>
           <a:p>
             <a:pPr algn="ctr"/>
-            <a:endParaRPr/>
           </a:p>
         </p:txBody>
       </p:sp>
@@ -8945,7 +12286,7 @@
           </a:fontRef>
         </p:style>
         <p:txBody>
-          <a:bodyPr wrap="square" lIns="45720" rIns="45720" rtlCol="0" anchor="ctr"/>
+          <a:bodyPr rtlCol="0" anchor="ctr" lIns="45720" rIns="45720" wrap="square"/>
           <a:lstStyle/>
           <a:p>
             <a:pPr algn="ctr"/>
@@ -9013,7 +12354,6 @@
           <a:lstStyle/>
           <a:p>
             <a:pPr algn="ctr"/>
-            <a:endParaRPr/>
           </a:p>
         </p:txBody>
       </p:sp>
@@ -9053,7 +12393,7 @@
           </a:fontRef>
         </p:style>
         <p:txBody>
-          <a:bodyPr wrap="square" lIns="45720" rIns="45720" rtlCol="0" anchor="ctr"/>
+          <a:bodyPr rtlCol="0" anchor="ctr" lIns="45720" rIns="45720" wrap="square"/>
           <a:lstStyle/>
           <a:p>
             <a:pPr algn="ctr"/>
@@ -9121,7 +12461,6 @@
           <a:lstStyle/>
           <a:p>
             <a:pPr algn="ctr"/>
-            <a:endParaRPr/>
           </a:p>
         </p:txBody>
       </p:sp>
@@ -9161,7 +12500,7 @@
           </a:fontRef>
         </p:style>
         <p:txBody>
-          <a:bodyPr wrap="square" lIns="45720" rIns="45720" rtlCol="0" anchor="ctr"/>
+          <a:bodyPr rtlCol="0" anchor="ctr" lIns="45720" rIns="45720" wrap="square"/>
           <a:lstStyle/>
           <a:p>
             <a:pPr algn="ctr"/>
@@ -9217,7 +12556,6 @@
           <a:lstStyle/>
           <a:p>
             <a:pPr algn="ctr"/>
-            <a:endParaRPr/>
           </a:p>
         </p:txBody>
       </p:sp>
@@ -9257,7 +12595,7 @@
           </a:fontRef>
         </p:style>
         <p:txBody>
-          <a:bodyPr wrap="square" lIns="45720" rIns="45720" rtlCol="0" anchor="ctr"/>
+          <a:bodyPr rtlCol="0" anchor="ctr" lIns="45720" rIns="45720" wrap="square"/>
           <a:lstStyle/>
           <a:p>
             <a:pPr algn="ctr"/>
@@ -9325,7 +12663,6 @@
           <a:lstStyle/>
           <a:p>
             <a:pPr algn="ctr"/>
-            <a:endParaRPr/>
           </a:p>
         </p:txBody>
       </p:sp>
@@ -9365,7 +12702,7 @@
           </a:fontRef>
         </p:style>
         <p:txBody>
-          <a:bodyPr wrap="square" lIns="45720" rIns="45720" rtlCol="0" anchor="ctr"/>
+          <a:bodyPr rtlCol="0" anchor="ctr" lIns="45720" rIns="45720" wrap="square"/>
           <a:lstStyle/>
           <a:p>
             <a:pPr algn="ctr"/>
@@ -9410,7 +12747,7 @@
           <a:noFill/>
         </p:spPr>
         <p:txBody>
-          <a:bodyPr wrap="square" lIns="45720" tIns="27432" rIns="45720" bIns="27432">
+          <a:bodyPr wrap="square" lIns="45720" rIns="45720" tIns="27432" bIns="27432">
             <a:spAutoFit/>
           </a:bodyPr>
           <a:lstStyle/>
@@ -9445,7 +12782,7 @@
           <a:noFill/>
         </p:spPr>
         <p:txBody>
-          <a:bodyPr wrap="square" lIns="45720" tIns="27432" rIns="45720" bIns="27432">
+          <a:bodyPr wrap="square" lIns="45720" rIns="45720" tIns="27432" bIns="27432">
             <a:spAutoFit/>
           </a:bodyPr>
           <a:lstStyle/>
@@ -9496,7 +12833,7 @@
 </file>
 
 <file path=ppt/slides/slide6.xml><?xml version="1.0" encoding="utf-8"?>
-<p:sld xmlns:a="http://schemas.openxmlformats.org/drawingml/2006/main" xmlns:r="http://schemas.openxmlformats.org/officeDocument/2006/relationships" xmlns:p="http://schemas.openxmlformats.org/presentationml/2006/main">
+<p:sld xmlns:a="http://schemas.openxmlformats.org/drawingml/2006/main" xmlns:p="http://schemas.openxmlformats.org/presentationml/2006/main" xmlns:r="http://schemas.openxmlformats.org/officeDocument/2006/relationships">
   <p:cSld>
     <p:spTree>
       <p:nvGrpSpPr>
@@ -9504,14 +12841,7 @@
         <p:cNvGrpSpPr/>
         <p:nvPr/>
       </p:nvGrpSpPr>
-      <p:grpSpPr>
-        <a:xfrm>
-          <a:off x="0" y="0"/>
-          <a:ext cx="0" cy="0"/>
-          <a:chOff x="0" y="0"/>
-          <a:chExt cx="0" cy="0"/>
-        </a:xfrm>
-      </p:grpSpPr>
+      <p:grpSpPr/>
       <p:sp>
         <p:nvSpPr>
           <p:cNvPr id="2" name="Rectangle 1"/>
@@ -9553,7 +12883,6 @@
           <a:lstStyle/>
           <a:p>
             <a:pPr algn="ctr"/>
-            <a:endParaRPr/>
           </a:p>
         </p:txBody>
       </p:sp>
@@ -9574,7 +12903,7 @@
           <a:noFill/>
         </p:spPr>
         <p:txBody>
-          <a:bodyPr wrap="square" lIns="45720" tIns="27432" rIns="45720" bIns="27432">
+          <a:bodyPr wrap="square" lIns="45720" rIns="45720" tIns="27432" bIns="27432">
             <a:spAutoFit/>
           </a:bodyPr>
           <a:lstStyle/>
@@ -9609,7 +12938,7 @@
           <a:noFill/>
         </p:spPr>
         <p:txBody>
-          <a:bodyPr wrap="square" lIns="45720" tIns="27432" rIns="45720" bIns="27432">
+          <a:bodyPr wrap="square" lIns="45720" rIns="45720" tIns="27432" bIns="27432">
             <a:spAutoFit/>
           </a:bodyPr>
           <a:lstStyle/>
@@ -9629,25 +12958,23 @@
       </p:sp>
       <p:sp>
         <p:nvSpPr>
-          <p:cNvPr id="7" name="Rounded Rectangle 6"/>
+          <p:cNvPr id="5" name="Rectangle 4"/>
           <p:cNvSpPr/>
           <p:nvPr/>
         </p:nvSpPr>
         <p:spPr>
           <a:xfrm>
-            <a:off x="777240" y="4937760"/>
-            <a:ext cx="10607040" cy="1371600"/>
-          </a:xfrm>
-          <a:prstGeom prst="roundRect">
+            <a:off x="548640" y="1508760"/>
+            <a:ext cx="109728" cy="548640"/>
+          </a:xfrm>
+          <a:prstGeom prst="rect">
             <a:avLst/>
           </a:prstGeom>
           <a:solidFill>
-            <a:srgbClr val="E8EEF5"/>
+            <a:srgbClr val="F5A623"/>
           </a:solidFill>
-          <a:ln w="19050">
-            <a:solidFill>
-              <a:srgbClr val="F5A623"/>
-            </a:solidFill>
+          <a:ln>
+            <a:noFill/>
           </a:ln>
         </p:spPr>
         <p:style>
@@ -9669,83 +12996,12 @@
           <a:lstStyle/>
           <a:p>
             <a:pPr algn="ctr"/>
-            <a:endParaRPr/>
-          </a:p>
-        </p:txBody>
-      </p:sp>
-      <p:sp>
-        <p:nvSpPr>
-          <p:cNvPr id="8" name="TextBox 7"/>
-          <p:cNvSpPr txBox="1"/>
-          <p:nvPr/>
-        </p:nvSpPr>
-        <p:spPr>
-          <a:xfrm>
-            <a:off x="914400" y="5074920"/>
-            <a:ext cx="10332720" cy="457200"/>
-          </a:xfrm>
-          <a:prstGeom prst="rect">
-            <a:avLst/>
-          </a:prstGeom>
-          <a:noFill/>
-        </p:spPr>
-        <p:txBody>
-          <a:bodyPr wrap="square" lIns="45720" tIns="27432" rIns="45720" bIns="27432">
-            <a:spAutoFit/>
-          </a:bodyPr>
-          <a:lstStyle/>
-          <a:p>
-            <a:pPr algn="l"/>
-            <a:r>
-              <a:rPr sz="1600" b="1" i="0">
-                <a:solidFill>
-                  <a:srgbClr val="065A82"/>
-                </a:solidFill>
-                <a:latin typeface="Calibri"/>
-              </a:rPr>
-              <a:t>emb_dim is not a free knob</a:t>
-            </a:r>
-          </a:p>
-        </p:txBody>
-      </p:sp>
-      <p:sp>
-        <p:nvSpPr>
-          <p:cNvPr id="9" name="TextBox 8"/>
-          <p:cNvSpPr txBox="1"/>
-          <p:nvPr/>
-        </p:nvSpPr>
-        <p:spPr>
-          <a:xfrm>
-            <a:off x="914400" y="5486400"/>
-            <a:ext cx="10332720" cy="822960"/>
-          </a:xfrm>
-          <a:prstGeom prst="rect">
-            <a:avLst/>
-          </a:prstGeom>
-          <a:noFill/>
-        </p:spPr>
-        <p:txBody>
-          <a:bodyPr wrap="square" lIns="45720" tIns="27432" rIns="45720" bIns="27432">
-            <a:spAutoFit/>
-          </a:bodyPr>
-          <a:lstStyle/>
-          <a:p>
-            <a:pPr algn="l"/>
-            <a:r>
-              <a:rPr sz="1400" b="0" i="0">
-                <a:solidFill>
-                  <a:srgbClr val="1A1A1A"/>
-                </a:solidFill>
-                <a:latin typeface="Calibri"/>
-              </a:rPr>
-              <a:t>emb_dim = n_heads × head_dim = 2 × 16 = 32.  It falls out automatically from the three choices above.</a:t>
-            </a:r>
           </a:p>
         </p:txBody>
       </p:sp>
       <p:graphicFrame>
         <p:nvGraphicFramePr>
-          <p:cNvPr id="10" name="Table 9"/>
+          <p:cNvPr id="6" name="Table 5"/>
           <p:cNvGraphicFramePr>
             <a:graphicFrameLocks noGrp="1"/>
           </p:cNvGraphicFramePr>
@@ -9762,50 +13018,20 @@
                 <a:tableStyleId>{5C22544A-7EE6-4342-B048-85BDC9FD1C3A}</a:tableStyleId>
               </a:tblPr>
               <a:tblGrid>
-                <a:gridCol w="1666240">
-                  <a:extLst>
-                    <a:ext uri="{9D8B030D-6E8A-4147-A177-3AD203B41FA5}">
-                      <a16:colId xmlns:a16="http://schemas.microsoft.com/office/drawing/2014/main" val="20000"/>
-                    </a:ext>
-                  </a:extLst>
-                </a:gridCol>
-                <a:gridCol w="2499360">
-                  <a:extLst>
-                    <a:ext uri="{9D8B030D-6E8A-4147-A177-3AD203B41FA5}">
-                      <a16:colId xmlns:a16="http://schemas.microsoft.com/office/drawing/2014/main" val="20001"/>
-                    </a:ext>
-                  </a:extLst>
-                </a:gridCol>
-                <a:gridCol w="2915920">
-                  <a:extLst>
-                    <a:ext uri="{9D8B030D-6E8A-4147-A177-3AD203B41FA5}">
-                      <a16:colId xmlns:a16="http://schemas.microsoft.com/office/drawing/2014/main" val="20002"/>
-                    </a:ext>
-                  </a:extLst>
-                </a:gridCol>
-                <a:gridCol w="2915920">
-                  <a:extLst>
-                    <a:ext uri="{9D8B030D-6E8A-4147-A177-3AD203B41FA5}">
-                      <a16:colId xmlns:a16="http://schemas.microsoft.com/office/drawing/2014/main" val="20003"/>
-                    </a:ext>
-                  </a:extLst>
-                </a:gridCol>
-                <a:gridCol w="1249680">
-                  <a:extLst>
-                    <a:ext uri="{9D8B030D-6E8A-4147-A177-3AD203B41FA5}">
-                      <a16:colId xmlns:a16="http://schemas.microsoft.com/office/drawing/2014/main" val="20004"/>
-                    </a:ext>
-                  </a:extLst>
-                </a:gridCol>
+                <a:gridCol w="1666240"/>
+                <a:gridCol w="2499360"/>
+                <a:gridCol w="2915920"/>
+                <a:gridCol w="2915920"/>
+                <a:gridCol w="1249680"/>
               </a:tblGrid>
               <a:tr h="731520">
                 <a:tc>
                   <a:txBody>
-                    <a:bodyPr/>
-                    <a:lstStyle/>
-                    <a:p>
-                      <a:r>
-                        <a:rPr sz="1200" b="1" dirty="0">
+                    <a:bodyPr wrap="square"/>
+                    <a:lstStyle/>
+                    <a:p>
+                      <a:r>
+                        <a:rPr sz="1200" b="1">
                           <a:solidFill>
                             <a:srgbClr val="F2F4F8"/>
                           </a:solidFill>
@@ -9823,7 +13049,7 @@
                 </a:tc>
                 <a:tc>
                   <a:txBody>
-                    <a:bodyPr/>
+                    <a:bodyPr wrap="square"/>
                     <a:lstStyle/>
                     <a:p>
                       <a:r>
@@ -9845,7 +13071,7 @@
                 </a:tc>
                 <a:tc>
                   <a:txBody>
-                    <a:bodyPr/>
+                    <a:bodyPr wrap="square"/>
                     <a:lstStyle/>
                     <a:p>
                       <a:r>
@@ -9867,7 +13093,7 @@
                 </a:tc>
                 <a:tc>
                   <a:txBody>
-                    <a:bodyPr/>
+                    <a:bodyPr wrap="square"/>
                     <a:lstStyle/>
                     <a:p>
                       <a:r>
@@ -9889,7 +13115,7 @@
                 </a:tc>
                 <a:tc>
                   <a:txBody>
-                    <a:bodyPr/>
+                    <a:bodyPr wrap="square"/>
                     <a:lstStyle/>
                     <a:p>
                       <a:r>
@@ -9909,16 +13135,11 @@
                     </a:solidFill>
                   </a:tcPr>
                 </a:tc>
-                <a:extLst>
-                  <a:ext uri="{0D108BD9-81ED-4DB2-BD59-A6C34878D82A}">
-                    <a16:rowId xmlns:a16="http://schemas.microsoft.com/office/drawing/2014/main" val="10000"/>
-                  </a:ext>
-                </a:extLst>
               </a:tr>
               <a:tr h="731520">
                 <a:tc>
                   <a:txBody>
-                    <a:bodyPr/>
+                    <a:bodyPr wrap="square"/>
                     <a:lstStyle/>
                     <a:p>
                       <a:r>
@@ -9940,7 +13161,7 @@
                 </a:tc>
                 <a:tc>
                   <a:txBody>
-                    <a:bodyPr/>
+                    <a:bodyPr wrap="square"/>
                     <a:lstStyle/>
                     <a:p>
                       <a:r>
@@ -9962,7 +13183,7 @@
                 </a:tc>
                 <a:tc>
                   <a:txBody>
-                    <a:bodyPr/>
+                    <a:bodyPr wrap="square"/>
                     <a:lstStyle/>
                     <a:p>
                       <a:r>
@@ -9984,7 +13205,7 @@
                 </a:tc>
                 <a:tc>
                   <a:txBody>
-                    <a:bodyPr/>
+                    <a:bodyPr wrap="square"/>
                     <a:lstStyle/>
                     <a:p>
                       <a:r>
@@ -10006,7 +13227,7 @@
                 </a:tc>
                 <a:tc>
                   <a:txBody>
-                    <a:bodyPr/>
+                    <a:bodyPr wrap="square"/>
                     <a:lstStyle/>
                     <a:p>
                       <a:r>
@@ -10026,16 +13247,11 @@
                     </a:solidFill>
                   </a:tcPr>
                 </a:tc>
-                <a:extLst>
-                  <a:ext uri="{0D108BD9-81ED-4DB2-BD59-A6C34878D82A}">
-                    <a16:rowId xmlns:a16="http://schemas.microsoft.com/office/drawing/2014/main" val="10001"/>
-                  </a:ext>
-                </a:extLst>
               </a:tr>
               <a:tr h="731520">
                 <a:tc>
                   <a:txBody>
-                    <a:bodyPr/>
+                    <a:bodyPr wrap="square"/>
                     <a:lstStyle/>
                     <a:p>
                       <a:r>
@@ -10057,7 +13273,7 @@
                 </a:tc>
                 <a:tc>
                   <a:txBody>
-                    <a:bodyPr/>
+                    <a:bodyPr wrap="square"/>
                     <a:lstStyle/>
                     <a:p>
                       <a:r>
@@ -10079,7 +13295,7 @@
                 </a:tc>
                 <a:tc>
                   <a:txBody>
-                    <a:bodyPr/>
+                    <a:bodyPr wrap="square"/>
                     <a:lstStyle/>
                     <a:p>
                       <a:r>
@@ -10101,7 +13317,7 @@
                 </a:tc>
                 <a:tc>
                   <a:txBody>
-                    <a:bodyPr/>
+                    <a:bodyPr wrap="square"/>
                     <a:lstStyle/>
                     <a:p>
                       <a:r>
@@ -10123,7 +13339,7 @@
                 </a:tc>
                 <a:tc>
                   <a:txBody>
-                    <a:bodyPr/>
+                    <a:bodyPr wrap="square"/>
                     <a:lstStyle/>
                     <a:p>
                       <a:r>
@@ -10143,16 +13359,11 @@
                     </a:solidFill>
                   </a:tcPr>
                 </a:tc>
-                <a:extLst>
-                  <a:ext uri="{0D108BD9-81ED-4DB2-BD59-A6C34878D82A}">
-                    <a16:rowId xmlns:a16="http://schemas.microsoft.com/office/drawing/2014/main" val="10002"/>
-                  </a:ext>
-                </a:extLst>
               </a:tr>
               <a:tr h="731520">
                 <a:tc>
                   <a:txBody>
-                    <a:bodyPr/>
+                    <a:bodyPr wrap="square"/>
                     <a:lstStyle/>
                     <a:p>
                       <a:r>
@@ -10174,7 +13385,7 @@
                 </a:tc>
                 <a:tc>
                   <a:txBody>
-                    <a:bodyPr/>
+                    <a:bodyPr wrap="square"/>
                     <a:lstStyle/>
                     <a:p>
                       <a:r>
@@ -10196,7 +13407,7 @@
                 </a:tc>
                 <a:tc>
                   <a:txBody>
-                    <a:bodyPr/>
+                    <a:bodyPr wrap="square"/>
                     <a:lstStyle/>
                     <a:p>
                       <a:r>
@@ -10218,7 +13429,7 @@
                 </a:tc>
                 <a:tc>
                   <a:txBody>
-                    <a:bodyPr/>
+                    <a:bodyPr wrap="square"/>
                     <a:lstStyle/>
                     <a:p>
                       <a:r>
@@ -10240,11 +13451,11 @@
                 </a:tc>
                 <a:tc>
                   <a:txBody>
-                    <a:bodyPr/>
-                    <a:lstStyle/>
-                    <a:p>
-                      <a:r>
-                        <a:rPr sz="1200" dirty="0">
+                    <a:bodyPr wrap="square"/>
+                    <a:lstStyle/>
+                    <a:p>
+                      <a:r>
+                        <a:rPr sz="1200">
                           <a:solidFill>
                             <a:srgbClr val="1A1A1A"/>
                           </a:solidFill>
@@ -10260,16 +13471,126 @@
                     </a:solidFill>
                   </a:tcPr>
                 </a:tc>
-                <a:extLst>
-                  <a:ext uri="{0D108BD9-81ED-4DB2-BD59-A6C34878D82A}">
-                    <a16:rowId xmlns:a16="http://schemas.microsoft.com/office/drawing/2014/main" val="10003"/>
-                  </a:ext>
-                </a:extLst>
               </a:tr>
             </a:tbl>
           </a:graphicData>
         </a:graphic>
       </p:graphicFrame>
+      <p:sp>
+        <p:nvSpPr>
+          <p:cNvPr id="7" name="Rounded Rectangle 6"/>
+          <p:cNvSpPr/>
+          <p:nvPr/>
+        </p:nvSpPr>
+        <p:spPr>
+          <a:xfrm>
+            <a:off x="777240" y="4937760"/>
+            <a:ext cx="10607040" cy="1371600"/>
+          </a:xfrm>
+          <a:prstGeom prst="roundRect">
+            <a:avLst/>
+          </a:prstGeom>
+          <a:solidFill>
+            <a:srgbClr val="E8EEF5"/>
+          </a:solidFill>
+          <a:ln w="19050">
+            <a:solidFill>
+              <a:srgbClr val="F5A623"/>
+            </a:solidFill>
+          </a:ln>
+        </p:spPr>
+        <p:style>
+          <a:lnRef idx="1">
+            <a:schemeClr val="accent1"/>
+          </a:lnRef>
+          <a:fillRef idx="3">
+            <a:schemeClr val="accent1"/>
+          </a:fillRef>
+          <a:effectRef idx="2">
+            <a:schemeClr val="accent1"/>
+          </a:effectRef>
+          <a:fontRef idx="minor">
+            <a:schemeClr val="lt1"/>
+          </a:fontRef>
+        </p:style>
+        <p:txBody>
+          <a:bodyPr rtlCol="0" anchor="ctr"/>
+          <a:lstStyle/>
+          <a:p>
+            <a:pPr algn="ctr"/>
+          </a:p>
+        </p:txBody>
+      </p:sp>
+      <p:sp>
+        <p:nvSpPr>
+          <p:cNvPr id="8" name="TextBox 7"/>
+          <p:cNvSpPr txBox="1"/>
+          <p:nvPr/>
+        </p:nvSpPr>
+        <p:spPr>
+          <a:xfrm>
+            <a:off x="914400" y="5074920"/>
+            <a:ext cx="10332720" cy="457200"/>
+          </a:xfrm>
+          <a:prstGeom prst="rect">
+            <a:avLst/>
+          </a:prstGeom>
+          <a:noFill/>
+        </p:spPr>
+        <p:txBody>
+          <a:bodyPr wrap="square" lIns="45720" rIns="45720" tIns="27432" bIns="27432">
+            <a:spAutoFit/>
+          </a:bodyPr>
+          <a:lstStyle/>
+          <a:p>
+            <a:pPr algn="l"/>
+            <a:r>
+              <a:rPr sz="1600" b="1" i="0">
+                <a:solidFill>
+                  <a:srgbClr val="065A82"/>
+                </a:solidFill>
+                <a:latin typeface="Calibri"/>
+              </a:rPr>
+              <a:t>emb_dim is not a free knob</a:t>
+            </a:r>
+          </a:p>
+        </p:txBody>
+      </p:sp>
+      <p:sp>
+        <p:nvSpPr>
+          <p:cNvPr id="9" name="TextBox 8"/>
+          <p:cNvSpPr txBox="1"/>
+          <p:nvPr/>
+        </p:nvSpPr>
+        <p:spPr>
+          <a:xfrm>
+            <a:off x="914400" y="5486400"/>
+            <a:ext cx="10332720" cy="822960"/>
+          </a:xfrm>
+          <a:prstGeom prst="rect">
+            <a:avLst/>
+          </a:prstGeom>
+          <a:noFill/>
+        </p:spPr>
+        <p:txBody>
+          <a:bodyPr wrap="square" lIns="45720" rIns="45720" tIns="27432" bIns="27432">
+            <a:spAutoFit/>
+          </a:bodyPr>
+          <a:lstStyle/>
+          <a:p>
+            <a:pPr algn="l"/>
+            <a:r>
+              <a:rPr sz="1400" b="0" i="0">
+                <a:solidFill>
+                  <a:srgbClr val="1A1A1A"/>
+                </a:solidFill>
+                <a:latin typeface="Calibri"/>
+              </a:rPr>
+              <a:t>emb_dim = n_heads × head_dim = 2 × 16 = 32.  It falls out automatically from the three choices above.</a:t>
+            </a:r>
+          </a:p>
+        </p:txBody>
+      </p:sp>
     </p:spTree>
   </p:cSld>
   <p:clrMapOvr>
@@ -10279,7 +13600,7 @@
 </file>
 
 <file path=ppt/slides/slide7.xml><?xml version="1.0" encoding="utf-8"?>
-<p:sld xmlns:a="http://schemas.openxmlformats.org/drawingml/2006/main" xmlns:r="http://schemas.openxmlformats.org/officeDocument/2006/relationships" xmlns:p="http://schemas.openxmlformats.org/presentationml/2006/main">
+<p:sld xmlns:a="http://schemas.openxmlformats.org/drawingml/2006/main" xmlns:p="http://schemas.openxmlformats.org/presentationml/2006/main" xmlns:r="http://schemas.openxmlformats.org/officeDocument/2006/relationships">
   <p:cSld>
     <p:spTree>
       <p:nvGrpSpPr>
@@ -10287,14 +13608,7 @@
         <p:cNvGrpSpPr/>
         <p:nvPr/>
       </p:nvGrpSpPr>
-      <p:grpSpPr>
-        <a:xfrm>
-          <a:off x="0" y="0"/>
-          <a:ext cx="0" cy="0"/>
-          <a:chOff x="0" y="0"/>
-          <a:chExt cx="0" cy="0"/>
-        </a:xfrm>
-      </p:grpSpPr>
+      <p:grpSpPr/>
       <p:sp>
         <p:nvSpPr>
           <p:cNvPr id="2" name="Rectangle 1"/>
@@ -10336,7 +13650,6 @@
           <a:lstStyle/>
           <a:p>
             <a:pPr algn="ctr"/>
-            <a:endParaRPr/>
           </a:p>
         </p:txBody>
       </p:sp>
@@ -10357,7 +13670,7 @@
           <a:noFill/>
         </p:spPr>
         <p:txBody>
-          <a:bodyPr wrap="square" lIns="45720" tIns="27432" rIns="45720" bIns="27432">
+          <a:bodyPr wrap="square" lIns="45720" rIns="45720" tIns="27432" bIns="27432">
             <a:spAutoFit/>
           </a:bodyPr>
           <a:lstStyle/>
@@ -10392,7 +13705,7 @@
           <a:noFill/>
         </p:spPr>
         <p:txBody>
-          <a:bodyPr wrap="square" lIns="45720" tIns="27432" rIns="45720" bIns="27432">
+          <a:bodyPr wrap="square" lIns="45720" rIns="45720" tIns="27432" bIns="27432">
             <a:spAutoFit/>
           </a:bodyPr>
           <a:lstStyle/>
@@ -10407,6 +13720,49 @@
               </a:rPr>
               <a:t>No tokenizer, no vocab_size</a:t>
             </a:r>
+          </a:p>
+        </p:txBody>
+      </p:sp>
+      <p:sp>
+        <p:nvSpPr>
+          <p:cNvPr id="5" name="Rectangle 4"/>
+          <p:cNvSpPr/>
+          <p:nvPr/>
+        </p:nvSpPr>
+        <p:spPr>
+          <a:xfrm>
+            <a:off x="548640" y="1508760"/>
+            <a:ext cx="109728" cy="548640"/>
+          </a:xfrm>
+          <a:prstGeom prst="rect">
+            <a:avLst/>
+          </a:prstGeom>
+          <a:solidFill>
+            <a:srgbClr val="F5A623"/>
+          </a:solidFill>
+          <a:ln>
+            <a:noFill/>
+          </a:ln>
+        </p:spPr>
+        <p:style>
+          <a:lnRef idx="1">
+            <a:schemeClr val="accent1"/>
+          </a:lnRef>
+          <a:fillRef idx="3">
+            <a:schemeClr val="accent1"/>
+          </a:fillRef>
+          <a:effectRef idx="2">
+            <a:schemeClr val="accent1"/>
+          </a:effectRef>
+          <a:fontRef idx="minor">
+            <a:schemeClr val="lt1"/>
+          </a:fontRef>
+        </p:style>
+        <p:txBody>
+          <a:bodyPr rtlCol="0" anchor="ctr"/>
+          <a:lstStyle/>
+          <a:p>
+            <a:pPr algn="ctr"/>
           </a:p>
         </p:txBody>
       </p:sp>
@@ -10429,32 +13785,14 @@
                 <a:tableStyleId>{5C22544A-7EE6-4342-B048-85BDC9FD1C3A}</a:tableStyleId>
               </a:tblPr>
               <a:tblGrid>
-                <a:gridCol w="2020388">
-                  <a:extLst>
-                    <a:ext uri="{9D8B030D-6E8A-4147-A177-3AD203B41FA5}">
-                      <a16:colId xmlns:a16="http://schemas.microsoft.com/office/drawing/2014/main" val="20000"/>
-                    </a:ext>
-                  </a:extLst>
-                </a:gridCol>
-                <a:gridCol w="4040777">
-                  <a:extLst>
-                    <a:ext uri="{9D8B030D-6E8A-4147-A177-3AD203B41FA5}">
-                      <a16:colId xmlns:a16="http://schemas.microsoft.com/office/drawing/2014/main" val="20001"/>
-                    </a:ext>
-                  </a:extLst>
-                </a:gridCol>
-                <a:gridCol w="4545874">
-                  <a:extLst>
-                    <a:ext uri="{9D8B030D-6E8A-4147-A177-3AD203B41FA5}">
-                      <a16:colId xmlns:a16="http://schemas.microsoft.com/office/drawing/2014/main" val="20002"/>
-                    </a:ext>
-                  </a:extLst>
-                </a:gridCol>
+                <a:gridCol w="2020388"/>
+                <a:gridCol w="4040777"/>
+                <a:gridCol w="4545874"/>
               </a:tblGrid>
               <a:tr h="548640">
                 <a:tc>
                   <a:txBody>
-                    <a:bodyPr/>
+                    <a:bodyPr wrap="square"/>
                     <a:lstStyle/>
                     <a:p>
                       <a:r>
@@ -10476,7 +13814,7 @@
                 </a:tc>
                 <a:tc>
                   <a:txBody>
-                    <a:bodyPr/>
+                    <a:bodyPr wrap="square"/>
                     <a:lstStyle/>
                     <a:p>
                       <a:r>
@@ -10498,7 +13836,7 @@
                 </a:tc>
                 <a:tc>
                   <a:txBody>
-                    <a:bodyPr/>
+                    <a:bodyPr wrap="square"/>
                     <a:lstStyle/>
                     <a:p>
                       <a:r>
@@ -10518,16 +13856,11 @@
                     </a:solidFill>
                   </a:tcPr>
                 </a:tc>
-                <a:extLst>
-                  <a:ext uri="{0D108BD9-81ED-4DB2-BD59-A6C34878D82A}">
-                    <a16:rowId xmlns:a16="http://schemas.microsoft.com/office/drawing/2014/main" val="10000"/>
-                  </a:ext>
-                </a:extLst>
               </a:tr>
               <a:tr h="548640">
                 <a:tc>
                   <a:txBody>
-                    <a:bodyPr/>
+                    <a:bodyPr wrap="square"/>
                     <a:lstStyle/>
                     <a:p>
                       <a:r>
@@ -10549,7 +13882,7 @@
                 </a:tc>
                 <a:tc>
                   <a:txBody>
-                    <a:bodyPr/>
+                    <a:bodyPr wrap="square"/>
                     <a:lstStyle/>
                     <a:p>
                       <a:r>
@@ -10571,7 +13904,7 @@
                 </a:tc>
                 <a:tc>
                   <a:txBody>
-                    <a:bodyPr/>
+                    <a:bodyPr wrap="square"/>
                     <a:lstStyle/>
                     <a:p>
                       <a:r>
@@ -10591,16 +13924,11 @@
                     </a:solidFill>
                   </a:tcPr>
                 </a:tc>
-                <a:extLst>
-                  <a:ext uri="{0D108BD9-81ED-4DB2-BD59-A6C34878D82A}">
-                    <a16:rowId xmlns:a16="http://schemas.microsoft.com/office/drawing/2014/main" val="10001"/>
-                  </a:ext>
-                </a:extLst>
               </a:tr>
               <a:tr h="548640">
                 <a:tc>
                   <a:txBody>
-                    <a:bodyPr/>
+                    <a:bodyPr wrap="square"/>
                     <a:lstStyle/>
                     <a:p>
                       <a:r>
@@ -10622,7 +13950,7 @@
                 </a:tc>
                 <a:tc>
                   <a:txBody>
-                    <a:bodyPr/>
+                    <a:bodyPr wrap="square"/>
                     <a:lstStyle/>
                     <a:p>
                       <a:r>
@@ -10644,7 +13972,7 @@
                 </a:tc>
                 <a:tc>
                   <a:txBody>
-                    <a:bodyPr/>
+                    <a:bodyPr wrap="square"/>
                     <a:lstStyle/>
                     <a:p>
                       <a:r>
@@ -10664,16 +13992,11 @@
                     </a:solidFill>
                   </a:tcPr>
                 </a:tc>
-                <a:extLst>
-                  <a:ext uri="{0D108BD9-81ED-4DB2-BD59-A6C34878D82A}">
-                    <a16:rowId xmlns:a16="http://schemas.microsoft.com/office/drawing/2014/main" val="10002"/>
-                  </a:ext>
-                </a:extLst>
               </a:tr>
               <a:tr h="548640">
                 <a:tc>
                   <a:txBody>
-                    <a:bodyPr/>
+                    <a:bodyPr wrap="square"/>
                     <a:lstStyle/>
                     <a:p>
                       <a:r>
@@ -10695,7 +14018,7 @@
                 </a:tc>
                 <a:tc>
                   <a:txBody>
-                    <a:bodyPr/>
+                    <a:bodyPr wrap="square"/>
                     <a:lstStyle/>
                     <a:p>
                       <a:r>
@@ -10717,7 +14040,7 @@
                 </a:tc>
                 <a:tc>
                   <a:txBody>
-                    <a:bodyPr/>
+                    <a:bodyPr wrap="square"/>
                     <a:lstStyle/>
                     <a:p>
                       <a:r>
@@ -10737,16 +14060,11 @@
                     </a:solidFill>
                   </a:tcPr>
                 </a:tc>
-                <a:extLst>
-                  <a:ext uri="{0D108BD9-81ED-4DB2-BD59-A6C34878D82A}">
-                    <a16:rowId xmlns:a16="http://schemas.microsoft.com/office/drawing/2014/main" val="10003"/>
-                  </a:ext>
-                </a:extLst>
               </a:tr>
               <a:tr h="548640">
                 <a:tc>
                   <a:txBody>
-                    <a:bodyPr/>
+                    <a:bodyPr wrap="square"/>
                     <a:lstStyle/>
                     <a:p>
                       <a:r>
@@ -10768,7 +14086,7 @@
                 </a:tc>
                 <a:tc>
                   <a:txBody>
-                    <a:bodyPr/>
+                    <a:bodyPr wrap="square"/>
                     <a:lstStyle/>
                     <a:p>
                       <a:r>
@@ -10790,7 +14108,7 @@
                 </a:tc>
                 <a:tc>
                   <a:txBody>
-                    <a:bodyPr/>
+                    <a:bodyPr wrap="square"/>
                     <a:lstStyle/>
                     <a:p>
                       <a:r>
@@ -10810,16 +14128,11 @@
                     </a:solidFill>
                   </a:tcPr>
                 </a:tc>
-                <a:extLst>
-                  <a:ext uri="{0D108BD9-81ED-4DB2-BD59-A6C34878D82A}">
-                    <a16:rowId xmlns:a16="http://schemas.microsoft.com/office/drawing/2014/main" val="10004"/>
-                  </a:ext>
-                </a:extLst>
               </a:tr>
               <a:tr h="548640">
                 <a:tc>
                   <a:txBody>
-                    <a:bodyPr/>
+                    <a:bodyPr wrap="square"/>
                     <a:lstStyle/>
                     <a:p>
                       <a:r>
@@ -10841,7 +14154,7 @@
                 </a:tc>
                 <a:tc>
                   <a:txBody>
-                    <a:bodyPr/>
+                    <a:bodyPr wrap="square"/>
                     <a:lstStyle/>
                     <a:p>
                       <a:r>
@@ -10863,7 +14176,7 @@
                 </a:tc>
                 <a:tc>
                   <a:txBody>
-                    <a:bodyPr/>
+                    <a:bodyPr wrap="square"/>
                     <a:lstStyle/>
                     <a:p>
                       <a:r>
@@ -10883,11 +14196,6 @@
                     </a:solidFill>
                   </a:tcPr>
                 </a:tc>
-                <a:extLst>
-                  <a:ext uri="{0D108BD9-81ED-4DB2-BD59-A6C34878D82A}">
-                    <a16:rowId xmlns:a16="http://schemas.microsoft.com/office/drawing/2014/main" val="10005"/>
-                  </a:ext>
-                </a:extLst>
               </a:tr>
             </a:tbl>
           </a:graphicData>
@@ -10910,7 +14218,7 @@
           <a:noFill/>
         </p:spPr>
         <p:txBody>
-          <a:bodyPr wrap="square" lIns="45720" tIns="27432" rIns="45720" bIns="27432">
+          <a:bodyPr wrap="square" lIns="45720" rIns="45720" tIns="27432" bIns="27432">
             <a:spAutoFit/>
           </a:bodyPr>
           <a:lstStyle/>
@@ -10949,7 +14257,7 @@
 </file>
 
 <file path=ppt/slides/slide8.xml><?xml version="1.0" encoding="utf-8"?>
-<p:sld xmlns:a="http://schemas.openxmlformats.org/drawingml/2006/main" xmlns:r="http://schemas.openxmlformats.org/officeDocument/2006/relationships" xmlns:p="http://schemas.openxmlformats.org/presentationml/2006/main">
+<p:sld xmlns:a="http://schemas.openxmlformats.org/drawingml/2006/main" xmlns:p="http://schemas.openxmlformats.org/presentationml/2006/main" xmlns:r="http://schemas.openxmlformats.org/officeDocument/2006/relationships">
   <p:cSld>
     <p:spTree>
       <p:nvGrpSpPr>
@@ -10957,14 +14265,7 @@
         <p:cNvGrpSpPr/>
         <p:nvPr/>
       </p:nvGrpSpPr>
-      <p:grpSpPr>
-        <a:xfrm>
-          <a:off x="0" y="0"/>
-          <a:ext cx="0" cy="0"/>
-          <a:chOff x="0" y="0"/>
-          <a:chExt cx="0" cy="0"/>
-        </a:xfrm>
-      </p:grpSpPr>
+      <p:grpSpPr/>
       <p:sp>
         <p:nvSpPr>
           <p:cNvPr id="2" name="Rectangle 1"/>
@@ -11006,7 +14307,6 @@
           <a:lstStyle/>
           <a:p>
             <a:pPr algn="ctr"/>
-            <a:endParaRPr/>
           </a:p>
         </p:txBody>
       </p:sp>
@@ -11027,7 +14327,7 @@
           <a:noFill/>
         </p:spPr>
         <p:txBody>
-          <a:bodyPr wrap="square" lIns="45720" tIns="27432" rIns="45720" bIns="27432">
+          <a:bodyPr wrap="square" lIns="45720" rIns="45720" tIns="27432" bIns="27432">
             <a:spAutoFit/>
           </a:bodyPr>
           <a:lstStyle/>
@@ -11062,7 +14362,7 @@
           <a:noFill/>
         </p:spPr>
         <p:txBody>
-          <a:bodyPr wrap="square" lIns="45720" tIns="27432" rIns="45720" bIns="27432">
+          <a:bodyPr wrap="square" lIns="45720" rIns="45720" tIns="27432" bIns="27432">
             <a:spAutoFit/>
           </a:bodyPr>
           <a:lstStyle/>
@@ -11082,6 +14382,49 @@
       </p:sp>
       <p:sp>
         <p:nvSpPr>
+          <p:cNvPr id="5" name="Rectangle 4"/>
+          <p:cNvSpPr/>
+          <p:nvPr/>
+        </p:nvSpPr>
+        <p:spPr>
+          <a:xfrm>
+            <a:off x="548640" y="1508760"/>
+            <a:ext cx="109728" cy="548640"/>
+          </a:xfrm>
+          <a:prstGeom prst="rect">
+            <a:avLst/>
+          </a:prstGeom>
+          <a:solidFill>
+            <a:srgbClr val="F5A623"/>
+          </a:solidFill>
+          <a:ln>
+            <a:noFill/>
+          </a:ln>
+        </p:spPr>
+        <p:style>
+          <a:lnRef idx="1">
+            <a:schemeClr val="accent1"/>
+          </a:lnRef>
+          <a:fillRef idx="3">
+            <a:schemeClr val="accent1"/>
+          </a:fillRef>
+          <a:effectRef idx="2">
+            <a:schemeClr val="accent1"/>
+          </a:effectRef>
+          <a:fontRef idx="minor">
+            <a:schemeClr val="lt1"/>
+          </a:fontRef>
+        </p:style>
+        <p:txBody>
+          <a:bodyPr rtlCol="0" anchor="ctr"/>
+          <a:lstStyle/>
+          <a:p>
+            <a:pPr algn="ctr"/>
+          </a:p>
+        </p:txBody>
+      </p:sp>
+      <p:sp>
+        <p:nvSpPr>
           <p:cNvPr id="6" name="TextBox 5"/>
           <p:cNvSpPr txBox="1"/>
           <p:nvPr/>
@@ -11097,7 +14440,7 @@
           <a:noFill/>
         </p:spPr>
         <p:txBody>
-          <a:bodyPr wrap="square" lIns="45720" tIns="27432" rIns="45720" bIns="27432">
+          <a:bodyPr wrap="square" lIns="45720" rIns="45720" tIns="27432" bIns="27432">
             <a:spAutoFit/>
           </a:bodyPr>
           <a:lstStyle/>
@@ -11132,7 +14475,7 @@
           <a:noFill/>
         </p:spPr>
         <p:txBody>
-          <a:bodyPr wrap="square" lIns="45720" tIns="27432" rIns="45720" bIns="27432">
+          <a:bodyPr wrap="square" lIns="45720" rIns="45720" tIns="27432" bIns="27432">
             <a:spAutoFit/>
           </a:bodyPr>
           <a:lstStyle/>
@@ -11167,7 +14510,7 @@
           <a:noFill/>
         </p:spPr>
         <p:txBody>
-          <a:bodyPr wrap="square" lIns="45720" tIns="27432" rIns="45720" bIns="27432">
+          <a:bodyPr wrap="square" lIns="45720" rIns="45720" tIns="27432" bIns="27432">
             <a:spAutoFit/>
           </a:bodyPr>
           <a:lstStyle/>
@@ -11226,7 +14569,7 @@
           <a:noFill/>
         </p:spPr>
         <p:txBody>
-          <a:bodyPr wrap="square" lIns="45720" tIns="27432" rIns="45720" bIns="27432">
+          <a:bodyPr wrap="square" lIns="45720" rIns="45720" tIns="27432" bIns="27432">
             <a:spAutoFit/>
           </a:bodyPr>
           <a:lstStyle/>
@@ -11261,7 +14604,7 @@
           <a:noFill/>
         </p:spPr>
         <p:txBody>
-          <a:bodyPr wrap="square" lIns="45720" tIns="27432" rIns="45720" bIns="27432">
+          <a:bodyPr wrap="square" lIns="45720" rIns="45720" tIns="27432" bIns="27432">
             <a:spAutoFit/>
           </a:bodyPr>
           <a:lstStyle/>
@@ -11312,7 +14655,7 @@
 </file>
 
 <file path=ppt/slides/slide9.xml><?xml version="1.0" encoding="utf-8"?>
-<p:sld xmlns:a="http://schemas.openxmlformats.org/drawingml/2006/main" xmlns:r="http://schemas.openxmlformats.org/officeDocument/2006/relationships" xmlns:p="http://schemas.openxmlformats.org/presentationml/2006/main">
+<p:sld xmlns:a="http://schemas.openxmlformats.org/drawingml/2006/main" xmlns:p="http://schemas.openxmlformats.org/presentationml/2006/main" xmlns:r="http://schemas.openxmlformats.org/officeDocument/2006/relationships">
   <p:cSld>
     <p:spTree>
       <p:nvGrpSpPr>
@@ -11320,14 +14663,7 @@
         <p:cNvGrpSpPr/>
         <p:nvPr/>
       </p:nvGrpSpPr>
-      <p:grpSpPr>
-        <a:xfrm>
-          <a:off x="0" y="0"/>
-          <a:ext cx="0" cy="0"/>
-          <a:chOff x="0" y="0"/>
-          <a:chExt cx="0" cy="0"/>
-        </a:xfrm>
-      </p:grpSpPr>
+      <p:grpSpPr/>
       <p:sp>
         <p:nvSpPr>
           <p:cNvPr id="2" name="Rectangle 1"/>
@@ -11369,7 +14705,6 @@
           <a:lstStyle/>
           <a:p>
             <a:pPr algn="ctr"/>
-            <a:endParaRPr/>
           </a:p>
         </p:txBody>
       </p:sp>
@@ -11390,7 +14725,7 @@
           <a:noFill/>
         </p:spPr>
         <p:txBody>
-          <a:bodyPr wrap="square" lIns="45720" tIns="27432" rIns="45720" bIns="27432">
+          <a:bodyPr wrap="square" lIns="45720" rIns="45720" tIns="27432" bIns="27432">
             <a:spAutoFit/>
           </a:bodyPr>
           <a:lstStyle/>
@@ -11425,7 +14760,7 @@
           <a:noFill/>
         </p:spPr>
         <p:txBody>
-          <a:bodyPr wrap="square" lIns="45720" tIns="27432" rIns="45720" bIns="27432">
+          <a:bodyPr wrap="square" lIns="45720" rIns="45720" tIns="27432" bIns="27432">
             <a:spAutoFit/>
           </a:bodyPr>
           <a:lstStyle/>
@@ -11445,6 +14780,49 @@
       </p:sp>
       <p:sp>
         <p:nvSpPr>
+          <p:cNvPr id="5" name="Rectangle 4"/>
+          <p:cNvSpPr/>
+          <p:nvPr/>
+        </p:nvSpPr>
+        <p:spPr>
+          <a:xfrm>
+            <a:off x="548640" y="1508760"/>
+            <a:ext cx="109728" cy="548640"/>
+          </a:xfrm>
+          <a:prstGeom prst="rect">
+            <a:avLst/>
+          </a:prstGeom>
+          <a:solidFill>
+            <a:srgbClr val="F5A623"/>
+          </a:solidFill>
+          <a:ln>
+            <a:noFill/>
+          </a:ln>
+        </p:spPr>
+        <p:style>
+          <a:lnRef idx="1">
+            <a:schemeClr val="accent1"/>
+          </a:lnRef>
+          <a:fillRef idx="3">
+            <a:schemeClr val="accent1"/>
+          </a:fillRef>
+          <a:effectRef idx="2">
+            <a:schemeClr val="accent1"/>
+          </a:effectRef>
+          <a:fontRef idx="minor">
+            <a:schemeClr val="lt1"/>
+          </a:fontRef>
+        </p:style>
+        <p:txBody>
+          <a:bodyPr rtlCol="0" anchor="ctr"/>
+          <a:lstStyle/>
+          <a:p>
+            <a:pPr algn="ctr"/>
+          </a:p>
+        </p:txBody>
+      </p:sp>
+      <p:sp>
+        <p:nvSpPr>
           <p:cNvPr id="6" name="TextBox 5"/>
           <p:cNvSpPr txBox="1"/>
           <p:nvPr/>
@@ -11460,7 +14838,7 @@
           <a:noFill/>
         </p:spPr>
         <p:txBody>
-          <a:bodyPr wrap="square" lIns="45720" tIns="27432" rIns="45720" bIns="27432">
+          <a:bodyPr wrap="square" lIns="45720" rIns="45720" tIns="27432" bIns="27432">
             <a:spAutoFit/>
           </a:bodyPr>
           <a:lstStyle/>
@@ -11497,39 +14875,15 @@
                 <a:tableStyleId>{5C22544A-7EE6-4342-B048-85BDC9FD1C3A}</a:tableStyleId>
               </a:tblPr>
               <a:tblGrid>
-                <a:gridCol w="2892829">
-                  <a:extLst>
-                    <a:ext uri="{9D8B030D-6E8A-4147-A177-3AD203B41FA5}">
-                      <a16:colId xmlns:a16="http://schemas.microsoft.com/office/drawing/2014/main" val="20000"/>
-                    </a:ext>
-                  </a:extLst>
-                </a:gridCol>
-                <a:gridCol w="2892829">
-                  <a:extLst>
-                    <a:ext uri="{9D8B030D-6E8A-4147-A177-3AD203B41FA5}">
-                      <a16:colId xmlns:a16="http://schemas.microsoft.com/office/drawing/2014/main" val="20001"/>
-                    </a:ext>
-                  </a:extLst>
-                </a:gridCol>
-                <a:gridCol w="2892829">
-                  <a:extLst>
-                    <a:ext uri="{9D8B030D-6E8A-4147-A177-3AD203B41FA5}">
-                      <a16:colId xmlns:a16="http://schemas.microsoft.com/office/drawing/2014/main" val="20002"/>
-                    </a:ext>
-                  </a:extLst>
-                </a:gridCol>
-                <a:gridCol w="1928552">
-                  <a:extLst>
-                    <a:ext uri="{9D8B030D-6E8A-4147-A177-3AD203B41FA5}">
-                      <a16:colId xmlns:a16="http://schemas.microsoft.com/office/drawing/2014/main" val="20003"/>
-                    </a:ext>
-                  </a:extLst>
-                </a:gridCol>
+                <a:gridCol w="2892829"/>
+                <a:gridCol w="2892829"/>
+                <a:gridCol w="2892829"/>
+                <a:gridCol w="1928552"/>
               </a:tblGrid>
               <a:tr h="533400">
                 <a:tc>
                   <a:txBody>
-                    <a:bodyPr/>
+                    <a:bodyPr wrap="square"/>
                     <a:lstStyle/>
                     <a:p>
                       <a:r>
@@ -11551,7 +14905,7 @@
                 </a:tc>
                 <a:tc>
                   <a:txBody>
-                    <a:bodyPr/>
+                    <a:bodyPr wrap="square"/>
                     <a:lstStyle/>
                     <a:p>
                       <a:r>
@@ -11573,7 +14927,7 @@
                 </a:tc>
                 <a:tc>
                   <a:txBody>
-                    <a:bodyPr/>
+                    <a:bodyPr wrap="square"/>
                     <a:lstStyle/>
                     <a:p>
                       <a:r>
@@ -11595,7 +14949,7 @@
                 </a:tc>
                 <a:tc>
                   <a:txBody>
-                    <a:bodyPr/>
+                    <a:bodyPr wrap="square"/>
                     <a:lstStyle/>
                     <a:p>
                       <a:r>
@@ -11615,16 +14969,11 @@
                     </a:solidFill>
                   </a:tcPr>
                 </a:tc>
-                <a:extLst>
-                  <a:ext uri="{0D108BD9-81ED-4DB2-BD59-A6C34878D82A}">
-                    <a16:rowId xmlns:a16="http://schemas.microsoft.com/office/drawing/2014/main" val="10000"/>
-                  </a:ext>
-                </a:extLst>
               </a:tr>
               <a:tr h="533400">
                 <a:tc>
                   <a:txBody>
-                    <a:bodyPr/>
+                    <a:bodyPr wrap="square"/>
                     <a:lstStyle/>
                     <a:p>
                       <a:r>
@@ -11646,7 +14995,7 @@
                 </a:tc>
                 <a:tc>
                   <a:txBody>
-                    <a:bodyPr/>
+                    <a:bodyPr wrap="square"/>
                     <a:lstStyle/>
                     <a:p>
                       <a:r>
@@ -11668,7 +15017,7 @@
                 </a:tc>
                 <a:tc>
                   <a:txBody>
-                    <a:bodyPr/>
+                    <a:bodyPr wrap="square"/>
                     <a:lstStyle/>
                     <a:p>
                       <a:r>
@@ -11690,7 +15039,7 @@
                 </a:tc>
                 <a:tc>
                   <a:txBody>
-                    <a:bodyPr/>
+                    <a:bodyPr wrap="square"/>
                     <a:lstStyle/>
                     <a:p>
                       <a:r>
@@ -11710,16 +15059,11 @@
                     </a:solidFill>
                   </a:tcPr>
                 </a:tc>
-                <a:extLst>
-                  <a:ext uri="{0D108BD9-81ED-4DB2-BD59-A6C34878D82A}">
-                    <a16:rowId xmlns:a16="http://schemas.microsoft.com/office/drawing/2014/main" val="10001"/>
-                  </a:ext>
-                </a:extLst>
               </a:tr>
               <a:tr h="533400">
                 <a:tc>
                   <a:txBody>
-                    <a:bodyPr/>
+                    <a:bodyPr wrap="square"/>
                     <a:lstStyle/>
                     <a:p>
                       <a:r>
@@ -11741,7 +15085,7 @@
                 </a:tc>
                 <a:tc>
                   <a:txBody>
-                    <a:bodyPr/>
+                    <a:bodyPr wrap="square"/>
                     <a:lstStyle/>
                     <a:p>
                       <a:r>
@@ -11763,7 +15107,7 @@
                 </a:tc>
                 <a:tc>
                   <a:txBody>
-                    <a:bodyPr/>
+                    <a:bodyPr wrap="square"/>
                     <a:lstStyle/>
                     <a:p>
                       <a:r>
@@ -11785,7 +15129,7 @@
                 </a:tc>
                 <a:tc>
                   <a:txBody>
-                    <a:bodyPr/>
+                    <a:bodyPr wrap="square"/>
                     <a:lstStyle/>
                     <a:p>
                       <a:r>
@@ -11805,16 +15149,11 @@
                     </a:solidFill>
                   </a:tcPr>
                 </a:tc>
-                <a:extLst>
-                  <a:ext uri="{0D108BD9-81ED-4DB2-BD59-A6C34878D82A}">
-                    <a16:rowId xmlns:a16="http://schemas.microsoft.com/office/drawing/2014/main" val="10002"/>
-                  </a:ext>
-                </a:extLst>
               </a:tr>
               <a:tr h="533400">
                 <a:tc>
                   <a:txBody>
-                    <a:bodyPr/>
+                    <a:bodyPr wrap="square"/>
                     <a:lstStyle/>
                     <a:p>
                       <a:r>
@@ -11836,7 +15175,7 @@
                 </a:tc>
                 <a:tc>
                   <a:txBody>
-                    <a:bodyPr/>
+                    <a:bodyPr wrap="square"/>
                     <a:lstStyle/>
                     <a:p>
                       <a:r>
@@ -11858,7 +15197,7 @@
                 </a:tc>
                 <a:tc>
                   <a:txBody>
-                    <a:bodyPr/>
+                    <a:bodyPr wrap="square"/>
                     <a:lstStyle/>
                     <a:p>
                       <a:r>
@@ -11880,7 +15219,7 @@
                 </a:tc>
                 <a:tc>
                   <a:txBody>
-                    <a:bodyPr/>
+                    <a:bodyPr wrap="square"/>
                     <a:lstStyle/>
                     <a:p>
                       <a:r>
@@ -11900,16 +15239,11 @@
                     </a:solidFill>
                   </a:tcPr>
                 </a:tc>
-                <a:extLst>
-                  <a:ext uri="{0D108BD9-81ED-4DB2-BD59-A6C34878D82A}">
-                    <a16:rowId xmlns:a16="http://schemas.microsoft.com/office/drawing/2014/main" val="10003"/>
-                  </a:ext>
-                </a:extLst>
               </a:tr>
               <a:tr h="533400">
                 <a:tc>
                   <a:txBody>
-                    <a:bodyPr/>
+                    <a:bodyPr wrap="square"/>
                     <a:lstStyle/>
                     <a:p>
                       <a:r>
@@ -11931,7 +15265,7 @@
                 </a:tc>
                 <a:tc>
                   <a:txBody>
-                    <a:bodyPr/>
+                    <a:bodyPr wrap="square"/>
                     <a:lstStyle/>
                     <a:p>
                       <a:r>
@@ -11953,7 +15287,7 @@
                 </a:tc>
                 <a:tc>
                   <a:txBody>
-                    <a:bodyPr/>
+                    <a:bodyPr wrap="square"/>
                     <a:lstStyle/>
                     <a:p>
                       <a:r>
@@ -11975,7 +15309,7 @@
                 </a:tc>
                 <a:tc>
                   <a:txBody>
-                    <a:bodyPr/>
+                    <a:bodyPr wrap="square"/>
                     <a:lstStyle/>
                     <a:p>
                       <a:r>
@@ -11995,16 +15329,11 @@
                     </a:solidFill>
                   </a:tcPr>
                 </a:tc>
-                <a:extLst>
-                  <a:ext uri="{0D108BD9-81ED-4DB2-BD59-A6C34878D82A}">
-                    <a16:rowId xmlns:a16="http://schemas.microsoft.com/office/drawing/2014/main" val="10004"/>
-                  </a:ext>
-                </a:extLst>
               </a:tr>
               <a:tr h="533400">
                 <a:tc>
                   <a:txBody>
-                    <a:bodyPr/>
+                    <a:bodyPr wrap="square"/>
                     <a:lstStyle/>
                     <a:p>
                       <a:r>
@@ -12026,7 +15355,7 @@
                 </a:tc>
                 <a:tc>
                   <a:txBody>
-                    <a:bodyPr/>
+                    <a:bodyPr wrap="square"/>
                     <a:lstStyle/>
                     <a:p>
                       <a:r>
@@ -12048,7 +15377,7 @@
                 </a:tc>
                 <a:tc>
                   <a:txBody>
-                    <a:bodyPr/>
+                    <a:bodyPr wrap="square"/>
                     <a:lstStyle/>
                     <a:p>
                       <a:r>
@@ -12070,7 +15399,7 @@
                 </a:tc>
                 <a:tc>
                   <a:txBody>
-                    <a:bodyPr/>
+                    <a:bodyPr wrap="square"/>
                     <a:lstStyle/>
                     <a:p>
                       <a:r>
@@ -12090,11 +15419,6 @@
                     </a:solidFill>
                   </a:tcPr>
                 </a:tc>
-                <a:extLst>
-                  <a:ext uri="{0D108BD9-81ED-4DB2-BD59-A6C34878D82A}">
-                    <a16:rowId xmlns:a16="http://schemas.microsoft.com/office/drawing/2014/main" val="10005"/>
-                  </a:ext>
-                </a:extLst>
               </a:tr>
             </a:tbl>
           </a:graphicData>
@@ -12117,7 +15441,7 @@
           <a:noFill/>
         </p:spPr>
         <p:txBody>
-          <a:bodyPr wrap="square" lIns="45720" tIns="27432" rIns="45720" bIns="27432">
+          <a:bodyPr wrap="square" lIns="45720" rIns="45720" tIns="27432" bIns="27432">
             <a:spAutoFit/>
           </a:bodyPr>
           <a:lstStyle/>

--- a/sinusoid_recovery/sinusoid_transformer_design.pptx
+++ b/sinusoid_recovery/sinusoid_transformer_design.pptx
@@ -3153,50 +3153,7 @@
       </p:sp>
       <p:sp>
         <p:nvSpPr>
-          <p:cNvPr id="3" name="Rectangle 2"/>
-          <p:cNvSpPr/>
-          <p:nvPr/>
-        </p:nvSpPr>
-        <p:spPr>
-          <a:xfrm>
-            <a:off x="0" y="0"/>
-            <a:ext cx="365760" cy="6858000"/>
-          </a:xfrm>
-          <a:prstGeom prst="rect">
-            <a:avLst/>
-          </a:prstGeom>
-          <a:solidFill>
-            <a:srgbClr val="F5A623"/>
-          </a:solidFill>
-          <a:ln>
-            <a:noFill/>
-          </a:ln>
-        </p:spPr>
-        <p:style>
-          <a:lnRef idx="1">
-            <a:schemeClr val="accent1"/>
-          </a:lnRef>
-          <a:fillRef idx="3">
-            <a:schemeClr val="accent1"/>
-          </a:fillRef>
-          <a:effectRef idx="2">
-            <a:schemeClr val="accent1"/>
-          </a:effectRef>
-          <a:fontRef idx="minor">
-            <a:schemeClr val="lt1"/>
-          </a:fontRef>
-        </p:style>
-        <p:txBody>
-          <a:bodyPr rtlCol="0" anchor="ctr"/>
-          <a:lstStyle/>
-          <a:p>
-            <a:pPr algn="ctr"/>
-          </a:p>
-        </p:txBody>
-      </p:sp>
-      <p:sp>
-        <p:nvSpPr>
-          <p:cNvPr id="4" name="TextBox 3"/>
+          <p:cNvPr id="3" name="TextBox 2"/>
           <p:cNvSpPr txBox="1"/>
           <p:nvPr/>
         </p:nvSpPr>
@@ -3231,7 +3188,7 @@
       </p:sp>
       <p:sp>
         <p:nvSpPr>
-          <p:cNvPr id="5" name="TextBox 4"/>
+          <p:cNvPr id="4" name="TextBox 3"/>
           <p:cNvSpPr txBox="1"/>
           <p:nvPr/>
         </p:nvSpPr>
@@ -3266,7 +3223,7 @@
       </p:sp>
       <p:sp>
         <p:nvSpPr>
-          <p:cNvPr id="6" name="TextBox 5"/>
+          <p:cNvPr id="5" name="TextBox 4"/>
           <p:cNvSpPr txBox="1"/>
           <p:nvPr/>
         </p:nvSpPr>
@@ -3433,50 +3390,7 @@
       </p:sp>
       <p:sp>
         <p:nvSpPr>
-          <p:cNvPr id="5" name="Rectangle 4"/>
-          <p:cNvSpPr/>
-          <p:nvPr/>
-        </p:nvSpPr>
-        <p:spPr>
-          <a:xfrm>
-            <a:off x="548640" y="1508760"/>
-            <a:ext cx="109728" cy="548640"/>
-          </a:xfrm>
-          <a:prstGeom prst="rect">
-            <a:avLst/>
-          </a:prstGeom>
-          <a:solidFill>
-            <a:srgbClr val="F5A623"/>
-          </a:solidFill>
-          <a:ln>
-            <a:noFill/>
-          </a:ln>
-        </p:spPr>
-        <p:style>
-          <a:lnRef idx="1">
-            <a:schemeClr val="accent1"/>
-          </a:lnRef>
-          <a:fillRef idx="3">
-            <a:schemeClr val="accent1"/>
-          </a:fillRef>
-          <a:effectRef idx="2">
-            <a:schemeClr val="accent1"/>
-          </a:effectRef>
-          <a:fontRef idx="minor">
-            <a:schemeClr val="lt1"/>
-          </a:fontRef>
-        </p:style>
-        <p:txBody>
-          <a:bodyPr rtlCol="0" anchor="ctr"/>
-          <a:lstStyle/>
-          <a:p>
-            <a:pPr algn="ctr"/>
-          </a:p>
-        </p:txBody>
-      </p:sp>
-      <p:sp>
-        <p:nvSpPr>
-          <p:cNvPr id="6" name="TextBox 5"/>
+          <p:cNvPr id="5" name="TextBox 4"/>
           <p:cNvSpPr txBox="1"/>
           <p:nvPr/>
         </p:nvSpPr>
@@ -3511,7 +3425,7 @@
       </p:sp>
       <p:sp>
         <p:nvSpPr>
-          <p:cNvPr id="7" name="TextBox 6"/>
+          <p:cNvPr id="6" name="TextBox 5"/>
           <p:cNvSpPr txBox="1"/>
           <p:nvPr/>
         </p:nvSpPr>
@@ -3558,7 +3472,7 @@
       </p:sp>
       <p:sp>
         <p:nvSpPr>
-          <p:cNvPr id="8" name="TextBox 7"/>
+          <p:cNvPr id="7" name="TextBox 6"/>
           <p:cNvSpPr txBox="1"/>
           <p:nvPr/>
         </p:nvSpPr>
@@ -3593,7 +3507,7 @@
       </p:sp>
       <p:sp>
         <p:nvSpPr>
-          <p:cNvPr id="9" name="TextBox 8"/>
+          <p:cNvPr id="8" name="TextBox 7"/>
           <p:cNvSpPr txBox="1"/>
           <p:nvPr/>
         </p:nvSpPr>
@@ -3796,50 +3710,7 @@
       </p:sp>
       <p:sp>
         <p:nvSpPr>
-          <p:cNvPr id="5" name="Rectangle 4"/>
-          <p:cNvSpPr/>
-          <p:nvPr/>
-        </p:nvSpPr>
-        <p:spPr>
-          <a:xfrm>
-            <a:off x="548640" y="1508760"/>
-            <a:ext cx="109728" cy="548640"/>
-          </a:xfrm>
-          <a:prstGeom prst="rect">
-            <a:avLst/>
-          </a:prstGeom>
-          <a:solidFill>
-            <a:srgbClr val="F5A623"/>
-          </a:solidFill>
-          <a:ln>
-            <a:noFill/>
-          </a:ln>
-        </p:spPr>
-        <p:style>
-          <a:lnRef idx="1">
-            <a:schemeClr val="accent1"/>
-          </a:lnRef>
-          <a:fillRef idx="3">
-            <a:schemeClr val="accent1"/>
-          </a:fillRef>
-          <a:effectRef idx="2">
-            <a:schemeClr val="accent1"/>
-          </a:effectRef>
-          <a:fontRef idx="minor">
-            <a:schemeClr val="lt1"/>
-          </a:fontRef>
-        </p:style>
-        <p:txBody>
-          <a:bodyPr rtlCol="0" anchor="ctr"/>
-          <a:lstStyle/>
-          <a:p>
-            <a:pPr algn="ctr"/>
-          </a:p>
-        </p:txBody>
-      </p:sp>
-      <p:sp>
-        <p:nvSpPr>
-          <p:cNvPr id="6" name="TextBox 5"/>
+          <p:cNvPr id="5" name="TextBox 4"/>
           <p:cNvSpPr txBox="1"/>
           <p:nvPr/>
         </p:nvSpPr>
@@ -3886,7 +3757,7 @@
       </p:sp>
       <p:sp>
         <p:nvSpPr>
-          <p:cNvPr id="7" name="TextBox 6"/>
+          <p:cNvPr id="6" name="TextBox 5"/>
           <p:cNvSpPr txBox="1"/>
           <p:nvPr/>
         </p:nvSpPr>
@@ -3921,7 +3792,7 @@
       </p:sp>
       <p:sp>
         <p:nvSpPr>
-          <p:cNvPr id="8" name="TextBox 7"/>
+          <p:cNvPr id="7" name="TextBox 6"/>
           <p:cNvSpPr txBox="1"/>
           <p:nvPr/>
         </p:nvSpPr>
@@ -4004,7 +3875,7 @@
       </p:sp>
       <p:sp>
         <p:nvSpPr>
-          <p:cNvPr id="9" name="TextBox 8"/>
+          <p:cNvPr id="8" name="TextBox 7"/>
           <p:cNvSpPr txBox="1"/>
           <p:nvPr/>
         </p:nvSpPr>
@@ -4171,50 +4042,7 @@
       </p:sp>
       <p:sp>
         <p:nvSpPr>
-          <p:cNvPr id="5" name="Rectangle 4"/>
-          <p:cNvSpPr/>
-          <p:nvPr/>
-        </p:nvSpPr>
-        <p:spPr>
-          <a:xfrm>
-            <a:off x="548640" y="1508760"/>
-            <a:ext cx="109728" cy="548640"/>
-          </a:xfrm>
-          <a:prstGeom prst="rect">
-            <a:avLst/>
-          </a:prstGeom>
-          <a:solidFill>
-            <a:srgbClr val="F5A623"/>
-          </a:solidFill>
-          <a:ln>
-            <a:noFill/>
-          </a:ln>
-        </p:spPr>
-        <p:style>
-          <a:lnRef idx="1">
-            <a:schemeClr val="accent1"/>
-          </a:lnRef>
-          <a:fillRef idx="3">
-            <a:schemeClr val="accent1"/>
-          </a:fillRef>
-          <a:effectRef idx="2">
-            <a:schemeClr val="accent1"/>
-          </a:effectRef>
-          <a:fontRef idx="minor">
-            <a:schemeClr val="lt1"/>
-          </a:fontRef>
-        </p:style>
-        <p:txBody>
-          <a:bodyPr rtlCol="0" anchor="ctr"/>
-          <a:lstStyle/>
-          <a:p>
-            <a:pPr algn="ctr"/>
-          </a:p>
-        </p:txBody>
-      </p:sp>
-      <p:sp>
-        <p:nvSpPr>
-          <p:cNvPr id="6" name="TextBox 5"/>
+          <p:cNvPr id="5" name="TextBox 4"/>
           <p:cNvSpPr txBox="1"/>
           <p:nvPr/>
         </p:nvSpPr>
@@ -4249,7 +4077,7 @@
       </p:sp>
       <p:sp>
         <p:nvSpPr>
-          <p:cNvPr id="7" name="TextBox 6"/>
+          <p:cNvPr id="6" name="TextBox 5"/>
           <p:cNvSpPr txBox="1"/>
           <p:nvPr/>
         </p:nvSpPr>
@@ -4284,7 +4112,7 @@
       </p:sp>
       <p:sp>
         <p:nvSpPr>
-          <p:cNvPr id="8" name="TextBox 7"/>
+          <p:cNvPr id="7" name="TextBox 6"/>
           <p:cNvSpPr txBox="1"/>
           <p:nvPr/>
         </p:nvSpPr>
@@ -4319,7 +4147,7 @@
       </p:sp>
       <p:sp>
         <p:nvSpPr>
-          <p:cNvPr id="9" name="TextBox 8"/>
+          <p:cNvPr id="8" name="TextBox 7"/>
           <p:cNvSpPr txBox="1"/>
           <p:nvPr/>
         </p:nvSpPr>
@@ -4532,52 +4360,9 @@
           </a:p>
         </p:txBody>
       </p:sp>
-      <p:sp>
-        <p:nvSpPr>
-          <p:cNvPr id="5" name="Rectangle 4"/>
-          <p:cNvSpPr/>
-          <p:nvPr/>
-        </p:nvSpPr>
-        <p:spPr>
-          <a:xfrm>
-            <a:off x="548640" y="1508760"/>
-            <a:ext cx="109728" cy="548640"/>
-          </a:xfrm>
-          <a:prstGeom prst="rect">
-            <a:avLst/>
-          </a:prstGeom>
-          <a:solidFill>
-            <a:srgbClr val="F5A623"/>
-          </a:solidFill>
-          <a:ln>
-            <a:noFill/>
-          </a:ln>
-        </p:spPr>
-        <p:style>
-          <a:lnRef idx="1">
-            <a:schemeClr val="accent1"/>
-          </a:lnRef>
-          <a:fillRef idx="3">
-            <a:schemeClr val="accent1"/>
-          </a:fillRef>
-          <a:effectRef idx="2">
-            <a:schemeClr val="accent1"/>
-          </a:effectRef>
-          <a:fontRef idx="minor">
-            <a:schemeClr val="lt1"/>
-          </a:fontRef>
-        </p:style>
-        <p:txBody>
-          <a:bodyPr rtlCol="0" anchor="ctr"/>
-          <a:lstStyle/>
-          <a:p>
-            <a:pPr algn="ctr"/>
-          </a:p>
-        </p:txBody>
-      </p:sp>
       <p:graphicFrame>
         <p:nvGraphicFramePr>
-          <p:cNvPr id="6" name="Table 5"/>
+          <p:cNvPr id="5" name="Table 4"/>
           <p:cNvGraphicFramePr>
             <a:graphicFrameLocks noGrp="1"/>
           </p:cNvGraphicFramePr>
@@ -5148,7 +4933,7 @@
       </p:graphicFrame>
       <p:sp>
         <p:nvSpPr>
-          <p:cNvPr id="7" name="TextBox 6"/>
+          <p:cNvPr id="6" name="TextBox 5"/>
           <p:cNvSpPr txBox="1"/>
           <p:nvPr/>
         </p:nvSpPr>
@@ -5315,20 +5100,138 @@
       </p:sp>
       <p:sp>
         <p:nvSpPr>
-          <p:cNvPr id="5" name="Rectangle 4"/>
+          <p:cNvPr id="5" name="TextBox 4"/>
+          <p:cNvSpPr txBox="1"/>
+          <p:nvPr/>
+        </p:nvSpPr>
+        <p:spPr>
+          <a:xfrm>
+            <a:off x="777240" y="1737360"/>
+            <a:ext cx="5303520" cy="457200"/>
+          </a:xfrm>
+          <a:prstGeom prst="rect">
+            <a:avLst/>
+          </a:prstGeom>
+          <a:noFill/>
+        </p:spPr>
+        <p:txBody>
+          <a:bodyPr wrap="square" lIns="45720" rIns="45720" tIns="27432" bIns="27432">
+            <a:spAutoFit/>
+          </a:bodyPr>
+          <a:lstStyle/>
+          <a:p>
+            <a:pPr algn="l"/>
+            <a:r>
+              <a:rPr sz="1800" b="1" i="0">
+                <a:solidFill>
+                  <a:srgbClr val="1C7293"/>
+                </a:solidFill>
+                <a:latin typeface="Calibri"/>
+              </a:rPr>
+              <a:t>Recipe</a:t>
+            </a:r>
+          </a:p>
+        </p:txBody>
+      </p:sp>
+      <p:sp>
+        <p:nvSpPr>
+          <p:cNvPr id="6" name="TextBox 5"/>
+          <p:cNvSpPr txBox="1"/>
+          <p:nvPr/>
+        </p:nvSpPr>
+        <p:spPr>
+          <a:xfrm>
+            <a:off x="777240" y="2194560"/>
+            <a:ext cx="5303520" cy="3200400"/>
+          </a:xfrm>
+          <a:prstGeom prst="rect">
+            <a:avLst/>
+          </a:prstGeom>
+          <a:noFill/>
+        </p:spPr>
+        <p:txBody>
+          <a:bodyPr wrap="square" lIns="45720" rIns="45720" tIns="27432" bIns="27432">
+            <a:spAutoFit/>
+          </a:bodyPr>
+          <a:lstStyle/>
+          <a:p>
+            <a:pPr algn="l"/>
+            <a:r>
+              <a:rPr sz="1500" b="0" i="0">
+                <a:solidFill>
+                  <a:srgbClr val="1A1A1A"/>
+                </a:solidFill>
+                <a:latin typeface="Calibri"/>
+              </a:rPr>
+              <a:t>• Loss: MSE</a:t>
+            </a:r>
+          </a:p>
+          <a:p>
+            <a:pPr algn="l"/>
+            <a:r>
+              <a:rPr sz="1500" b="0" i="0">
+                <a:solidFill>
+                  <a:srgbClr val="1A1A1A"/>
+                </a:solidFill>
+                <a:latin typeface="Calibri"/>
+              </a:rPr>
+              <a:t>• Optimizer: AdamW (lr = 1e-3)</a:t>
+            </a:r>
+          </a:p>
+          <a:p>
+            <a:pPr algn="l"/>
+            <a:r>
+              <a:rPr sz="1500" b="0" i="0">
+                <a:solidFill>
+                  <a:srgbClr val="1A1A1A"/>
+                </a:solidFill>
+                <a:latin typeface="Calibri"/>
+              </a:rPr>
+              <a:t>• Batch size: 32</a:t>
+            </a:r>
+          </a:p>
+          <a:p>
+            <a:pPr algn="l"/>
+            <a:r>
+              <a:rPr sz="1500" b="0" i="0">
+                <a:solidFill>
+                  <a:srgbClr val="1A1A1A"/>
+                </a:solidFill>
+                <a:latin typeface="Calibri"/>
+              </a:rPr>
+              <a:t>• 10 000 fresh sinusoids / epoch</a:t>
+            </a:r>
+          </a:p>
+          <a:p>
+            <a:pPr algn="l"/>
+            <a:r>
+              <a:rPr sz="1500" b="0" i="0">
+                <a:solidFill>
+                  <a:srgbClr val="1A1A1A"/>
+                </a:solidFill>
+                <a:latin typeface="Calibri"/>
+              </a:rPr>
+              <a:t>• On-the-fly data generation</a:t>
+            </a:r>
+          </a:p>
+        </p:txBody>
+      </p:sp>
+      <p:sp>
+        <p:nvSpPr>
+          <p:cNvPr id="7" name="Rounded Rectangle 6"/>
           <p:cNvSpPr/>
           <p:nvPr/>
         </p:nvSpPr>
         <p:spPr>
           <a:xfrm>
-            <a:off x="548640" y="1508760"/>
-            <a:ext cx="109728" cy="548640"/>
-          </a:xfrm>
-          <a:prstGeom prst="rect">
+            <a:off x="6400800" y="1737360"/>
+            <a:ext cx="2560320" cy="1371600"/>
+          </a:xfrm>
+          <a:prstGeom prst="roundRect">
             <a:avLst/>
           </a:prstGeom>
           <a:solidFill>
-            <a:srgbClr val="F5A623"/>
+            <a:srgbClr val="065A82"/>
           </a:solidFill>
           <a:ln>
             <a:noFill/>
@@ -5358,14 +5261,14 @@
       </p:sp>
       <p:sp>
         <p:nvSpPr>
-          <p:cNvPr id="6" name="TextBox 5"/>
+          <p:cNvPr id="8" name="TextBox 7"/>
           <p:cNvSpPr txBox="1"/>
           <p:nvPr/>
         </p:nvSpPr>
         <p:spPr>
           <a:xfrm>
-            <a:off x="777240" y="1737360"/>
-            <a:ext cx="5303520" cy="457200"/>
+            <a:off x="6400800" y="1783080"/>
+            <a:ext cx="2560320" cy="365760"/>
           </a:xfrm>
           <a:prstGeom prst="rect">
             <a:avLst/>
@@ -5378,29 +5281,29 @@
           </a:bodyPr>
           <a:lstStyle/>
           <a:p>
-            <a:pPr algn="l"/>
-            <a:r>
-              <a:rPr sz="1800" b="1" i="0">
-                <a:solidFill>
-                  <a:srgbClr val="1C7293"/>
-                </a:solidFill>
-                <a:latin typeface="Calibri"/>
-              </a:rPr>
-              <a:t>Recipe</a:t>
-            </a:r>
-          </a:p>
-        </p:txBody>
-      </p:sp>
-      <p:sp>
-        <p:nvSpPr>
-          <p:cNvPr id="7" name="TextBox 6"/>
+            <a:pPr algn="ctr"/>
+            <a:r>
+              <a:rPr sz="1100" b="0" i="0">
+                <a:solidFill>
+                  <a:srgbClr val="CADCFC"/>
+                </a:solidFill>
+                <a:latin typeface="Calibri"/>
+              </a:rPr>
+              <a:t>Initial MSE</a:t>
+            </a:r>
+          </a:p>
+        </p:txBody>
+      </p:sp>
+      <p:sp>
+        <p:nvSpPr>
+          <p:cNvPr id="9" name="TextBox 8"/>
           <p:cNvSpPr txBox="1"/>
           <p:nvPr/>
         </p:nvSpPr>
         <p:spPr>
           <a:xfrm>
-            <a:off x="777240" y="2194560"/>
-            <a:ext cx="5303520" cy="3200400"/>
+            <a:off x="6400800" y="2103120"/>
+            <a:ext cx="2560320" cy="731520"/>
           </a:xfrm>
           <a:prstGeom prst="rect">
             <a:avLst/>
@@ -5413,76 +5316,28 @@
           </a:bodyPr>
           <a:lstStyle/>
           <a:p>
-            <a:pPr algn="l"/>
-            <a:r>
-              <a:rPr sz="1500" b="0" i="0">
-                <a:solidFill>
-                  <a:srgbClr val="1A1A1A"/>
-                </a:solidFill>
-                <a:latin typeface="Calibri"/>
-              </a:rPr>
-              <a:t>• Loss: MSE</a:t>
-            </a:r>
-          </a:p>
-          <a:p>
-            <a:pPr algn="l"/>
-            <a:r>
-              <a:rPr sz="1500" b="0" i="0">
-                <a:solidFill>
-                  <a:srgbClr val="1A1A1A"/>
-                </a:solidFill>
-                <a:latin typeface="Calibri"/>
-              </a:rPr>
-              <a:t>• Optimizer: AdamW (lr = 1e-3)</a:t>
-            </a:r>
-          </a:p>
-          <a:p>
-            <a:pPr algn="l"/>
-            <a:r>
-              <a:rPr sz="1500" b="0" i="0">
-                <a:solidFill>
-                  <a:srgbClr val="1A1A1A"/>
-                </a:solidFill>
-                <a:latin typeface="Calibri"/>
-              </a:rPr>
-              <a:t>• Batch size: 32</a:t>
-            </a:r>
-          </a:p>
-          <a:p>
-            <a:pPr algn="l"/>
-            <a:r>
-              <a:rPr sz="1500" b="0" i="0">
-                <a:solidFill>
-                  <a:srgbClr val="1A1A1A"/>
-                </a:solidFill>
-                <a:latin typeface="Calibri"/>
-              </a:rPr>
-              <a:t>• 10 000 fresh sinusoids / epoch</a:t>
-            </a:r>
-          </a:p>
-          <a:p>
-            <a:pPr algn="l"/>
-            <a:r>
-              <a:rPr sz="1500" b="0" i="0">
-                <a:solidFill>
-                  <a:srgbClr val="1A1A1A"/>
-                </a:solidFill>
-                <a:latin typeface="Calibri"/>
-              </a:rPr>
-              <a:t>• On-the-fly data generation</a:t>
-            </a:r>
-          </a:p>
-        </p:txBody>
-      </p:sp>
-      <p:sp>
-        <p:nvSpPr>
-          <p:cNvPr id="8" name="Rounded Rectangle 7"/>
+            <a:pPr algn="ctr"/>
+            <a:r>
+              <a:rPr sz="2600" b="1" i="0">
+                <a:solidFill>
+                  <a:srgbClr val="F2F4F8"/>
+                </a:solidFill>
+                <a:latin typeface="Calibri"/>
+              </a:rPr>
+              <a:t>1.40</a:t>
+            </a:r>
+          </a:p>
+        </p:txBody>
+      </p:sp>
+      <p:sp>
+        <p:nvSpPr>
+          <p:cNvPr id="10" name="Rounded Rectangle 9"/>
           <p:cNvSpPr/>
           <p:nvPr/>
         </p:nvSpPr>
         <p:spPr>
           <a:xfrm>
-            <a:off x="6400800" y="1737360"/>
+            <a:off x="9144000" y="1737360"/>
             <a:ext cx="2560320" cy="1371600"/>
           </a:xfrm>
           <a:prstGeom prst="roundRect">
@@ -5519,13 +5374,13 @@
       </p:sp>
       <p:sp>
         <p:nvSpPr>
-          <p:cNvPr id="9" name="TextBox 8"/>
+          <p:cNvPr id="11" name="TextBox 10"/>
           <p:cNvSpPr txBox="1"/>
           <p:nvPr/>
         </p:nvSpPr>
         <p:spPr>
           <a:xfrm>
-            <a:off x="6400800" y="1783080"/>
+            <a:off x="9144000" y="1783080"/>
             <a:ext cx="2560320" cy="365760"/>
           </a:xfrm>
           <a:prstGeom prst="rect">
@@ -5547,20 +5402,20 @@
                 </a:solidFill>
                 <a:latin typeface="Calibri"/>
               </a:rPr>
-              <a:t>Initial MSE</a:t>
-            </a:r>
-          </a:p>
-        </p:txBody>
-      </p:sp>
-      <p:sp>
-        <p:nvSpPr>
-          <p:cNvPr id="10" name="TextBox 9"/>
+              <a:t>Final MSE</a:t>
+            </a:r>
+          </a:p>
+        </p:txBody>
+      </p:sp>
+      <p:sp>
+        <p:nvSpPr>
+          <p:cNvPr id="12" name="TextBox 11"/>
           <p:cNvSpPr txBox="1"/>
           <p:nvPr/>
         </p:nvSpPr>
         <p:spPr>
           <a:xfrm>
-            <a:off x="6400800" y="2103120"/>
+            <a:off x="9144000" y="2103120"/>
             <a:ext cx="2560320" cy="731520"/>
           </a:xfrm>
           <a:prstGeom prst="rect">
@@ -5582,20 +5437,20 @@
                 </a:solidFill>
                 <a:latin typeface="Calibri"/>
               </a:rPr>
-              <a:t>1.40</a:t>
-            </a:r>
-          </a:p>
-        </p:txBody>
-      </p:sp>
-      <p:sp>
-        <p:nvSpPr>
-          <p:cNvPr id="11" name="Rounded Rectangle 10"/>
+              <a:t>0.03</a:t>
+            </a:r>
+          </a:p>
+        </p:txBody>
+      </p:sp>
+      <p:sp>
+        <p:nvSpPr>
+          <p:cNvPr id="13" name="Rounded Rectangle 12"/>
           <p:cNvSpPr/>
           <p:nvPr/>
         </p:nvSpPr>
         <p:spPr>
           <a:xfrm>
-            <a:off x="9144000" y="1737360"/>
+            <a:off x="6400800" y="3291840"/>
             <a:ext cx="2560320" cy="1371600"/>
           </a:xfrm>
           <a:prstGeom prst="roundRect">
@@ -5632,13 +5487,13 @@
       </p:sp>
       <p:sp>
         <p:nvSpPr>
-          <p:cNvPr id="12" name="TextBox 11"/>
+          <p:cNvPr id="14" name="TextBox 13"/>
           <p:cNvSpPr txBox="1"/>
           <p:nvPr/>
         </p:nvSpPr>
         <p:spPr>
           <a:xfrm>
-            <a:off x="9144000" y="1783080"/>
+            <a:off x="6400800" y="3337560"/>
             <a:ext cx="2560320" cy="365760"/>
           </a:xfrm>
           <a:prstGeom prst="rect">
@@ -5660,20 +5515,20 @@
                 </a:solidFill>
                 <a:latin typeface="Calibri"/>
               </a:rPr>
-              <a:t>Final MSE</a:t>
-            </a:r>
-          </a:p>
-        </p:txBody>
-      </p:sp>
-      <p:sp>
-        <p:nvSpPr>
-          <p:cNvPr id="13" name="TextBox 12"/>
+              <a:t>Output SNR</a:t>
+            </a:r>
+          </a:p>
+        </p:txBody>
+      </p:sp>
+      <p:sp>
+        <p:nvSpPr>
+          <p:cNvPr id="15" name="TextBox 14"/>
           <p:cNvSpPr txBox="1"/>
           <p:nvPr/>
         </p:nvSpPr>
         <p:spPr>
           <a:xfrm>
-            <a:off x="9144000" y="2103120"/>
+            <a:off x="6400800" y="3657600"/>
             <a:ext cx="2560320" cy="731520"/>
           </a:xfrm>
           <a:prstGeom prst="rect">
@@ -5695,20 +5550,55 @@
                 </a:solidFill>
                 <a:latin typeface="Calibri"/>
               </a:rPr>
-              <a:t>0.03</a:t>
-            </a:r>
-          </a:p>
-        </p:txBody>
-      </p:sp>
-      <p:sp>
-        <p:nvSpPr>
-          <p:cNvPr id="14" name="Rounded Rectangle 13"/>
+              <a:t>14.8 dB</a:t>
+            </a:r>
+          </a:p>
+        </p:txBody>
+      </p:sp>
+      <p:sp>
+        <p:nvSpPr>
+          <p:cNvPr id="16" name="TextBox 15"/>
+          <p:cNvSpPr txBox="1"/>
+          <p:nvPr/>
+        </p:nvSpPr>
+        <p:spPr>
+          <a:xfrm>
+            <a:off x="6400800" y="4251960"/>
+            <a:ext cx="2560320" cy="365760"/>
+          </a:xfrm>
+          <a:prstGeom prst="rect">
+            <a:avLst/>
+          </a:prstGeom>
+          <a:noFill/>
+        </p:spPr>
+        <p:txBody>
+          <a:bodyPr wrap="square" lIns="45720" rIns="45720" tIns="27432" bIns="27432">
+            <a:spAutoFit/>
+          </a:bodyPr>
+          <a:lstStyle/>
+          <a:p>
+            <a:pPr algn="ctr"/>
+            <a:r>
+              <a:rPr sz="1000" b="0" i="0">
+                <a:solidFill>
+                  <a:srgbClr val="CADCFC"/>
+                </a:solidFill>
+                <a:latin typeface="Calibri"/>
+              </a:rPr>
+              <a:t>matches naive baseline</a:t>
+            </a:r>
+          </a:p>
+        </p:txBody>
+      </p:sp>
+      <p:sp>
+        <p:nvSpPr>
+          <p:cNvPr id="17" name="Rounded Rectangle 16"/>
           <p:cNvSpPr/>
           <p:nvPr/>
         </p:nvSpPr>
         <p:spPr>
           <a:xfrm>
-            <a:off x="6400800" y="3291840"/>
+            <a:off x="9144000" y="3291840"/>
             <a:ext cx="2560320" cy="1371600"/>
           </a:xfrm>
           <a:prstGeom prst="roundRect">
@@ -5745,13 +5635,13 @@
       </p:sp>
       <p:sp>
         <p:nvSpPr>
-          <p:cNvPr id="15" name="TextBox 14"/>
+          <p:cNvPr id="18" name="TextBox 17"/>
           <p:cNvSpPr txBox="1"/>
           <p:nvPr/>
         </p:nvSpPr>
         <p:spPr>
           <a:xfrm>
-            <a:off x="6400800" y="3337560"/>
+            <a:off x="9144000" y="3337560"/>
             <a:ext cx="2560320" cy="365760"/>
           </a:xfrm>
           <a:prstGeom prst="rect">
@@ -5773,20 +5663,20 @@
                 </a:solidFill>
                 <a:latin typeface="Calibri"/>
               </a:rPr>
-              <a:t>Output SNR</a:t>
-            </a:r>
-          </a:p>
-        </p:txBody>
-      </p:sp>
-      <p:sp>
-        <p:nvSpPr>
-          <p:cNvPr id="16" name="TextBox 15"/>
+              <a:t>Parameters</a:t>
+            </a:r>
+          </a:p>
+        </p:txBody>
+      </p:sp>
+      <p:sp>
+        <p:nvSpPr>
+          <p:cNvPr id="19" name="TextBox 18"/>
           <p:cNvSpPr txBox="1"/>
           <p:nvPr/>
         </p:nvSpPr>
         <p:spPr>
           <a:xfrm>
-            <a:off x="6400800" y="3657600"/>
+            <a:off x="9144000" y="3657600"/>
             <a:ext cx="2560320" cy="731520"/>
           </a:xfrm>
           <a:prstGeom prst="rect">
@@ -5808,120 +5698,7 @@
                 </a:solidFill>
                 <a:latin typeface="Calibri"/>
               </a:rPr>
-              <a:t>14.8 dB</a:t>
-            </a:r>
-          </a:p>
-        </p:txBody>
-      </p:sp>
-      <p:sp>
-        <p:nvSpPr>
-          <p:cNvPr id="17" name="TextBox 16"/>
-          <p:cNvSpPr txBox="1"/>
-          <p:nvPr/>
-        </p:nvSpPr>
-        <p:spPr>
-          <a:xfrm>
-            <a:off x="6400800" y="4251960"/>
-            <a:ext cx="2560320" cy="365760"/>
-          </a:xfrm>
-          <a:prstGeom prst="rect">
-            <a:avLst/>
-          </a:prstGeom>
-          <a:noFill/>
-        </p:spPr>
-        <p:txBody>
-          <a:bodyPr wrap="square" lIns="45720" rIns="45720" tIns="27432" bIns="27432">
-            <a:spAutoFit/>
-          </a:bodyPr>
-          <a:lstStyle/>
-          <a:p>
-            <a:pPr algn="ctr"/>
-            <a:r>
-              <a:rPr sz="1000" b="0" i="0">
-                <a:solidFill>
-                  <a:srgbClr val="CADCFC"/>
-                </a:solidFill>
-                <a:latin typeface="Calibri"/>
-              </a:rPr>
-              <a:t>matches naive baseline</a:t>
-            </a:r>
-          </a:p>
-        </p:txBody>
-      </p:sp>
-      <p:sp>
-        <p:nvSpPr>
-          <p:cNvPr id="18" name="Rounded Rectangle 17"/>
-          <p:cNvSpPr/>
-          <p:nvPr/>
-        </p:nvSpPr>
-        <p:spPr>
-          <a:xfrm>
-            <a:off x="9144000" y="3291840"/>
-            <a:ext cx="2560320" cy="1371600"/>
-          </a:xfrm>
-          <a:prstGeom prst="roundRect">
-            <a:avLst/>
-          </a:prstGeom>
-          <a:solidFill>
-            <a:srgbClr val="065A82"/>
-          </a:solidFill>
-          <a:ln>
-            <a:noFill/>
-          </a:ln>
-        </p:spPr>
-        <p:style>
-          <a:lnRef idx="1">
-            <a:schemeClr val="accent1"/>
-          </a:lnRef>
-          <a:fillRef idx="3">
-            <a:schemeClr val="accent1"/>
-          </a:fillRef>
-          <a:effectRef idx="2">
-            <a:schemeClr val="accent1"/>
-          </a:effectRef>
-          <a:fontRef idx="minor">
-            <a:schemeClr val="lt1"/>
-          </a:fontRef>
-        </p:style>
-        <p:txBody>
-          <a:bodyPr rtlCol="0" anchor="ctr"/>
-          <a:lstStyle/>
-          <a:p>
-            <a:pPr algn="ctr"/>
-          </a:p>
-        </p:txBody>
-      </p:sp>
-      <p:sp>
-        <p:nvSpPr>
-          <p:cNvPr id="19" name="TextBox 18"/>
-          <p:cNvSpPr txBox="1"/>
-          <p:nvPr/>
-        </p:nvSpPr>
-        <p:spPr>
-          <a:xfrm>
-            <a:off x="9144000" y="3337560"/>
-            <a:ext cx="2560320" cy="365760"/>
-          </a:xfrm>
-          <a:prstGeom prst="rect">
-            <a:avLst/>
-          </a:prstGeom>
-          <a:noFill/>
-        </p:spPr>
-        <p:txBody>
-          <a:bodyPr wrap="square" lIns="45720" rIns="45720" tIns="27432" bIns="27432">
-            <a:spAutoFit/>
-          </a:bodyPr>
-          <a:lstStyle/>
-          <a:p>
-            <a:pPr algn="ctr"/>
-            <a:r>
-              <a:rPr sz="1100" b="0" i="0">
-                <a:solidFill>
-                  <a:srgbClr val="CADCFC"/>
-                </a:solidFill>
-                <a:latin typeface="Calibri"/>
-              </a:rPr>
-              <a:t>Parameters</a:t>
+              <a:t>29 K</a:t>
             </a:r>
           </a:p>
         </p:txBody>
@@ -5929,41 +5706,6 @@
       <p:sp>
         <p:nvSpPr>
           <p:cNvPr id="20" name="TextBox 19"/>
-          <p:cNvSpPr txBox="1"/>
-          <p:nvPr/>
-        </p:nvSpPr>
-        <p:spPr>
-          <a:xfrm>
-            <a:off x="9144000" y="3657600"/>
-            <a:ext cx="2560320" cy="731520"/>
-          </a:xfrm>
-          <a:prstGeom prst="rect">
-            <a:avLst/>
-          </a:prstGeom>
-          <a:noFill/>
-        </p:spPr>
-        <p:txBody>
-          <a:bodyPr wrap="square" lIns="45720" rIns="45720" tIns="27432" bIns="27432">
-            <a:spAutoFit/>
-          </a:bodyPr>
-          <a:lstStyle/>
-          <a:p>
-            <a:pPr algn="ctr"/>
-            <a:r>
-              <a:rPr sz="2600" b="1" i="0">
-                <a:solidFill>
-                  <a:srgbClr val="F2F4F8"/>
-                </a:solidFill>
-                <a:latin typeface="Calibri"/>
-              </a:rPr>
-              <a:t>29 K</a:t>
-            </a:r>
-          </a:p>
-        </p:txBody>
-      </p:sp>
-      <p:sp>
-        <p:nvSpPr>
-          <p:cNvPr id="21" name="TextBox 20"/>
           <p:cNvSpPr txBox="1"/>
           <p:nvPr/>
         </p:nvSpPr>
@@ -6130,16 +5872,16 @@
       </p:sp>
       <p:sp>
         <p:nvSpPr>
-          <p:cNvPr id="5" name="Rectangle 4"/>
+          <p:cNvPr id="5" name="Oval 4"/>
           <p:cNvSpPr/>
           <p:nvPr/>
         </p:nvSpPr>
         <p:spPr>
           <a:xfrm>
-            <a:off x="548640" y="1508760"/>
-            <a:ext cx="109728" cy="548640"/>
-          </a:xfrm>
-          <a:prstGeom prst="rect">
+            <a:off x="777240" y="1874520"/>
+            <a:ext cx="457200" cy="457200"/>
+          </a:xfrm>
+          <a:prstGeom prst="ellipse">
             <a:avLst/>
           </a:prstGeom>
           <a:solidFill>
@@ -6173,13 +5915,83 @@
       </p:sp>
       <p:sp>
         <p:nvSpPr>
-          <p:cNvPr id="6" name="Oval 5"/>
+          <p:cNvPr id="6" name="TextBox 5"/>
+          <p:cNvSpPr txBox="1"/>
+          <p:nvPr/>
+        </p:nvSpPr>
+        <p:spPr>
+          <a:xfrm>
+            <a:off x="1371600" y="1783080"/>
+            <a:ext cx="10058400" cy="457200"/>
+          </a:xfrm>
+          <a:prstGeom prst="rect">
+            <a:avLst/>
+          </a:prstGeom>
+          <a:noFill/>
+        </p:spPr>
+        <p:txBody>
+          <a:bodyPr wrap="square" lIns="45720" rIns="45720" tIns="27432" bIns="27432">
+            <a:spAutoFit/>
+          </a:bodyPr>
+          <a:lstStyle/>
+          <a:p>
+            <a:pPr algn="l"/>
+            <a:r>
+              <a:rPr sz="1700" b="1" i="0">
+                <a:solidFill>
+                  <a:srgbClr val="065A82"/>
+                </a:solidFill>
+                <a:latin typeface="Calibri"/>
+              </a:rPr>
+              <a:t>Attention heatmaps</a:t>
+            </a:r>
+          </a:p>
+        </p:txBody>
+      </p:sp>
+      <p:sp>
+        <p:nvSpPr>
+          <p:cNvPr id="7" name="TextBox 6"/>
+          <p:cNvSpPr txBox="1"/>
+          <p:nvPr/>
+        </p:nvSpPr>
+        <p:spPr>
+          <a:xfrm>
+            <a:off x="1371600" y="2240280"/>
+            <a:ext cx="10058400" cy="548640"/>
+          </a:xfrm>
+          <a:prstGeom prst="rect">
+            <a:avLst/>
+          </a:prstGeom>
+          <a:noFill/>
+        </p:spPr>
+        <p:txBody>
+          <a:bodyPr wrap="square" lIns="45720" rIns="45720" tIns="27432" bIns="27432">
+            <a:spAutoFit/>
+          </a:bodyPr>
+          <a:lstStyle/>
+          <a:p>
+            <a:pPr algn="l"/>
+            <a:r>
+              <a:rPr sz="1400" b="0" i="0">
+                <a:solidFill>
+                  <a:srgbClr val="1A1A1A"/>
+                </a:solidFill>
+                <a:latin typeface="Calibri"/>
+              </a:rPr>
+              <a:t>Peaks at lag 1 and lag 2 — matches AR(2) tap structure</a:t>
+            </a:r>
+          </a:p>
+        </p:txBody>
+      </p:sp>
+      <p:sp>
+        <p:nvSpPr>
+          <p:cNvPr id="8" name="Oval 7"/>
           <p:cNvSpPr/>
           <p:nvPr/>
         </p:nvSpPr>
         <p:spPr>
           <a:xfrm>
-            <a:off x="777240" y="1874520"/>
+            <a:off x="777240" y="2971800"/>
             <a:ext cx="457200" cy="457200"/>
           </a:xfrm>
           <a:prstGeom prst="ellipse">
@@ -6216,13 +6028,13 @@
       </p:sp>
       <p:sp>
         <p:nvSpPr>
-          <p:cNvPr id="7" name="TextBox 6"/>
+          <p:cNvPr id="9" name="TextBox 8"/>
           <p:cNvSpPr txBox="1"/>
           <p:nvPr/>
         </p:nvSpPr>
         <p:spPr>
           <a:xfrm>
-            <a:off x="1371600" y="1783080"/>
+            <a:off x="1371600" y="2880360"/>
             <a:ext cx="10058400" cy="457200"/>
           </a:xfrm>
           <a:prstGeom prst="rect">
@@ -6244,20 +6056,20 @@
                 </a:solidFill>
                 <a:latin typeface="Calibri"/>
               </a:rPr>
-              <a:t>Attention heatmaps</a:t>
-            </a:r>
-          </a:p>
-        </p:txBody>
-      </p:sp>
-      <p:sp>
-        <p:nvSpPr>
-          <p:cNvPr id="8" name="TextBox 7"/>
+              <a:t>Attention-vs-lag profile</a:t>
+            </a:r>
+          </a:p>
+        </p:txBody>
+      </p:sp>
+      <p:sp>
+        <p:nvSpPr>
+          <p:cNvPr id="10" name="TextBox 9"/>
           <p:cNvSpPr txBox="1"/>
           <p:nvPr/>
         </p:nvSpPr>
         <p:spPr>
           <a:xfrm>
-            <a:off x="1371600" y="2240280"/>
+            <a:off x="1371600" y="3337560"/>
             <a:ext cx="10058400" cy="548640"/>
           </a:xfrm>
           <a:prstGeom prst="rect">
@@ -6279,20 +6091,20 @@
                 </a:solidFill>
                 <a:latin typeface="Calibri"/>
               </a:rPr>
-              <a:t>Peaks at lag 1 and lag 2 — matches AR(2) tap structure</a:t>
-            </a:r>
-          </a:p>
-        </p:txBody>
-      </p:sp>
-      <p:sp>
-        <p:nvSpPr>
-          <p:cNvPr id="9" name="Oval 8"/>
+              <a:t>Bar heights track theoretical  2 cos(ω₀)  weights</a:t>
+            </a:r>
+          </a:p>
+        </p:txBody>
+      </p:sp>
+      <p:sp>
+        <p:nvSpPr>
+          <p:cNvPr id="11" name="Oval 10"/>
           <p:cNvSpPr/>
           <p:nvPr/>
         </p:nvSpPr>
         <p:spPr>
           <a:xfrm>
-            <a:off x="777240" y="2971800"/>
+            <a:off x="777240" y="4069080"/>
             <a:ext cx="457200" cy="457200"/>
           </a:xfrm>
           <a:prstGeom prst="ellipse">
@@ -6329,13 +6141,13 @@
       </p:sp>
       <p:sp>
         <p:nvSpPr>
-          <p:cNvPr id="10" name="TextBox 9"/>
+          <p:cNvPr id="12" name="TextBox 11"/>
           <p:cNvSpPr txBox="1"/>
           <p:nvPr/>
         </p:nvSpPr>
         <p:spPr>
           <a:xfrm>
-            <a:off x="1371600" y="2880360"/>
+            <a:off x="1371600" y="3977640"/>
             <a:ext cx="10058400" cy="457200"/>
           </a:xfrm>
           <a:prstGeom prst="rect">
@@ -6357,20 +6169,20 @@
                 </a:solidFill>
                 <a:latin typeface="Calibri"/>
               </a:rPr>
-              <a:t>Attention-vs-lag profile</a:t>
-            </a:r>
-          </a:p>
-        </p:txBody>
-      </p:sp>
-      <p:sp>
-        <p:nvSpPr>
-          <p:cNvPr id="11" name="TextBox 10"/>
+              <a:t>FFT comparison</a:t>
+            </a:r>
+          </a:p>
+        </p:txBody>
+      </p:sp>
+      <p:sp>
+        <p:nvSpPr>
+          <p:cNvPr id="13" name="TextBox 12"/>
           <p:cNvSpPr txBox="1"/>
           <p:nvPr/>
         </p:nvSpPr>
         <p:spPr>
           <a:xfrm>
-            <a:off x="1371600" y="3337560"/>
+            <a:off x="1371600" y="4434840"/>
             <a:ext cx="10058400" cy="548640"/>
           </a:xfrm>
           <a:prstGeom prst="rect">
@@ -6392,20 +6204,20 @@
                 </a:solidFill>
                 <a:latin typeface="Calibri"/>
               </a:rPr>
-              <a:t>Bar heights track theoretical  2 cos(ω₀)  weights</a:t>
-            </a:r>
-          </a:p>
-        </p:txBody>
-      </p:sp>
-      <p:sp>
-        <p:nvSpPr>
-          <p:cNvPr id="12" name="Oval 11"/>
+              <a:t>Output spectrum concentrates at true frequency, noise suppressed</a:t>
+            </a:r>
+          </a:p>
+        </p:txBody>
+      </p:sp>
+      <p:sp>
+        <p:nvSpPr>
+          <p:cNvPr id="14" name="Oval 13"/>
           <p:cNvSpPr/>
           <p:nvPr/>
         </p:nvSpPr>
         <p:spPr>
           <a:xfrm>
-            <a:off x="777240" y="4069080"/>
+            <a:off x="777240" y="5166360"/>
             <a:ext cx="457200" cy="457200"/>
           </a:xfrm>
           <a:prstGeom prst="ellipse">
@@ -6442,13 +6254,13 @@
       </p:sp>
       <p:sp>
         <p:nvSpPr>
-          <p:cNvPr id="13" name="TextBox 12"/>
+          <p:cNvPr id="15" name="TextBox 14"/>
           <p:cNvSpPr txBox="1"/>
           <p:nvPr/>
         </p:nvSpPr>
         <p:spPr>
           <a:xfrm>
-            <a:off x="1371600" y="3977640"/>
+            <a:off x="1371600" y="5074920"/>
             <a:ext cx="10058400" cy="457200"/>
           </a:xfrm>
           <a:prstGeom prst="rect">
@@ -6470,127 +6282,14 @@
                 </a:solidFill>
                 <a:latin typeface="Calibri"/>
               </a:rPr>
-              <a:t>FFT comparison</a:t>
-            </a:r>
-          </a:p>
-        </p:txBody>
-      </p:sp>
-      <p:sp>
-        <p:nvSpPr>
-          <p:cNvPr id="14" name="TextBox 13"/>
-          <p:cNvSpPr txBox="1"/>
-          <p:nvPr/>
-        </p:nvSpPr>
-        <p:spPr>
-          <a:xfrm>
-            <a:off x="1371600" y="4434840"/>
-            <a:ext cx="10058400" cy="548640"/>
-          </a:xfrm>
-          <a:prstGeom prst="rect">
-            <a:avLst/>
-          </a:prstGeom>
-          <a:noFill/>
-        </p:spPr>
-        <p:txBody>
-          <a:bodyPr wrap="square" lIns="45720" rIns="45720" tIns="27432" bIns="27432">
-            <a:spAutoFit/>
-          </a:bodyPr>
-          <a:lstStyle/>
-          <a:p>
-            <a:pPr algn="l"/>
-            <a:r>
-              <a:rPr sz="1400" b="0" i="0">
-                <a:solidFill>
-                  <a:srgbClr val="1A1A1A"/>
-                </a:solidFill>
-                <a:latin typeface="Calibri"/>
-              </a:rPr>
-              <a:t>Output spectrum concentrates at true frequency, noise suppressed</a:t>
-            </a:r>
-          </a:p>
-        </p:txBody>
-      </p:sp>
-      <p:sp>
-        <p:nvSpPr>
-          <p:cNvPr id="15" name="Oval 14"/>
-          <p:cNvSpPr/>
-          <p:nvPr/>
-        </p:nvSpPr>
-        <p:spPr>
-          <a:xfrm>
-            <a:off x="777240" y="5166360"/>
-            <a:ext cx="457200" cy="457200"/>
-          </a:xfrm>
-          <a:prstGeom prst="ellipse">
-            <a:avLst/>
-          </a:prstGeom>
-          <a:solidFill>
-            <a:srgbClr val="F5A623"/>
-          </a:solidFill>
-          <a:ln>
-            <a:noFill/>
-          </a:ln>
-        </p:spPr>
-        <p:style>
-          <a:lnRef idx="1">
-            <a:schemeClr val="accent1"/>
-          </a:lnRef>
-          <a:fillRef idx="3">
-            <a:schemeClr val="accent1"/>
-          </a:fillRef>
-          <a:effectRef idx="2">
-            <a:schemeClr val="accent1"/>
-          </a:effectRef>
-          <a:fontRef idx="minor">
-            <a:schemeClr val="lt1"/>
-          </a:fontRef>
-        </p:style>
-        <p:txBody>
-          <a:bodyPr rtlCol="0" anchor="ctr"/>
-          <a:lstStyle/>
-          <a:p>
-            <a:pPr algn="ctr"/>
+              <a:t>Autoregressive generation</a:t>
+            </a:r>
           </a:p>
         </p:txBody>
       </p:sp>
       <p:sp>
         <p:nvSpPr>
           <p:cNvPr id="16" name="TextBox 15"/>
-          <p:cNvSpPr txBox="1"/>
-          <p:nvPr/>
-        </p:nvSpPr>
-        <p:spPr>
-          <a:xfrm>
-            <a:off x="1371600" y="5074920"/>
-            <a:ext cx="10058400" cy="457200"/>
-          </a:xfrm>
-          <a:prstGeom prst="rect">
-            <a:avLst/>
-          </a:prstGeom>
-          <a:noFill/>
-        </p:spPr>
-        <p:txBody>
-          <a:bodyPr wrap="square" lIns="45720" rIns="45720" tIns="27432" bIns="27432">
-            <a:spAutoFit/>
-          </a:bodyPr>
-          <a:lstStyle/>
-          <a:p>
-            <a:pPr algn="l"/>
-            <a:r>
-              <a:rPr sz="1700" b="1" i="0">
-                <a:solidFill>
-                  <a:srgbClr val="065A82"/>
-                </a:solidFill>
-                <a:latin typeface="Calibri"/>
-              </a:rPr>
-              <a:t>Autoregressive generation</a:t>
-            </a:r>
-          </a:p>
-        </p:txBody>
-      </p:sp>
-      <p:sp>
-        <p:nvSpPr>
-          <p:cNvPr id="17" name="TextBox 16"/>
           <p:cNvSpPr txBox="1"/>
           <p:nvPr/>
         </p:nvSpPr>
@@ -6755,52 +6454,9 @@
           </a:p>
         </p:txBody>
       </p:sp>
-      <p:sp>
-        <p:nvSpPr>
-          <p:cNvPr id="5" name="Rectangle 4"/>
-          <p:cNvSpPr/>
-          <p:nvPr/>
-        </p:nvSpPr>
-        <p:spPr>
-          <a:xfrm>
-            <a:off x="548640" y="1508760"/>
-            <a:ext cx="109728" cy="548640"/>
-          </a:xfrm>
-          <a:prstGeom prst="rect">
-            <a:avLst/>
-          </a:prstGeom>
-          <a:solidFill>
-            <a:srgbClr val="F5A623"/>
-          </a:solidFill>
-          <a:ln>
-            <a:noFill/>
-          </a:ln>
-        </p:spPr>
-        <p:style>
-          <a:lnRef idx="1">
-            <a:schemeClr val="accent1"/>
-          </a:lnRef>
-          <a:fillRef idx="3">
-            <a:schemeClr val="accent1"/>
-          </a:fillRef>
-          <a:effectRef idx="2">
-            <a:schemeClr val="accent1"/>
-          </a:effectRef>
-          <a:fontRef idx="minor">
-            <a:schemeClr val="lt1"/>
-          </a:fontRef>
-        </p:style>
-        <p:txBody>
-          <a:bodyPr rtlCol="0" anchor="ctr"/>
-          <a:lstStyle/>
-          <a:p>
-            <a:pPr algn="ctr"/>
-          </a:p>
-        </p:txBody>
-      </p:sp>
       <p:graphicFrame>
         <p:nvGraphicFramePr>
-          <p:cNvPr id="6" name="Table 5"/>
+          <p:cNvPr id="5" name="Table 4"/>
           <p:cNvGraphicFramePr>
             <a:graphicFrameLocks noGrp="1"/>
           </p:cNvGraphicFramePr>
@@ -7613,7 +7269,7 @@
       </p:graphicFrame>
       <p:sp>
         <p:nvSpPr>
-          <p:cNvPr id="7" name="TextBox 6"/>
+          <p:cNvPr id="6" name="TextBox 5"/>
           <p:cNvSpPr txBox="1"/>
           <p:nvPr/>
         </p:nvSpPr>
@@ -7778,52 +7434,9 @@
           </a:p>
         </p:txBody>
       </p:sp>
-      <p:sp>
-        <p:nvSpPr>
-          <p:cNvPr id="5" name="Rectangle 4"/>
-          <p:cNvSpPr/>
-          <p:nvPr/>
-        </p:nvSpPr>
-        <p:spPr>
-          <a:xfrm>
-            <a:off x="548640" y="1508760"/>
-            <a:ext cx="109728" cy="548640"/>
-          </a:xfrm>
-          <a:prstGeom prst="rect">
-            <a:avLst/>
-          </a:prstGeom>
-          <a:solidFill>
-            <a:srgbClr val="F5A623"/>
-          </a:solidFill>
-          <a:ln>
-            <a:noFill/>
-          </a:ln>
-        </p:spPr>
-        <p:style>
-          <a:lnRef idx="1">
-            <a:schemeClr val="accent1"/>
-          </a:lnRef>
-          <a:fillRef idx="3">
-            <a:schemeClr val="accent1"/>
-          </a:fillRef>
-          <a:effectRef idx="2">
-            <a:schemeClr val="accent1"/>
-          </a:effectRef>
-          <a:fontRef idx="minor">
-            <a:schemeClr val="lt1"/>
-          </a:fontRef>
-        </p:style>
-        <p:txBody>
-          <a:bodyPr rtlCol="0" anchor="ctr"/>
-          <a:lstStyle/>
-          <a:p>
-            <a:pPr algn="ctr"/>
-          </a:p>
-        </p:txBody>
-      </p:sp>
       <p:graphicFrame>
         <p:nvGraphicFramePr>
-          <p:cNvPr id="6" name="Table 5"/>
+          <p:cNvPr id="5" name="Table 4"/>
           <p:cNvGraphicFramePr>
             <a:graphicFrameLocks noGrp="1"/>
           </p:cNvGraphicFramePr>
@@ -8211,7 +7824,7 @@
       </p:graphicFrame>
       <p:sp>
         <p:nvSpPr>
-          <p:cNvPr id="7" name="TextBox 6"/>
+          <p:cNvPr id="6" name="TextBox 5"/>
           <p:cNvSpPr txBox="1"/>
           <p:nvPr/>
         </p:nvSpPr>
@@ -8246,7 +7859,7 @@
       </p:sp>
       <p:sp>
         <p:nvSpPr>
-          <p:cNvPr id="8" name="TextBox 7"/>
+          <p:cNvPr id="7" name="TextBox 6"/>
           <p:cNvSpPr txBox="1"/>
           <p:nvPr/>
         </p:nvSpPr>
@@ -8461,50 +8074,7 @@
       </p:sp>
       <p:sp>
         <p:nvSpPr>
-          <p:cNvPr id="5" name="Rectangle 4"/>
-          <p:cNvSpPr/>
-          <p:nvPr/>
-        </p:nvSpPr>
-        <p:spPr>
-          <a:xfrm>
-            <a:off x="548640" y="1508760"/>
-            <a:ext cx="109728" cy="548640"/>
-          </a:xfrm>
-          <a:prstGeom prst="rect">
-            <a:avLst/>
-          </a:prstGeom>
-          <a:solidFill>
-            <a:srgbClr val="F5A623"/>
-          </a:solidFill>
-          <a:ln>
-            <a:noFill/>
-          </a:ln>
-        </p:spPr>
-        <p:style>
-          <a:lnRef idx="1">
-            <a:schemeClr val="accent1"/>
-          </a:lnRef>
-          <a:fillRef idx="3">
-            <a:schemeClr val="accent1"/>
-          </a:fillRef>
-          <a:effectRef idx="2">
-            <a:schemeClr val="accent1"/>
-          </a:effectRef>
-          <a:fontRef idx="minor">
-            <a:schemeClr val="lt1"/>
-          </a:fontRef>
-        </p:style>
-        <p:txBody>
-          <a:bodyPr rtlCol="0" anchor="ctr"/>
-          <a:lstStyle/>
-          <a:p>
-            <a:pPr algn="ctr"/>
-          </a:p>
-        </p:txBody>
-      </p:sp>
-      <p:sp>
-        <p:nvSpPr>
-          <p:cNvPr id="6" name="TextBox 5"/>
+          <p:cNvPr id="5" name="TextBox 4"/>
           <p:cNvSpPr txBox="1"/>
           <p:nvPr/>
         </p:nvSpPr>
@@ -8539,7 +8109,7 @@
       </p:sp>
       <p:sp>
         <p:nvSpPr>
-          <p:cNvPr id="7" name="TextBox 6"/>
+          <p:cNvPr id="6" name="TextBox 5"/>
           <p:cNvSpPr txBox="1"/>
           <p:nvPr/>
         </p:nvSpPr>
@@ -8574,7 +8144,7 @@
       </p:sp>
       <p:graphicFrame>
         <p:nvGraphicFramePr>
-          <p:cNvPr id="8" name="Table 7"/>
+          <p:cNvPr id="7" name="Table 6"/>
           <p:cNvGraphicFramePr>
             <a:graphicFrameLocks noGrp="1"/>
           </p:cNvGraphicFramePr>
@@ -8872,7 +8442,7 @@
       </p:graphicFrame>
       <p:sp>
         <p:nvSpPr>
-          <p:cNvPr id="9" name="TextBox 8"/>
+          <p:cNvPr id="8" name="TextBox 7"/>
           <p:cNvSpPr txBox="1"/>
           <p:nvPr/>
         </p:nvSpPr>
@@ -8907,7 +8477,7 @@
       </p:sp>
       <p:graphicFrame>
         <p:nvGraphicFramePr>
-          <p:cNvPr id="10" name="Table 9"/>
+          <p:cNvPr id="9" name="Table 8"/>
           <p:cNvGraphicFramePr>
             <a:graphicFrameLocks noGrp="1"/>
           </p:cNvGraphicFramePr>
@@ -9295,7 +8865,7 @@
       </p:graphicFrame>
       <p:sp>
         <p:nvSpPr>
-          <p:cNvPr id="11" name="TextBox 10"/>
+          <p:cNvPr id="10" name="TextBox 9"/>
           <p:cNvSpPr txBox="1"/>
           <p:nvPr/>
         </p:nvSpPr>
@@ -9462,50 +9032,7 @@
       </p:sp>
       <p:sp>
         <p:nvSpPr>
-          <p:cNvPr id="5" name="Rectangle 4"/>
-          <p:cNvSpPr/>
-          <p:nvPr/>
-        </p:nvSpPr>
-        <p:spPr>
-          <a:xfrm>
-            <a:off x="548640" y="1508760"/>
-            <a:ext cx="109728" cy="548640"/>
-          </a:xfrm>
-          <a:prstGeom prst="rect">
-            <a:avLst/>
-          </a:prstGeom>
-          <a:solidFill>
-            <a:srgbClr val="F5A623"/>
-          </a:solidFill>
-          <a:ln>
-            <a:noFill/>
-          </a:ln>
-        </p:spPr>
-        <p:style>
-          <a:lnRef idx="1">
-            <a:schemeClr val="accent1"/>
-          </a:lnRef>
-          <a:fillRef idx="3">
-            <a:schemeClr val="accent1"/>
-          </a:fillRef>
-          <a:effectRef idx="2">
-            <a:schemeClr val="accent1"/>
-          </a:effectRef>
-          <a:fontRef idx="minor">
-            <a:schemeClr val="lt1"/>
-          </a:fontRef>
-        </p:style>
-        <p:txBody>
-          <a:bodyPr rtlCol="0" anchor="ctr"/>
-          <a:lstStyle/>
-          <a:p>
-            <a:pPr algn="ctr"/>
-          </a:p>
-        </p:txBody>
-      </p:sp>
-      <p:sp>
-        <p:nvSpPr>
-          <p:cNvPr id="6" name="TextBox 5"/>
+          <p:cNvPr id="5" name="TextBox 4"/>
           <p:cNvSpPr txBox="1"/>
           <p:nvPr/>
         </p:nvSpPr>
@@ -9540,7 +9067,7 @@
       </p:sp>
       <p:sp>
         <p:nvSpPr>
-          <p:cNvPr id="7" name="TextBox 6"/>
+          <p:cNvPr id="6" name="TextBox 5"/>
           <p:cNvSpPr txBox="1"/>
           <p:nvPr/>
         </p:nvSpPr>
@@ -9575,7 +9102,7 @@
       </p:sp>
       <p:sp>
         <p:nvSpPr>
-          <p:cNvPr id="8" name="TextBox 7"/>
+          <p:cNvPr id="7" name="TextBox 6"/>
           <p:cNvSpPr txBox="1"/>
           <p:nvPr/>
         </p:nvSpPr>
@@ -9658,7 +9185,7 @@
       </p:sp>
       <p:sp>
         <p:nvSpPr>
-          <p:cNvPr id="9" name="TextBox 8"/>
+          <p:cNvPr id="8" name="TextBox 7"/>
           <p:cNvSpPr txBox="1"/>
           <p:nvPr/>
         </p:nvSpPr>
@@ -9693,7 +9220,7 @@
       </p:sp>
       <p:sp>
         <p:nvSpPr>
-          <p:cNvPr id="10" name="TextBox 9"/>
+          <p:cNvPr id="9" name="TextBox 8"/>
           <p:cNvSpPr txBox="1"/>
           <p:nvPr/>
         </p:nvSpPr>
@@ -9884,50 +9411,7 @@
       </p:sp>
       <p:sp>
         <p:nvSpPr>
-          <p:cNvPr id="5" name="Rectangle 4"/>
-          <p:cNvSpPr/>
-          <p:nvPr/>
-        </p:nvSpPr>
-        <p:spPr>
-          <a:xfrm>
-            <a:off x="548640" y="1508760"/>
-            <a:ext cx="109728" cy="548640"/>
-          </a:xfrm>
-          <a:prstGeom prst="rect">
-            <a:avLst/>
-          </a:prstGeom>
-          <a:solidFill>
-            <a:srgbClr val="F5A623"/>
-          </a:solidFill>
-          <a:ln>
-            <a:noFill/>
-          </a:ln>
-        </p:spPr>
-        <p:style>
-          <a:lnRef idx="1">
-            <a:schemeClr val="accent1"/>
-          </a:lnRef>
-          <a:fillRef idx="3">
-            <a:schemeClr val="accent1"/>
-          </a:fillRef>
-          <a:effectRef idx="2">
-            <a:schemeClr val="accent1"/>
-          </a:effectRef>
-          <a:fontRef idx="minor">
-            <a:schemeClr val="lt1"/>
-          </a:fontRef>
-        </p:style>
-        <p:txBody>
-          <a:bodyPr rtlCol="0" anchor="ctr"/>
-          <a:lstStyle/>
-          <a:p>
-            <a:pPr algn="ctr"/>
-          </a:p>
-        </p:txBody>
-      </p:sp>
-      <p:sp>
-        <p:nvSpPr>
-          <p:cNvPr id="6" name="TextBox 5"/>
+          <p:cNvPr id="5" name="TextBox 4"/>
           <p:cNvSpPr txBox="1"/>
           <p:nvPr/>
         </p:nvSpPr>
@@ -9962,7 +9446,7 @@
       </p:sp>
       <p:sp>
         <p:nvSpPr>
-          <p:cNvPr id="7" name="TextBox 6"/>
+          <p:cNvPr id="6" name="TextBox 5"/>
           <p:cNvSpPr txBox="1"/>
           <p:nvPr/>
         </p:nvSpPr>
@@ -10033,7 +9517,7 @@
       </p:sp>
       <p:sp>
         <p:nvSpPr>
-          <p:cNvPr id="8" name="TextBox 7"/>
+          <p:cNvPr id="7" name="TextBox 6"/>
           <p:cNvSpPr txBox="1"/>
           <p:nvPr/>
         </p:nvSpPr>
@@ -10068,7 +9552,7 @@
       </p:sp>
       <p:sp>
         <p:nvSpPr>
-          <p:cNvPr id="9" name="TextBox 8"/>
+          <p:cNvPr id="8" name="TextBox 7"/>
           <p:cNvSpPr txBox="1"/>
           <p:nvPr/>
         </p:nvSpPr>
@@ -10139,7 +9623,7 @@
       </p:sp>
       <p:sp>
         <p:nvSpPr>
-          <p:cNvPr id="10" name="TextBox 9"/>
+          <p:cNvPr id="9" name="TextBox 8"/>
           <p:cNvSpPr txBox="1"/>
           <p:nvPr/>
         </p:nvSpPr>
@@ -10236,20 +9720,90 @@
       </p:sp>
       <p:sp>
         <p:nvSpPr>
-          <p:cNvPr id="3" name="Rectangle 2"/>
+          <p:cNvPr id="3" name="TextBox 2"/>
+          <p:cNvSpPr txBox="1"/>
+          <p:nvPr/>
+        </p:nvSpPr>
+        <p:spPr>
+          <a:xfrm>
+            <a:off x="914400" y="731520"/>
+            <a:ext cx="10515600" cy="914400"/>
+          </a:xfrm>
+          <a:prstGeom prst="rect">
+            <a:avLst/>
+          </a:prstGeom>
+          <a:noFill/>
+        </p:spPr>
+        <p:txBody>
+          <a:bodyPr wrap="square" lIns="45720" rIns="45720" tIns="27432" bIns="27432">
+            <a:spAutoFit/>
+          </a:bodyPr>
+          <a:lstStyle/>
+          <a:p>
+            <a:pPr algn="l"/>
+            <a:r>
+              <a:rPr sz="3800" b="1" i="0">
+                <a:solidFill>
+                  <a:srgbClr val="F2F4F8"/>
+                </a:solidFill>
+                <a:latin typeface="Calibri"/>
+              </a:rPr>
+              <a:t>Key Takeaway</a:t>
+            </a:r>
+          </a:p>
+        </p:txBody>
+      </p:sp>
+      <p:sp>
+        <p:nvSpPr>
+          <p:cNvPr id="4" name="TextBox 3"/>
+          <p:cNvSpPr txBox="1"/>
+          <p:nvPr/>
+        </p:nvSpPr>
+        <p:spPr>
+          <a:xfrm>
+            <a:off x="914400" y="1645920"/>
+            <a:ext cx="10515600" cy="548640"/>
+          </a:xfrm>
+          <a:prstGeom prst="rect">
+            <a:avLst/>
+          </a:prstGeom>
+          <a:noFill/>
+        </p:spPr>
+        <p:txBody>
+          <a:bodyPr wrap="square" lIns="45720" rIns="45720" tIns="27432" bIns="27432">
+            <a:spAutoFit/>
+          </a:bodyPr>
+          <a:lstStyle/>
+          <a:p>
+            <a:pPr algn="l"/>
+            <a:r>
+              <a:rPr sz="1800" b="0" i="0">
+                <a:solidFill>
+                  <a:srgbClr val="CADCFC"/>
+                </a:solidFill>
+                <a:latin typeface="Calibri"/>
+              </a:rPr>
+              <a:t>Three DSP-anchored hyperparameters define the design</a:t>
+            </a:r>
+          </a:p>
+        </p:txBody>
+      </p:sp>
+      <p:sp>
+        <p:nvSpPr>
+          <p:cNvPr id="5" name="Rounded Rectangle 4"/>
           <p:cNvSpPr/>
           <p:nvPr/>
         </p:nvSpPr>
         <p:spPr>
           <a:xfrm>
-            <a:off x="0" y="0"/>
-            <a:ext cx="365760" cy="6858000"/>
-          </a:xfrm>
-          <a:prstGeom prst="rect">
+            <a:off x="914400" y="2834640"/>
+            <a:ext cx="10332720" cy="822960"/>
+          </a:xfrm>
+          <a:prstGeom prst="roundRect">
             <a:avLst/>
           </a:prstGeom>
           <a:solidFill>
-            <a:srgbClr val="F5A623"/>
+            <a:srgbClr val="065A82"/>
           </a:solidFill>
           <a:ln>
             <a:noFill/>
@@ -10279,14 +9833,14 @@
       </p:sp>
       <p:sp>
         <p:nvSpPr>
-          <p:cNvPr id="4" name="TextBox 3"/>
+          <p:cNvPr id="6" name="TextBox 5"/>
           <p:cNvSpPr txBox="1"/>
           <p:nvPr/>
         </p:nvSpPr>
         <p:spPr>
           <a:xfrm>
-            <a:off x="914400" y="731520"/>
-            <a:ext cx="10515600" cy="914400"/>
+            <a:off x="1188720" y="3017520"/>
+            <a:ext cx="3200400" cy="457200"/>
           </a:xfrm>
           <a:prstGeom prst="rect">
             <a:avLst/>
@@ -10301,27 +9855,27 @@
           <a:p>
             <a:pPr algn="l"/>
             <a:r>
-              <a:rPr sz="3800" b="1" i="0">
-                <a:solidFill>
-                  <a:srgbClr val="F2F4F8"/>
-                </a:solidFill>
-                <a:latin typeface="Calibri"/>
-              </a:rPr>
-              <a:t>Key Takeaway</a:t>
-            </a:r>
-          </a:p>
-        </p:txBody>
-      </p:sp>
-      <p:sp>
-        <p:nvSpPr>
-          <p:cNvPr id="5" name="TextBox 4"/>
+              <a:rPr sz="2000" b="1" i="0">
+                <a:solidFill>
+                  <a:srgbClr val="F5A623"/>
+                </a:solidFill>
+                <a:latin typeface="Calibri"/>
+              </a:rPr>
+              <a:t>n_heads</a:t>
+            </a:r>
+          </a:p>
+        </p:txBody>
+      </p:sp>
+      <p:sp>
+        <p:nvSpPr>
+          <p:cNvPr id="7" name="TextBox 6"/>
           <p:cNvSpPr txBox="1"/>
           <p:nvPr/>
         </p:nvSpPr>
         <p:spPr>
           <a:xfrm>
-            <a:off x="914400" y="1645920"/>
-            <a:ext cx="10515600" cy="548640"/>
+            <a:off x="4572000" y="3017520"/>
+            <a:ext cx="6400800" cy="457200"/>
           </a:xfrm>
           <a:prstGeom prst="rect">
             <a:avLst/>
@@ -10336,26 +9890,26 @@
           <a:p>
             <a:pPr algn="l"/>
             <a:r>
-              <a:rPr sz="1800" b="0" i="0">
-                <a:solidFill>
-                  <a:srgbClr val="CADCFC"/>
-                </a:solidFill>
-                <a:latin typeface="Calibri"/>
-              </a:rPr>
-              <a:t>Three DSP-anchored hyperparameters define the design</a:t>
-            </a:r>
-          </a:p>
-        </p:txBody>
-      </p:sp>
-      <p:sp>
-        <p:nvSpPr>
-          <p:cNvPr id="6" name="Rounded Rectangle 5"/>
+              <a:rPr sz="2000" b="0" i="0">
+                <a:solidFill>
+                  <a:srgbClr val="F2F4F8"/>
+                </a:solidFill>
+                <a:latin typeface="Calibri"/>
+              </a:rPr>
+              <a:t>≈  effective AR order</a:t>
+            </a:r>
+          </a:p>
+        </p:txBody>
+      </p:sp>
+      <p:sp>
+        <p:nvSpPr>
+          <p:cNvPr id="8" name="Rounded Rectangle 7"/>
           <p:cNvSpPr/>
           <p:nvPr/>
         </p:nvSpPr>
         <p:spPr>
           <a:xfrm>
-            <a:off x="914400" y="2834640"/>
+            <a:off x="914400" y="3794760"/>
             <a:ext cx="10332720" cy="822960"/>
           </a:xfrm>
           <a:prstGeom prst="roundRect">
@@ -10392,13 +9946,13 @@
       </p:sp>
       <p:sp>
         <p:nvSpPr>
-          <p:cNvPr id="7" name="TextBox 6"/>
+          <p:cNvPr id="9" name="TextBox 8"/>
           <p:cNvSpPr txBox="1"/>
           <p:nvPr/>
         </p:nvSpPr>
         <p:spPr>
           <a:xfrm>
-            <a:off x="1188720" y="3017520"/>
+            <a:off x="1188720" y="3977640"/>
             <a:ext cx="3200400" cy="457200"/>
           </a:xfrm>
           <a:prstGeom prst="rect">
@@ -10420,20 +9974,20 @@
                 </a:solidFill>
                 <a:latin typeface="Calibri"/>
               </a:rPr>
-              <a:t>n_heads</a:t>
-            </a:r>
-          </a:p>
-        </p:txBody>
-      </p:sp>
-      <p:sp>
-        <p:nvSpPr>
-          <p:cNvPr id="8" name="TextBox 7"/>
+              <a:t>context_length</a:t>
+            </a:r>
+          </a:p>
+        </p:txBody>
+      </p:sp>
+      <p:sp>
+        <p:nvSpPr>
+          <p:cNvPr id="10" name="TextBox 9"/>
           <p:cNvSpPr txBox="1"/>
           <p:nvPr/>
         </p:nvSpPr>
         <p:spPr>
           <a:xfrm>
-            <a:off x="4572000" y="3017520"/>
+            <a:off x="4572000" y="3977640"/>
             <a:ext cx="6400800" cy="457200"/>
           </a:xfrm>
           <a:prstGeom prst="rect">
@@ -10455,20 +10009,20 @@
                 </a:solidFill>
                 <a:latin typeface="Calibri"/>
               </a:rPr>
-              <a:t>≈  effective AR order</a:t>
-            </a:r>
-          </a:p>
-        </p:txBody>
-      </p:sp>
-      <p:sp>
-        <p:nvSpPr>
-          <p:cNvPr id="9" name="Rounded Rectangle 8"/>
+              <a:t>≈  N_FFT  ≈  fs / f_min</a:t>
+            </a:r>
+          </a:p>
+        </p:txBody>
+      </p:sp>
+      <p:sp>
+        <p:nvSpPr>
+          <p:cNvPr id="11" name="Rounded Rectangle 10"/>
           <p:cNvSpPr/>
           <p:nvPr/>
         </p:nvSpPr>
         <p:spPr>
           <a:xfrm>
-            <a:off x="914400" y="3794760"/>
+            <a:off x="914400" y="4754880"/>
             <a:ext cx="10332720" cy="822960"/>
           </a:xfrm>
           <a:prstGeom prst="roundRect">
@@ -10505,13 +10059,13 @@
       </p:sp>
       <p:sp>
         <p:nvSpPr>
-          <p:cNvPr id="10" name="TextBox 9"/>
+          <p:cNvPr id="12" name="TextBox 11"/>
           <p:cNvSpPr txBox="1"/>
           <p:nvPr/>
         </p:nvSpPr>
         <p:spPr>
           <a:xfrm>
-            <a:off x="1188720" y="3977640"/>
+            <a:off x="1188720" y="4937760"/>
             <a:ext cx="3200400" cy="457200"/>
           </a:xfrm>
           <a:prstGeom prst="rect">
@@ -10533,20 +10087,20 @@
                 </a:solidFill>
                 <a:latin typeface="Calibri"/>
               </a:rPr>
-              <a:t>context_length</a:t>
-            </a:r>
-          </a:p>
-        </p:txBody>
-      </p:sp>
-      <p:sp>
-        <p:nvSpPr>
-          <p:cNvPr id="11" name="TextBox 10"/>
+              <a:t>head_dim</a:t>
+            </a:r>
+          </a:p>
+        </p:txBody>
+      </p:sp>
+      <p:sp>
+        <p:nvSpPr>
+          <p:cNvPr id="13" name="TextBox 12"/>
           <p:cNvSpPr txBox="1"/>
           <p:nvPr/>
         </p:nvSpPr>
         <p:spPr>
           <a:xfrm>
-            <a:off x="4572000" y="3977640"/>
+            <a:off x="4572000" y="4937760"/>
             <a:ext cx="6400800" cy="457200"/>
           </a:xfrm>
           <a:prstGeom prst="rect">
@@ -10568,85 +10122,7 @@
                 </a:solidFill>
                 <a:latin typeface="Calibri"/>
               </a:rPr>
-              <a:t>≈  N_FFT  ≈  fs / f_min</a:t>
-            </a:r>
-          </a:p>
-        </p:txBody>
-      </p:sp>
-      <p:sp>
-        <p:nvSpPr>
-          <p:cNvPr id="12" name="Rounded Rectangle 11"/>
-          <p:cNvSpPr/>
-          <p:nvPr/>
-        </p:nvSpPr>
-        <p:spPr>
-          <a:xfrm>
-            <a:off x="914400" y="4754880"/>
-            <a:ext cx="10332720" cy="822960"/>
-          </a:xfrm>
-          <a:prstGeom prst="roundRect">
-            <a:avLst/>
-          </a:prstGeom>
-          <a:solidFill>
-            <a:srgbClr val="065A82"/>
-          </a:solidFill>
-          <a:ln>
-            <a:noFill/>
-          </a:ln>
-        </p:spPr>
-        <p:style>
-          <a:lnRef idx="1">
-            <a:schemeClr val="accent1"/>
-          </a:lnRef>
-          <a:fillRef idx="3">
-            <a:schemeClr val="accent1"/>
-          </a:fillRef>
-          <a:effectRef idx="2">
-            <a:schemeClr val="accent1"/>
-          </a:effectRef>
-          <a:fontRef idx="minor">
-            <a:schemeClr val="lt1"/>
-          </a:fontRef>
-        </p:style>
-        <p:txBody>
-          <a:bodyPr rtlCol="0" anchor="ctr"/>
-          <a:lstStyle/>
-          <a:p>
-            <a:pPr algn="ctr"/>
-          </a:p>
-        </p:txBody>
-      </p:sp>
-      <p:sp>
-        <p:nvSpPr>
-          <p:cNvPr id="13" name="TextBox 12"/>
-          <p:cNvSpPr txBox="1"/>
-          <p:nvPr/>
-        </p:nvSpPr>
-        <p:spPr>
-          <a:xfrm>
-            <a:off x="1188720" y="4937760"/>
-            <a:ext cx="3200400" cy="457200"/>
-          </a:xfrm>
-          <a:prstGeom prst="rect">
-            <a:avLst/>
-          </a:prstGeom>
-          <a:noFill/>
-        </p:spPr>
-        <p:txBody>
-          <a:bodyPr wrap="square" lIns="45720" rIns="45720" tIns="27432" bIns="27432">
-            <a:spAutoFit/>
-          </a:bodyPr>
-          <a:lstStyle/>
-          <a:p>
-            <a:pPr algn="l"/>
-            <a:r>
-              <a:rPr sz="2000" b="1" i="0">
-                <a:solidFill>
-                  <a:srgbClr val="F5A623"/>
-                </a:solidFill>
-                <a:latin typeface="Calibri"/>
-              </a:rPr>
-              <a:t>head_dim</a:t>
+              <a:t>≈  2 · log₂(context_length)</a:t>
             </a:r>
           </a:p>
         </p:txBody>
@@ -10654,41 +10130,6 @@
       <p:sp>
         <p:nvSpPr>
           <p:cNvPr id="14" name="TextBox 13"/>
-          <p:cNvSpPr txBox="1"/>
-          <p:nvPr/>
-        </p:nvSpPr>
-        <p:spPr>
-          <a:xfrm>
-            <a:off x="4572000" y="4937760"/>
-            <a:ext cx="6400800" cy="457200"/>
-          </a:xfrm>
-          <a:prstGeom prst="rect">
-            <a:avLst/>
-          </a:prstGeom>
-          <a:noFill/>
-        </p:spPr>
-        <p:txBody>
-          <a:bodyPr wrap="square" lIns="45720" rIns="45720" tIns="27432" bIns="27432">
-            <a:spAutoFit/>
-          </a:bodyPr>
-          <a:lstStyle/>
-          <a:p>
-            <a:pPr algn="l"/>
-            <a:r>
-              <a:rPr sz="2000" b="0" i="0">
-                <a:solidFill>
-                  <a:srgbClr val="F2F4F8"/>
-                </a:solidFill>
-                <a:latin typeface="Calibri"/>
-              </a:rPr>
-              <a:t>≈  2 · log₂(context_length)</a:t>
-            </a:r>
-          </a:p>
-        </p:txBody>
-      </p:sp>
-      <p:sp>
-        <p:nvSpPr>
-          <p:cNvPr id="15" name="TextBox 14"/>
           <p:cNvSpPr txBox="1"/>
           <p:nvPr/>
         </p:nvSpPr>
@@ -10855,20 +10296,20 @@
       </p:sp>
       <p:sp>
         <p:nvSpPr>
-          <p:cNvPr id="5" name="Rectangle 4"/>
+          <p:cNvPr id="5" name="Rounded Rectangle 4"/>
           <p:cNvSpPr/>
           <p:nvPr/>
         </p:nvSpPr>
         <p:spPr>
           <a:xfrm>
-            <a:off x="548640" y="1508760"/>
-            <a:ext cx="109728" cy="548640"/>
-          </a:xfrm>
-          <a:prstGeom prst="rect">
+            <a:off x="1371600" y="2103120"/>
+            <a:ext cx="9418320" cy="1463040"/>
+          </a:xfrm>
+          <a:prstGeom prst="roundRect">
             <a:avLst/>
           </a:prstGeom>
           <a:solidFill>
-            <a:srgbClr val="F5A623"/>
+            <a:srgbClr val="065A82"/>
           </a:solidFill>
           <a:ln>
             <a:noFill/>
@@ -10898,50 +10339,7 @@
       </p:sp>
       <p:sp>
         <p:nvSpPr>
-          <p:cNvPr id="6" name="Rounded Rectangle 5"/>
-          <p:cNvSpPr/>
-          <p:nvPr/>
-        </p:nvSpPr>
-        <p:spPr>
-          <a:xfrm>
-            <a:off x="1371600" y="2103120"/>
-            <a:ext cx="9418320" cy="1463040"/>
-          </a:xfrm>
-          <a:prstGeom prst="roundRect">
-            <a:avLst/>
-          </a:prstGeom>
-          <a:solidFill>
-            <a:srgbClr val="065A82"/>
-          </a:solidFill>
-          <a:ln>
-            <a:noFill/>
-          </a:ln>
-        </p:spPr>
-        <p:style>
-          <a:lnRef idx="1">
-            <a:schemeClr val="accent1"/>
-          </a:lnRef>
-          <a:fillRef idx="3">
-            <a:schemeClr val="accent1"/>
-          </a:fillRef>
-          <a:effectRef idx="2">
-            <a:schemeClr val="accent1"/>
-          </a:effectRef>
-          <a:fontRef idx="minor">
-            <a:schemeClr val="lt1"/>
-          </a:fontRef>
-        </p:style>
-        <p:txBody>
-          <a:bodyPr rtlCol="0" anchor="ctr"/>
-          <a:lstStyle/>
-          <a:p>
-            <a:pPr algn="ctr"/>
-          </a:p>
-        </p:txBody>
-      </p:sp>
-      <p:sp>
-        <p:nvSpPr>
-          <p:cNvPr id="7" name="TextBox 6"/>
+          <p:cNvPr id="6" name="TextBox 5"/>
           <p:cNvSpPr txBox="1"/>
           <p:nvPr/>
         </p:nvSpPr>
@@ -10976,7 +10374,7 @@
       </p:sp>
       <p:sp>
         <p:nvSpPr>
-          <p:cNvPr id="8" name="TextBox 7"/>
+          <p:cNvPr id="7" name="TextBox 6"/>
           <p:cNvSpPr txBox="1"/>
           <p:nvPr/>
         </p:nvSpPr>
@@ -11011,7 +10409,7 @@
       </p:sp>
       <p:sp>
         <p:nvSpPr>
-          <p:cNvPr id="9" name="TextBox 8"/>
+          <p:cNvPr id="8" name="TextBox 7"/>
           <p:cNvSpPr txBox="1"/>
           <p:nvPr/>
         </p:nvSpPr>
@@ -11212,52 +10610,9 @@
           </a:p>
         </p:txBody>
       </p:sp>
-      <p:sp>
-        <p:nvSpPr>
-          <p:cNvPr id="5" name="Rectangle 4"/>
-          <p:cNvSpPr/>
-          <p:nvPr/>
-        </p:nvSpPr>
-        <p:spPr>
-          <a:xfrm>
-            <a:off x="548640" y="1508760"/>
-            <a:ext cx="109728" cy="548640"/>
-          </a:xfrm>
-          <a:prstGeom prst="rect">
-            <a:avLst/>
-          </a:prstGeom>
-          <a:solidFill>
-            <a:srgbClr val="F5A623"/>
-          </a:solidFill>
-          <a:ln>
-            <a:noFill/>
-          </a:ln>
-        </p:spPr>
-        <p:style>
-          <a:lnRef idx="1">
-            <a:schemeClr val="accent1"/>
-          </a:lnRef>
-          <a:fillRef idx="3">
-            <a:schemeClr val="accent1"/>
-          </a:fillRef>
-          <a:effectRef idx="2">
-            <a:schemeClr val="accent1"/>
-          </a:effectRef>
-          <a:fontRef idx="minor">
-            <a:schemeClr val="lt1"/>
-          </a:fontRef>
-        </p:style>
-        <p:txBody>
-          <a:bodyPr rtlCol="0" anchor="ctr"/>
-          <a:lstStyle/>
-          <a:p>
-            <a:pPr algn="ctr"/>
-          </a:p>
-        </p:txBody>
-      </p:sp>
       <p:graphicFrame>
         <p:nvGraphicFramePr>
-          <p:cNvPr id="6" name="Table 5"/>
+          <p:cNvPr id="5" name="Table 4"/>
           <p:cNvGraphicFramePr>
             <a:graphicFrameLocks noGrp="1"/>
           </p:cNvGraphicFramePr>
@@ -11828,7 +11183,7 @@
       </p:graphicFrame>
       <p:sp>
         <p:nvSpPr>
-          <p:cNvPr id="7" name="TextBox 6"/>
+          <p:cNvPr id="6" name="TextBox 5"/>
           <p:cNvSpPr txBox="1"/>
           <p:nvPr/>
         </p:nvSpPr>
@@ -11995,20 +11350,20 @@
       </p:sp>
       <p:sp>
         <p:nvSpPr>
-          <p:cNvPr id="5" name="Rectangle 4"/>
+          <p:cNvPr id="5" name="Rounded Rectangle 4"/>
           <p:cNvSpPr/>
           <p:nvPr/>
         </p:nvSpPr>
         <p:spPr>
           <a:xfrm>
-            <a:off x="548640" y="1508760"/>
-            <a:ext cx="109728" cy="548640"/>
-          </a:xfrm>
-          <a:prstGeom prst="rect">
+            <a:off x="411480" y="2286000"/>
+            <a:ext cx="1508760" cy="1188720"/>
+          </a:xfrm>
+          <a:prstGeom prst="roundRect">
             <a:avLst/>
           </a:prstGeom>
           <a:solidFill>
-            <a:srgbClr val="F5A623"/>
+            <a:srgbClr val="B8C7D8"/>
           </a:solidFill>
           <a:ln>
             <a:noFill/>
@@ -12029,29 +11384,50 @@
           </a:fontRef>
         </p:style>
         <p:txBody>
-          <a:bodyPr rtlCol="0" anchor="ctr"/>
+          <a:bodyPr rtlCol="0" anchor="ctr" lIns="45720" rIns="45720" wrap="square"/>
           <a:lstStyle/>
           <a:p>
             <a:pPr algn="ctr"/>
-          </a:p>
-        </p:txBody>
-      </p:sp>
-      <p:sp>
-        <p:nvSpPr>
-          <p:cNvPr id="6" name="Rounded Rectangle 5"/>
+            <a:r>
+              <a:rPr sz="1200" b="1">
+                <a:solidFill>
+                  <a:srgbClr val="1A1A1A"/>
+                </a:solidFill>
+                <a:latin typeface="Calibri"/>
+              </a:rPr>
+              <a:t>Scalar</a:t>
+            </a:r>
+          </a:p>
+          <a:p>
+            <a:pPr algn="ctr"/>
+            <a:r>
+              <a:rPr sz="1200" b="1">
+                <a:solidFill>
+                  <a:srgbClr val="1A1A1A"/>
+                </a:solidFill>
+                <a:latin typeface="Calibri"/>
+              </a:rPr>
+              <a:t>sample</a:t>
+            </a:r>
+          </a:p>
+        </p:txBody>
+      </p:sp>
+      <p:sp>
+        <p:nvSpPr>
+          <p:cNvPr id="6" name="Right Arrow 5"/>
           <p:cNvSpPr/>
           <p:nvPr/>
         </p:nvSpPr>
         <p:spPr>
           <a:xfrm>
-            <a:off x="411480" y="2286000"/>
-            <a:ext cx="1508760" cy="1188720"/>
-          </a:xfrm>
-          <a:prstGeom prst="roundRect">
+            <a:off x="1920240" y="2743200"/>
+            <a:ext cx="164592" cy="274320"/>
+          </a:xfrm>
+          <a:prstGeom prst="rightArrow">
             <a:avLst/>
           </a:prstGeom>
           <a:solidFill>
-            <a:srgbClr val="B8C7D8"/>
+            <a:srgbClr val="555F6D"/>
           </a:solidFill>
           <a:ln>
             <a:noFill/>
@@ -12072,50 +11448,29 @@
           </a:fontRef>
         </p:style>
         <p:txBody>
-          <a:bodyPr rtlCol="0" anchor="ctr" lIns="45720" rIns="45720" wrap="square"/>
+          <a:bodyPr rtlCol="0" anchor="ctr"/>
           <a:lstStyle/>
           <a:p>
             <a:pPr algn="ctr"/>
-            <a:r>
-              <a:rPr sz="1200" b="1">
-                <a:solidFill>
-                  <a:srgbClr val="1A1A1A"/>
-                </a:solidFill>
-                <a:latin typeface="Calibri"/>
-              </a:rPr>
-              <a:t>Scalar</a:t>
-            </a:r>
-          </a:p>
-          <a:p>
-            <a:pPr algn="ctr"/>
-            <a:r>
-              <a:rPr sz="1200" b="1">
-                <a:solidFill>
-                  <a:srgbClr val="1A1A1A"/>
-                </a:solidFill>
-                <a:latin typeface="Calibri"/>
-              </a:rPr>
-              <a:t>sample</a:t>
-            </a:r>
-          </a:p>
-        </p:txBody>
-      </p:sp>
-      <p:sp>
-        <p:nvSpPr>
-          <p:cNvPr id="7" name="Right Arrow 6"/>
+          </a:p>
+        </p:txBody>
+      </p:sp>
+      <p:sp>
+        <p:nvSpPr>
+          <p:cNvPr id="7" name="Rounded Rectangle 6"/>
           <p:cNvSpPr/>
           <p:nvPr/>
         </p:nvSpPr>
         <p:spPr>
           <a:xfrm>
-            <a:off x="1920240" y="2743200"/>
-            <a:ext cx="164592" cy="274320"/>
-          </a:xfrm>
-          <a:prstGeom prst="rightArrow">
+            <a:off x="2084832" y="2286000"/>
+            <a:ext cx="1508760" cy="1188720"/>
+          </a:xfrm>
+          <a:prstGeom prst="roundRect">
             <a:avLst/>
           </a:prstGeom>
           <a:solidFill>
-            <a:srgbClr val="555F6D"/>
+            <a:srgbClr val="1C7293"/>
           </a:solidFill>
           <a:ln>
             <a:noFill/>
@@ -12136,29 +11491,50 @@
           </a:fontRef>
         </p:style>
         <p:txBody>
-          <a:bodyPr rtlCol="0" anchor="ctr"/>
+          <a:bodyPr rtlCol="0" anchor="ctr" lIns="45720" rIns="45720" wrap="square"/>
           <a:lstStyle/>
           <a:p>
             <a:pPr algn="ctr"/>
-          </a:p>
-        </p:txBody>
-      </p:sp>
-      <p:sp>
-        <p:nvSpPr>
-          <p:cNvPr id="8" name="Rounded Rectangle 7"/>
+            <a:r>
+              <a:rPr sz="1200" b="1">
+                <a:solidFill>
+                  <a:srgbClr val="F2F4F8"/>
+                </a:solidFill>
+                <a:latin typeface="Calibri"/>
+              </a:rPr>
+              <a:t>Linear(1,32)</a:t>
+            </a:r>
+          </a:p>
+          <a:p>
+            <a:pPr algn="ctr"/>
+            <a:r>
+              <a:rPr sz="1200" b="1">
+                <a:solidFill>
+                  <a:srgbClr val="F2F4F8"/>
+                </a:solidFill>
+                <a:latin typeface="Calibri"/>
+              </a:rPr>
+              <a:t>input proj</a:t>
+            </a:r>
+          </a:p>
+        </p:txBody>
+      </p:sp>
+      <p:sp>
+        <p:nvSpPr>
+          <p:cNvPr id="8" name="Right Arrow 7"/>
           <p:cNvSpPr/>
           <p:nvPr/>
         </p:nvSpPr>
         <p:spPr>
           <a:xfrm>
-            <a:off x="2084832" y="2286000"/>
-            <a:ext cx="1508760" cy="1188720"/>
-          </a:xfrm>
-          <a:prstGeom prst="roundRect">
+            <a:off x="3593592" y="2743200"/>
+            <a:ext cx="164592" cy="274320"/>
+          </a:xfrm>
+          <a:prstGeom prst="rightArrow">
             <a:avLst/>
           </a:prstGeom>
           <a:solidFill>
-            <a:srgbClr val="1C7293"/>
+            <a:srgbClr val="555F6D"/>
           </a:solidFill>
           <a:ln>
             <a:noFill/>
@@ -12179,50 +11555,29 @@
           </a:fontRef>
         </p:style>
         <p:txBody>
-          <a:bodyPr rtlCol="0" anchor="ctr" lIns="45720" rIns="45720" wrap="square"/>
+          <a:bodyPr rtlCol="0" anchor="ctr"/>
           <a:lstStyle/>
           <a:p>
             <a:pPr algn="ctr"/>
-            <a:r>
-              <a:rPr sz="1200" b="1">
-                <a:solidFill>
-                  <a:srgbClr val="F2F4F8"/>
-                </a:solidFill>
-                <a:latin typeface="Calibri"/>
-              </a:rPr>
-              <a:t>Linear(1,32)</a:t>
-            </a:r>
-          </a:p>
-          <a:p>
-            <a:pPr algn="ctr"/>
-            <a:r>
-              <a:rPr sz="1200" b="1">
-                <a:solidFill>
-                  <a:srgbClr val="F2F4F8"/>
-                </a:solidFill>
-                <a:latin typeface="Calibri"/>
-              </a:rPr>
-              <a:t>input proj</a:t>
-            </a:r>
-          </a:p>
-        </p:txBody>
-      </p:sp>
-      <p:sp>
-        <p:nvSpPr>
-          <p:cNvPr id="9" name="Right Arrow 8"/>
+          </a:p>
+        </p:txBody>
+      </p:sp>
+      <p:sp>
+        <p:nvSpPr>
+          <p:cNvPr id="9" name="Rounded Rectangle 8"/>
           <p:cNvSpPr/>
           <p:nvPr/>
         </p:nvSpPr>
         <p:spPr>
           <a:xfrm>
-            <a:off x="3593592" y="2743200"/>
-            <a:ext cx="164592" cy="274320"/>
-          </a:xfrm>
-          <a:prstGeom prst="rightArrow">
+            <a:off x="3758184" y="2286000"/>
+            <a:ext cx="1508760" cy="1188720"/>
+          </a:xfrm>
+          <a:prstGeom prst="roundRect">
             <a:avLst/>
           </a:prstGeom>
           <a:solidFill>
-            <a:srgbClr val="555F6D"/>
+            <a:srgbClr val="1C7293"/>
           </a:solidFill>
           <a:ln>
             <a:noFill/>
@@ -12243,29 +11598,50 @@
           </a:fontRef>
         </p:style>
         <p:txBody>
-          <a:bodyPr rtlCol="0" anchor="ctr"/>
+          <a:bodyPr rtlCol="0" anchor="ctr" lIns="45720" rIns="45720" wrap="square"/>
           <a:lstStyle/>
           <a:p>
             <a:pPr algn="ctr"/>
-          </a:p>
-        </p:txBody>
-      </p:sp>
-      <p:sp>
-        <p:nvSpPr>
-          <p:cNvPr id="10" name="Rounded Rectangle 9"/>
+            <a:r>
+              <a:rPr sz="1200" b="1">
+                <a:solidFill>
+                  <a:srgbClr val="F2F4F8"/>
+                </a:solidFill>
+                <a:latin typeface="Calibri"/>
+              </a:rPr>
+              <a:t>+ pos emb</a:t>
+            </a:r>
+          </a:p>
+          <a:p>
+            <a:pPr algn="ctr"/>
+            <a:r>
+              <a:rPr sz="1200" b="1">
+                <a:solidFill>
+                  <a:srgbClr val="F2F4F8"/>
+                </a:solidFill>
+                <a:latin typeface="Calibri"/>
+              </a:rPr>
+              <a:t>(128×32)</a:t>
+            </a:r>
+          </a:p>
+        </p:txBody>
+      </p:sp>
+      <p:sp>
+        <p:nvSpPr>
+          <p:cNvPr id="10" name="Right Arrow 9"/>
           <p:cNvSpPr/>
           <p:nvPr/>
         </p:nvSpPr>
         <p:spPr>
           <a:xfrm>
-            <a:off x="3758184" y="2286000"/>
-            <a:ext cx="1508760" cy="1188720"/>
-          </a:xfrm>
-          <a:prstGeom prst="roundRect">
+            <a:off x="5266944" y="2743200"/>
+            <a:ext cx="164592" cy="274320"/>
+          </a:xfrm>
+          <a:prstGeom prst="rightArrow">
             <a:avLst/>
           </a:prstGeom>
           <a:solidFill>
-            <a:srgbClr val="1C7293"/>
+            <a:srgbClr val="555F6D"/>
           </a:solidFill>
           <a:ln>
             <a:noFill/>
@@ -12286,50 +11662,29 @@
           </a:fontRef>
         </p:style>
         <p:txBody>
-          <a:bodyPr rtlCol="0" anchor="ctr" lIns="45720" rIns="45720" wrap="square"/>
+          <a:bodyPr rtlCol="0" anchor="ctr"/>
           <a:lstStyle/>
           <a:p>
             <a:pPr algn="ctr"/>
-            <a:r>
-              <a:rPr sz="1200" b="1">
-                <a:solidFill>
-                  <a:srgbClr val="F2F4F8"/>
-                </a:solidFill>
-                <a:latin typeface="Calibri"/>
-              </a:rPr>
-              <a:t>+ pos emb</a:t>
-            </a:r>
-          </a:p>
-          <a:p>
-            <a:pPr algn="ctr"/>
-            <a:r>
-              <a:rPr sz="1200" b="1">
-                <a:solidFill>
-                  <a:srgbClr val="F2F4F8"/>
-                </a:solidFill>
-                <a:latin typeface="Calibri"/>
-              </a:rPr>
-              <a:t>(128×32)</a:t>
-            </a:r>
-          </a:p>
-        </p:txBody>
-      </p:sp>
-      <p:sp>
-        <p:nvSpPr>
-          <p:cNvPr id="11" name="Right Arrow 10"/>
+          </a:p>
+        </p:txBody>
+      </p:sp>
+      <p:sp>
+        <p:nvSpPr>
+          <p:cNvPr id="11" name="Rounded Rectangle 10"/>
           <p:cNvSpPr/>
           <p:nvPr/>
         </p:nvSpPr>
         <p:spPr>
           <a:xfrm>
-            <a:off x="5266944" y="2743200"/>
-            <a:ext cx="164592" cy="274320"/>
-          </a:xfrm>
-          <a:prstGeom prst="rightArrow">
+            <a:off x="5431536" y="2286000"/>
+            <a:ext cx="1508760" cy="1188720"/>
+          </a:xfrm>
+          <a:prstGeom prst="roundRect">
             <a:avLst/>
           </a:prstGeom>
           <a:solidFill>
-            <a:srgbClr val="555F6D"/>
+            <a:srgbClr val="065A82"/>
           </a:solidFill>
           <a:ln>
             <a:noFill/>
@@ -12350,29 +11705,50 @@
           </a:fontRef>
         </p:style>
         <p:txBody>
-          <a:bodyPr rtlCol="0" anchor="ctr"/>
+          <a:bodyPr rtlCol="0" anchor="ctr" lIns="45720" rIns="45720" wrap="square"/>
           <a:lstStyle/>
           <a:p>
             <a:pPr algn="ctr"/>
-          </a:p>
-        </p:txBody>
-      </p:sp>
-      <p:sp>
-        <p:nvSpPr>
-          <p:cNvPr id="12" name="Rounded Rectangle 11"/>
+            <a:r>
+              <a:rPr sz="1200" b="1">
+                <a:solidFill>
+                  <a:srgbClr val="F2F4F8"/>
+                </a:solidFill>
+                <a:latin typeface="Calibri"/>
+              </a:rPr>
+              <a:t>Trf block ×2</a:t>
+            </a:r>
+          </a:p>
+          <a:p>
+            <a:pPr algn="ctr"/>
+            <a:r>
+              <a:rPr sz="1200" b="1">
+                <a:solidFill>
+                  <a:srgbClr val="F2F4F8"/>
+                </a:solidFill>
+                <a:latin typeface="Calibri"/>
+              </a:rPr>
+              <a:t>2 heads, 32 dim</a:t>
+            </a:r>
+          </a:p>
+        </p:txBody>
+      </p:sp>
+      <p:sp>
+        <p:nvSpPr>
+          <p:cNvPr id="12" name="Right Arrow 11"/>
           <p:cNvSpPr/>
           <p:nvPr/>
         </p:nvSpPr>
         <p:spPr>
           <a:xfrm>
-            <a:off x="5431536" y="2286000"/>
-            <a:ext cx="1508760" cy="1188720"/>
-          </a:xfrm>
-          <a:prstGeom prst="roundRect">
+            <a:off x="6940296" y="2743200"/>
+            <a:ext cx="164592" cy="274320"/>
+          </a:xfrm>
+          <a:prstGeom prst="rightArrow">
             <a:avLst/>
           </a:prstGeom>
           <a:solidFill>
-            <a:srgbClr val="065A82"/>
+            <a:srgbClr val="555F6D"/>
           </a:solidFill>
           <a:ln>
             <a:noFill/>
@@ -12393,50 +11769,29 @@
           </a:fontRef>
         </p:style>
         <p:txBody>
-          <a:bodyPr rtlCol="0" anchor="ctr" lIns="45720" rIns="45720" wrap="square"/>
+          <a:bodyPr rtlCol="0" anchor="ctr"/>
           <a:lstStyle/>
           <a:p>
             <a:pPr algn="ctr"/>
-            <a:r>
-              <a:rPr sz="1200" b="1">
-                <a:solidFill>
-                  <a:srgbClr val="F2F4F8"/>
-                </a:solidFill>
-                <a:latin typeface="Calibri"/>
-              </a:rPr>
-              <a:t>Trf block ×2</a:t>
-            </a:r>
-          </a:p>
-          <a:p>
-            <a:pPr algn="ctr"/>
-            <a:r>
-              <a:rPr sz="1200" b="1">
-                <a:solidFill>
-                  <a:srgbClr val="F2F4F8"/>
-                </a:solidFill>
-                <a:latin typeface="Calibri"/>
-              </a:rPr>
-              <a:t>2 heads, 32 dim</a:t>
-            </a:r>
-          </a:p>
-        </p:txBody>
-      </p:sp>
-      <p:sp>
-        <p:nvSpPr>
-          <p:cNvPr id="13" name="Right Arrow 12"/>
+          </a:p>
+        </p:txBody>
+      </p:sp>
+      <p:sp>
+        <p:nvSpPr>
+          <p:cNvPr id="13" name="Rounded Rectangle 12"/>
           <p:cNvSpPr/>
           <p:nvPr/>
         </p:nvSpPr>
         <p:spPr>
           <a:xfrm>
-            <a:off x="6940296" y="2743200"/>
-            <a:ext cx="164592" cy="274320"/>
-          </a:xfrm>
-          <a:prstGeom prst="rightArrow">
+            <a:off x="7104888" y="2286000"/>
+            <a:ext cx="1508760" cy="1188720"/>
+          </a:xfrm>
+          <a:prstGeom prst="roundRect">
             <a:avLst/>
           </a:prstGeom>
           <a:solidFill>
-            <a:srgbClr val="555F6D"/>
+            <a:srgbClr val="1C7293"/>
           </a:solidFill>
           <a:ln>
             <a:noFill/>
@@ -12457,29 +11812,38 @@
           </a:fontRef>
         </p:style>
         <p:txBody>
-          <a:bodyPr rtlCol="0" anchor="ctr"/>
+          <a:bodyPr rtlCol="0" anchor="ctr" lIns="45720" rIns="45720" wrap="square"/>
           <a:lstStyle/>
           <a:p>
             <a:pPr algn="ctr"/>
-          </a:p>
-        </p:txBody>
-      </p:sp>
-      <p:sp>
-        <p:nvSpPr>
-          <p:cNvPr id="14" name="Rounded Rectangle 13"/>
+            <a:r>
+              <a:rPr sz="1200" b="1">
+                <a:solidFill>
+                  <a:srgbClr val="F2F4F8"/>
+                </a:solidFill>
+                <a:latin typeface="Calibri"/>
+              </a:rPr>
+              <a:t>LayerNorm</a:t>
+            </a:r>
+          </a:p>
+        </p:txBody>
+      </p:sp>
+      <p:sp>
+        <p:nvSpPr>
+          <p:cNvPr id="14" name="Right Arrow 13"/>
           <p:cNvSpPr/>
           <p:nvPr/>
         </p:nvSpPr>
         <p:spPr>
           <a:xfrm>
-            <a:off x="7104888" y="2286000"/>
-            <a:ext cx="1508760" cy="1188720"/>
-          </a:xfrm>
-          <a:prstGeom prst="roundRect">
+            <a:off x="8613648" y="2743200"/>
+            <a:ext cx="164592" cy="274320"/>
+          </a:xfrm>
+          <a:prstGeom prst="rightArrow">
             <a:avLst/>
           </a:prstGeom>
           <a:solidFill>
-            <a:srgbClr val="1C7293"/>
+            <a:srgbClr val="555F6D"/>
           </a:solidFill>
           <a:ln>
             <a:noFill/>
@@ -12500,38 +11864,29 @@
           </a:fontRef>
         </p:style>
         <p:txBody>
-          <a:bodyPr rtlCol="0" anchor="ctr" lIns="45720" rIns="45720" wrap="square"/>
+          <a:bodyPr rtlCol="0" anchor="ctr"/>
           <a:lstStyle/>
           <a:p>
             <a:pPr algn="ctr"/>
-            <a:r>
-              <a:rPr sz="1200" b="1">
-                <a:solidFill>
-                  <a:srgbClr val="F2F4F8"/>
-                </a:solidFill>
-                <a:latin typeface="Calibri"/>
-              </a:rPr>
-              <a:t>LayerNorm</a:t>
-            </a:r>
-          </a:p>
-        </p:txBody>
-      </p:sp>
-      <p:sp>
-        <p:nvSpPr>
-          <p:cNvPr id="15" name="Right Arrow 14"/>
+          </a:p>
+        </p:txBody>
+      </p:sp>
+      <p:sp>
+        <p:nvSpPr>
+          <p:cNvPr id="15" name="Rounded Rectangle 14"/>
           <p:cNvSpPr/>
           <p:nvPr/>
         </p:nvSpPr>
         <p:spPr>
           <a:xfrm>
-            <a:off x="8613648" y="2743200"/>
-            <a:ext cx="164592" cy="274320"/>
-          </a:xfrm>
-          <a:prstGeom prst="rightArrow">
+            <a:off x="8778240" y="2286000"/>
+            <a:ext cx="1508760" cy="1188720"/>
+          </a:xfrm>
+          <a:prstGeom prst="roundRect">
             <a:avLst/>
           </a:prstGeom>
           <a:solidFill>
-            <a:srgbClr val="555F6D"/>
+            <a:srgbClr val="1C7293"/>
           </a:solidFill>
           <a:ln>
             <a:noFill/>
@@ -12552,29 +11907,50 @@
           </a:fontRef>
         </p:style>
         <p:txBody>
-          <a:bodyPr rtlCol="0" anchor="ctr"/>
+          <a:bodyPr rtlCol="0" anchor="ctr" lIns="45720" rIns="45720" wrap="square"/>
           <a:lstStyle/>
           <a:p>
             <a:pPr algn="ctr"/>
-          </a:p>
-        </p:txBody>
-      </p:sp>
-      <p:sp>
-        <p:nvSpPr>
-          <p:cNvPr id="16" name="Rounded Rectangle 15"/>
+            <a:r>
+              <a:rPr sz="1200" b="1">
+                <a:solidFill>
+                  <a:srgbClr val="F2F4F8"/>
+                </a:solidFill>
+                <a:latin typeface="Calibri"/>
+              </a:rPr>
+              <a:t>Linear(32,1)</a:t>
+            </a:r>
+          </a:p>
+          <a:p>
+            <a:pPr algn="ctr"/>
+            <a:r>
+              <a:rPr sz="1200" b="1">
+                <a:solidFill>
+                  <a:srgbClr val="F2F4F8"/>
+                </a:solidFill>
+                <a:latin typeface="Calibri"/>
+              </a:rPr>
+              <a:t>out head</a:t>
+            </a:r>
+          </a:p>
+        </p:txBody>
+      </p:sp>
+      <p:sp>
+        <p:nvSpPr>
+          <p:cNvPr id="16" name="Right Arrow 15"/>
           <p:cNvSpPr/>
           <p:nvPr/>
         </p:nvSpPr>
         <p:spPr>
           <a:xfrm>
-            <a:off x="8778240" y="2286000"/>
-            <a:ext cx="1508760" cy="1188720"/>
-          </a:xfrm>
-          <a:prstGeom prst="roundRect">
+            <a:off x="10287000" y="2743200"/>
+            <a:ext cx="164592" cy="274320"/>
+          </a:xfrm>
+          <a:prstGeom prst="rightArrow">
             <a:avLst/>
           </a:prstGeom>
           <a:solidFill>
-            <a:srgbClr val="1C7293"/>
+            <a:srgbClr val="555F6D"/>
           </a:solidFill>
           <a:ln>
             <a:noFill/>
@@ -12595,50 +11971,29 @@
           </a:fontRef>
         </p:style>
         <p:txBody>
-          <a:bodyPr rtlCol="0" anchor="ctr" lIns="45720" rIns="45720" wrap="square"/>
+          <a:bodyPr rtlCol="0" anchor="ctr"/>
           <a:lstStyle/>
           <a:p>
             <a:pPr algn="ctr"/>
-            <a:r>
-              <a:rPr sz="1200" b="1">
-                <a:solidFill>
-                  <a:srgbClr val="F2F4F8"/>
-                </a:solidFill>
-                <a:latin typeface="Calibri"/>
-              </a:rPr>
-              <a:t>Linear(32,1)</a:t>
-            </a:r>
-          </a:p>
-          <a:p>
-            <a:pPr algn="ctr"/>
-            <a:r>
-              <a:rPr sz="1200" b="1">
-                <a:solidFill>
-                  <a:srgbClr val="F2F4F8"/>
-                </a:solidFill>
-                <a:latin typeface="Calibri"/>
-              </a:rPr>
-              <a:t>out head</a:t>
-            </a:r>
-          </a:p>
-        </p:txBody>
-      </p:sp>
-      <p:sp>
-        <p:nvSpPr>
-          <p:cNvPr id="17" name="Right Arrow 16"/>
+          </a:p>
+        </p:txBody>
+      </p:sp>
+      <p:sp>
+        <p:nvSpPr>
+          <p:cNvPr id="17" name="Rounded Rectangle 16"/>
           <p:cNvSpPr/>
           <p:nvPr/>
         </p:nvSpPr>
         <p:spPr>
           <a:xfrm>
-            <a:off x="10287000" y="2743200"/>
-            <a:ext cx="164592" cy="274320"/>
-          </a:xfrm>
-          <a:prstGeom prst="rightArrow">
+            <a:off x="10451592" y="2286000"/>
+            <a:ext cx="1508760" cy="1188720"/>
+          </a:xfrm>
+          <a:prstGeom prst="roundRect">
             <a:avLst/>
           </a:prstGeom>
           <a:solidFill>
-            <a:srgbClr val="555F6D"/>
+            <a:srgbClr val="F5A623"/>
           </a:solidFill>
           <a:ln>
             <a:noFill/>
@@ -12659,51 +12014,20 @@
           </a:fontRef>
         </p:style>
         <p:txBody>
-          <a:bodyPr rtlCol="0" anchor="ctr"/>
+          <a:bodyPr rtlCol="0" anchor="ctr" lIns="45720" rIns="45720" wrap="square"/>
           <a:lstStyle/>
           <a:p>
             <a:pPr algn="ctr"/>
-          </a:p>
-        </p:txBody>
-      </p:sp>
-      <p:sp>
-        <p:nvSpPr>
-          <p:cNvPr id="18" name="Rounded Rectangle 17"/>
-          <p:cNvSpPr/>
-          <p:nvPr/>
-        </p:nvSpPr>
-        <p:spPr>
-          <a:xfrm>
-            <a:off x="10451592" y="2286000"/>
-            <a:ext cx="1508760" cy="1188720"/>
-          </a:xfrm>
-          <a:prstGeom prst="roundRect">
-            <a:avLst/>
-          </a:prstGeom>
-          <a:solidFill>
-            <a:srgbClr val="F5A623"/>
-          </a:solidFill>
-          <a:ln>
-            <a:noFill/>
-          </a:ln>
-        </p:spPr>
-        <p:style>
-          <a:lnRef idx="1">
-            <a:schemeClr val="accent1"/>
-          </a:lnRef>
-          <a:fillRef idx="3">
-            <a:schemeClr val="accent1"/>
-          </a:fillRef>
-          <a:effectRef idx="2">
-            <a:schemeClr val="accent1"/>
-          </a:effectRef>
-          <a:fontRef idx="minor">
-            <a:schemeClr val="lt1"/>
-          </a:fontRef>
-        </p:style>
-        <p:txBody>
-          <a:bodyPr rtlCol="0" anchor="ctr" lIns="45720" rIns="45720" wrap="square"/>
-          <a:lstStyle/>
+            <a:r>
+              <a:rPr sz="1200" b="1">
+                <a:solidFill>
+                  <a:srgbClr val="F2F4F8"/>
+                </a:solidFill>
+                <a:latin typeface="Calibri"/>
+              </a:rPr>
+              <a:t>Next</a:t>
+            </a:r>
+          </a:p>
           <a:p>
             <a:pPr algn="ctr"/>
             <a:r>
@@ -12713,18 +12037,6 @@
                 </a:solidFill>
                 <a:latin typeface="Calibri"/>
               </a:rPr>
-              <a:t>Next</a:t>
-            </a:r>
-          </a:p>
-          <a:p>
-            <a:pPr algn="ctr"/>
-            <a:r>
-              <a:rPr sz="1200" b="1">
-                <a:solidFill>
-                  <a:srgbClr val="F2F4F8"/>
-                </a:solidFill>
-                <a:latin typeface="Calibri"/>
-              </a:rPr>
               <a:t>sample</a:t>
             </a:r>
           </a:p>
@@ -12732,7 +12044,7 @@
       </p:sp>
       <p:sp>
         <p:nvSpPr>
-          <p:cNvPr id="19" name="TextBox 18"/>
+          <p:cNvPr id="18" name="TextBox 17"/>
           <p:cNvSpPr txBox="1"/>
           <p:nvPr/>
         </p:nvSpPr>
@@ -12767,7 +12079,7 @@
       </p:sp>
       <p:sp>
         <p:nvSpPr>
-          <p:cNvPr id="20" name="TextBox 19"/>
+          <p:cNvPr id="19" name="TextBox 18"/>
           <p:cNvSpPr txBox="1"/>
           <p:nvPr/>
         </p:nvSpPr>
@@ -12956,52 +12268,9 @@
           </a:p>
         </p:txBody>
       </p:sp>
-      <p:sp>
-        <p:nvSpPr>
-          <p:cNvPr id="5" name="Rectangle 4"/>
-          <p:cNvSpPr/>
-          <p:nvPr/>
-        </p:nvSpPr>
-        <p:spPr>
-          <a:xfrm>
-            <a:off x="548640" y="1508760"/>
-            <a:ext cx="109728" cy="548640"/>
-          </a:xfrm>
-          <a:prstGeom prst="rect">
-            <a:avLst/>
-          </a:prstGeom>
-          <a:solidFill>
-            <a:srgbClr val="F5A623"/>
-          </a:solidFill>
-          <a:ln>
-            <a:noFill/>
-          </a:ln>
-        </p:spPr>
-        <p:style>
-          <a:lnRef idx="1">
-            <a:schemeClr val="accent1"/>
-          </a:lnRef>
-          <a:fillRef idx="3">
-            <a:schemeClr val="accent1"/>
-          </a:fillRef>
-          <a:effectRef idx="2">
-            <a:schemeClr val="accent1"/>
-          </a:effectRef>
-          <a:fontRef idx="minor">
-            <a:schemeClr val="lt1"/>
-          </a:fontRef>
-        </p:style>
-        <p:txBody>
-          <a:bodyPr rtlCol="0" anchor="ctr"/>
-          <a:lstStyle/>
-          <a:p>
-            <a:pPr algn="ctr"/>
-          </a:p>
-        </p:txBody>
-      </p:sp>
       <p:graphicFrame>
         <p:nvGraphicFramePr>
-          <p:cNvPr id="6" name="Table 5"/>
+          <p:cNvPr id="5" name="Table 4"/>
           <p:cNvGraphicFramePr>
             <a:graphicFrameLocks noGrp="1"/>
           </p:cNvGraphicFramePr>
@@ -13478,7 +12747,7 @@
       </p:graphicFrame>
       <p:sp>
         <p:nvSpPr>
-          <p:cNvPr id="7" name="Rounded Rectangle 6"/>
+          <p:cNvPr id="6" name="Rounded Rectangle 5"/>
           <p:cNvSpPr/>
           <p:nvPr/>
         </p:nvSpPr>
@@ -13523,7 +12792,7 @@
       </p:sp>
       <p:sp>
         <p:nvSpPr>
-          <p:cNvPr id="8" name="TextBox 7"/>
+          <p:cNvPr id="7" name="TextBox 6"/>
           <p:cNvSpPr txBox="1"/>
           <p:nvPr/>
         </p:nvSpPr>
@@ -13558,7 +12827,7 @@
       </p:sp>
       <p:sp>
         <p:nvSpPr>
-          <p:cNvPr id="9" name="TextBox 8"/>
+          <p:cNvPr id="8" name="TextBox 7"/>
           <p:cNvSpPr txBox="1"/>
           <p:nvPr/>
         </p:nvSpPr>
@@ -13723,52 +12992,9 @@
           </a:p>
         </p:txBody>
       </p:sp>
-      <p:sp>
-        <p:nvSpPr>
-          <p:cNvPr id="5" name="Rectangle 4"/>
-          <p:cNvSpPr/>
-          <p:nvPr/>
-        </p:nvSpPr>
-        <p:spPr>
-          <a:xfrm>
-            <a:off x="548640" y="1508760"/>
-            <a:ext cx="109728" cy="548640"/>
-          </a:xfrm>
-          <a:prstGeom prst="rect">
-            <a:avLst/>
-          </a:prstGeom>
-          <a:solidFill>
-            <a:srgbClr val="F5A623"/>
-          </a:solidFill>
-          <a:ln>
-            <a:noFill/>
-          </a:ln>
-        </p:spPr>
-        <p:style>
-          <a:lnRef idx="1">
-            <a:schemeClr val="accent1"/>
-          </a:lnRef>
-          <a:fillRef idx="3">
-            <a:schemeClr val="accent1"/>
-          </a:fillRef>
-          <a:effectRef idx="2">
-            <a:schemeClr val="accent1"/>
-          </a:effectRef>
-          <a:fontRef idx="minor">
-            <a:schemeClr val="lt1"/>
-          </a:fontRef>
-        </p:style>
-        <p:txBody>
-          <a:bodyPr rtlCol="0" anchor="ctr"/>
-          <a:lstStyle/>
-          <a:p>
-            <a:pPr algn="ctr"/>
-          </a:p>
-        </p:txBody>
-      </p:sp>
       <p:graphicFrame>
         <p:nvGraphicFramePr>
-          <p:cNvPr id="6" name="Table 5"/>
+          <p:cNvPr id="5" name="Table 4"/>
           <p:cNvGraphicFramePr>
             <a:graphicFrameLocks noGrp="1"/>
           </p:cNvGraphicFramePr>
@@ -14203,7 +13429,7 @@
       </p:graphicFrame>
       <p:sp>
         <p:nvSpPr>
-          <p:cNvPr id="7" name="TextBox 6"/>
+          <p:cNvPr id="6" name="TextBox 5"/>
           <p:cNvSpPr txBox="1"/>
           <p:nvPr/>
         </p:nvSpPr>
@@ -14382,50 +13608,7 @@
       </p:sp>
       <p:sp>
         <p:nvSpPr>
-          <p:cNvPr id="5" name="Rectangle 4"/>
-          <p:cNvSpPr/>
-          <p:nvPr/>
-        </p:nvSpPr>
-        <p:spPr>
-          <a:xfrm>
-            <a:off x="548640" y="1508760"/>
-            <a:ext cx="109728" cy="548640"/>
-          </a:xfrm>
-          <a:prstGeom prst="rect">
-            <a:avLst/>
-          </a:prstGeom>
-          <a:solidFill>
-            <a:srgbClr val="F5A623"/>
-          </a:solidFill>
-          <a:ln>
-            <a:noFill/>
-          </a:ln>
-        </p:spPr>
-        <p:style>
-          <a:lnRef idx="1">
-            <a:schemeClr val="accent1"/>
-          </a:lnRef>
-          <a:fillRef idx="3">
-            <a:schemeClr val="accent1"/>
-          </a:fillRef>
-          <a:effectRef idx="2">
-            <a:schemeClr val="accent1"/>
-          </a:effectRef>
-          <a:fontRef idx="minor">
-            <a:schemeClr val="lt1"/>
-          </a:fontRef>
-        </p:style>
-        <p:txBody>
-          <a:bodyPr rtlCol="0" anchor="ctr"/>
-          <a:lstStyle/>
-          <a:p>
-            <a:pPr algn="ctr"/>
-          </a:p>
-        </p:txBody>
-      </p:sp>
-      <p:sp>
-        <p:nvSpPr>
-          <p:cNvPr id="6" name="TextBox 5"/>
+          <p:cNvPr id="5" name="TextBox 4"/>
           <p:cNvSpPr txBox="1"/>
           <p:nvPr/>
         </p:nvSpPr>
@@ -14460,7 +13643,7 @@
       </p:sp>
       <p:sp>
         <p:nvSpPr>
-          <p:cNvPr id="7" name="TextBox 6"/>
+          <p:cNvPr id="6" name="TextBox 5"/>
           <p:cNvSpPr txBox="1"/>
           <p:nvPr/>
         </p:nvSpPr>
@@ -14495,7 +13678,7 @@
       </p:sp>
       <p:sp>
         <p:nvSpPr>
-          <p:cNvPr id="8" name="TextBox 7"/>
+          <p:cNvPr id="7" name="TextBox 6"/>
           <p:cNvSpPr txBox="1"/>
           <p:nvPr/>
         </p:nvSpPr>
@@ -14554,7 +13737,7 @@
       </p:sp>
       <p:sp>
         <p:nvSpPr>
-          <p:cNvPr id="9" name="TextBox 8"/>
+          <p:cNvPr id="8" name="TextBox 7"/>
           <p:cNvSpPr txBox="1"/>
           <p:nvPr/>
         </p:nvSpPr>
@@ -14589,7 +13772,7 @@
       </p:sp>
       <p:sp>
         <p:nvSpPr>
-          <p:cNvPr id="10" name="TextBox 9"/>
+          <p:cNvPr id="9" name="TextBox 8"/>
           <p:cNvSpPr txBox="1"/>
           <p:nvPr/>
         </p:nvSpPr>
@@ -14780,50 +13963,7 @@
       </p:sp>
       <p:sp>
         <p:nvSpPr>
-          <p:cNvPr id="5" name="Rectangle 4"/>
-          <p:cNvSpPr/>
-          <p:nvPr/>
-        </p:nvSpPr>
-        <p:spPr>
-          <a:xfrm>
-            <a:off x="548640" y="1508760"/>
-            <a:ext cx="109728" cy="548640"/>
-          </a:xfrm>
-          <a:prstGeom prst="rect">
-            <a:avLst/>
-          </a:prstGeom>
-          <a:solidFill>
-            <a:srgbClr val="F5A623"/>
-          </a:solidFill>
-          <a:ln>
-            <a:noFill/>
-          </a:ln>
-        </p:spPr>
-        <p:style>
-          <a:lnRef idx="1">
-            <a:schemeClr val="accent1"/>
-          </a:lnRef>
-          <a:fillRef idx="3">
-            <a:schemeClr val="accent1"/>
-          </a:fillRef>
-          <a:effectRef idx="2">
-            <a:schemeClr val="accent1"/>
-          </a:effectRef>
-          <a:fontRef idx="minor">
-            <a:schemeClr val="lt1"/>
-          </a:fontRef>
-        </p:style>
-        <p:txBody>
-          <a:bodyPr rtlCol="0" anchor="ctr"/>
-          <a:lstStyle/>
-          <a:p>
-            <a:pPr algn="ctr"/>
-          </a:p>
-        </p:txBody>
-      </p:sp>
-      <p:sp>
-        <p:nvSpPr>
-          <p:cNvPr id="6" name="TextBox 5"/>
+          <p:cNvPr id="5" name="TextBox 4"/>
           <p:cNvSpPr txBox="1"/>
           <p:nvPr/>
         </p:nvSpPr>
@@ -14858,7 +13998,7 @@
       </p:sp>
       <p:graphicFrame>
         <p:nvGraphicFramePr>
-          <p:cNvPr id="7" name="Table 6"/>
+          <p:cNvPr id="6" name="Table 5"/>
           <p:cNvGraphicFramePr>
             <a:graphicFrameLocks noGrp="1"/>
           </p:cNvGraphicFramePr>
@@ -15426,7 +14566,7 @@
       </p:graphicFrame>
       <p:sp>
         <p:nvSpPr>
-          <p:cNvPr id="8" name="TextBox 7"/>
+          <p:cNvPr id="7" name="TextBox 6"/>
           <p:cNvSpPr txBox="1"/>
           <p:nvPr/>
         </p:nvSpPr>
